--- a/sih-26097/SkillCall_SIH26097_Cognify.pptx
+++ b/sih-26097/SkillCall_SIH26097_Cognify.pptx
@@ -771,7 +771,7 @@
           <a:p>
             <a:r>
               <a:rPr lang="en-US" dirty="0"/>
-              <a:t>Feasibility: UIDAI–Sarvam (10 languages), Kilkari (1.2 million calls/day), Voice of India benchmark (≤20% WER). Cost: ₹37–83 per completed profile; the funnel and working are shown in the table. Viability: ₹0.9–1.7 crore per state per year = 0.04–0.08% of the PM-AJAY budget. Risks and mitigations in the bottom rows.</a:t>
+              <a:t>Feasibility: UIDAI–Sarvam (live today in 10 of Sarvam's 22 Indian languages; SkillCall targets all 22 over time), Kilkari (1.2 million calls/day), Voice of India benchmark (≤20% WER). Cost: ₹37–83 per completed profile; the funnel and working are shown in the table. Viability: ₹0.9–1.7 crore per state per year = 0.04–0.08% of the PM-AJAY budget. Risks and mitigations in the bottom rows.</a:t>
             </a:r>
             <a:endParaRPr lang="en-US" dirty="0"/>
           </a:p>
@@ -11930,7 +11930,7 @@
                 <a:ea typeface="Calibri" pitchFamily="34" charset="-122"/>
                 <a:cs typeface="Calibri" pitchFamily="34" charset="-120"/>
               </a:rPr>
-              <a:t>10 languages</a:t>
+              <a:t>10 of 22 languages</a:t>
             </a:r>
             <a:endParaRPr lang="en-US" sz="1200" dirty="0"/>
           </a:p>
@@ -11969,7 +11969,7 @@
                 <a:ea typeface="Calibri" pitchFamily="34" charset="-122"/>
                 <a:cs typeface="Calibri" pitchFamily="34" charset="-120"/>
               </a:rPr>
-              <a:t>UIDAI already runs Sarvam's voice AI for Aadhaar — on-premise, air-gapped.</a:t>
+              <a:t>UIDAI already runs Sarvam's voice AI for Aadhaar in 10 of its 22 Indian languages — on-premise, air-gapped.</a:t>
             </a:r>
             <a:endParaRPr lang="en-US" sz="690" dirty="0"/>
           </a:p>

--- a/sih-26097/SkillCall_SIH26097_Cognify.pptx
+++ b/sih-26097/SkillCall_SIH26097_Cognify.pptx
@@ -595,7 +595,7 @@
           <a:p>
             <a:r>
               <a:rPr lang="en-US" dirty="0"/>
-              <a:t>The problem in numbers (CAG 2025, NFHS-6, Census 2011); who we serve (5.9 crore eligible, ~50,000 GIA seats a year → every seat must fit); the six steps of one call; six things a form cannot do, including the automatically written profile and the answer cache.</a:t>
+              <a:t>Every headline states the point on its own: the problem, the three numbers, who we serve, the six steps and the six differentiators.</a:t>
             </a:r>
             <a:endParaRPr lang="en-US" dirty="0"/>
           </a:p>
@@ -771,7 +771,7 @@
           <a:p>
             <a:r>
               <a:rPr lang="en-US" dirty="0"/>
-              <a:t>Proof points with sources. Cost per completed call ₹25–54 (calculations sheet §3; human call-back corrected to 10–20% × 5–6 min × ₹3.2/min = ₹1.6–3.8). Funnel with sources; affordability (§4.3). Four risks.</a:t>
+              <a:t>Proof points, cost per completed call (₹25–54; calculations sheet §3), call funnel with sources, affordability (§4.3), four risks.</a:t>
             </a:r>
             <a:endParaRPr lang="en-US" dirty="0"/>
           </a:p>
@@ -859,7 +859,7 @@
           <a:p>
             <a:r>
               <a:rPr lang="en-US" dirty="0"/>
-              <a:t>Impact with working (calculations sheet §5–6): 41→70% placement gap; 62→73% retention (+11 points, J-PAL); officer time 30 h → 5 h a month for 40 cases, ~31,250 h a year India-wide ≈ 18 staff-years; ₹12.5–15 crore better used = 6–14× SkillCall's yearly cost. Reach: 1–1.5 lakh profiles a year.</a:t>
+              <a:t>Impact with working (calculations sheet §5–6): 41→70% placement gap; 62→73% retention; officer time 30 h → 5 h a month per 40 cases, ≈ 18 staff-years India-wide; ₹12.5–15 crore better used = 6–14× SkillCall's yearly cost; reach 1–1.5 lakh profiles a year.</a:t>
             </a:r>
             <a:endParaRPr lang="en-US" dirty="0"/>
           </a:p>
@@ -1906,11 +1906,11 @@
         <p:spPr>
           <a:xfrm>
             <a:off x="274320" y="896112"/>
-            <a:ext cx="4846320" cy="731520"/>
+            <a:ext cx="4846320" cy="804672"/>
           </a:xfrm>
           <a:prstGeom prst="roundRect">
             <a:avLst>
-              <a:gd name="adj" fmla="val 10000"/>
+              <a:gd name="adj" fmla="val 9091"/>
             </a:avLst>
           </a:prstGeom>
           <a:solidFill>
@@ -1932,8 +1932,8 @@
         </p:nvSpPr>
         <p:spPr>
           <a:xfrm>
-            <a:off x="384048" y="987552"/>
-            <a:ext cx="365760" cy="365760"/>
+            <a:off x="365760" y="987552"/>
+            <a:ext cx="310896" cy="310896"/>
           </a:xfrm>
           <a:prstGeom prst="roundRect">
             <a:avLst>
@@ -1967,8 +1967,8 @@
         </p:blipFill>
         <p:spPr>
           <a:xfrm>
-            <a:off x="438912" y="1042416"/>
-            <a:ext cx="256032" cy="256032"/>
+            <a:off x="412394" y="1034186"/>
+            <a:ext cx="217627" cy="217627"/>
           </a:xfrm>
           <a:prstGeom prst="rect">
             <a:avLst/>
@@ -1983,8 +1983,86 @@
         </p:nvSpPr>
         <p:spPr>
           <a:xfrm>
-            <a:off x="868680" y="941832"/>
-            <a:ext cx="4160520" cy="658368"/>
+            <a:off x="768096" y="960120"/>
+            <a:ext cx="4261104" cy="219456"/>
+          </a:xfrm>
+          <a:prstGeom prst="rect">
+            <a:avLst/>
+          </a:prstGeom>
+          <a:noFill/>
+          <a:ln/>
+        </p:spPr>
+        <p:txBody>
+          <a:bodyPr wrap="square" lIns="0" tIns="0" rIns="0" bIns="0" rtlCol="0" anchor="ctr"/>
+          <a:lstStyle/>
+          <a:p>
+            <a:pPr indent="0" marL="0">
+              <a:buNone/>
+            </a:pPr>
+            <a:r>
+              <a:rPr lang="en-US" sz="1100" b="1" dirty="0">
+                <a:solidFill>
+                  <a:srgbClr val="EF8A22"/>
+                </a:solidFill>
+                <a:latin typeface="Calibri" pitchFamily="34" charset="0"/>
+                <a:ea typeface="Calibri" pitchFamily="34" charset="-122"/>
+                <a:cs typeface="Calibri" pitchFamily="34" charset="-120"/>
+              </a:rPr>
+              <a:t>Wrong course, then no job</a:t>
+            </a:r>
+            <a:endParaRPr lang="en-US" sz="1100" dirty="0"/>
+          </a:p>
+        </p:txBody>
+      </p:sp>
+      <p:sp>
+        <p:nvSpPr>
+          <p:cNvPr id="12" name="Text 8"/>
+          <p:cNvSpPr txBox="1"/>
+          <p:nvPr/>
+        </p:nvSpPr>
+        <p:spPr>
+          <a:xfrm>
+            <a:off x="768096" y="1170432"/>
+            <a:ext cx="4261104" cy="146304"/>
+          </a:xfrm>
+          <a:prstGeom prst="rect">
+            <a:avLst/>
+          </a:prstGeom>
+          <a:noFill/>
+          <a:ln/>
+        </p:spPr>
+        <p:txBody>
+          <a:bodyPr wrap="square" lIns="0" tIns="0" rIns="0" bIns="0" rtlCol="0" anchor="ctr"/>
+          <a:lstStyle/>
+          <a:p>
+            <a:pPr indent="0" marL="0">
+              <a:buNone/>
+            </a:pPr>
+            <a:r>
+              <a:rPr lang="en-US" sz="730" b="1" dirty="0">
+                <a:solidFill>
+                  <a:srgbClr val="5B6B7F"/>
+                </a:solidFill>
+                <a:latin typeface="Calibri" pitchFamily="34" charset="0"/>
+                <a:ea typeface="Calibri" pitchFamily="34" charset="-122"/>
+                <a:cs typeface="Calibri" pitchFamily="34" charset="-120"/>
+              </a:rPr>
+              <a:t>that is what happens to SC families today (SIH26097 · MoSJE)</a:t>
+            </a:r>
+            <a:endParaRPr lang="en-US" sz="730" dirty="0"/>
+          </a:p>
+        </p:txBody>
+      </p:sp>
+      <p:sp>
+        <p:nvSpPr>
+          <p:cNvPr id="13" name="Text 9"/>
+          <p:cNvSpPr txBox="1"/>
+          <p:nvPr/>
+        </p:nvSpPr>
+        <p:spPr>
+          <a:xfrm>
+            <a:off x="365760" y="1371600"/>
+            <a:ext cx="4663440" cy="256032"/>
           </a:xfrm>
           <a:prstGeom prst="rect">
             <a:avLst/>
@@ -2000,29 +2078,7 @@
               <a:buNone/>
             </a:pPr>
             <a:r>
-              <a:rPr lang="en-US" sz="900" b="1" dirty="0">
-                <a:solidFill>
-                  <a:srgbClr val="EF8A22"/>
-                </a:solidFill>
-                <a:latin typeface="Calibri" pitchFamily="34" charset="0"/>
-                <a:ea typeface="Calibri" pitchFamily="34" charset="-122"/>
-                <a:cs typeface="Calibri" pitchFamily="34" charset="-120"/>
-              </a:rPr>
-              <a:t>The problem  </a:t>
-            </a:r>
-            <a:r>
-              <a:rPr lang="en-US" sz="700" dirty="0">
-                <a:solidFill>
-                  <a:srgbClr val="6B7280"/>
-                </a:solidFill>
-                <a:latin typeface="Calibri" pitchFamily="34" charset="0"/>
-                <a:ea typeface="Calibri" pitchFamily="34" charset="-122"/>
-                <a:cs typeface="Calibri" pitchFamily="34" charset="-120"/>
-              </a:rPr>
-              <a:t>SIH26097 · Ministry of Social Justice &amp; Empowerment</a:t>
-            </a:r>
-            <a:r>
-              <a:rPr lang="en-US" sz="800" dirty="0">
+              <a:rPr lang="en-US" sz="670" dirty="0">
                 <a:solidFill>
                   <a:srgbClr val="1F2937"/>
                 </a:solidFill>
@@ -2030,38 +2086,26 @@
                 <a:ea typeface="Calibri" pitchFamily="34" charset="-122"/>
                 <a:cs typeface="Calibri" pitchFamily="34" charset="-120"/>
               </a:rPr>
-              <a:t>
-</a:t>
-            </a:r>
-            <a:r>
-              <a:rPr lang="en-US" sz="800" dirty="0">
-                <a:solidFill>
-                  <a:srgbClr val="1F2937"/>
-                </a:solidFill>
-                <a:latin typeface="Calibri" pitchFamily="34" charset="0"/>
-                <a:ea typeface="Calibri" pitchFamily="34" charset="-122"/>
-                <a:cs typeface="Calibri" pitchFamily="34" charset="-120"/>
-              </a:rPr>
-              <a:t>PM-AJAY pays for skill training and small-business support (up to ₹50,000) for poor SC families. But people are picked and placed through paper forms and field visits. Those who can't read, or don't know the trades, land in the wrong course — and don't get a job.</a:t>
-            </a:r>
-            <a:endParaRPr lang="en-US" sz="800" dirty="0"/>
-          </a:p>
-        </p:txBody>
-      </p:sp>
-      <p:sp>
-        <p:nvSpPr>
-          <p:cNvPr id="12" name="Shape 8"/>
+              <a:t>PM-AJAY pays for skill training and small-business support (up to ₹50,000). But people are picked and placed through paper forms and field visits — those who can't read, or don't know the trades, land in the wrong course.</a:t>
+            </a:r>
+            <a:endParaRPr lang="en-US" sz="670" dirty="0"/>
+          </a:p>
+        </p:txBody>
+      </p:sp>
+      <p:sp>
+        <p:nvSpPr>
+          <p:cNvPr id="14" name="Shape 10"/>
           <p:cNvSpPr/>
           <p:nvPr/>
         </p:nvSpPr>
         <p:spPr>
           <a:xfrm>
             <a:off x="5230368" y="896112"/>
-            <a:ext cx="1170432" cy="731520"/>
+            <a:ext cx="1170432" cy="804672"/>
           </a:xfrm>
           <a:prstGeom prst="roundRect">
             <a:avLst>
-              <a:gd name="adj" fmla="val 10000"/>
+              <a:gd name="adj" fmla="val 9091"/>
             </a:avLst>
           </a:prstGeom>
           <a:solidFill>
@@ -2077,14 +2121,14 @@
       </p:sp>
       <p:sp>
         <p:nvSpPr>
-          <p:cNvPr id="13" name="Text 9"/>
-          <p:cNvSpPr txBox="1"/>
-          <p:nvPr/>
-        </p:nvSpPr>
-        <p:spPr>
-          <a:xfrm>
-            <a:off x="5303520" y="914400"/>
-            <a:ext cx="1051560" cy="256032"/>
+          <p:cNvPr id="15" name="Text 11"/>
+          <p:cNvSpPr txBox="1"/>
+          <p:nvPr/>
+        </p:nvSpPr>
+        <p:spPr>
+          <a:xfrm>
+            <a:off x="5303520" y="932688"/>
+            <a:ext cx="1051560" cy="219456"/>
           </a:xfrm>
           <a:prstGeom prst="rect">
             <a:avLst/>
@@ -2100,7 +2144,7 @@
               <a:buNone/>
             </a:pPr>
             <a:r>
-              <a:rPr lang="en-US" sz="1600" b="1" dirty="0">
+              <a:rPr lang="en-US" sz="950" b="1" dirty="0">
                 <a:solidFill>
                   <a:srgbClr val="EF8A22"/>
                 </a:solidFill>
@@ -2108,22 +2152,22 @@
                 <a:ea typeface="Calibri" pitchFamily="34" charset="-122"/>
                 <a:cs typeface="Calibri" pitchFamily="34" charset="-120"/>
               </a:rPr>
-              <a:t>41%</a:t>
-            </a:r>
-            <a:endParaRPr lang="en-US" sz="1600" dirty="0"/>
-          </a:p>
-        </p:txBody>
-      </p:sp>
-      <p:sp>
-        <p:nvSpPr>
-          <p:cNvPr id="14" name="Text 10"/>
-          <p:cNvSpPr txBox="1"/>
-          <p:nvPr/>
-        </p:nvSpPr>
-        <p:spPr>
-          <a:xfrm>
-            <a:off x="5303520" y="1170432"/>
-            <a:ext cx="1051560" cy="256032"/>
+              <a:t>41% got a job</a:t>
+            </a:r>
+            <a:endParaRPr lang="en-US" sz="950" dirty="0"/>
+          </a:p>
+        </p:txBody>
+      </p:sp>
+      <p:sp>
+        <p:nvSpPr>
+          <p:cNvPr id="16" name="Text 12"/>
+          <p:cNvSpPr txBox="1"/>
+          <p:nvPr/>
+        </p:nvSpPr>
+        <p:spPr>
+          <a:xfrm>
+            <a:off x="5303520" y="1152144"/>
+            <a:ext cx="1051560" cy="274320"/>
           </a:xfrm>
           <a:prstGeom prst="rect">
             <a:avLst/>
@@ -2139,15 +2183,15 @@
               <a:buNone/>
             </a:pPr>
             <a:r>
-              <a:rPr lang="en-US" sz="680" dirty="0">
-                <a:solidFill>
-                  <a:srgbClr val="1F2937"/>
-                </a:solidFill>
-                <a:latin typeface="Calibri" pitchFamily="34" charset="0"/>
-                <a:ea typeface="Calibri" pitchFamily="34" charset="-122"/>
-                <a:cs typeface="Calibri" pitchFamily="34" charset="-120"/>
-              </a:rPr>
-              <a:t>of trained people got a job</a:t>
+              <a:rPr lang="en-US" sz="680" b="1" dirty="0">
+                <a:solidFill>
+                  <a:srgbClr val="5B6B7F"/>
+                </a:solidFill>
+                <a:latin typeface="Calibri" pitchFamily="34" charset="0"/>
+                <a:ea typeface="Calibri" pitchFamily="34" charset="-122"/>
+                <a:cs typeface="Calibri" pitchFamily="34" charset="-120"/>
+              </a:rPr>
+              <a:t>after government training</a:t>
             </a:r>
             <a:endParaRPr lang="en-US" sz="680" dirty="0"/>
           </a:p>
@@ -2155,13 +2199,13 @@
       </p:sp>
       <p:sp>
         <p:nvSpPr>
-          <p:cNvPr id="15" name="Shape 11"/>
+          <p:cNvPr id="17" name="Shape 13"/>
           <p:cNvSpPr/>
           <p:nvPr/>
         </p:nvSpPr>
         <p:spPr>
           <a:xfrm>
-            <a:off x="5303520" y="1444752"/>
+            <a:off x="5303520" y="1499616"/>
             <a:ext cx="1024128" cy="137160"/>
           </a:xfrm>
           <a:prstGeom prst="roundRect">
@@ -2182,13 +2226,13 @@
       </p:sp>
       <p:sp>
         <p:nvSpPr>
-          <p:cNvPr id="16" name="Text 12"/>
-          <p:cNvSpPr txBox="1"/>
-          <p:nvPr/>
-        </p:nvSpPr>
-        <p:spPr>
-          <a:xfrm>
-            <a:off x="5358384" y="1444752"/>
+          <p:cNvPr id="18" name="Text 14"/>
+          <p:cNvSpPr txBox="1"/>
+          <p:nvPr/>
+        </p:nvSpPr>
+        <p:spPr>
+          <a:xfrm>
+            <a:off x="5358384" y="1499616"/>
             <a:ext cx="932688" cy="137160"/>
           </a:xfrm>
           <a:prstGeom prst="rect">
@@ -2221,18 +2265,18 @@
       </p:sp>
       <p:sp>
         <p:nvSpPr>
-          <p:cNvPr id="17" name="Shape 13"/>
+          <p:cNvPr id="19" name="Shape 15"/>
           <p:cNvSpPr/>
           <p:nvPr/>
         </p:nvSpPr>
         <p:spPr>
           <a:xfrm>
             <a:off x="6455664" y="896112"/>
-            <a:ext cx="1170432" cy="731520"/>
+            <a:ext cx="1170432" cy="804672"/>
           </a:xfrm>
           <a:prstGeom prst="roundRect">
             <a:avLst>
-              <a:gd name="adj" fmla="val 10000"/>
+              <a:gd name="adj" fmla="val 9091"/>
             </a:avLst>
           </a:prstGeom>
           <a:solidFill>
@@ -2248,14 +2292,14 @@
       </p:sp>
       <p:sp>
         <p:nvSpPr>
-          <p:cNvPr id="18" name="Text 14"/>
-          <p:cNvSpPr txBox="1"/>
-          <p:nvPr/>
-        </p:nvSpPr>
-        <p:spPr>
-          <a:xfrm>
-            <a:off x="6528816" y="914400"/>
-            <a:ext cx="1051560" cy="256032"/>
+          <p:cNvPr id="20" name="Text 16"/>
+          <p:cNvSpPr txBox="1"/>
+          <p:nvPr/>
+        </p:nvSpPr>
+        <p:spPr>
+          <a:xfrm>
+            <a:off x="6528816" y="932688"/>
+            <a:ext cx="1051560" cy="219456"/>
           </a:xfrm>
           <a:prstGeom prst="rect">
             <a:avLst/>
@@ -2271,7 +2315,7 @@
               <a:buNone/>
             </a:pPr>
             <a:r>
-              <a:rPr lang="en-US" sz="1600" b="1" dirty="0">
+              <a:rPr lang="en-US" sz="950" b="1" dirty="0">
                 <a:solidFill>
                   <a:srgbClr val="D6467A"/>
                 </a:solidFill>
@@ -2279,22 +2323,22 @@
                 <a:ea typeface="Calibri" pitchFamily="34" charset="-122"/>
                 <a:cs typeface="Calibri" pitchFamily="34" charset="-120"/>
               </a:rPr>
-              <a:t>43%</a:t>
-            </a:r>
-            <a:endParaRPr lang="en-US" sz="1600" dirty="0"/>
-          </a:p>
-        </p:txBody>
-      </p:sp>
-      <p:sp>
-        <p:nvSpPr>
-          <p:cNvPr id="19" name="Text 15"/>
-          <p:cNvSpPr txBox="1"/>
-          <p:nvPr/>
-        </p:nvSpPr>
-        <p:spPr>
-          <a:xfrm>
-            <a:off x="6528816" y="1170432"/>
-            <a:ext cx="1051560" cy="256032"/>
+              <a:t>43% have no phone</a:t>
+            </a:r>
+            <a:endParaRPr lang="en-US" sz="950" dirty="0"/>
+          </a:p>
+        </p:txBody>
+      </p:sp>
+      <p:sp>
+        <p:nvSpPr>
+          <p:cNvPr id="21" name="Text 17"/>
+          <p:cNvSpPr txBox="1"/>
+          <p:nvPr/>
+        </p:nvSpPr>
+        <p:spPr>
+          <a:xfrm>
+            <a:off x="6528816" y="1152144"/>
+            <a:ext cx="1051560" cy="274320"/>
           </a:xfrm>
           <a:prstGeom prst="rect">
             <a:avLst/>
@@ -2310,15 +2354,15 @@
               <a:buNone/>
             </a:pPr>
             <a:r>
-              <a:rPr lang="en-US" sz="680" dirty="0">
-                <a:solidFill>
-                  <a:srgbClr val="1F2937"/>
-                </a:solidFill>
-                <a:latin typeface="Calibri" pitchFamily="34" charset="0"/>
-                <a:ea typeface="Calibri" pitchFamily="34" charset="-122"/>
-                <a:cs typeface="Calibri" pitchFamily="34" charset="-120"/>
-              </a:rPr>
-              <a:t>of rural women have no phone of their own</a:t>
+              <a:rPr lang="en-US" sz="680" b="1" dirty="0">
+                <a:solidFill>
+                  <a:srgbClr val="5B6B7F"/>
+                </a:solidFill>
+                <a:latin typeface="Calibri" pitchFamily="34" charset="0"/>
+                <a:ea typeface="Calibri" pitchFamily="34" charset="-122"/>
+                <a:cs typeface="Calibri" pitchFamily="34" charset="-120"/>
+              </a:rPr>
+              <a:t>of rural women, of their own</a:t>
             </a:r>
             <a:endParaRPr lang="en-US" sz="680" dirty="0"/>
           </a:p>
@@ -2326,13 +2370,13 @@
       </p:sp>
       <p:sp>
         <p:nvSpPr>
-          <p:cNvPr id="20" name="Shape 16"/>
+          <p:cNvPr id="22" name="Shape 18"/>
           <p:cNvSpPr/>
           <p:nvPr/>
         </p:nvSpPr>
         <p:spPr>
           <a:xfrm>
-            <a:off x="6528816" y="1444752"/>
+            <a:off x="6528816" y="1499616"/>
             <a:ext cx="1024128" cy="137160"/>
           </a:xfrm>
           <a:prstGeom prst="roundRect">
@@ -2353,13 +2397,13 @@
       </p:sp>
       <p:sp>
         <p:nvSpPr>
-          <p:cNvPr id="21" name="Text 17"/>
-          <p:cNvSpPr txBox="1"/>
-          <p:nvPr/>
-        </p:nvSpPr>
-        <p:spPr>
-          <a:xfrm>
-            <a:off x="6583680" y="1444752"/>
+          <p:cNvPr id="23" name="Text 19"/>
+          <p:cNvSpPr txBox="1"/>
+          <p:nvPr/>
+        </p:nvSpPr>
+        <p:spPr>
+          <a:xfrm>
+            <a:off x="6583680" y="1499616"/>
             <a:ext cx="932688" cy="137160"/>
           </a:xfrm>
           <a:prstGeom prst="rect">
@@ -2392,18 +2436,18 @@
       </p:sp>
       <p:sp>
         <p:nvSpPr>
-          <p:cNvPr id="22" name="Shape 18"/>
+          <p:cNvPr id="24" name="Shape 20"/>
           <p:cNvSpPr/>
           <p:nvPr/>
         </p:nvSpPr>
         <p:spPr>
           <a:xfrm>
             <a:off x="7680960" y="896112"/>
-            <a:ext cx="1170432" cy="731520"/>
+            <a:ext cx="1170432" cy="804672"/>
           </a:xfrm>
           <a:prstGeom prst="roundRect">
             <a:avLst>
-              <a:gd name="adj" fmla="val 10000"/>
+              <a:gd name="adj" fmla="val 9091"/>
             </a:avLst>
           </a:prstGeom>
           <a:solidFill>
@@ -2419,14 +2463,14 @@
       </p:sp>
       <p:sp>
         <p:nvSpPr>
-          <p:cNvPr id="23" name="Text 19"/>
-          <p:cNvSpPr txBox="1"/>
-          <p:nvPr/>
-        </p:nvSpPr>
-        <p:spPr>
-          <a:xfrm>
-            <a:off x="7754112" y="914400"/>
-            <a:ext cx="1051560" cy="256032"/>
+          <p:cNvPr id="25" name="Text 21"/>
+          <p:cNvSpPr txBox="1"/>
+          <p:nvPr/>
+        </p:nvSpPr>
+        <p:spPr>
+          <a:xfrm>
+            <a:off x="7754112" y="932688"/>
+            <a:ext cx="1051560" cy="219456"/>
           </a:xfrm>
           <a:prstGeom prst="rect">
             <a:avLst/>
@@ -2442,7 +2486,7 @@
               <a:buNone/>
             </a:pPr>
             <a:r>
-              <a:rPr lang="en-US" sz="1600" b="1" dirty="0">
+              <a:rPr lang="en-US" sz="950" b="1" dirty="0">
                 <a:solidFill>
                   <a:srgbClr val="7A5AF8"/>
                 </a:solidFill>
@@ -2450,22 +2494,22 @@
                 <a:ea typeface="Calibri" pitchFamily="34" charset="-122"/>
                 <a:cs typeface="Calibri" pitchFamily="34" charset="-120"/>
               </a:rPr>
-              <a:t>34%</a:t>
-            </a:r>
-            <a:endParaRPr lang="en-US" sz="1600" dirty="0"/>
-          </a:p>
-        </p:txBody>
-      </p:sp>
-      <p:sp>
-        <p:nvSpPr>
-          <p:cNvPr id="24" name="Text 20"/>
-          <p:cNvSpPr txBox="1"/>
-          <p:nvPr/>
-        </p:nvSpPr>
-        <p:spPr>
-          <a:xfrm>
-            <a:off x="7754112" y="1170432"/>
-            <a:ext cx="1051560" cy="256032"/>
+              <a:t>34% cannot read</a:t>
+            </a:r>
+            <a:endParaRPr lang="en-US" sz="950" dirty="0"/>
+          </a:p>
+        </p:txBody>
+      </p:sp>
+      <p:sp>
+        <p:nvSpPr>
+          <p:cNvPr id="26" name="Text 22"/>
+          <p:cNvSpPr txBox="1"/>
+          <p:nvPr/>
+        </p:nvSpPr>
+        <p:spPr>
+          <a:xfrm>
+            <a:off x="7754112" y="1152144"/>
+            <a:ext cx="1051560" cy="274320"/>
           </a:xfrm>
           <a:prstGeom prst="rect">
             <a:avLst/>
@@ -2481,15 +2525,15 @@
               <a:buNone/>
             </a:pPr>
             <a:r>
-              <a:rPr lang="en-US" sz="680" dirty="0">
-                <a:solidFill>
-                  <a:srgbClr val="1F2937"/>
-                </a:solidFill>
-                <a:latin typeface="Calibri" pitchFamily="34" charset="0"/>
-                <a:ea typeface="Calibri" pitchFamily="34" charset="-122"/>
-                <a:cs typeface="Calibri" pitchFamily="34" charset="-120"/>
-              </a:rPr>
-              <a:t>of SC adults cannot read</a:t>
+              <a:rPr lang="en-US" sz="680" b="1" dirty="0">
+                <a:solidFill>
+                  <a:srgbClr val="5B6B7F"/>
+                </a:solidFill>
+                <a:latin typeface="Calibri" pitchFamily="34" charset="0"/>
+                <a:ea typeface="Calibri" pitchFamily="34" charset="-122"/>
+                <a:cs typeface="Calibri" pitchFamily="34" charset="-120"/>
+              </a:rPr>
+              <a:t>of SC adults</a:t>
             </a:r>
             <a:endParaRPr lang="en-US" sz="680" dirty="0"/>
           </a:p>
@@ -2497,13 +2541,13 @@
       </p:sp>
       <p:sp>
         <p:nvSpPr>
-          <p:cNvPr id="25" name="Shape 21"/>
+          <p:cNvPr id="27" name="Shape 23"/>
           <p:cNvSpPr/>
           <p:nvPr/>
         </p:nvSpPr>
         <p:spPr>
           <a:xfrm>
-            <a:off x="7754112" y="1444752"/>
+            <a:off x="7754112" y="1499616"/>
             <a:ext cx="1024128" cy="137160"/>
           </a:xfrm>
           <a:prstGeom prst="roundRect">
@@ -2524,13 +2568,13 @@
       </p:sp>
       <p:sp>
         <p:nvSpPr>
-          <p:cNvPr id="26" name="Text 22"/>
-          <p:cNvSpPr txBox="1"/>
-          <p:nvPr/>
-        </p:nvSpPr>
-        <p:spPr>
-          <a:xfrm>
-            <a:off x="7808976" y="1444752"/>
+          <p:cNvPr id="28" name="Text 24"/>
+          <p:cNvSpPr txBox="1"/>
+          <p:nvPr/>
+        </p:nvSpPr>
+        <p:spPr>
+          <a:xfrm>
+            <a:off x="7808976" y="1499616"/>
             <a:ext cx="932688" cy="137160"/>
           </a:xfrm>
           <a:prstGeom prst="rect">
@@ -2563,13 +2607,13 @@
       </p:sp>
       <p:sp>
         <p:nvSpPr>
-          <p:cNvPr id="27" name="Shape 23"/>
+          <p:cNvPr id="29" name="Shape 25"/>
           <p:cNvSpPr/>
           <p:nvPr/>
         </p:nvSpPr>
         <p:spPr>
           <a:xfrm>
-            <a:off x="274320" y="1700784"/>
+            <a:off x="274320" y="1773936"/>
             <a:ext cx="8595360" cy="274320"/>
           </a:xfrm>
           <a:prstGeom prst="roundRect">
@@ -2590,13 +2634,13 @@
       </p:sp>
       <p:sp>
         <p:nvSpPr>
-          <p:cNvPr id="28" name="Text 24"/>
-          <p:cNvSpPr txBox="1"/>
-          <p:nvPr/>
-        </p:nvSpPr>
-        <p:spPr>
-          <a:xfrm>
-            <a:off x="384048" y="1700784"/>
+          <p:cNvPr id="30" name="Text 26"/>
+          <p:cNvSpPr txBox="1"/>
+          <p:nvPr/>
+        </p:nvSpPr>
+        <p:spPr>
+          <a:xfrm>
+            <a:off x="384048" y="1773936"/>
             <a:ext cx="914400" cy="274320"/>
           </a:xfrm>
           <a:prstGeom prst="rect">
@@ -2629,13 +2673,13 @@
       </p:sp>
       <p:sp>
         <p:nvSpPr>
-          <p:cNvPr id="29" name="Text 25"/>
-          <p:cNvSpPr txBox="1"/>
-          <p:nvPr/>
-        </p:nvSpPr>
-        <p:spPr>
-          <a:xfrm>
-            <a:off x="1325880" y="1700784"/>
+          <p:cNvPr id="31" name="Text 27"/>
+          <p:cNvSpPr txBox="1"/>
+          <p:nvPr/>
+        </p:nvSpPr>
+        <p:spPr>
+          <a:xfrm>
+            <a:off x="1325880" y="1773936"/>
             <a:ext cx="1417320" cy="274320"/>
           </a:xfrm>
           <a:prstGeom prst="rect">
@@ -2679,13 +2723,13 @@
       </p:sp>
       <p:sp>
         <p:nvSpPr>
-          <p:cNvPr id="30" name="Text 26"/>
-          <p:cNvSpPr txBox="1"/>
-          <p:nvPr/>
-        </p:nvSpPr>
-        <p:spPr>
-          <a:xfrm>
-            <a:off x="2606040" y="1700784"/>
+          <p:cNvPr id="32" name="Text 28"/>
+          <p:cNvSpPr txBox="1"/>
+          <p:nvPr/>
+        </p:nvSpPr>
+        <p:spPr>
+          <a:xfrm>
+            <a:off x="2606040" y="1773936"/>
             <a:ext cx="228600" cy="274320"/>
           </a:xfrm>
           <a:prstGeom prst="rect">
@@ -2718,13 +2762,13 @@
       </p:sp>
       <p:sp>
         <p:nvSpPr>
-          <p:cNvPr id="31" name="Text 27"/>
-          <p:cNvSpPr txBox="1"/>
-          <p:nvPr/>
-        </p:nvSpPr>
-        <p:spPr>
-          <a:xfrm>
-            <a:off x="2880360" y="1700784"/>
+          <p:cNvPr id="33" name="Text 29"/>
+          <p:cNvSpPr txBox="1"/>
+          <p:nvPr/>
+        </p:nvSpPr>
+        <p:spPr>
+          <a:xfrm>
+            <a:off x="2880360" y="1773936"/>
             <a:ext cx="1874520" cy="274320"/>
           </a:xfrm>
           <a:prstGeom prst="rect">
@@ -2768,13 +2812,13 @@
       </p:sp>
       <p:sp>
         <p:nvSpPr>
-          <p:cNvPr id="32" name="Text 28"/>
-          <p:cNvSpPr txBox="1"/>
-          <p:nvPr/>
-        </p:nvSpPr>
-        <p:spPr>
-          <a:xfrm>
-            <a:off x="4617720" y="1700784"/>
+          <p:cNvPr id="34" name="Text 30"/>
+          <p:cNvSpPr txBox="1"/>
+          <p:nvPr/>
+        </p:nvSpPr>
+        <p:spPr>
+          <a:xfrm>
+            <a:off x="4617720" y="1773936"/>
             <a:ext cx="228600" cy="274320"/>
           </a:xfrm>
           <a:prstGeom prst="rect">
@@ -2807,13 +2851,13 @@
       </p:sp>
       <p:sp>
         <p:nvSpPr>
-          <p:cNvPr id="33" name="Text 29"/>
-          <p:cNvSpPr txBox="1"/>
-          <p:nvPr/>
-        </p:nvSpPr>
-        <p:spPr>
-          <a:xfrm>
-            <a:off x="4892040" y="1700784"/>
+          <p:cNvPr id="35" name="Text 31"/>
+          <p:cNvSpPr txBox="1"/>
+          <p:nvPr/>
+        </p:nvSpPr>
+        <p:spPr>
+          <a:xfrm>
+            <a:off x="4892040" y="1773936"/>
             <a:ext cx="1691640" cy="274320"/>
           </a:xfrm>
           <a:prstGeom prst="rect">
@@ -2857,13 +2901,13 @@
       </p:sp>
       <p:sp>
         <p:nvSpPr>
-          <p:cNvPr id="34" name="Text 30"/>
-          <p:cNvSpPr txBox="1"/>
-          <p:nvPr/>
-        </p:nvSpPr>
-        <p:spPr>
-          <a:xfrm>
-            <a:off x="6446520" y="1700784"/>
+          <p:cNvPr id="36" name="Text 32"/>
+          <p:cNvSpPr txBox="1"/>
+          <p:nvPr/>
+        </p:nvSpPr>
+        <p:spPr>
+          <a:xfrm>
+            <a:off x="6446520" y="1773936"/>
             <a:ext cx="228600" cy="274320"/>
           </a:xfrm>
           <a:prstGeom prst="rect">
@@ -2896,13 +2940,13 @@
       </p:sp>
       <p:sp>
         <p:nvSpPr>
-          <p:cNvPr id="35" name="Text 31"/>
-          <p:cNvSpPr txBox="1"/>
-          <p:nvPr/>
-        </p:nvSpPr>
-        <p:spPr>
-          <a:xfrm>
-            <a:off x="6720840" y="1700784"/>
+          <p:cNvPr id="37" name="Text 33"/>
+          <p:cNvSpPr txBox="1"/>
+          <p:nvPr/>
+        </p:nvSpPr>
+        <p:spPr>
+          <a:xfrm>
+            <a:off x="6720840" y="1773936"/>
             <a:ext cx="2103120" cy="274320"/>
           </a:xfrm>
           <a:prstGeom prst="rect">
@@ -2946,13 +2990,13 @@
       </p:sp>
       <p:sp>
         <p:nvSpPr>
-          <p:cNvPr id="36" name="Text 32"/>
-          <p:cNvSpPr txBox="1"/>
-          <p:nvPr/>
-        </p:nvSpPr>
-        <p:spPr>
-          <a:xfrm>
-            <a:off x="274320" y="1993392"/>
+          <p:cNvPr id="38" name="Text 34"/>
+          <p:cNvSpPr txBox="1"/>
+          <p:nvPr/>
+        </p:nvSpPr>
+        <p:spPr>
+          <a:xfrm>
+            <a:off x="274320" y="2066544"/>
             <a:ext cx="8595360" cy="118872"/>
           </a:xfrm>
           <a:prstGeom prst="rect">
@@ -2985,23 +3029,23 @@
       </p:sp>
       <p:sp>
         <p:nvSpPr>
-          <p:cNvPr id="37" name="Text 33"/>
-          <p:cNvSpPr txBox="1"/>
-          <p:nvPr/>
-        </p:nvSpPr>
-        <p:spPr>
-          <a:xfrm>
-            <a:off x="274320" y="2157984"/>
-            <a:ext cx="5486400" cy="182880"/>
-          </a:xfrm>
-          <a:prstGeom prst="rect">
-            <a:avLst/>
-          </a:prstGeom>
-          <a:noFill/>
-          <a:ln/>
-        </p:spPr>
-        <p:txBody>
-          <a:bodyPr wrap="square" lIns="0" tIns="0" rIns="0" bIns="0" rtlCol="0" anchor="t"/>
+          <p:cNvPr id="39" name="Text 35"/>
+          <p:cNvSpPr txBox="1"/>
+          <p:nvPr/>
+        </p:nvSpPr>
+        <p:spPr>
+          <a:xfrm>
+            <a:off x="274320" y="2231136"/>
+            <a:ext cx="6400800" cy="182880"/>
+          </a:xfrm>
+          <a:prstGeom prst="rect">
+            <a:avLst/>
+          </a:prstGeom>
+          <a:noFill/>
+          <a:ln/>
+        </p:spPr>
+        <p:txBody>
+          <a:bodyPr wrap="square" lIns="0" tIns="0" rIns="0" bIns="0" rtlCol="0" anchor="ctr"/>
           <a:lstStyle/>
           <a:p>
             <a:pPr indent="0" marL="0">
@@ -3016,7 +3060,18 @@
                 <a:ea typeface="Calibri" pitchFamily="34" charset="-122"/>
                 <a:cs typeface="Calibri" pitchFamily="34" charset="-120"/>
               </a:rPr>
-              <a:t>HOW IT WORKS — ONE CALL, ABOUT 10 MINUTES, ON ANY PHONE</a:t>
+              <a:t>ONE CALL, SIX STEPS  </a:t>
+            </a:r>
+            <a:r>
+              <a:rPr lang="en-US" sz="750" i="1" dirty="0">
+                <a:solidFill>
+                  <a:srgbClr val="6B7280"/>
+                </a:solidFill>
+                <a:latin typeface="Calibri" pitchFamily="34" charset="0"/>
+                <a:ea typeface="Calibri" pitchFamily="34" charset="-122"/>
+                <a:cs typeface="Calibri" pitchFamily="34" charset="-120"/>
+              </a:rPr>
+              <a:t>about 10 minutes, on any keypad phone</a:t>
             </a:r>
             <a:endParaRPr lang="en-US" sz="850" dirty="0"/>
           </a:p>
@@ -3024,18 +3079,18 @@
       </p:sp>
       <p:sp>
         <p:nvSpPr>
-          <p:cNvPr id="38" name="Shape 34"/>
+          <p:cNvPr id="40" name="Shape 36"/>
           <p:cNvSpPr/>
           <p:nvPr/>
         </p:nvSpPr>
         <p:spPr>
           <a:xfrm>
-            <a:off x="274320" y="2340864"/>
-            <a:ext cx="1371600" cy="1005840"/>
+            <a:off x="274320" y="2432304"/>
+            <a:ext cx="1371600" cy="1024128"/>
           </a:xfrm>
           <a:prstGeom prst="roundRect">
             <a:avLst>
-              <a:gd name="adj" fmla="val 7273"/>
+              <a:gd name="adj" fmla="val 7143"/>
             </a:avLst>
           </a:prstGeom>
           <a:solidFill>
@@ -3051,13 +3106,13 @@
       </p:sp>
       <p:sp>
         <p:nvSpPr>
-          <p:cNvPr id="39" name="Shape 35"/>
+          <p:cNvPr id="41" name="Shape 37"/>
           <p:cNvSpPr/>
           <p:nvPr/>
         </p:nvSpPr>
         <p:spPr>
           <a:xfrm>
-            <a:off x="356616" y="2414016"/>
+            <a:off x="356616" y="2505456"/>
             <a:ext cx="329184" cy="329184"/>
           </a:xfrm>
           <a:prstGeom prst="ellipse">
@@ -3076,7 +3131,7 @@
       </p:sp>
       <p:pic>
         <p:nvPicPr>
-          <p:cNvPr id="40" name="Image 2" descr="preencoded.png">    </p:cNvPr>
+          <p:cNvPr id="42" name="Image 2" descr="preencoded.png">    </p:cNvPr>
           <p:cNvPicPr>
             <a:picLocks noChangeAspect="1"/>
           </p:cNvPicPr>
@@ -3090,7 +3145,7 @@
         </p:blipFill>
         <p:spPr>
           <a:xfrm>
-            <a:off x="402336" y="2459736"/>
+            <a:off x="402336" y="2551176"/>
             <a:ext cx="237744" cy="237744"/>
           </a:xfrm>
           <a:prstGeom prst="rect">
@@ -3100,13 +3155,13 @@
       </p:pic>
       <p:sp>
         <p:nvSpPr>
-          <p:cNvPr id="41" name="Shape 36"/>
+          <p:cNvPr id="43" name="Shape 38"/>
           <p:cNvSpPr/>
           <p:nvPr/>
         </p:nvSpPr>
         <p:spPr>
           <a:xfrm>
-            <a:off x="1316736" y="2414016"/>
+            <a:off x="1316736" y="2505456"/>
             <a:ext cx="246888" cy="246888"/>
           </a:xfrm>
           <a:prstGeom prst="ellipse">
@@ -3125,13 +3180,13 @@
       </p:sp>
       <p:sp>
         <p:nvSpPr>
-          <p:cNvPr id="42" name="Text 37"/>
-          <p:cNvSpPr txBox="1"/>
-          <p:nvPr/>
-        </p:nvSpPr>
-        <p:spPr>
-          <a:xfrm>
-            <a:off x="1316736" y="2414016"/>
+          <p:cNvPr id="44" name="Text 39"/>
+          <p:cNvSpPr txBox="1"/>
+          <p:nvPr/>
+        </p:nvSpPr>
+        <p:spPr>
+          <a:xfrm>
+            <a:off x="1316736" y="2505456"/>
             <a:ext cx="246888" cy="246888"/>
           </a:xfrm>
           <a:prstGeom prst="rect">
@@ -3164,13 +3219,13 @@
       </p:sp>
       <p:sp>
         <p:nvSpPr>
-          <p:cNvPr id="43" name="Text 38"/>
-          <p:cNvSpPr txBox="1"/>
-          <p:nvPr/>
-        </p:nvSpPr>
-        <p:spPr>
-          <a:xfrm>
-            <a:off x="356616" y="2770632"/>
+          <p:cNvPr id="45" name="Text 40"/>
+          <p:cNvSpPr txBox="1"/>
+          <p:nvPr/>
+        </p:nvSpPr>
+        <p:spPr>
+          <a:xfrm>
+            <a:off x="356616" y="2862072"/>
             <a:ext cx="1207008" cy="182880"/>
           </a:xfrm>
           <a:prstGeom prst="rect">
@@ -3187,7 +3242,7 @@
               <a:buNone/>
             </a:pPr>
             <a:r>
-              <a:rPr lang="en-US" sz="830" b="1" dirty="0">
+              <a:rPr lang="en-US" sz="850" b="1" dirty="0">
                 <a:solidFill>
                   <a:srgbClr val="2E6FD6"/>
                 </a:solidFill>
@@ -3195,22 +3250,61 @@
                 <a:ea typeface="Calibri" pitchFamily="34" charset="-122"/>
                 <a:cs typeface="Calibri" pitchFamily="34" charset="-120"/>
               </a:rPr>
-              <a:t>Missed call → call-back</a:t>
-            </a:r>
-            <a:endParaRPr lang="en-US" sz="830" dirty="0"/>
-          </a:p>
-        </p:txBody>
-      </p:sp>
-      <p:sp>
-        <p:nvSpPr>
-          <p:cNvPr id="44" name="Text 39"/>
-          <p:cNvSpPr txBox="1"/>
-          <p:nvPr/>
-        </p:nvSpPr>
-        <p:spPr>
-          <a:xfrm>
-            <a:off x="356616" y="2944368"/>
-            <a:ext cx="1207008" cy="402336"/>
+              <a:t>Missed call</a:t>
+            </a:r>
+            <a:endParaRPr lang="en-US" sz="850" dirty="0"/>
+          </a:p>
+        </p:txBody>
+      </p:sp>
+      <p:sp>
+        <p:nvSpPr>
+          <p:cNvPr id="46" name="Text 41"/>
+          <p:cNvSpPr txBox="1"/>
+          <p:nvPr/>
+        </p:nvSpPr>
+        <p:spPr>
+          <a:xfrm>
+            <a:off x="356616" y="3035808"/>
+            <a:ext cx="1207008" cy="128016"/>
+          </a:xfrm>
+          <a:prstGeom prst="rect">
+            <a:avLst/>
+          </a:prstGeom>
+          <a:noFill/>
+          <a:ln/>
+        </p:spPr>
+        <p:txBody>
+          <a:bodyPr wrap="square" lIns="0" tIns="0" rIns="0" bIns="0" rtlCol="0" anchor="ctr"/>
+          <a:lstStyle/>
+          <a:p>
+            <a:pPr indent="0" marL="0">
+              <a:buNone/>
+            </a:pPr>
+            <a:r>
+              <a:rPr lang="en-US" sz="680" b="1" dirty="0">
+                <a:solidFill>
+                  <a:srgbClr val="5B6B7F"/>
+                </a:solidFill>
+                <a:latin typeface="Calibri" pitchFamily="34" charset="0"/>
+                <a:ea typeface="Calibri" pitchFamily="34" charset="-122"/>
+                <a:cs typeface="Calibri" pitchFamily="34" charset="-120"/>
+              </a:rPr>
+              <a:t>he gets a free call-back</a:t>
+            </a:r>
+            <a:endParaRPr lang="en-US" sz="680" dirty="0"/>
+          </a:p>
+        </p:txBody>
+      </p:sp>
+      <p:sp>
+        <p:nvSpPr>
+          <p:cNvPr id="47" name="Text 42"/>
+          <p:cNvSpPr txBox="1"/>
+          <p:nvPr/>
+        </p:nvSpPr>
+        <p:spPr>
+          <a:xfrm>
+            <a:off x="356616" y="3182112"/>
+            <a:ext cx="1207008" cy="274320"/>
           </a:xfrm>
           <a:prstGeom prst="rect">
             <a:avLst/>
@@ -3226,7 +3320,7 @@
               <a:buNone/>
             </a:pPr>
             <a:r>
-              <a:rPr lang="en-US" sz="660" dirty="0">
+              <a:rPr lang="en-US" sz="640" dirty="0">
                 <a:solidFill>
                   <a:srgbClr val="1F2937"/>
                 </a:solidFill>
@@ -3234,26 +3328,26 @@
                 <a:ea typeface="Calibri" pitchFamily="34" charset="-122"/>
                 <a:cs typeface="Calibri" pitchFamily="34" charset="-120"/>
               </a:rPr>
-              <a:t>He gives a missed call; SkillCall calls back in a minute — free, from a govt 1600 number, in his language.</a:t>
-            </a:r>
-            <a:endParaRPr lang="en-US" sz="660" dirty="0"/>
-          </a:p>
-        </p:txBody>
-      </p:sp>
-      <p:sp>
-        <p:nvSpPr>
-          <p:cNvPr id="45" name="Shape 40"/>
+              <a:t>Within a minute, from a govt 1600 number, in the language he picks on the keypad.</a:t>
+            </a:r>
+            <a:endParaRPr lang="en-US" sz="640" dirty="0"/>
+          </a:p>
+        </p:txBody>
+      </p:sp>
+      <p:sp>
+        <p:nvSpPr>
+          <p:cNvPr id="48" name="Shape 43"/>
           <p:cNvSpPr/>
           <p:nvPr/>
         </p:nvSpPr>
         <p:spPr>
           <a:xfrm>
-            <a:off x="1719072" y="2340864"/>
-            <a:ext cx="1371600" cy="1005840"/>
+            <a:off x="1719072" y="2432304"/>
+            <a:ext cx="1371600" cy="1024128"/>
           </a:xfrm>
           <a:prstGeom prst="roundRect">
             <a:avLst>
-              <a:gd name="adj" fmla="val 7273"/>
+              <a:gd name="adj" fmla="val 7143"/>
             </a:avLst>
           </a:prstGeom>
           <a:solidFill>
@@ -3269,13 +3363,13 @@
       </p:sp>
       <p:sp>
         <p:nvSpPr>
-          <p:cNvPr id="46" name="Shape 41"/>
+          <p:cNvPr id="49" name="Shape 44"/>
           <p:cNvSpPr/>
           <p:nvPr/>
         </p:nvSpPr>
         <p:spPr>
           <a:xfrm>
-            <a:off x="1801368" y="2414016"/>
+            <a:off x="1801368" y="2505456"/>
             <a:ext cx="329184" cy="329184"/>
           </a:xfrm>
           <a:prstGeom prst="ellipse">
@@ -3294,7 +3388,7 @@
       </p:sp>
       <p:pic>
         <p:nvPicPr>
-          <p:cNvPr id="47" name="Image 3" descr="preencoded.png">    </p:cNvPr>
+          <p:cNvPr id="50" name="Image 3" descr="preencoded.png">    </p:cNvPr>
           <p:cNvPicPr>
             <a:picLocks noChangeAspect="1"/>
           </p:cNvPicPr>
@@ -3308,7 +3402,7 @@
         </p:blipFill>
         <p:spPr>
           <a:xfrm>
-            <a:off x="1847088" y="2459736"/>
+            <a:off x="1847088" y="2551176"/>
             <a:ext cx="237744" cy="237744"/>
           </a:xfrm>
           <a:prstGeom prst="rect">
@@ -3318,13 +3412,13 @@
       </p:pic>
       <p:sp>
         <p:nvSpPr>
-          <p:cNvPr id="48" name="Shape 42"/>
+          <p:cNvPr id="51" name="Shape 45"/>
           <p:cNvSpPr/>
           <p:nvPr/>
         </p:nvSpPr>
         <p:spPr>
           <a:xfrm>
-            <a:off x="2761488" y="2414016"/>
+            <a:off x="2761488" y="2505456"/>
             <a:ext cx="246888" cy="246888"/>
           </a:xfrm>
           <a:prstGeom prst="ellipse">
@@ -3343,13 +3437,13 @@
       </p:sp>
       <p:sp>
         <p:nvSpPr>
-          <p:cNvPr id="49" name="Text 43"/>
-          <p:cNvSpPr txBox="1"/>
-          <p:nvPr/>
-        </p:nvSpPr>
-        <p:spPr>
-          <a:xfrm>
-            <a:off x="2761488" y="2414016"/>
+          <p:cNvPr id="52" name="Text 46"/>
+          <p:cNvSpPr txBox="1"/>
+          <p:nvPr/>
+        </p:nvSpPr>
+        <p:spPr>
+          <a:xfrm>
+            <a:off x="2761488" y="2505456"/>
             <a:ext cx="246888" cy="246888"/>
           </a:xfrm>
           <a:prstGeom prst="rect">
@@ -3382,13 +3476,13 @@
       </p:sp>
       <p:sp>
         <p:nvSpPr>
-          <p:cNvPr id="50" name="Text 44"/>
-          <p:cNvSpPr txBox="1"/>
-          <p:nvPr/>
-        </p:nvSpPr>
-        <p:spPr>
-          <a:xfrm>
-            <a:off x="1801368" y="2770632"/>
+          <p:cNvPr id="53" name="Text 47"/>
+          <p:cNvSpPr txBox="1"/>
+          <p:nvPr/>
+        </p:nvSpPr>
+        <p:spPr>
+          <a:xfrm>
+            <a:off x="1801368" y="2862072"/>
             <a:ext cx="1207008" cy="182880"/>
           </a:xfrm>
           <a:prstGeom prst="rect">
@@ -3405,7 +3499,7 @@
               <a:buNone/>
             </a:pPr>
             <a:r>
-              <a:rPr lang="en-US" sz="830" b="1" dirty="0">
+              <a:rPr lang="en-US" sz="850" b="1" dirty="0">
                 <a:solidFill>
                   <a:srgbClr val="13919B"/>
                 </a:solidFill>
@@ -3415,20 +3509,59 @@
               </a:rPr>
               <a:t>Facts by keypad</a:t>
             </a:r>
-            <a:endParaRPr lang="en-US" sz="830" dirty="0"/>
-          </a:p>
-        </p:txBody>
-      </p:sp>
-      <p:sp>
-        <p:nvSpPr>
-          <p:cNvPr id="51" name="Text 45"/>
-          <p:cNvSpPr txBox="1"/>
-          <p:nvPr/>
-        </p:nvSpPr>
-        <p:spPr>
-          <a:xfrm>
-            <a:off x="1801368" y="2944368"/>
-            <a:ext cx="1207008" cy="402336"/>
+            <a:endParaRPr lang="en-US" sz="850" dirty="0"/>
+          </a:p>
+        </p:txBody>
+      </p:sp>
+      <p:sp>
+        <p:nvSpPr>
+          <p:cNvPr id="54" name="Text 48"/>
+          <p:cNvSpPr txBox="1"/>
+          <p:nvPr/>
+        </p:nvSpPr>
+        <p:spPr>
+          <a:xfrm>
+            <a:off x="1801368" y="3035808"/>
+            <a:ext cx="1207008" cy="128016"/>
+          </a:xfrm>
+          <a:prstGeom prst="rect">
+            <a:avLst/>
+          </a:prstGeom>
+          <a:noFill/>
+          <a:ln/>
+        </p:spPr>
+        <p:txBody>
+          <a:bodyPr wrap="square" lIns="0" tIns="0" rIns="0" bIns="0" rtlCol="0" anchor="ctr"/>
+          <a:lstStyle/>
+          <a:p>
+            <a:pPr indent="0" marL="0">
+              <a:buNone/>
+            </a:pPr>
+            <a:r>
+              <a:rPr lang="en-US" sz="680" b="1" dirty="0">
+                <a:solidFill>
+                  <a:srgbClr val="5B6B7F"/>
+                </a:solidFill>
+                <a:latin typeface="Calibri" pitchFamily="34" charset="0"/>
+                <a:ea typeface="Calibri" pitchFamily="34" charset="-122"/>
+                <a:cs typeface="Calibri" pitchFamily="34" charset="-120"/>
+              </a:rPr>
+              <a:t>so a speech error can't hurt</a:t>
+            </a:r>
+            <a:endParaRPr lang="en-US" sz="680" dirty="0"/>
+          </a:p>
+        </p:txBody>
+      </p:sp>
+      <p:sp>
+        <p:nvSpPr>
+          <p:cNvPr id="55" name="Text 49"/>
+          <p:cNvSpPr txBox="1"/>
+          <p:nvPr/>
+        </p:nvSpPr>
+        <p:spPr>
+          <a:xfrm>
+            <a:off x="1801368" y="3182112"/>
+            <a:ext cx="1207008" cy="274320"/>
           </a:xfrm>
           <a:prstGeom prst="rect">
             <a:avLst/>
@@ -3444,7 +3577,7 @@
               <a:buNone/>
             </a:pPr>
             <a:r>
-              <a:rPr lang="en-US" sz="660" dirty="0">
+              <a:rPr lang="en-US" sz="640" dirty="0">
                 <a:solidFill>
                   <a:srgbClr val="1F2937"/>
                 </a:solidFill>
@@ -3452,26 +3585,26 @@
                 <a:ea typeface="Calibri" pitchFamily="34" charset="-122"/>
                 <a:cs typeface="Calibri" pitchFamily="34" charset="-120"/>
               </a:rPr>
-              <a:t>Age, education, travel distance: he presses keys. A speech error can never change eligibility.</a:t>
-            </a:r>
-            <a:endParaRPr lang="en-US" sz="660" dirty="0"/>
-          </a:p>
-        </p:txBody>
-      </p:sp>
-      <p:sp>
-        <p:nvSpPr>
-          <p:cNvPr id="52" name="Shape 46"/>
+              <a:t>Age, education, travel distance are pressed on keys — eligibility never depends on speech.</a:t>
+            </a:r>
+            <a:endParaRPr lang="en-US" sz="640" dirty="0"/>
+          </a:p>
+        </p:txBody>
+      </p:sp>
+      <p:sp>
+        <p:nvSpPr>
+          <p:cNvPr id="56" name="Shape 50"/>
           <p:cNvSpPr/>
           <p:nvPr/>
         </p:nvSpPr>
         <p:spPr>
           <a:xfrm>
-            <a:off x="3163824" y="2340864"/>
-            <a:ext cx="1371600" cy="1005840"/>
+            <a:off x="3163824" y="2432304"/>
+            <a:ext cx="1371600" cy="1024128"/>
           </a:xfrm>
           <a:prstGeom prst="roundRect">
             <a:avLst>
-              <a:gd name="adj" fmla="val 7273"/>
+              <a:gd name="adj" fmla="val 7143"/>
             </a:avLst>
           </a:prstGeom>
           <a:solidFill>
@@ -3487,13 +3620,13 @@
       </p:sp>
       <p:sp>
         <p:nvSpPr>
-          <p:cNvPr id="53" name="Shape 47"/>
+          <p:cNvPr id="57" name="Shape 51"/>
           <p:cNvSpPr/>
           <p:nvPr/>
         </p:nvSpPr>
         <p:spPr>
           <a:xfrm>
-            <a:off x="3246120" y="2414016"/>
+            <a:off x="3246120" y="2505456"/>
             <a:ext cx="329184" cy="329184"/>
           </a:xfrm>
           <a:prstGeom prst="ellipse">
@@ -3512,7 +3645,7 @@
       </p:sp>
       <p:pic>
         <p:nvPicPr>
-          <p:cNvPr id="54" name="Image 4" descr="preencoded.png">    </p:cNvPr>
+          <p:cNvPr id="58" name="Image 4" descr="preencoded.png">    </p:cNvPr>
           <p:cNvPicPr>
             <a:picLocks noChangeAspect="1"/>
           </p:cNvPicPr>
@@ -3526,7 +3659,7 @@
         </p:blipFill>
         <p:spPr>
           <a:xfrm>
-            <a:off x="3291840" y="2459736"/>
+            <a:off x="3291840" y="2551176"/>
             <a:ext cx="237744" cy="237744"/>
           </a:xfrm>
           <a:prstGeom prst="rect">
@@ -3536,13 +3669,13 @@
       </p:pic>
       <p:sp>
         <p:nvSpPr>
-          <p:cNvPr id="55" name="Shape 48"/>
+          <p:cNvPr id="59" name="Shape 52"/>
           <p:cNvSpPr/>
           <p:nvPr/>
         </p:nvSpPr>
         <p:spPr>
           <a:xfrm>
-            <a:off x="4206240" y="2414016"/>
+            <a:off x="4206240" y="2505456"/>
             <a:ext cx="246888" cy="246888"/>
           </a:xfrm>
           <a:prstGeom prst="ellipse">
@@ -3561,13 +3694,13 @@
       </p:sp>
       <p:sp>
         <p:nvSpPr>
-          <p:cNvPr id="56" name="Text 49"/>
-          <p:cNvSpPr txBox="1"/>
-          <p:nvPr/>
-        </p:nvSpPr>
-        <p:spPr>
-          <a:xfrm>
-            <a:off x="4206240" y="2414016"/>
+          <p:cNvPr id="60" name="Text 53"/>
+          <p:cNvSpPr txBox="1"/>
+          <p:nvPr/>
+        </p:nvSpPr>
+        <p:spPr>
+          <a:xfrm>
+            <a:off x="4206240" y="2505456"/>
             <a:ext cx="246888" cy="246888"/>
           </a:xfrm>
           <a:prstGeom prst="rect">
@@ -3600,13 +3733,13 @@
       </p:sp>
       <p:sp>
         <p:nvSpPr>
-          <p:cNvPr id="57" name="Text 50"/>
-          <p:cNvSpPr txBox="1"/>
-          <p:nvPr/>
-        </p:nvSpPr>
-        <p:spPr>
-          <a:xfrm>
-            <a:off x="3246120" y="2770632"/>
+          <p:cNvPr id="61" name="Text 54"/>
+          <p:cNvSpPr txBox="1"/>
+          <p:nvPr/>
+        </p:nvSpPr>
+        <p:spPr>
+          <a:xfrm>
+            <a:off x="3246120" y="2862072"/>
             <a:ext cx="1207008" cy="182880"/>
           </a:xfrm>
           <a:prstGeom prst="rect">
@@ -3623,7 +3756,7 @@
               <a:buNone/>
             </a:pPr>
             <a:r>
-              <a:rPr lang="en-US" sz="830" b="1" dirty="0">
+              <a:rPr lang="en-US" sz="850" b="1" dirty="0">
                 <a:solidFill>
                   <a:srgbClr val="7A5AF8"/>
                 </a:solidFill>
@@ -3633,20 +3766,59 @@
               </a:rPr>
               <a:t>He talks, AI listens</a:t>
             </a:r>
-            <a:endParaRPr lang="en-US" sz="830" dirty="0"/>
-          </a:p>
-        </p:txBody>
-      </p:sp>
-      <p:sp>
-        <p:nvSpPr>
-          <p:cNvPr id="58" name="Text 51"/>
-          <p:cNvSpPr txBox="1"/>
-          <p:nvPr/>
-        </p:nvSpPr>
-        <p:spPr>
-          <a:xfrm>
-            <a:off x="3246120" y="2944368"/>
-            <a:ext cx="1207008" cy="402336"/>
+            <a:endParaRPr lang="en-US" sz="850" dirty="0"/>
+          </a:p>
+        </p:txBody>
+      </p:sp>
+      <p:sp>
+        <p:nvSpPr>
+          <p:cNvPr id="62" name="Text 55"/>
+          <p:cNvSpPr txBox="1"/>
+          <p:nvPr/>
+        </p:nvSpPr>
+        <p:spPr>
+          <a:xfrm>
+            <a:off x="3246120" y="3035808"/>
+            <a:ext cx="1207008" cy="128016"/>
+          </a:xfrm>
+          <a:prstGeom prst="rect">
+            <a:avLst/>
+          </a:prstGeom>
+          <a:noFill/>
+          <a:ln/>
+        </p:spPr>
+        <p:txBody>
+          <a:bodyPr wrap="square" lIns="0" tIns="0" rIns="0" bIns="0" rtlCol="0" anchor="ctr"/>
+          <a:lstStyle/>
+          <a:p>
+            <a:pPr indent="0" marL="0">
+              <a:buNone/>
+            </a:pPr>
+            <a:r>
+              <a:rPr lang="en-US" sz="680" b="1" dirty="0">
+                <a:solidFill>
+                  <a:srgbClr val="5B6B7F"/>
+                </a:solidFill>
+                <a:latin typeface="Calibri" pitchFamily="34" charset="0"/>
+                <a:ea typeface="Calibri" pitchFamily="34" charset="-122"/>
+                <a:cs typeface="Calibri" pitchFamily="34" charset="-120"/>
+              </a:rPr>
+              <a:t>his job becomes an NCO code</a:t>
+            </a:r>
+            <a:endParaRPr lang="en-US" sz="680" dirty="0"/>
+          </a:p>
+        </p:txBody>
+      </p:sp>
+      <p:sp>
+        <p:nvSpPr>
+          <p:cNvPr id="63" name="Text 56"/>
+          <p:cNvSpPr txBox="1"/>
+          <p:nvPr/>
+        </p:nvSpPr>
+        <p:spPr>
+          <a:xfrm>
+            <a:off x="3246120" y="3182112"/>
+            <a:ext cx="1207008" cy="274320"/>
           </a:xfrm>
           <a:prstGeom prst="rect">
             <a:avLst/>
@@ -3662,7 +3834,7 @@
               <a:buNone/>
             </a:pPr>
             <a:r>
-              <a:rPr lang="en-US" sz="660" dirty="0">
+              <a:rPr lang="en-US" sz="640" dirty="0">
                 <a:solidFill>
                   <a:srgbClr val="1F2937"/>
                 </a:solidFill>
@@ -3670,26 +3842,26 @@
                 <a:ea typeface="Calibri" pitchFamily="34" charset="-122"/>
                 <a:cs typeface="Calibri" pitchFamily="34" charset="-120"/>
               </a:rPr>
-              <a:t>"Aap kya kaam karte ho?" The AI finds his official job (NCO code) and asks about his skills.</a:t>
-            </a:r>
-            <a:endParaRPr lang="en-US" sz="660" dirty="0"/>
-          </a:p>
-        </p:txBody>
-      </p:sp>
-      <p:sp>
-        <p:nvSpPr>
-          <p:cNvPr id="59" name="Shape 52"/>
+              <a:t>"Aap kya kaam karte ho?" The AI finds his official occupation and asks about his skills.</a:t>
+            </a:r>
+            <a:endParaRPr lang="en-US" sz="640" dirty="0"/>
+          </a:p>
+        </p:txBody>
+      </p:sp>
+      <p:sp>
+        <p:nvSpPr>
+          <p:cNvPr id="64" name="Shape 57"/>
           <p:cNvSpPr/>
           <p:nvPr/>
         </p:nvSpPr>
         <p:spPr>
           <a:xfrm>
-            <a:off x="4608576" y="2340864"/>
-            <a:ext cx="1371600" cy="1005840"/>
+            <a:off x="4608576" y="2432304"/>
+            <a:ext cx="1371600" cy="1024128"/>
           </a:xfrm>
           <a:prstGeom prst="roundRect">
             <a:avLst>
-              <a:gd name="adj" fmla="val 7273"/>
+              <a:gd name="adj" fmla="val 7143"/>
             </a:avLst>
           </a:prstGeom>
           <a:solidFill>
@@ -3705,13 +3877,13 @@
       </p:sp>
       <p:sp>
         <p:nvSpPr>
-          <p:cNvPr id="60" name="Shape 53"/>
+          <p:cNvPr id="65" name="Shape 58"/>
           <p:cNvSpPr/>
           <p:nvPr/>
         </p:nvSpPr>
         <p:spPr>
           <a:xfrm>
-            <a:off x="4690872" y="2414016"/>
+            <a:off x="4690872" y="2505456"/>
             <a:ext cx="329184" cy="329184"/>
           </a:xfrm>
           <a:prstGeom prst="ellipse">
@@ -3730,7 +3902,7 @@
       </p:sp>
       <p:pic>
         <p:nvPicPr>
-          <p:cNvPr id="61" name="Image 5" descr="preencoded.png">    </p:cNvPr>
+          <p:cNvPr id="66" name="Image 5" descr="preencoded.png">    </p:cNvPr>
           <p:cNvPicPr>
             <a:picLocks noChangeAspect="1"/>
           </p:cNvPicPr>
@@ -3744,7 +3916,7 @@
         </p:blipFill>
         <p:spPr>
           <a:xfrm>
-            <a:off x="4736592" y="2459736"/>
+            <a:off x="4736592" y="2551176"/>
             <a:ext cx="237744" cy="237744"/>
           </a:xfrm>
           <a:prstGeom prst="rect">
@@ -3754,13 +3926,13 @@
       </p:pic>
       <p:sp>
         <p:nvSpPr>
-          <p:cNvPr id="62" name="Shape 54"/>
+          <p:cNvPr id="67" name="Shape 59"/>
           <p:cNvSpPr/>
           <p:nvPr/>
         </p:nvSpPr>
         <p:spPr>
           <a:xfrm>
-            <a:off x="5650992" y="2414016"/>
+            <a:off x="5650992" y="2505456"/>
             <a:ext cx="246888" cy="246888"/>
           </a:xfrm>
           <a:prstGeom prst="ellipse">
@@ -3779,13 +3951,13 @@
       </p:sp>
       <p:sp>
         <p:nvSpPr>
-          <p:cNvPr id="63" name="Text 55"/>
-          <p:cNvSpPr txBox="1"/>
-          <p:nvPr/>
-        </p:nvSpPr>
-        <p:spPr>
-          <a:xfrm>
-            <a:off x="5650992" y="2414016"/>
+          <p:cNvPr id="68" name="Text 60"/>
+          <p:cNvSpPr txBox="1"/>
+          <p:nvPr/>
+        </p:nvSpPr>
+        <p:spPr>
+          <a:xfrm>
+            <a:off x="5650992" y="2505456"/>
             <a:ext cx="246888" cy="246888"/>
           </a:xfrm>
           <a:prstGeom prst="rect">
@@ -3818,13 +3990,13 @@
       </p:sp>
       <p:sp>
         <p:nvSpPr>
-          <p:cNvPr id="64" name="Text 56"/>
-          <p:cNvSpPr txBox="1"/>
-          <p:nvPr/>
-        </p:nvSpPr>
-        <p:spPr>
-          <a:xfrm>
-            <a:off x="4690872" y="2770632"/>
+          <p:cNvPr id="69" name="Text 61"/>
+          <p:cNvSpPr txBox="1"/>
+          <p:nvPr/>
+        </p:nvSpPr>
+        <p:spPr>
+          <a:xfrm>
+            <a:off x="4690872" y="2862072"/>
             <a:ext cx="1207008" cy="182880"/>
           </a:xfrm>
           <a:prstGeom prst="rect">
@@ -3841,7 +4013,7 @@
               <a:buNone/>
             </a:pPr>
             <a:r>
-              <a:rPr lang="en-US" sz="830" b="1" dirty="0">
+              <a:rPr lang="en-US" sz="850" b="1" dirty="0">
                 <a:solidFill>
                   <a:srgbClr val="D4930D"/>
                 </a:solidFill>
@@ -3851,20 +4023,59 @@
               </a:rPr>
               <a:t>Read back &amp; saved</a:t>
             </a:r>
-            <a:endParaRPr lang="en-US" sz="830" dirty="0"/>
-          </a:p>
-        </p:txBody>
-      </p:sp>
-      <p:sp>
-        <p:nvSpPr>
-          <p:cNvPr id="65" name="Text 57"/>
-          <p:cNvSpPr txBox="1"/>
-          <p:nvPr/>
-        </p:nvSpPr>
-        <p:spPr>
-          <a:xfrm>
-            <a:off x="4690872" y="2944368"/>
-            <a:ext cx="1207008" cy="402336"/>
+            <a:endParaRPr lang="en-US" sz="850" dirty="0"/>
+          </a:p>
+        </p:txBody>
+      </p:sp>
+      <p:sp>
+        <p:nvSpPr>
+          <p:cNvPr id="70" name="Text 62"/>
+          <p:cNvSpPr txBox="1"/>
+          <p:nvPr/>
+        </p:nvSpPr>
+        <p:spPr>
+          <a:xfrm>
+            <a:off x="4690872" y="3035808"/>
+            <a:ext cx="1207008" cy="128016"/>
+          </a:xfrm>
+          <a:prstGeom prst="rect">
+            <a:avLst/>
+          </a:prstGeom>
+          <a:noFill/>
+          <a:ln/>
+        </p:spPr>
+        <p:txBody>
+          <a:bodyPr wrap="square" lIns="0" tIns="0" rIns="0" bIns="0" rtlCol="0" anchor="ctr"/>
+          <a:lstStyle/>
+          <a:p>
+            <a:pPr indent="0" marL="0">
+              <a:buNone/>
+            </a:pPr>
+            <a:r>
+              <a:rPr lang="en-US" sz="680" b="1" dirty="0">
+                <a:solidFill>
+                  <a:srgbClr val="5B6B7F"/>
+                </a:solidFill>
+                <a:latin typeface="Calibri" pitchFamily="34" charset="0"/>
+                <a:ea typeface="Calibri" pitchFamily="34" charset="-122"/>
+                <a:cs typeface="Calibri" pitchFamily="34" charset="-120"/>
+              </a:rPr>
+              <a:t>one clean profile, no paper</a:t>
+            </a:r>
+            <a:endParaRPr lang="en-US" sz="680" dirty="0"/>
+          </a:p>
+        </p:txBody>
+      </p:sp>
+      <p:sp>
+        <p:nvSpPr>
+          <p:cNvPr id="71" name="Text 63"/>
+          <p:cNvSpPr txBox="1"/>
+          <p:nvPr/>
+        </p:nvSpPr>
+        <p:spPr>
+          <a:xfrm>
+            <a:off x="4690872" y="3182112"/>
+            <a:ext cx="1207008" cy="274320"/>
           </a:xfrm>
           <a:prstGeom prst="rect">
             <a:avLst/>
@@ -3880,7 +4091,7 @@
               <a:buNone/>
             </a:pPr>
             <a:r>
-              <a:rPr lang="en-US" sz="660" dirty="0">
+              <a:rPr lang="en-US" sz="640" dirty="0">
                 <a:solidFill>
                   <a:srgbClr val="1F2937"/>
                 </a:solidFill>
@@ -3888,26 +4099,26 @@
                 <a:ea typeface="Calibri" pitchFamily="34" charset="-122"/>
                 <a:cs typeface="Calibri" pitchFamily="34" charset="-120"/>
               </a:rPr>
-              <a:t>Everything is read back; he presses 1 to confirm. Saved as a clean profile — no paper form.</a:t>
-            </a:r>
-            <a:endParaRPr lang="en-US" sz="660" dirty="0"/>
-          </a:p>
-        </p:txBody>
-      </p:sp>
-      <p:sp>
-        <p:nvSpPr>
-          <p:cNvPr id="66" name="Shape 58"/>
+              <a:t>He hears everything back and presses 1 to confirm, 2 to correct.</a:t>
+            </a:r>
+            <a:endParaRPr lang="en-US" sz="640" dirty="0"/>
+          </a:p>
+        </p:txBody>
+      </p:sp>
+      <p:sp>
+        <p:nvSpPr>
+          <p:cNvPr id="72" name="Shape 64"/>
           <p:cNvSpPr/>
           <p:nvPr/>
         </p:nvSpPr>
         <p:spPr>
           <a:xfrm>
-            <a:off x="6053328" y="2340864"/>
-            <a:ext cx="1371600" cy="1005840"/>
+            <a:off x="6053328" y="2432304"/>
+            <a:ext cx="1371600" cy="1024128"/>
           </a:xfrm>
           <a:prstGeom prst="roundRect">
             <a:avLst>
-              <a:gd name="adj" fmla="val 7273"/>
+              <a:gd name="adj" fmla="val 7143"/>
             </a:avLst>
           </a:prstGeom>
           <a:solidFill>
@@ -3923,13 +4134,13 @@
       </p:sp>
       <p:sp>
         <p:nvSpPr>
-          <p:cNvPr id="67" name="Shape 59"/>
+          <p:cNvPr id="73" name="Shape 65"/>
           <p:cNvSpPr/>
           <p:nvPr/>
         </p:nvSpPr>
         <p:spPr>
           <a:xfrm>
-            <a:off x="6135624" y="2414016"/>
+            <a:off x="6135624" y="2505456"/>
             <a:ext cx="329184" cy="329184"/>
           </a:xfrm>
           <a:prstGeom prst="ellipse">
@@ -3948,7 +4159,7 @@
       </p:sp>
       <p:pic>
         <p:nvPicPr>
-          <p:cNvPr id="68" name="Image 6" descr="preencoded.png">    </p:cNvPr>
+          <p:cNvPr id="74" name="Image 6" descr="preencoded.png">    </p:cNvPr>
           <p:cNvPicPr>
             <a:picLocks noChangeAspect="1"/>
           </p:cNvPicPr>
@@ -3962,7 +4173,7 @@
         </p:blipFill>
         <p:spPr>
           <a:xfrm>
-            <a:off x="6181344" y="2459736"/>
+            <a:off x="6181344" y="2551176"/>
             <a:ext cx="237744" cy="237744"/>
           </a:xfrm>
           <a:prstGeom prst="rect">
@@ -3972,13 +4183,13 @@
       </p:pic>
       <p:sp>
         <p:nvSpPr>
-          <p:cNvPr id="69" name="Shape 60"/>
+          <p:cNvPr id="75" name="Shape 66"/>
           <p:cNvSpPr/>
           <p:nvPr/>
         </p:nvSpPr>
         <p:spPr>
           <a:xfrm>
-            <a:off x="7095744" y="2414016"/>
+            <a:off x="7095744" y="2505456"/>
             <a:ext cx="246888" cy="246888"/>
           </a:xfrm>
           <a:prstGeom prst="ellipse">
@@ -3997,13 +4208,13 @@
       </p:sp>
       <p:sp>
         <p:nvSpPr>
-          <p:cNvPr id="70" name="Text 61"/>
-          <p:cNvSpPr txBox="1"/>
-          <p:nvPr/>
-        </p:nvSpPr>
-        <p:spPr>
-          <a:xfrm>
-            <a:off x="7095744" y="2414016"/>
+          <p:cNvPr id="76" name="Text 67"/>
+          <p:cNvSpPr txBox="1"/>
+          <p:nvPr/>
+        </p:nvSpPr>
+        <p:spPr>
+          <a:xfrm>
+            <a:off x="7095744" y="2505456"/>
             <a:ext cx="246888" cy="246888"/>
           </a:xfrm>
           <a:prstGeom prst="rect">
@@ -4036,13 +4247,13 @@
       </p:sp>
       <p:sp>
         <p:nvSpPr>
-          <p:cNvPr id="71" name="Text 62"/>
-          <p:cNvSpPr txBox="1"/>
-          <p:nvPr/>
-        </p:nvSpPr>
-        <p:spPr>
-          <a:xfrm>
-            <a:off x="6135624" y="2770632"/>
+          <p:cNvPr id="77" name="Text 68"/>
+          <p:cNvSpPr txBox="1"/>
+          <p:nvPr/>
+        </p:nvSpPr>
+        <p:spPr>
+          <a:xfrm>
+            <a:off x="6135624" y="2862072"/>
             <a:ext cx="1207008" cy="182880"/>
           </a:xfrm>
           <a:prstGeom prst="rect">
@@ -4059,7 +4270,7 @@
               <a:buNone/>
             </a:pPr>
             <a:r>
-              <a:rPr lang="en-US" sz="830" b="1" dirty="0">
+              <a:rPr lang="en-US" sz="850" b="1" dirty="0">
                 <a:solidFill>
                   <a:srgbClr val="1F9D63"/>
                 </a:solidFill>
@@ -4069,20 +4280,59 @@
               </a:rPr>
               <a:t>1–4 options that fit</a:t>
             </a:r>
-            <a:endParaRPr lang="en-US" sz="830" dirty="0"/>
-          </a:p>
-        </p:txBody>
-      </p:sp>
-      <p:sp>
-        <p:nvSpPr>
-          <p:cNvPr id="72" name="Text 63"/>
-          <p:cNvSpPr txBox="1"/>
-          <p:nvPr/>
-        </p:nvSpPr>
-        <p:spPr>
-          <a:xfrm>
-            <a:off x="6135624" y="2944368"/>
-            <a:ext cx="1207008" cy="402336"/>
+            <a:endParaRPr lang="en-US" sz="850" dirty="0"/>
+          </a:p>
+        </p:txBody>
+      </p:sp>
+      <p:sp>
+        <p:nvSpPr>
+          <p:cNvPr id="78" name="Text 69"/>
+          <p:cNvSpPr txBox="1"/>
+          <p:nvPr/>
+        </p:nvSpPr>
+        <p:spPr>
+          <a:xfrm>
+            <a:off x="6135624" y="3035808"/>
+            <a:ext cx="1207008" cy="128016"/>
+          </a:xfrm>
+          <a:prstGeom prst="rect">
+            <a:avLst/>
+          </a:prstGeom>
+          <a:noFill/>
+          <a:ln/>
+        </p:spPr>
+        <p:txBody>
+          <a:bodyPr wrap="square" lIns="0" tIns="0" rIns="0" bIns="0" rtlCol="0" anchor="ctr"/>
+          <a:lstStyle/>
+          <a:p>
+            <a:pPr indent="0" marL="0">
+              <a:buNone/>
+            </a:pPr>
+            <a:r>
+              <a:rPr lang="en-US" sz="680" b="1" dirty="0">
+                <a:solidFill>
+                  <a:srgbClr val="5B6B7F"/>
+                </a:solidFill>
+                <a:latin typeface="Calibri" pitchFamily="34" charset="0"/>
+                <a:ea typeface="Calibri" pitchFamily="34" charset="-122"/>
+                <a:cs typeface="Calibri" pitchFamily="34" charset="-120"/>
+              </a:rPr>
+              <a:t>every fact checked first</a:t>
+            </a:r>
+            <a:endParaRPr lang="en-US" sz="680" dirty="0"/>
+          </a:p>
+        </p:txBody>
+      </p:sp>
+      <p:sp>
+        <p:nvSpPr>
+          <p:cNvPr id="79" name="Text 70"/>
+          <p:cNvSpPr txBox="1"/>
+          <p:nvPr/>
+        </p:nvSpPr>
+        <p:spPr>
+          <a:xfrm>
+            <a:off x="6135624" y="3182112"/>
+            <a:ext cx="1207008" cy="274320"/>
           </a:xfrm>
           <a:prstGeom prst="rect">
             <a:avLst/>
@@ -4098,7 +4348,7 @@
               <a:buNone/>
             </a:pPr>
             <a:r>
-              <a:rPr lang="en-US" sz="660" dirty="0">
+              <a:rPr lang="en-US" sz="640" dirty="0">
                 <a:solidFill>
                   <a:srgbClr val="1F2937"/>
                 </a:solidFill>
@@ -4106,26 +4356,26 @@
                 <a:ea typeface="Calibri" pitchFamily="34" charset="-122"/>
                 <a:cs typeface="Calibri" pitchFamily="34" charset="-120"/>
               </a:rPr>
-              <a:t>Only courses, schemes or jobs near him that truly fit. Every fact checked. He can ask any doubt.</a:t>
-            </a:r>
-            <a:endParaRPr lang="en-US" sz="660" dirty="0"/>
-          </a:p>
-        </p:txBody>
-      </p:sp>
-      <p:sp>
-        <p:nvSpPr>
-          <p:cNvPr id="73" name="Shape 64"/>
+              <a:t>Only courses, schemes or jobs near him that truly fit. He can ask any doubt.</a:t>
+            </a:r>
+            <a:endParaRPr lang="en-US" sz="640" dirty="0"/>
+          </a:p>
+        </p:txBody>
+      </p:sp>
+      <p:sp>
+        <p:nvSpPr>
+          <p:cNvPr id="80" name="Shape 71"/>
           <p:cNvSpPr/>
           <p:nvPr/>
         </p:nvSpPr>
         <p:spPr>
           <a:xfrm>
-            <a:off x="7498080" y="2340864"/>
-            <a:ext cx="1371600" cy="1005840"/>
+            <a:off x="7498080" y="2432304"/>
+            <a:ext cx="1371600" cy="1024128"/>
           </a:xfrm>
           <a:prstGeom prst="roundRect">
             <a:avLst>
-              <a:gd name="adj" fmla="val 7273"/>
+              <a:gd name="adj" fmla="val 7143"/>
             </a:avLst>
           </a:prstGeom>
           <a:solidFill>
@@ -4141,13 +4391,13 @@
       </p:sp>
       <p:sp>
         <p:nvSpPr>
-          <p:cNvPr id="74" name="Shape 65"/>
+          <p:cNvPr id="81" name="Shape 72"/>
           <p:cNvSpPr/>
           <p:nvPr/>
         </p:nvSpPr>
         <p:spPr>
           <a:xfrm>
-            <a:off x="7580376" y="2414016"/>
+            <a:off x="7580376" y="2505456"/>
             <a:ext cx="329184" cy="329184"/>
           </a:xfrm>
           <a:prstGeom prst="ellipse">
@@ -4166,7 +4416,7 @@
       </p:sp>
       <p:pic>
         <p:nvPicPr>
-          <p:cNvPr id="75" name="Image 7" descr="preencoded.png">    </p:cNvPr>
+          <p:cNvPr id="82" name="Image 7" descr="preencoded.png">    </p:cNvPr>
           <p:cNvPicPr>
             <a:picLocks noChangeAspect="1"/>
           </p:cNvPicPr>
@@ -4180,7 +4430,7 @@
         </p:blipFill>
         <p:spPr>
           <a:xfrm>
-            <a:off x="7626096" y="2459736"/>
+            <a:off x="7626096" y="2551176"/>
             <a:ext cx="237744" cy="237744"/>
           </a:xfrm>
           <a:prstGeom prst="rect">
@@ -4190,13 +4440,13 @@
       </p:pic>
       <p:sp>
         <p:nvSpPr>
-          <p:cNvPr id="76" name="Shape 66"/>
+          <p:cNvPr id="83" name="Shape 73"/>
           <p:cNvSpPr/>
           <p:nvPr/>
         </p:nvSpPr>
         <p:spPr>
           <a:xfrm>
-            <a:off x="8540496" y="2414016"/>
+            <a:off x="8540496" y="2505456"/>
             <a:ext cx="246888" cy="246888"/>
           </a:xfrm>
           <a:prstGeom prst="ellipse">
@@ -4215,13 +4465,13 @@
       </p:sp>
       <p:sp>
         <p:nvSpPr>
-          <p:cNvPr id="77" name="Text 67"/>
-          <p:cNvSpPr txBox="1"/>
-          <p:nvPr/>
-        </p:nvSpPr>
-        <p:spPr>
-          <a:xfrm>
-            <a:off x="8540496" y="2414016"/>
+          <p:cNvPr id="84" name="Text 74"/>
+          <p:cNvSpPr txBox="1"/>
+          <p:nvPr/>
+        </p:nvSpPr>
+        <p:spPr>
+          <a:xfrm>
+            <a:off x="8540496" y="2505456"/>
             <a:ext cx="246888" cy="246888"/>
           </a:xfrm>
           <a:prstGeom prst="rect">
@@ -4254,13 +4504,13 @@
       </p:sp>
       <p:sp>
         <p:nvSpPr>
-          <p:cNvPr id="78" name="Text 68"/>
-          <p:cNvSpPr txBox="1"/>
-          <p:nvPr/>
-        </p:nvSpPr>
-        <p:spPr>
-          <a:xfrm>
-            <a:off x="7580376" y="2770632"/>
+          <p:cNvPr id="85" name="Text 75"/>
+          <p:cNvSpPr txBox="1"/>
+          <p:nvPr/>
+        </p:nvSpPr>
+        <p:spPr>
+          <a:xfrm>
+            <a:off x="7580376" y="2862072"/>
             <a:ext cx="1207008" cy="182880"/>
           </a:xfrm>
           <a:prstGeom prst="rect">
@@ -4277,7 +4527,7 @@
               <a:buNone/>
             </a:pPr>
             <a:r>
-              <a:rPr lang="en-US" sz="830" b="1" dirty="0">
+              <a:rPr lang="en-US" sz="850" b="1" dirty="0">
                 <a:solidFill>
                   <a:srgbClr val="EF8A22"/>
                 </a:solidFill>
@@ -4287,20 +4537,59 @@
               </a:rPr>
               <a:t>Apply &amp; follow-up</a:t>
             </a:r>
-            <a:endParaRPr lang="en-US" sz="830" dirty="0"/>
-          </a:p>
-        </p:txBody>
-      </p:sp>
-      <p:sp>
-        <p:nvSpPr>
-          <p:cNvPr id="79" name="Text 69"/>
-          <p:cNvSpPr txBox="1"/>
-          <p:nvPr/>
-        </p:nvSpPr>
-        <p:spPr>
-          <a:xfrm>
-            <a:off x="7580376" y="2944368"/>
-            <a:ext cx="1207008" cy="402336"/>
+            <a:endParaRPr lang="en-US" sz="850" dirty="0"/>
+          </a:p>
+        </p:txBody>
+      </p:sp>
+      <p:sp>
+        <p:nvSpPr>
+          <p:cNvPr id="86" name="Text 76"/>
+          <p:cNvSpPr txBox="1"/>
+          <p:nvPr/>
+        </p:nvSpPr>
+        <p:spPr>
+          <a:xfrm>
+            <a:off x="7580376" y="3035808"/>
+            <a:ext cx="1207008" cy="128016"/>
+          </a:xfrm>
+          <a:prstGeom prst="rect">
+            <a:avLst/>
+          </a:prstGeom>
+          <a:noFill/>
+          <a:ln/>
+        </p:spPr>
+        <p:txBody>
+          <a:bodyPr wrap="square" lIns="0" tIns="0" rIns="0" bIns="0" rtlCol="0" anchor="ctr"/>
+          <a:lstStyle/>
+          <a:p>
+            <a:pPr indent="0" marL="0">
+              <a:buNone/>
+            </a:pPr>
+            <a:r>
+              <a:rPr lang="en-US" sz="680" b="1" dirty="0">
+                <a:solidFill>
+                  <a:srgbClr val="5B6B7F"/>
+                </a:solidFill>
+                <a:latin typeface="Calibri" pitchFamily="34" charset="0"/>
+                <a:ea typeface="Calibri" pitchFamily="34" charset="-122"/>
+                <a:cs typeface="Calibri" pitchFamily="34" charset="-120"/>
+              </a:rPr>
+              <a:t>CSC → officer → 3 calls</a:t>
+            </a:r>
+            <a:endParaRPr lang="en-US" sz="680" dirty="0"/>
+          </a:p>
+        </p:txBody>
+      </p:sp>
+      <p:sp>
+        <p:nvSpPr>
+          <p:cNvPr id="87" name="Text 77"/>
+          <p:cNvSpPr txBox="1"/>
+          <p:nvPr/>
+        </p:nvSpPr>
+        <p:spPr>
+          <a:xfrm>
+            <a:off x="7580376" y="3182112"/>
+            <a:ext cx="1207008" cy="274320"/>
           </a:xfrm>
           <a:prstGeom prst="rect">
             <a:avLst/>
@@ -4316,7 +4605,7 @@
               <a:buNone/>
             </a:pPr>
             <a:r>
-              <a:rPr lang="en-US" sz="660" dirty="0">
+              <a:rPr lang="en-US" sz="640" dirty="0">
                 <a:solidFill>
                   <a:srgbClr val="1F2937"/>
                 </a:solidFill>
@@ -4326,29 +4615,29 @@
               </a:rPr>
               <a:t>SMS with Case ID + nearest CSC; officer approves in the AJAY app; calls at 1, 3 and 6 months.</a:t>
             </a:r>
-            <a:endParaRPr lang="en-US" sz="660" dirty="0"/>
-          </a:p>
-        </p:txBody>
-      </p:sp>
-      <p:sp>
-        <p:nvSpPr>
-          <p:cNvPr id="80" name="Text 70"/>
-          <p:cNvSpPr txBox="1"/>
-          <p:nvPr/>
-        </p:nvSpPr>
-        <p:spPr>
-          <a:xfrm>
-            <a:off x="274320" y="3419856"/>
-            <a:ext cx="5486400" cy="182880"/>
-          </a:xfrm>
-          <a:prstGeom prst="rect">
-            <a:avLst/>
-          </a:prstGeom>
-          <a:noFill/>
-          <a:ln/>
-        </p:spPr>
-        <p:txBody>
-          <a:bodyPr wrap="square" lIns="0" tIns="0" rIns="0" bIns="0" rtlCol="0" anchor="t"/>
+            <a:endParaRPr lang="en-US" sz="640" dirty="0"/>
+          </a:p>
+        </p:txBody>
+      </p:sp>
+      <p:sp>
+        <p:nvSpPr>
+          <p:cNvPr id="88" name="Text 78"/>
+          <p:cNvSpPr txBox="1"/>
+          <p:nvPr/>
+        </p:nvSpPr>
+        <p:spPr>
+          <a:xfrm>
+            <a:off x="274320" y="3529584"/>
+            <a:ext cx="6400800" cy="182880"/>
+          </a:xfrm>
+          <a:prstGeom prst="rect">
+            <a:avLst/>
+          </a:prstGeom>
+          <a:noFill/>
+          <a:ln/>
+        </p:spPr>
+        <p:txBody>
+          <a:bodyPr wrap="square" lIns="0" tIns="0" rIns="0" bIns="0" rtlCol="0" anchor="ctr"/>
           <a:lstStyle/>
           <a:p>
             <a:pPr indent="0" marL="0">
@@ -4363,7 +4652,18 @@
                 <a:ea typeface="Calibri" pitchFamily="34" charset="-122"/>
                 <a:cs typeface="Calibri" pitchFamily="34" charset="-120"/>
               </a:rPr>
-              <a:t>WHAT MAKES IT DIFFERENT</a:t>
+              <a:t>WHAT MAKES IT DIFFERENT  </a:t>
+            </a:r>
+            <a:r>
+              <a:rPr lang="en-US" sz="750" i="1" dirty="0">
+                <a:solidFill>
+                  <a:srgbClr val="6B7280"/>
+                </a:solidFill>
+                <a:latin typeface="Calibri" pitchFamily="34" charset="0"/>
+                <a:ea typeface="Calibri" pitchFamily="34" charset="-122"/>
+                <a:cs typeface="Calibri" pitchFamily="34" charset="-120"/>
+              </a:rPr>
+              <a:t>six things a paper form can never do</a:t>
             </a:r>
             <a:endParaRPr lang="en-US" sz="850" dirty="0"/>
           </a:p>
@@ -4371,18 +4671,18 @@
       </p:sp>
       <p:sp>
         <p:nvSpPr>
-          <p:cNvPr id="81" name="Shape 71"/>
+          <p:cNvPr id="89" name="Shape 79"/>
           <p:cNvSpPr/>
           <p:nvPr/>
         </p:nvSpPr>
         <p:spPr>
           <a:xfrm>
-            <a:off x="274320" y="3602736"/>
-            <a:ext cx="1371600" cy="969264"/>
+            <a:off x="274320" y="3730752"/>
+            <a:ext cx="1371600" cy="914400"/>
           </a:xfrm>
           <a:prstGeom prst="roundRect">
             <a:avLst>
-              <a:gd name="adj" fmla="val 7547"/>
+              <a:gd name="adj" fmla="val 8000"/>
             </a:avLst>
           </a:prstGeom>
           <a:solidFill>
@@ -4398,14 +4698,14 @@
       </p:sp>
       <p:sp>
         <p:nvSpPr>
-          <p:cNvPr id="82" name="Shape 72"/>
+          <p:cNvPr id="90" name="Shape 80"/>
           <p:cNvSpPr/>
           <p:nvPr/>
         </p:nvSpPr>
         <p:spPr>
           <a:xfrm>
-            <a:off x="356616" y="3685032"/>
-            <a:ext cx="292608" cy="292608"/>
+            <a:off x="356616" y="3813048"/>
+            <a:ext cx="274320" cy="274320"/>
           </a:xfrm>
           <a:prstGeom prst="roundRect">
             <a:avLst>
@@ -4425,7 +4725,7 @@
       </p:sp>
       <p:pic>
         <p:nvPicPr>
-          <p:cNvPr id="83" name="Image 8" descr="preencoded.png">    </p:cNvPr>
+          <p:cNvPr id="91" name="Image 8" descr="preencoded.png">    </p:cNvPr>
           <p:cNvPicPr>
             <a:picLocks noChangeAspect="1"/>
           </p:cNvPicPr>
@@ -4439,8 +4739,8 @@
         </p:blipFill>
         <p:spPr>
           <a:xfrm>
-            <a:off x="400507" y="3728923"/>
-            <a:ext cx="204826" cy="204826"/>
+            <a:off x="397764" y="3854196"/>
+            <a:ext cx="192024" cy="192024"/>
           </a:xfrm>
           <a:prstGeom prst="rect">
             <a:avLst/>
@@ -4449,14 +4749,14 @@
       </p:pic>
       <p:sp>
         <p:nvSpPr>
-          <p:cNvPr id="84" name="Text 73"/>
-          <p:cNvSpPr txBox="1"/>
-          <p:nvPr/>
-        </p:nvSpPr>
-        <p:spPr>
-          <a:xfrm>
-            <a:off x="713232" y="3675888"/>
-            <a:ext cx="877824" cy="310896"/>
+          <p:cNvPr id="92" name="Text 81"/>
+          <p:cNvSpPr txBox="1"/>
+          <p:nvPr/>
+        </p:nvSpPr>
+        <p:spPr>
+          <a:xfrm>
+            <a:off x="694944" y="3803904"/>
+            <a:ext cx="896112" cy="292608"/>
           </a:xfrm>
           <a:prstGeom prst="rect">
             <a:avLst/>
@@ -4488,14 +4788,53 @@
       </p:sp>
       <p:sp>
         <p:nvSpPr>
-          <p:cNvPr id="85" name="Text 74"/>
-          <p:cNvSpPr txBox="1"/>
-          <p:nvPr/>
-        </p:nvSpPr>
-        <p:spPr>
-          <a:xfrm>
-            <a:off x="356616" y="4041648"/>
-            <a:ext cx="1207008" cy="512064"/>
+          <p:cNvPr id="93" name="Text 82"/>
+          <p:cNvSpPr txBox="1"/>
+          <p:nvPr/>
+        </p:nvSpPr>
+        <p:spPr>
+          <a:xfrm>
+            <a:off x="356616" y="4142232"/>
+            <a:ext cx="1207008" cy="146304"/>
+          </a:xfrm>
+          <a:prstGeom prst="rect">
+            <a:avLst/>
+          </a:prstGeom>
+          <a:noFill/>
+          <a:ln/>
+        </p:spPr>
+        <p:txBody>
+          <a:bodyPr wrap="square" lIns="0" tIns="0" rIns="0" bIns="0" rtlCol="0" anchor="ctr"/>
+          <a:lstStyle/>
+          <a:p>
+            <a:pPr indent="0" marL="0">
+              <a:buNone/>
+            </a:pPr>
+            <a:r>
+              <a:rPr lang="en-US" sz="660" b="1" dirty="0">
+                <a:solidFill>
+                  <a:srgbClr val="5B6B7F"/>
+                </a:solidFill>
+                <a:latin typeface="Calibri" pitchFamily="34" charset="0"/>
+                <a:ea typeface="Calibri" pitchFamily="34" charset="-122"/>
+                <a:cs typeface="Calibri" pitchFamily="34" charset="-120"/>
+              </a:rPr>
+              <a:t>each depends on the last answer</a:t>
+            </a:r>
+            <a:endParaRPr lang="en-US" sz="660" dirty="0"/>
+          </a:p>
+        </p:txBody>
+      </p:sp>
+      <p:sp>
+        <p:nvSpPr>
+          <p:cNvPr id="94" name="Text 83"/>
+          <p:cNvSpPr txBox="1"/>
+          <p:nvPr/>
+        </p:nvSpPr>
+        <p:spPr>
+          <a:xfrm>
+            <a:off x="356616" y="4306824"/>
+            <a:ext cx="1207008" cy="329184"/>
           </a:xfrm>
           <a:prstGeom prst="rect">
             <a:avLst/>
@@ -4511,7 +4850,7 @@
               <a:buNone/>
             </a:pPr>
             <a:r>
-              <a:rPr lang="en-US" sz="680" dirty="0">
+              <a:rPr lang="en-US" sz="640" dirty="0">
                 <a:solidFill>
                   <a:srgbClr val="1F2937"/>
                 </a:solidFill>
@@ -4519,26 +4858,26 @@
                 <a:ea typeface="Calibri" pitchFamily="34" charset="-122"/>
                 <a:cs typeface="Calibri" pitchFamily="34" charset="-120"/>
               </a:rPr>
-              <a:t>Next question depends on his last answer: bike mechanic → engine, tyres, oil.</a:t>
-            </a:r>
-            <a:endParaRPr lang="en-US" sz="680" dirty="0"/>
-          </a:p>
-        </p:txBody>
-      </p:sp>
-      <p:sp>
-        <p:nvSpPr>
-          <p:cNvPr id="86" name="Shape 75"/>
+              <a:t>Bike mechanic → engine, tyres, oil — not a generic form.</a:t>
+            </a:r>
+            <a:endParaRPr lang="en-US" sz="640" dirty="0"/>
+          </a:p>
+        </p:txBody>
+      </p:sp>
+      <p:sp>
+        <p:nvSpPr>
+          <p:cNvPr id="95" name="Shape 84"/>
           <p:cNvSpPr/>
           <p:nvPr/>
         </p:nvSpPr>
         <p:spPr>
           <a:xfrm>
-            <a:off x="1719072" y="3602736"/>
-            <a:ext cx="1371600" cy="969264"/>
+            <a:off x="1719072" y="3730752"/>
+            <a:ext cx="1371600" cy="914400"/>
           </a:xfrm>
           <a:prstGeom prst="roundRect">
             <a:avLst>
-              <a:gd name="adj" fmla="val 7547"/>
+              <a:gd name="adj" fmla="val 8000"/>
             </a:avLst>
           </a:prstGeom>
           <a:solidFill>
@@ -4554,14 +4893,14 @@
       </p:sp>
       <p:sp>
         <p:nvSpPr>
-          <p:cNvPr id="87" name="Shape 76"/>
+          <p:cNvPr id="96" name="Shape 85"/>
           <p:cNvSpPr/>
           <p:nvPr/>
         </p:nvSpPr>
         <p:spPr>
           <a:xfrm>
-            <a:off x="1801368" y="3685032"/>
-            <a:ext cx="292608" cy="292608"/>
+            <a:off x="1801368" y="3813048"/>
+            <a:ext cx="274320" cy="274320"/>
           </a:xfrm>
           <a:prstGeom prst="roundRect">
             <a:avLst>
@@ -4581,7 +4920,7 @@
       </p:sp>
       <p:pic>
         <p:nvPicPr>
-          <p:cNvPr id="88" name="Image 9" descr="preencoded.png">    </p:cNvPr>
+          <p:cNvPr id="97" name="Image 9" descr="preencoded.png">    </p:cNvPr>
           <p:cNvPicPr>
             <a:picLocks noChangeAspect="1"/>
           </p:cNvPicPr>
@@ -4595,8 +4934,8 @@
         </p:blipFill>
         <p:spPr>
           <a:xfrm>
-            <a:off x="1845259" y="3728923"/>
-            <a:ext cx="204826" cy="204826"/>
+            <a:off x="1842516" y="3854196"/>
+            <a:ext cx="192024" cy="192024"/>
           </a:xfrm>
           <a:prstGeom prst="rect">
             <a:avLst/>
@@ -4605,14 +4944,14 @@
       </p:pic>
       <p:sp>
         <p:nvSpPr>
-          <p:cNvPr id="89" name="Text 77"/>
-          <p:cNvSpPr txBox="1"/>
-          <p:nvPr/>
-        </p:nvSpPr>
-        <p:spPr>
-          <a:xfrm>
-            <a:off x="2157984" y="3675888"/>
-            <a:ext cx="877824" cy="310896"/>
+          <p:cNvPr id="98" name="Text 86"/>
+          <p:cNvSpPr txBox="1"/>
+          <p:nvPr/>
+        </p:nvSpPr>
+        <p:spPr>
+          <a:xfrm>
+            <a:off x="2139696" y="3803904"/>
+            <a:ext cx="896112" cy="292608"/>
           </a:xfrm>
           <a:prstGeom prst="rect">
             <a:avLst/>
@@ -4644,14 +4983,53 @@
       </p:sp>
       <p:sp>
         <p:nvSpPr>
-          <p:cNvPr id="90" name="Text 78"/>
-          <p:cNvSpPr txBox="1"/>
-          <p:nvPr/>
-        </p:nvSpPr>
-        <p:spPr>
-          <a:xfrm>
-            <a:off x="1801368" y="4041648"/>
-            <a:ext cx="1207008" cy="512064"/>
+          <p:cNvPr id="99" name="Text 87"/>
+          <p:cNvSpPr txBox="1"/>
+          <p:nvPr/>
+        </p:nvSpPr>
+        <p:spPr>
+          <a:xfrm>
+            <a:off x="1801368" y="4142232"/>
+            <a:ext cx="1207008" cy="146304"/>
+          </a:xfrm>
+          <a:prstGeom prst="rect">
+            <a:avLst/>
+          </a:prstGeom>
+          <a:noFill/>
+          <a:ln/>
+        </p:spPr>
+        <p:txBody>
+          <a:bodyPr wrap="square" lIns="0" tIns="0" rIns="0" bIns="0" rtlCol="0" anchor="ctr"/>
+          <a:lstStyle/>
+          <a:p>
+            <a:pPr indent="0" marL="0">
+              <a:buNone/>
+            </a:pPr>
+            <a:r>
+              <a:rPr lang="en-US" sz="660" b="1" dirty="0">
+                <a:solidFill>
+                  <a:srgbClr val="5B6B7F"/>
+                </a:solidFill>
+                <a:latin typeface="Calibri" pitchFamily="34" charset="0"/>
+                <a:ea typeface="Calibri" pitchFamily="34" charset="-122"/>
+                <a:cs typeface="Calibri" pitchFamily="34" charset="-120"/>
+              </a:rPr>
+              <a:t>officers only review and approve</a:t>
+            </a:r>
+            <a:endParaRPr lang="en-US" sz="660" dirty="0"/>
+          </a:p>
+        </p:txBody>
+      </p:sp>
+      <p:sp>
+        <p:nvSpPr>
+          <p:cNvPr id="100" name="Text 88"/>
+          <p:cNvSpPr txBox="1"/>
+          <p:nvPr/>
+        </p:nvSpPr>
+        <p:spPr>
+          <a:xfrm>
+            <a:off x="1801368" y="4306824"/>
+            <a:ext cx="1207008" cy="329184"/>
           </a:xfrm>
           <a:prstGeom prst="rect">
             <a:avLst/>
@@ -4667,7 +5045,7 @@
               <a:buNone/>
             </a:pPr>
             <a:r>
-              <a:rPr lang="en-US" sz="680" dirty="0">
+              <a:rPr lang="en-US" sz="640" dirty="0">
                 <a:solidFill>
                   <a:srgbClr val="1F2937"/>
                 </a:solidFill>
@@ -4675,26 +5053,26 @@
                 <a:ea typeface="Calibri" pitchFamily="34" charset="-122"/>
                 <a:cs typeface="Calibri" pitchFamily="34" charset="-120"/>
               </a:rPr>
-              <a:t>AI fills the full profile table in the proper format. Officers only review and approve.</a:t>
-            </a:r>
-            <a:endParaRPr lang="en-US" sz="680" dirty="0"/>
-          </a:p>
-        </p:txBody>
-      </p:sp>
-      <p:sp>
-        <p:nvSpPr>
-          <p:cNvPr id="91" name="Shape 79"/>
+              <a:t>The AI fills the full profile table in the proper format.</a:t>
+            </a:r>
+            <a:endParaRPr lang="en-US" sz="640" dirty="0"/>
+          </a:p>
+        </p:txBody>
+      </p:sp>
+      <p:sp>
+        <p:nvSpPr>
+          <p:cNvPr id="101" name="Shape 89"/>
           <p:cNvSpPr/>
           <p:nvPr/>
         </p:nvSpPr>
         <p:spPr>
           <a:xfrm>
-            <a:off x="3163824" y="3602736"/>
-            <a:ext cx="1371600" cy="969264"/>
+            <a:off x="3163824" y="3730752"/>
+            <a:ext cx="1371600" cy="914400"/>
           </a:xfrm>
           <a:prstGeom prst="roundRect">
             <a:avLst>
-              <a:gd name="adj" fmla="val 7547"/>
+              <a:gd name="adj" fmla="val 8000"/>
             </a:avLst>
           </a:prstGeom>
           <a:solidFill>
@@ -4710,14 +5088,14 @@
       </p:sp>
       <p:sp>
         <p:nvSpPr>
-          <p:cNvPr id="92" name="Shape 80"/>
+          <p:cNvPr id="102" name="Shape 90"/>
           <p:cNvSpPr/>
           <p:nvPr/>
         </p:nvSpPr>
         <p:spPr>
           <a:xfrm>
-            <a:off x="3246120" y="3685032"/>
-            <a:ext cx="292608" cy="292608"/>
+            <a:off x="3246120" y="3813048"/>
+            <a:ext cx="274320" cy="274320"/>
           </a:xfrm>
           <a:prstGeom prst="roundRect">
             <a:avLst>
@@ -4737,7 +5115,7 @@
       </p:sp>
       <p:pic>
         <p:nvPicPr>
-          <p:cNvPr id="93" name="Image 10" descr="preencoded.png">    </p:cNvPr>
+          <p:cNvPr id="103" name="Image 10" descr="preencoded.png">    </p:cNvPr>
           <p:cNvPicPr>
             <a:picLocks noChangeAspect="1"/>
           </p:cNvPicPr>
@@ -4751,8 +5129,8 @@
         </p:blipFill>
         <p:spPr>
           <a:xfrm>
-            <a:off x="3290011" y="3728923"/>
-            <a:ext cx="204826" cy="204826"/>
+            <a:off x="3287268" y="3854196"/>
+            <a:ext cx="192024" cy="192024"/>
           </a:xfrm>
           <a:prstGeom prst="rect">
             <a:avLst/>
@@ -4761,14 +5139,14 @@
       </p:pic>
       <p:sp>
         <p:nvSpPr>
-          <p:cNvPr id="94" name="Text 81"/>
-          <p:cNvSpPr txBox="1"/>
-          <p:nvPr/>
-        </p:nvSpPr>
-        <p:spPr>
-          <a:xfrm>
-            <a:off x="3602736" y="3675888"/>
-            <a:ext cx="877824" cy="310896"/>
+          <p:cNvPr id="104" name="Text 91"/>
+          <p:cNvSpPr txBox="1"/>
+          <p:nvPr/>
+        </p:nvSpPr>
+        <p:spPr>
+          <a:xfrm>
+            <a:off x="3584448" y="3803904"/>
+            <a:ext cx="896112" cy="292608"/>
           </a:xfrm>
           <a:prstGeom prst="rect">
             <a:avLst/>
@@ -4800,14 +5178,53 @@
       </p:sp>
       <p:sp>
         <p:nvSpPr>
-          <p:cNvPr id="95" name="Text 82"/>
-          <p:cNvSpPr txBox="1"/>
-          <p:nvPr/>
-        </p:nvSpPr>
-        <p:spPr>
-          <a:xfrm>
-            <a:off x="3246120" y="4041648"/>
-            <a:ext cx="1207008" cy="512064"/>
+          <p:cNvPr id="105" name="Text 92"/>
+          <p:cNvSpPr txBox="1"/>
+          <p:nvPr/>
+        </p:nvSpPr>
+        <p:spPr>
+          <a:xfrm>
+            <a:off x="3246120" y="4142232"/>
+            <a:ext cx="1207008" cy="146304"/>
+          </a:xfrm>
+          <a:prstGeom prst="rect">
+            <a:avLst/>
+          </a:prstGeom>
+          <a:noFill/>
+          <a:ln/>
+        </p:spPr>
+        <p:txBody>
+          <a:bodyPr wrap="square" lIns="0" tIns="0" rIns="0" bIns="0" rtlCol="0" anchor="ctr"/>
+          <a:lstStyle/>
+          <a:p>
+            <a:pPr indent="0" marL="0">
+              <a:buNone/>
+            </a:pPr>
+            <a:r>
+              <a:rPr lang="en-US" sz="660" b="1" dirty="0">
+                <a:solidFill>
+                  <a:srgbClr val="5B6B7F"/>
+                </a:solidFill>
+                <a:latin typeface="Calibri" pitchFamily="34" charset="0"/>
+                <a:ea typeface="Calibri" pitchFamily="34" charset="-122"/>
+                <a:cs typeface="Calibri" pitchFamily="34" charset="-120"/>
+              </a:rPr>
+              <a:t>nothing invented, ever</a:t>
+            </a:r>
+            <a:endParaRPr lang="en-US" sz="660" dirty="0"/>
+          </a:p>
+        </p:txBody>
+      </p:sp>
+      <p:sp>
+        <p:nvSpPr>
+          <p:cNvPr id="106" name="Text 93"/>
+          <p:cNvSpPr txBox="1"/>
+          <p:nvPr/>
+        </p:nvSpPr>
+        <p:spPr>
+          <a:xfrm>
+            <a:off x="3246120" y="4306824"/>
+            <a:ext cx="1207008" cy="329184"/>
           </a:xfrm>
           <a:prstGeom prst="rect">
             <a:avLst/>
@@ -4823,7 +5240,7 @@
               <a:buNone/>
             </a:pPr>
             <a:r>
-              <a:rPr lang="en-US" sz="680" dirty="0">
+              <a:rPr lang="en-US" sz="640" dirty="0">
                 <a:solidFill>
                   <a:srgbClr val="1F2937"/>
                 </a:solidFill>
@@ -4831,26 +5248,26 @@
                 <a:ea typeface="Calibri" pitchFamily="34" charset="-122"/>
                 <a:cs typeface="Calibri" pitchFamily="34" charset="-120"/>
               </a:rPr>
-              <a:t>Answers come only from loaded data: rules, NQR courses, NCO codes, centres. Nothing invented.</a:t>
-            </a:r>
-            <a:endParaRPr lang="en-US" sz="680" dirty="0"/>
-          </a:p>
-        </p:txBody>
-      </p:sp>
-      <p:sp>
-        <p:nvSpPr>
-          <p:cNvPr id="96" name="Shape 83"/>
+              <a:t>Rules, NQR courses, NCO codes, centres — loaded by us, never the internet.</a:t>
+            </a:r>
+            <a:endParaRPr lang="en-US" sz="640" dirty="0"/>
+          </a:p>
+        </p:txBody>
+      </p:sp>
+      <p:sp>
+        <p:nvSpPr>
+          <p:cNvPr id="107" name="Shape 94"/>
           <p:cNvSpPr/>
           <p:nvPr/>
         </p:nvSpPr>
         <p:spPr>
           <a:xfrm>
-            <a:off x="4608576" y="3602736"/>
-            <a:ext cx="1371600" cy="969264"/>
+            <a:off x="4608576" y="3730752"/>
+            <a:ext cx="1371600" cy="914400"/>
           </a:xfrm>
           <a:prstGeom prst="roundRect">
             <a:avLst>
-              <a:gd name="adj" fmla="val 7547"/>
+              <a:gd name="adj" fmla="val 8000"/>
             </a:avLst>
           </a:prstGeom>
           <a:solidFill>
@@ -4866,14 +5283,14 @@
       </p:sp>
       <p:sp>
         <p:nvSpPr>
-          <p:cNvPr id="97" name="Shape 84"/>
+          <p:cNvPr id="108" name="Shape 95"/>
           <p:cNvSpPr/>
           <p:nvPr/>
         </p:nvSpPr>
         <p:spPr>
           <a:xfrm>
-            <a:off x="4690872" y="3685032"/>
-            <a:ext cx="292608" cy="292608"/>
+            <a:off x="4690872" y="3813048"/>
+            <a:ext cx="274320" cy="274320"/>
           </a:xfrm>
           <a:prstGeom prst="roundRect">
             <a:avLst>
@@ -4893,7 +5310,7 @@
       </p:sp>
       <p:pic>
         <p:nvPicPr>
-          <p:cNvPr id="98" name="Image 11" descr="preencoded.png">    </p:cNvPr>
+          <p:cNvPr id="109" name="Image 11" descr="preencoded.png">    </p:cNvPr>
           <p:cNvPicPr>
             <a:picLocks noChangeAspect="1"/>
           </p:cNvPicPr>
@@ -4907,8 +5324,8 @@
         </p:blipFill>
         <p:spPr>
           <a:xfrm>
-            <a:off x="4734763" y="3728923"/>
-            <a:ext cx="204826" cy="204826"/>
+            <a:off x="4732020" y="3854196"/>
+            <a:ext cx="192024" cy="192024"/>
           </a:xfrm>
           <a:prstGeom prst="rect">
             <a:avLst/>
@@ -4917,14 +5334,14 @@
       </p:pic>
       <p:sp>
         <p:nvSpPr>
-          <p:cNvPr id="99" name="Text 85"/>
-          <p:cNvSpPr txBox="1"/>
-          <p:nvPr/>
-        </p:nvSpPr>
-        <p:spPr>
-          <a:xfrm>
-            <a:off x="5047488" y="3675888"/>
-            <a:ext cx="877824" cy="310896"/>
+          <p:cNvPr id="110" name="Text 96"/>
+          <p:cNvSpPr txBox="1"/>
+          <p:nvPr/>
+        </p:nvSpPr>
+        <p:spPr>
+          <a:xfrm>
+            <a:off x="5029200" y="3803904"/>
+            <a:ext cx="896112" cy="292608"/>
           </a:xfrm>
           <a:prstGeom prst="rect">
             <a:avLst/>
@@ -4956,14 +5373,53 @@
       </p:sp>
       <p:sp>
         <p:nvSpPr>
-          <p:cNvPr id="100" name="Text 86"/>
-          <p:cNvSpPr txBox="1"/>
-          <p:nvPr/>
-        </p:nvSpPr>
-        <p:spPr>
-          <a:xfrm>
-            <a:off x="4690872" y="4041648"/>
-            <a:ext cx="1207008" cy="512064"/>
+          <p:cNvPr id="111" name="Text 97"/>
+          <p:cNvSpPr txBox="1"/>
+          <p:nvPr/>
+        </p:nvSpPr>
+        <p:spPr>
+          <a:xfrm>
+            <a:off x="4690872" y="4142232"/>
+            <a:ext cx="1207008" cy="146304"/>
+          </a:xfrm>
+          <a:prstGeom prst="rect">
+            <a:avLst/>
+          </a:prstGeom>
+          <a:noFill/>
+          <a:ln/>
+        </p:spPr>
+        <p:txBody>
+          <a:bodyPr wrap="square" lIns="0" tIns="0" rIns="0" bIns="0" rtlCol="0" anchor="ctr"/>
+          <a:lstStyle/>
+          <a:p>
+            <a:pPr indent="0" marL="0">
+              <a:buNone/>
+            </a:pPr>
+            <a:r>
+              <a:rPr lang="en-US" sz="660" b="1" dirty="0">
+                <a:solidFill>
+                  <a:srgbClr val="5B6B7F"/>
+                </a:solidFill>
+                <a:latin typeface="Calibri" pitchFamily="34" charset="0"/>
+                <a:ea typeface="Calibri" pitchFamily="34" charset="-122"/>
+                <a:cs typeface="Calibri" pitchFamily="34" charset="-120"/>
+              </a:rPr>
+              <a:t>no match in the DB → not said</a:t>
+            </a:r>
+            <a:endParaRPr lang="en-US" sz="660" dirty="0"/>
+          </a:p>
+        </p:txBody>
+      </p:sp>
+      <p:sp>
+        <p:nvSpPr>
+          <p:cNvPr id="112" name="Text 98"/>
+          <p:cNvSpPr txBox="1"/>
+          <p:nvPr/>
+        </p:nvSpPr>
+        <p:spPr>
+          <a:xfrm>
+            <a:off x="4690872" y="4306824"/>
+            <a:ext cx="1207008" cy="329184"/>
           </a:xfrm>
           <a:prstGeom prst="rect">
             <a:avLst/>
@@ -4979,7 +5435,7 @@
               <a:buNone/>
             </a:pPr>
             <a:r>
-              <a:rPr lang="en-US" sz="680" dirty="0">
+              <a:rPr lang="en-US" sz="640" dirty="0">
                 <a:solidFill>
                   <a:srgbClr val="1F2937"/>
                 </a:solidFill>
@@ -4987,26 +5443,26 @@
                 <a:ea typeface="Calibri" pitchFamily="34" charset="-122"/>
                 <a:cs typeface="Calibri" pitchFamily="34" charset="-120"/>
               </a:rPr>
-              <a:t>Each fact is matched to a database row before it is spoken. No match → not said.</a:t>
-            </a:r>
-            <a:endParaRPr lang="en-US" sz="680" dirty="0"/>
-          </a:p>
-        </p:txBody>
-      </p:sp>
-      <p:sp>
-        <p:nvSpPr>
-          <p:cNvPr id="101" name="Shape 87"/>
+              <a:t>Every fact is matched to a database row before it is spoken.</a:t>
+            </a:r>
+            <a:endParaRPr lang="en-US" sz="640" dirty="0"/>
+          </a:p>
+        </p:txBody>
+      </p:sp>
+      <p:sp>
+        <p:nvSpPr>
+          <p:cNvPr id="113" name="Shape 99"/>
           <p:cNvSpPr/>
           <p:nvPr/>
         </p:nvSpPr>
         <p:spPr>
           <a:xfrm>
-            <a:off x="6053328" y="3602736"/>
-            <a:ext cx="1371600" cy="969264"/>
+            <a:off x="6053328" y="3730752"/>
+            <a:ext cx="1371600" cy="914400"/>
           </a:xfrm>
           <a:prstGeom prst="roundRect">
             <a:avLst>
-              <a:gd name="adj" fmla="val 7547"/>
+              <a:gd name="adj" fmla="val 8000"/>
             </a:avLst>
           </a:prstGeom>
           <a:solidFill>
@@ -5022,14 +5478,14 @@
       </p:sp>
       <p:sp>
         <p:nvSpPr>
-          <p:cNvPr id="102" name="Shape 88"/>
+          <p:cNvPr id="114" name="Shape 100"/>
           <p:cNvSpPr/>
           <p:nvPr/>
         </p:nvSpPr>
         <p:spPr>
           <a:xfrm>
-            <a:off x="6135624" y="3685032"/>
-            <a:ext cx="292608" cy="292608"/>
+            <a:off x="6135624" y="3813048"/>
+            <a:ext cx="274320" cy="274320"/>
           </a:xfrm>
           <a:prstGeom prst="roundRect">
             <a:avLst>
@@ -5049,7 +5505,7 @@
       </p:sp>
       <p:pic>
         <p:nvPicPr>
-          <p:cNvPr id="103" name="Image 12" descr="preencoded.png">    </p:cNvPr>
+          <p:cNvPr id="115" name="Image 12" descr="preencoded.png">    </p:cNvPr>
           <p:cNvPicPr>
             <a:picLocks noChangeAspect="1"/>
           </p:cNvPicPr>
@@ -5063,8 +5519,8 @@
         </p:blipFill>
         <p:spPr>
           <a:xfrm>
-            <a:off x="6179515" y="3728923"/>
-            <a:ext cx="204826" cy="204826"/>
+            <a:off x="6176772" y="3854196"/>
+            <a:ext cx="192024" cy="192024"/>
           </a:xfrm>
           <a:prstGeom prst="rect">
             <a:avLst/>
@@ -5073,14 +5529,14 @@
       </p:pic>
       <p:sp>
         <p:nvSpPr>
-          <p:cNvPr id="104" name="Text 89"/>
-          <p:cNvSpPr txBox="1"/>
-          <p:nvPr/>
-        </p:nvSpPr>
-        <p:spPr>
-          <a:xfrm>
-            <a:off x="6492240" y="3675888"/>
-            <a:ext cx="877824" cy="310896"/>
+          <p:cNvPr id="116" name="Text 101"/>
+          <p:cNvSpPr txBox="1"/>
+          <p:nvPr/>
+        </p:nvSpPr>
+        <p:spPr>
+          <a:xfrm>
+            <a:off x="6473952" y="3803904"/>
+            <a:ext cx="896112" cy="292608"/>
           </a:xfrm>
           <a:prstGeom prst="rect">
             <a:avLst/>
@@ -5112,14 +5568,53 @@
       </p:sp>
       <p:sp>
         <p:nvSpPr>
-          <p:cNvPr id="105" name="Text 90"/>
-          <p:cNvSpPr txBox="1"/>
-          <p:nvPr/>
-        </p:nvSpPr>
-        <p:spPr>
-          <a:xfrm>
-            <a:off x="6135624" y="4041648"/>
-            <a:ext cx="1207008" cy="512064"/>
+          <p:cNvPr id="117" name="Text 102"/>
+          <p:cNvSpPr txBox="1"/>
+          <p:nvPr/>
+        </p:nvSpPr>
+        <p:spPr>
+          <a:xfrm>
+            <a:off x="6135624" y="4142232"/>
+            <a:ext cx="1207008" cy="146304"/>
+          </a:xfrm>
+          <a:prstGeom prst="rect">
+            <a:avLst/>
+          </a:prstGeom>
+          <a:noFill/>
+          <a:ln/>
+        </p:spPr>
+        <p:txBody>
+          <a:bodyPr wrap="square" lIns="0" tIns="0" rIns="0" bIns="0" rtlCol="0" anchor="ctr"/>
+          <a:lstStyle/>
+          <a:p>
+            <a:pPr indent="0" marL="0">
+              <a:buNone/>
+            </a:pPr>
+            <a:r>
+              <a:rPr lang="en-US" sz="660" b="1" dirty="0">
+                <a:solidFill>
+                  <a:srgbClr val="5B6B7F"/>
+                </a:solidFill>
+                <a:latin typeface="Calibri" pitchFamily="34" charset="0"/>
+                <a:ea typeface="Calibri" pitchFamily="34" charset="-122"/>
+                <a:cs typeface="Calibri" pitchFamily="34" charset="-120"/>
+              </a:rPr>
+              <a:t>bigger model, then a human, only if needed</a:t>
+            </a:r>
+            <a:endParaRPr lang="en-US" sz="660" dirty="0"/>
+          </a:p>
+        </p:txBody>
+      </p:sp>
+      <p:sp>
+        <p:nvSpPr>
+          <p:cNvPr id="118" name="Text 103"/>
+          <p:cNvSpPr txBox="1"/>
+          <p:nvPr/>
+        </p:nvSpPr>
+        <p:spPr>
+          <a:xfrm>
+            <a:off x="6135624" y="4306824"/>
+            <a:ext cx="1207008" cy="329184"/>
           </a:xfrm>
           <a:prstGeom prst="rect">
             <a:avLst/>
@@ -5135,7 +5630,7 @@
               <a:buNone/>
             </a:pPr>
             <a:r>
-              <a:rPr lang="en-US" sz="680" dirty="0">
+              <a:rPr lang="en-US" sz="640" dirty="0">
                 <a:solidFill>
                   <a:srgbClr val="1F2937"/>
                 </a:solidFill>
@@ -5143,26 +5638,26 @@
                 <a:ea typeface="Calibri" pitchFamily="34" charset="-122"/>
                 <a:cs typeface="Calibri" pitchFamily="34" charset="-120"/>
               </a:rPr>
-              <a:t>Small model by default, bigger only if needed, a human if still stuck. Common answers get cached — cost falls over time.</a:t>
-            </a:r>
-            <a:endParaRPr lang="en-US" sz="680" dirty="0"/>
-          </a:p>
-        </p:txBody>
-      </p:sp>
-      <p:sp>
-        <p:nvSpPr>
-          <p:cNvPr id="106" name="Shape 91"/>
+              <a:t>Common answers get cached — cost falls over time.</a:t>
+            </a:r>
+            <a:endParaRPr lang="en-US" sz="640" dirty="0"/>
+          </a:p>
+        </p:txBody>
+      </p:sp>
+      <p:sp>
+        <p:nvSpPr>
+          <p:cNvPr id="119" name="Shape 104"/>
           <p:cNvSpPr/>
           <p:nvPr/>
         </p:nvSpPr>
         <p:spPr>
           <a:xfrm>
-            <a:off x="7498080" y="3602736"/>
-            <a:ext cx="1371600" cy="969264"/>
+            <a:off x="7498080" y="3730752"/>
+            <a:ext cx="1371600" cy="914400"/>
           </a:xfrm>
           <a:prstGeom prst="roundRect">
             <a:avLst>
-              <a:gd name="adj" fmla="val 7547"/>
+              <a:gd name="adj" fmla="val 8000"/>
             </a:avLst>
           </a:prstGeom>
           <a:solidFill>
@@ -5178,14 +5673,14 @@
       </p:sp>
       <p:sp>
         <p:nvSpPr>
-          <p:cNvPr id="107" name="Shape 92"/>
+          <p:cNvPr id="120" name="Shape 105"/>
           <p:cNvSpPr/>
           <p:nvPr/>
         </p:nvSpPr>
         <p:spPr>
           <a:xfrm>
-            <a:off x="7580376" y="3685032"/>
-            <a:ext cx="292608" cy="292608"/>
+            <a:off x="7580376" y="3813048"/>
+            <a:ext cx="274320" cy="274320"/>
           </a:xfrm>
           <a:prstGeom prst="roundRect">
             <a:avLst>
@@ -5205,7 +5700,7 @@
       </p:sp>
       <p:pic>
         <p:nvPicPr>
-          <p:cNvPr id="108" name="Image 13" descr="preencoded.png">    </p:cNvPr>
+          <p:cNvPr id="121" name="Image 13" descr="preencoded.png">    </p:cNvPr>
           <p:cNvPicPr>
             <a:picLocks noChangeAspect="1"/>
           </p:cNvPicPr>
@@ -5219,8 +5714,8 @@
         </p:blipFill>
         <p:spPr>
           <a:xfrm>
-            <a:off x="7624267" y="3728923"/>
-            <a:ext cx="204826" cy="204826"/>
+            <a:off x="7621524" y="3854196"/>
+            <a:ext cx="192024" cy="192024"/>
           </a:xfrm>
           <a:prstGeom prst="rect">
             <a:avLst/>
@@ -5229,14 +5724,14 @@
       </p:pic>
       <p:sp>
         <p:nvSpPr>
-          <p:cNvPr id="109" name="Text 93"/>
-          <p:cNvSpPr txBox="1"/>
-          <p:nvPr/>
-        </p:nvSpPr>
-        <p:spPr>
-          <a:xfrm>
-            <a:off x="7936992" y="3675888"/>
-            <a:ext cx="877824" cy="310896"/>
+          <p:cNvPr id="122" name="Text 106"/>
+          <p:cNvSpPr txBox="1"/>
+          <p:nvPr/>
+        </p:nvSpPr>
+        <p:spPr>
+          <a:xfrm>
+            <a:off x="7918704" y="3803904"/>
+            <a:ext cx="896112" cy="292608"/>
           </a:xfrm>
           <a:prstGeom prst="rect">
             <a:avLst/>
@@ -5268,14 +5763,53 @@
       </p:sp>
       <p:sp>
         <p:nvSpPr>
-          <p:cNvPr id="110" name="Text 94"/>
-          <p:cNvSpPr txBox="1"/>
-          <p:nvPr/>
-        </p:nvSpPr>
-        <p:spPr>
-          <a:xfrm>
-            <a:off x="7580376" y="4041648"/>
-            <a:ext cx="1207008" cy="512064"/>
+          <p:cNvPr id="123" name="Text 107"/>
+          <p:cNvSpPr txBox="1"/>
+          <p:nvPr/>
+        </p:nvSpPr>
+        <p:spPr>
+          <a:xfrm>
+            <a:off x="7580376" y="4142232"/>
+            <a:ext cx="1207008" cy="146304"/>
+          </a:xfrm>
+          <a:prstGeom prst="rect">
+            <a:avLst/>
+          </a:prstGeom>
+          <a:noFill/>
+          <a:ln/>
+        </p:spPr>
+        <p:txBody>
+          <a:bodyPr wrap="square" lIns="0" tIns="0" rIns="0" bIns="0" rtlCol="0" anchor="ctr"/>
+          <a:lstStyle/>
+          <a:p>
+            <a:pPr indent="0" marL="0">
+              <a:buNone/>
+            </a:pPr>
+            <a:r>
+              <a:rPr lang="en-US" sz="660" b="1" dirty="0">
+                <a:solidFill>
+                  <a:srgbClr val="5B6B7F"/>
+                </a:solidFill>
+                <a:latin typeface="Calibri" pitchFamily="34" charset="0"/>
+                <a:ea typeface="Calibri" pitchFamily="34" charset="-122"/>
+                <a:cs typeface="Calibri" pitchFamily="34" charset="-120"/>
+              </a:rPr>
+              <a:t>same case, no call needed</a:t>
+            </a:r>
+            <a:endParaRPr lang="en-US" sz="660" dirty="0"/>
+          </a:p>
+        </p:txBody>
+      </p:sp>
+      <p:sp>
+        <p:nvSpPr>
+          <p:cNvPr id="124" name="Text 108"/>
+          <p:cNvSpPr txBox="1"/>
+          <p:nvPr/>
+        </p:nvSpPr>
+        <p:spPr>
+          <a:xfrm>
+            <a:off x="7580376" y="4306824"/>
+            <a:ext cx="1207008" cy="329184"/>
           </a:xfrm>
           <a:prstGeom prst="rect">
             <a:avLst/>
@@ -5291,7 +5825,7 @@
               <a:buNone/>
             </a:pPr>
             <a:r>
-              <a:rPr lang="en-US" sz="680" dirty="0">
+              <a:rPr lang="en-US" sz="640" dirty="0">
                 <a:solidFill>
                   <a:srgbClr val="1F2937"/>
                 </a:solidFill>
@@ -5299,21 +5833,21 @@
                 <a:ea typeface="Calibri" pitchFamily="34" charset="-122"/>
                 <a:cs typeface="Calibri" pitchFamily="34" charset="-120"/>
               </a:rPr>
-              <a:t>Mobile + OTP login: family, CSC or officer can view or edit the case — or skip the call.</a:t>
-            </a:r>
-            <a:endParaRPr lang="en-US" sz="680" dirty="0"/>
-          </a:p>
-        </p:txBody>
-      </p:sp>
-      <p:sp>
-        <p:nvSpPr>
-          <p:cNvPr id="111" name="Text 95"/>
-          <p:cNvSpPr txBox="1"/>
-          <p:nvPr/>
-        </p:nvSpPr>
-        <p:spPr>
-          <a:xfrm>
-            <a:off x="274320" y="4645152"/>
+              <a:t>Mobile + OTP login for the family, CSC or officer to view or edit.</a:t>
+            </a:r>
+            <a:endParaRPr lang="en-US" sz="640" dirty="0"/>
+          </a:p>
+        </p:txBody>
+      </p:sp>
+      <p:sp>
+        <p:nvSpPr>
+          <p:cNvPr id="125" name="Text 109"/>
+          <p:cNvSpPr txBox="1"/>
+          <p:nvPr/>
+        </p:nvSpPr>
+        <p:spPr>
+          <a:xfrm>
+            <a:off x="274320" y="4700016"/>
             <a:ext cx="8046720" cy="164592"/>
           </a:xfrm>
           <a:prstGeom prst="rect">
@@ -5571,7 +6105,7 @@
           <a:ln/>
         </p:spPr>
         <p:txBody>
-          <a:bodyPr wrap="square" lIns="0" tIns="0" rIns="0" bIns="0" rtlCol="0" anchor="t"/>
+          <a:bodyPr wrap="square" lIns="0" tIns="0" rIns="0" bIns="0" rtlCol="0" anchor="ctr"/>
           <a:lstStyle/>
           <a:p>
             <a:pPr indent="0" marL="0">
@@ -5586,7 +6120,18 @@
                 <a:ea typeface="Calibri" pitchFamily="34" charset="-122"/>
                 <a:cs typeface="Calibri" pitchFamily="34" charset="-120"/>
               </a:rPr>
-              <a:t>TECH STACK</a:t>
+              <a:t>TECH STACK  </a:t>
+            </a:r>
+            <a:r>
+              <a:rPr lang="en-US" sz="750" i="1" dirty="0">
+                <a:solidFill>
+                  <a:srgbClr val="6B7280"/>
+                </a:solidFill>
+                <a:latin typeface="Calibri" pitchFamily="34" charset="0"/>
+                <a:ea typeface="Calibri" pitchFamily="34" charset="-122"/>
+                <a:cs typeface="Calibri" pitchFamily="34" charset="-120"/>
+              </a:rPr>
+              <a:t>Indian, open where possible</a:t>
             </a:r>
             <a:endParaRPr lang="en-US" sz="850" dirty="0"/>
           </a:p>
@@ -7821,7 +8366,7 @@
           <a:ln/>
         </p:spPr>
         <p:txBody>
-          <a:bodyPr wrap="square" lIns="0" tIns="0" rIns="0" bIns="0" rtlCol="0" anchor="t"/>
+          <a:bodyPr wrap="square" lIns="0" tIns="0" rIns="0" bIns="0" rtlCol="0" anchor="ctr"/>
           <a:lstStyle/>
           <a:p>
             <a:pPr indent="0" marL="0">
@@ -7836,7 +8381,18 @@
                 <a:ea typeface="Calibri" pitchFamily="34" charset="-122"/>
                 <a:cs typeface="Calibri" pitchFamily="34" charset="-120"/>
               </a:rPr>
-              <a:t>HOW IT WORKS — ARCHITECTURE</a:t>
+              <a:t>HOW IT WORKS  </a:t>
+            </a:r>
+            <a:r>
+              <a:rPr lang="en-US" sz="750" i="1" dirty="0">
+                <a:solidFill>
+                  <a:srgbClr val="6B7280"/>
+                </a:solidFill>
+                <a:latin typeface="Calibri" pitchFamily="34" charset="0"/>
+                <a:ea typeface="Calibri" pitchFamily="34" charset="-122"/>
+                <a:cs typeface="Calibri" pitchFamily="34" charset="-120"/>
+              </a:rPr>
+              <a:t>two lanes: during the call (AI, in seconds) and after it (people, in days)</a:t>
             </a:r>
             <a:endParaRPr lang="en-US" sz="850" dirty="0"/>
           </a:p>
@@ -12029,7 +12585,7 @@
           <a:ln/>
         </p:spPr>
         <p:txBody>
-          <a:bodyPr wrap="square" lIns="0" tIns="0" rIns="0" bIns="0" rtlCol="0" anchor="t"/>
+          <a:bodyPr wrap="square" lIns="0" tIns="0" rIns="0" bIns="0" rtlCol="0" anchor="ctr"/>
           <a:lstStyle/>
           <a:p>
             <a:pPr indent="0" marL="0">
@@ -12044,7 +12600,18 @@
                 <a:ea typeface="Calibri" pitchFamily="34" charset="-122"/>
                 <a:cs typeface="Calibri" pitchFamily="34" charset="-120"/>
               </a:rPr>
-              <a:t>ALREADY WORKING IN INDIA — NOTHING HERE IS UNTESTED</a:t>
+              <a:t>ALREADY WORKING IN INDIA  </a:t>
+            </a:r>
+            <a:r>
+              <a:rPr lang="en-US" sz="750" i="1" dirty="0">
+                <a:solidFill>
+                  <a:srgbClr val="6B7280"/>
+                </a:solidFill>
+                <a:latin typeface="Calibri" pitchFamily="34" charset="0"/>
+                <a:ea typeface="Calibri" pitchFamily="34" charset="-122"/>
+                <a:cs typeface="Calibri" pitchFamily="34" charset="-120"/>
+              </a:rPr>
+              <a:t>nothing here is untested</a:t>
             </a:r>
             <a:endParaRPr lang="en-US" sz="850" dirty="0"/>
           </a:p>
@@ -12059,11 +12626,11 @@
         <p:spPr>
           <a:xfrm>
             <a:off x="274320" y="1389888"/>
-            <a:ext cx="2057400" cy="822960"/>
+            <a:ext cx="2057400" cy="914400"/>
           </a:xfrm>
           <a:prstGeom prst="roundRect">
             <a:avLst>
-              <a:gd name="adj" fmla="val 8889"/>
+              <a:gd name="adj" fmla="val 8000"/>
             </a:avLst>
           </a:prstGeom>
           <a:solidFill>
@@ -12085,7 +12652,7 @@
         </p:nvSpPr>
         <p:spPr>
           <a:xfrm>
-            <a:off x="365760" y="1463040"/>
+            <a:off x="365760" y="1481328"/>
             <a:ext cx="310896" cy="310896"/>
           </a:xfrm>
           <a:prstGeom prst="roundRect">
@@ -12120,7 +12687,7 @@
         </p:blipFill>
         <p:spPr>
           <a:xfrm>
-            <a:off x="412394" y="1509674"/>
+            <a:off x="412394" y="1527962"/>
             <a:ext cx="217627" cy="217627"/>
           </a:xfrm>
           <a:prstGeom prst="rect">
@@ -12136,8 +12703,8 @@
         </p:nvSpPr>
         <p:spPr>
           <a:xfrm>
-            <a:off x="749808" y="1444752"/>
-            <a:ext cx="1536192" cy="329184"/>
+            <a:off x="768096" y="1453896"/>
+            <a:ext cx="1472184" cy="219456"/>
           </a:xfrm>
           <a:prstGeom prst="rect">
             <a:avLst/>
@@ -12153,7 +12720,7 @@
               <a:buNone/>
             </a:pPr>
             <a:r>
-              <a:rPr lang="en-US" sz="1100" b="1" dirty="0">
+              <a:rPr lang="en-US" sz="1050" b="1" dirty="0">
                 <a:solidFill>
                   <a:srgbClr val="2E6FD6"/>
                 </a:solidFill>
@@ -12161,9 +12728,9 @@
                 <a:ea typeface="Calibri" pitchFamily="34" charset="-122"/>
                 <a:cs typeface="Calibri" pitchFamily="34" charset="-120"/>
               </a:rPr>
-              <a:t>10 languages</a:t>
-            </a:r>
-            <a:endParaRPr lang="en-US" sz="1100" dirty="0"/>
+              <a:t>10 languages out of 22</a:t>
+            </a:r>
+            <a:endParaRPr lang="en-US" sz="1050" dirty="0"/>
           </a:p>
         </p:txBody>
       </p:sp>
@@ -12175,8 +12742,47 @@
         </p:nvSpPr>
         <p:spPr>
           <a:xfrm>
-            <a:off x="365760" y="1810512"/>
-            <a:ext cx="1874520" cy="256032"/>
+            <a:off x="768096" y="1664208"/>
+            <a:ext cx="1472184" cy="146304"/>
+          </a:xfrm>
+          <a:prstGeom prst="rect">
+            <a:avLst/>
+          </a:prstGeom>
+          <a:noFill/>
+          <a:ln/>
+        </p:spPr>
+        <p:txBody>
+          <a:bodyPr wrap="square" lIns="0" tIns="0" rIns="0" bIns="0" rtlCol="0" anchor="ctr"/>
+          <a:lstStyle/>
+          <a:p>
+            <a:pPr indent="0" marL="0">
+              <a:buNone/>
+            </a:pPr>
+            <a:r>
+              <a:rPr lang="en-US" sz="730" b="1" dirty="0">
+                <a:solidFill>
+                  <a:srgbClr val="5B6B7F"/>
+                </a:solidFill>
+                <a:latin typeface="Calibri" pitchFamily="34" charset="0"/>
+                <a:ea typeface="Calibri" pitchFamily="34" charset="-122"/>
+                <a:cs typeface="Calibri" pitchFamily="34" charset="-120"/>
+              </a:rPr>
+              <a:t>are already in use</a:t>
+            </a:r>
+            <a:endParaRPr lang="en-US" sz="730" dirty="0"/>
+          </a:p>
+        </p:txBody>
+      </p:sp>
+      <p:sp>
+        <p:nvSpPr>
+          <p:cNvPr id="14" name="Text 10"/>
+          <p:cNvSpPr txBox="1"/>
+          <p:nvPr/>
+        </p:nvSpPr>
+        <p:spPr>
+          <a:xfrm>
+            <a:off x="365760" y="1865376"/>
+            <a:ext cx="1874520" cy="219456"/>
           </a:xfrm>
           <a:prstGeom prst="rect">
             <a:avLst/>
@@ -12208,14 +12814,14 @@
       </p:sp>
       <p:sp>
         <p:nvSpPr>
-          <p:cNvPr id="14" name="Shape 10"/>
+          <p:cNvPr id="15" name="Shape 11"/>
           <p:cNvSpPr/>
           <p:nvPr/>
         </p:nvSpPr>
         <p:spPr>
           <a:xfrm>
-            <a:off x="365760" y="2057400"/>
-            <a:ext cx="1737360" cy="137160"/>
+            <a:off x="365760" y="2103120"/>
+            <a:ext cx="1874520" cy="137160"/>
           </a:xfrm>
           <a:prstGeom prst="roundRect">
             <a:avLst>
@@ -12235,14 +12841,14 @@
       </p:sp>
       <p:sp>
         <p:nvSpPr>
-          <p:cNvPr id="15" name="Text 11"/>
-          <p:cNvSpPr txBox="1"/>
-          <p:nvPr/>
-        </p:nvSpPr>
-        <p:spPr>
-          <a:xfrm>
-            <a:off x="420624" y="2057400"/>
-            <a:ext cx="1645920" cy="137160"/>
+          <p:cNvPr id="16" name="Text 12"/>
+          <p:cNvSpPr txBox="1"/>
+          <p:nvPr/>
+        </p:nvSpPr>
+        <p:spPr>
+          <a:xfrm>
+            <a:off x="420624" y="2103120"/>
+            <a:ext cx="1783080" cy="137160"/>
           </a:xfrm>
           <a:prstGeom prst="rect">
             <a:avLst/>
@@ -12274,18 +12880,18 @@
       </p:sp>
       <p:sp>
         <p:nvSpPr>
-          <p:cNvPr id="16" name="Shape 12"/>
+          <p:cNvPr id="17" name="Shape 13"/>
           <p:cNvSpPr/>
           <p:nvPr/>
         </p:nvSpPr>
         <p:spPr>
           <a:xfrm>
             <a:off x="2446020" y="1389888"/>
-            <a:ext cx="2057400" cy="822960"/>
+            <a:ext cx="2057400" cy="914400"/>
           </a:xfrm>
           <a:prstGeom prst="roundRect">
             <a:avLst>
-              <a:gd name="adj" fmla="val 8889"/>
+              <a:gd name="adj" fmla="val 8000"/>
             </a:avLst>
           </a:prstGeom>
           <a:solidFill>
@@ -12301,13 +12907,13 @@
       </p:sp>
       <p:sp>
         <p:nvSpPr>
-          <p:cNvPr id="17" name="Shape 13"/>
+          <p:cNvPr id="18" name="Shape 14"/>
           <p:cNvSpPr/>
           <p:nvPr/>
         </p:nvSpPr>
         <p:spPr>
           <a:xfrm>
-            <a:off x="2537460" y="1463040"/>
+            <a:off x="2537460" y="1481328"/>
             <a:ext cx="310896" cy="310896"/>
           </a:xfrm>
           <a:prstGeom prst="roundRect">
@@ -12328,7 +12934,7 @@
       </p:sp>
       <p:pic>
         <p:nvPicPr>
-          <p:cNvPr id="18" name="Image 2" descr="preencoded.png">    </p:cNvPr>
+          <p:cNvPr id="19" name="Image 2" descr="preencoded.png">    </p:cNvPr>
           <p:cNvPicPr>
             <a:picLocks noChangeAspect="1"/>
           </p:cNvPicPr>
@@ -12342,7 +12948,7 @@
         </p:blipFill>
         <p:spPr>
           <a:xfrm>
-            <a:off x="2584094" y="1509674"/>
+            <a:off x="2584094" y="1527962"/>
             <a:ext cx="217627" cy="217627"/>
           </a:xfrm>
           <a:prstGeom prst="rect">
@@ -12352,14 +12958,14 @@
       </p:pic>
       <p:sp>
         <p:nvSpPr>
-          <p:cNvPr id="19" name="Text 14"/>
-          <p:cNvSpPr txBox="1"/>
-          <p:nvPr/>
-        </p:nvSpPr>
-        <p:spPr>
-          <a:xfrm>
-            <a:off x="2921508" y="1444752"/>
-            <a:ext cx="1536192" cy="329184"/>
+          <p:cNvPr id="20" name="Text 15"/>
+          <p:cNvSpPr txBox="1"/>
+          <p:nvPr/>
+        </p:nvSpPr>
+        <p:spPr>
+          <a:xfrm>
+            <a:off x="2939796" y="1453896"/>
+            <a:ext cx="1472184" cy="219456"/>
           </a:xfrm>
           <a:prstGeom prst="rect">
             <a:avLst/>
@@ -12375,7 +12981,7 @@
               <a:buNone/>
             </a:pPr>
             <a:r>
-              <a:rPr lang="en-US" sz="1100" b="1" dirty="0">
+              <a:rPr lang="en-US" sz="1050" b="1" dirty="0">
                 <a:solidFill>
                   <a:srgbClr val="13919B"/>
                 </a:solidFill>
@@ -12385,20 +12991,59 @@
               </a:rPr>
               <a:t>12 lakh calls a day</a:t>
             </a:r>
-            <a:endParaRPr lang="en-US" sz="1100" dirty="0"/>
-          </a:p>
-        </p:txBody>
-      </p:sp>
-      <p:sp>
-        <p:nvSpPr>
-          <p:cNvPr id="20" name="Text 15"/>
-          <p:cNvSpPr txBox="1"/>
-          <p:nvPr/>
-        </p:nvSpPr>
-        <p:spPr>
-          <a:xfrm>
-            <a:off x="2537460" y="1810512"/>
-            <a:ext cx="1874520" cy="256032"/>
+            <a:endParaRPr lang="en-US" sz="1050" dirty="0"/>
+          </a:p>
+        </p:txBody>
+      </p:sp>
+      <p:sp>
+        <p:nvSpPr>
+          <p:cNvPr id="21" name="Text 16"/>
+          <p:cNvSpPr txBox="1"/>
+          <p:nvPr/>
+        </p:nvSpPr>
+        <p:spPr>
+          <a:xfrm>
+            <a:off x="2939796" y="1664208"/>
+            <a:ext cx="1472184" cy="146304"/>
+          </a:xfrm>
+          <a:prstGeom prst="rect">
+            <a:avLst/>
+          </a:prstGeom>
+          <a:noFill/>
+          <a:ln/>
+        </p:spPr>
+        <p:txBody>
+          <a:bodyPr wrap="square" lIns="0" tIns="0" rIns="0" bIns="0" rtlCol="0" anchor="ctr"/>
+          <a:lstStyle/>
+          <a:p>
+            <a:pPr indent="0" marL="0">
+              <a:buNone/>
+            </a:pPr>
+            <a:r>
+              <a:rPr lang="en-US" sz="730" b="1" dirty="0">
+                <a:solidFill>
+                  <a:srgbClr val="5B6B7F"/>
+                </a:solidFill>
+                <a:latin typeface="Calibri" pitchFamily="34" charset="0"/>
+                <a:ea typeface="Calibri" pitchFamily="34" charset="-122"/>
+                <a:cs typeface="Calibri" pitchFamily="34" charset="-120"/>
+              </a:rPr>
+              <a:t>already handled by a govt line</a:t>
+            </a:r>
+            <a:endParaRPr lang="en-US" sz="730" dirty="0"/>
+          </a:p>
+        </p:txBody>
+      </p:sp>
+      <p:sp>
+        <p:nvSpPr>
+          <p:cNvPr id="22" name="Text 17"/>
+          <p:cNvSpPr txBox="1"/>
+          <p:nvPr/>
+        </p:nvSpPr>
+        <p:spPr>
+          <a:xfrm>
+            <a:off x="2537460" y="1865376"/>
+            <a:ext cx="1874520" cy="219456"/>
           </a:xfrm>
           <a:prstGeom prst="rect">
             <a:avLst/>
@@ -12422,7 +13067,7 @@
                 <a:ea typeface="Calibri" pitchFamily="34" charset="-122"/>
                 <a:cs typeface="Calibri" pitchFamily="34" charset="-120"/>
               </a:rPr>
-              <a:t>Kilkari, the govt health-advice line, already handles this volume every day.</a:t>
+              <a:t>Kilkari, the government health-advice line, runs this volume every single day.</a:t>
             </a:r>
             <a:endParaRPr lang="en-US" sz="670" dirty="0"/>
           </a:p>
@@ -12430,14 +13075,14 @@
       </p:sp>
       <p:sp>
         <p:nvSpPr>
-          <p:cNvPr id="21" name="Shape 16"/>
+          <p:cNvPr id="23" name="Shape 18"/>
           <p:cNvSpPr/>
           <p:nvPr/>
         </p:nvSpPr>
         <p:spPr>
           <a:xfrm>
-            <a:off x="2537460" y="2057400"/>
-            <a:ext cx="1737360" cy="137160"/>
+            <a:off x="2537460" y="2103120"/>
+            <a:ext cx="1874520" cy="137160"/>
           </a:xfrm>
           <a:prstGeom prst="roundRect">
             <a:avLst>
@@ -12457,14 +13102,14 @@
       </p:sp>
       <p:sp>
         <p:nvSpPr>
-          <p:cNvPr id="22" name="Text 17"/>
-          <p:cNvSpPr txBox="1"/>
-          <p:nvPr/>
-        </p:nvSpPr>
-        <p:spPr>
-          <a:xfrm>
-            <a:off x="2592324" y="2057400"/>
-            <a:ext cx="1645920" cy="137160"/>
+          <p:cNvPr id="24" name="Text 19"/>
+          <p:cNvSpPr txBox="1"/>
+          <p:nvPr/>
+        </p:nvSpPr>
+        <p:spPr>
+          <a:xfrm>
+            <a:off x="2592324" y="2103120"/>
+            <a:ext cx="1783080" cy="137160"/>
           </a:xfrm>
           <a:prstGeom prst="rect">
             <a:avLst/>
@@ -12496,18 +13141,18 @@
       </p:sp>
       <p:sp>
         <p:nvSpPr>
-          <p:cNvPr id="23" name="Shape 18"/>
+          <p:cNvPr id="25" name="Shape 20"/>
           <p:cNvSpPr/>
           <p:nvPr/>
         </p:nvSpPr>
         <p:spPr>
           <a:xfrm>
             <a:off x="4617720" y="1389888"/>
-            <a:ext cx="2057400" cy="822960"/>
+            <a:ext cx="2057400" cy="914400"/>
           </a:xfrm>
           <a:prstGeom prst="roundRect">
             <a:avLst>
-              <a:gd name="adj" fmla="val 8889"/>
+              <a:gd name="adj" fmla="val 8000"/>
             </a:avLst>
           </a:prstGeom>
           <a:solidFill>
@@ -12523,13 +13168,13 @@
       </p:sp>
       <p:sp>
         <p:nvSpPr>
-          <p:cNvPr id="24" name="Shape 19"/>
+          <p:cNvPr id="26" name="Shape 21"/>
           <p:cNvSpPr/>
           <p:nvPr/>
         </p:nvSpPr>
         <p:spPr>
           <a:xfrm>
-            <a:off x="4709160" y="1463040"/>
+            <a:off x="4709160" y="1481328"/>
             <a:ext cx="310896" cy="310896"/>
           </a:xfrm>
           <a:prstGeom prst="roundRect">
@@ -12550,7 +13195,7 @@
       </p:sp>
       <p:pic>
         <p:nvPicPr>
-          <p:cNvPr id="25" name="Image 3" descr="preencoded.png">    </p:cNvPr>
+          <p:cNvPr id="27" name="Image 3" descr="preencoded.png">    </p:cNvPr>
           <p:cNvPicPr>
             <a:picLocks noChangeAspect="1"/>
           </p:cNvPicPr>
@@ -12564,7 +13209,7 @@
         </p:blipFill>
         <p:spPr>
           <a:xfrm>
-            <a:off x="4755794" y="1509674"/>
+            <a:off x="4755794" y="1527962"/>
             <a:ext cx="217627" cy="217627"/>
           </a:xfrm>
           <a:prstGeom prst="rect">
@@ -12574,14 +13219,14 @@
       </p:pic>
       <p:sp>
         <p:nvSpPr>
-          <p:cNvPr id="26" name="Text 20"/>
-          <p:cNvSpPr txBox="1"/>
-          <p:nvPr/>
-        </p:nvSpPr>
-        <p:spPr>
-          <a:xfrm>
-            <a:off x="5093208" y="1444752"/>
-            <a:ext cx="1536192" cy="329184"/>
+          <p:cNvPr id="28" name="Text 22"/>
+          <p:cNvSpPr txBox="1"/>
+          <p:nvPr/>
+        </p:nvSpPr>
+        <p:spPr>
+          <a:xfrm>
+            <a:off x="5111496" y="1453896"/>
+            <a:ext cx="1472184" cy="219456"/>
           </a:xfrm>
           <a:prstGeom prst="rect">
             <a:avLst/>
@@ -12597,7 +13242,7 @@
               <a:buNone/>
             </a:pPr>
             <a:r>
-              <a:rPr lang="en-US" sz="1100" b="1" dirty="0">
+              <a:rPr lang="en-US" sz="1050" b="1" dirty="0">
                 <a:solidFill>
                   <a:srgbClr val="7A5AF8"/>
                 </a:solidFill>
@@ -12607,20 +13252,59 @@
               </a:rPr>
               <a:t>≤ 20% word error</a:t>
             </a:r>
-            <a:endParaRPr lang="en-US" sz="1100" dirty="0"/>
-          </a:p>
-        </p:txBody>
-      </p:sp>
-      <p:sp>
-        <p:nvSpPr>
-          <p:cNvPr id="27" name="Text 21"/>
-          <p:cNvSpPr txBox="1"/>
-          <p:nvPr/>
-        </p:nvSpPr>
-        <p:spPr>
-          <a:xfrm>
-            <a:off x="4709160" y="1810512"/>
-            <a:ext cx="1874520" cy="256032"/>
+            <a:endParaRPr lang="en-US" sz="1050" dirty="0"/>
+          </a:p>
+        </p:txBody>
+      </p:sp>
+      <p:sp>
+        <p:nvSpPr>
+          <p:cNvPr id="29" name="Text 23"/>
+          <p:cNvSpPr txBox="1"/>
+          <p:nvPr/>
+        </p:nvSpPr>
+        <p:spPr>
+          <a:xfrm>
+            <a:off x="5111496" y="1664208"/>
+            <a:ext cx="1472184" cy="146304"/>
+          </a:xfrm>
+          <a:prstGeom prst="rect">
+            <a:avLst/>
+          </a:prstGeom>
+          <a:noFill/>
+          <a:ln/>
+        </p:spPr>
+        <p:txBody>
+          <a:bodyPr wrap="square" lIns="0" tIns="0" rIns="0" bIns="0" rtlCol="0" anchor="ctr"/>
+          <a:lstStyle/>
+          <a:p>
+            <a:pPr indent="0" marL="0">
+              <a:buNone/>
+            </a:pPr>
+            <a:r>
+              <a:rPr lang="en-US" sz="730" b="1" dirty="0">
+                <a:solidFill>
+                  <a:srgbClr val="5B6B7F"/>
+                </a:solidFill>
+                <a:latin typeface="Calibri" pitchFamily="34" charset="0"/>
+                <a:ea typeface="Calibri" pitchFamily="34" charset="-122"/>
+                <a:cs typeface="Calibri" pitchFamily="34" charset="-120"/>
+              </a:rPr>
+              <a:t>on real Indian phone calls</a:t>
+            </a:r>
+            <a:endParaRPr lang="en-US" sz="730" dirty="0"/>
+          </a:p>
+        </p:txBody>
+      </p:sp>
+      <p:sp>
+        <p:nvSpPr>
+          <p:cNvPr id="30" name="Text 24"/>
+          <p:cNvSpPr txBox="1"/>
+          <p:nvPr/>
+        </p:nvSpPr>
+        <p:spPr>
+          <a:xfrm>
+            <a:off x="4709160" y="1865376"/>
+            <a:ext cx="1874520" cy="219456"/>
           </a:xfrm>
           <a:prstGeom prst="rect">
             <a:avLst/>
@@ -12644,7 +13328,7 @@
                 <a:ea typeface="Calibri" pitchFamily="34" charset="-122"/>
                 <a:cs typeface="Calibri" pitchFamily="34" charset="-120"/>
               </a:rPr>
-              <a:t>Best Indian speech AI on real phone calls — 36,691 speakers, 15 languages, 536 hours.</a:t>
+              <a:t>Best Indian speech AI, tested on 36,691 speakers in 15 languages (536 hours).</a:t>
             </a:r>
             <a:endParaRPr lang="en-US" sz="670" dirty="0"/>
           </a:p>
@@ -12652,14 +13336,14 @@
       </p:sp>
       <p:sp>
         <p:nvSpPr>
-          <p:cNvPr id="28" name="Shape 22"/>
+          <p:cNvPr id="31" name="Shape 25"/>
           <p:cNvSpPr/>
           <p:nvPr/>
         </p:nvSpPr>
         <p:spPr>
           <a:xfrm>
-            <a:off x="4709160" y="2057400"/>
-            <a:ext cx="1737360" cy="137160"/>
+            <a:off x="4709160" y="2103120"/>
+            <a:ext cx="1874520" cy="137160"/>
           </a:xfrm>
           <a:prstGeom prst="roundRect">
             <a:avLst>
@@ -12679,14 +13363,14 @@
       </p:sp>
       <p:sp>
         <p:nvSpPr>
-          <p:cNvPr id="29" name="Text 23"/>
-          <p:cNvSpPr txBox="1"/>
-          <p:nvPr/>
-        </p:nvSpPr>
-        <p:spPr>
-          <a:xfrm>
-            <a:off x="4764024" y="2057400"/>
-            <a:ext cx="1645920" cy="137160"/>
+          <p:cNvPr id="32" name="Text 26"/>
+          <p:cNvSpPr txBox="1"/>
+          <p:nvPr/>
+        </p:nvSpPr>
+        <p:spPr>
+          <a:xfrm>
+            <a:off x="4764024" y="2103120"/>
+            <a:ext cx="1783080" cy="137160"/>
           </a:xfrm>
           <a:prstGeom prst="rect">
             <a:avLst/>
@@ -12718,18 +13402,18 @@
       </p:sp>
       <p:sp>
         <p:nvSpPr>
-          <p:cNvPr id="30" name="Shape 24"/>
+          <p:cNvPr id="33" name="Shape 27"/>
           <p:cNvSpPr/>
           <p:nvPr/>
         </p:nvSpPr>
         <p:spPr>
           <a:xfrm>
             <a:off x="6789420" y="1389888"/>
-            <a:ext cx="2057400" cy="822960"/>
+            <a:ext cx="2057400" cy="914400"/>
           </a:xfrm>
           <a:prstGeom prst="roundRect">
             <a:avLst>
-              <a:gd name="adj" fmla="val 8889"/>
+              <a:gd name="adj" fmla="val 8000"/>
             </a:avLst>
           </a:prstGeom>
           <a:solidFill>
@@ -12745,13 +13429,13 @@
       </p:sp>
       <p:sp>
         <p:nvSpPr>
-          <p:cNvPr id="31" name="Shape 25"/>
+          <p:cNvPr id="34" name="Shape 28"/>
           <p:cNvSpPr/>
           <p:nvPr/>
         </p:nvSpPr>
         <p:spPr>
           <a:xfrm>
-            <a:off x="6880860" y="1463040"/>
+            <a:off x="6880860" y="1481328"/>
             <a:ext cx="310896" cy="310896"/>
           </a:xfrm>
           <a:prstGeom prst="roundRect">
@@ -12772,7 +13456,7 @@
       </p:sp>
       <p:pic>
         <p:nvPicPr>
-          <p:cNvPr id="32" name="Image 4" descr="preencoded.png">    </p:cNvPr>
+          <p:cNvPr id="35" name="Image 4" descr="preencoded.png">    </p:cNvPr>
           <p:cNvPicPr>
             <a:picLocks noChangeAspect="1"/>
           </p:cNvPicPr>
@@ -12786,7 +13470,7 @@
         </p:blipFill>
         <p:spPr>
           <a:xfrm>
-            <a:off x="6927494" y="1509674"/>
+            <a:off x="6927494" y="1527962"/>
             <a:ext cx="217627" cy="217627"/>
           </a:xfrm>
           <a:prstGeom prst="rect">
@@ -12796,14 +13480,14 @@
       </p:pic>
       <p:sp>
         <p:nvSpPr>
-          <p:cNvPr id="33" name="Text 26"/>
-          <p:cNvSpPr txBox="1"/>
-          <p:nvPr/>
-        </p:nvSpPr>
-        <p:spPr>
-          <a:xfrm>
-            <a:off x="7264908" y="1444752"/>
-            <a:ext cx="1536192" cy="329184"/>
+          <p:cNvPr id="36" name="Text 29"/>
+          <p:cNvSpPr txBox="1"/>
+          <p:nvPr/>
+        </p:nvSpPr>
+        <p:spPr>
+          <a:xfrm>
+            <a:off x="7283196" y="1453896"/>
+            <a:ext cx="1472184" cy="219456"/>
           </a:xfrm>
           <a:prstGeom prst="rect">
             <a:avLst/>
@@ -12819,7 +13503,7 @@
               <a:buNone/>
             </a:pPr>
             <a:r>
-              <a:rPr lang="en-US" sz="1100" b="1" dirty="0">
+              <a:rPr lang="en-US" sz="1050" b="1" dirty="0">
                 <a:solidFill>
                   <a:srgbClr val="EF8A22"/>
                 </a:solidFill>
@@ -12829,20 +13513,59 @@
               </a:rPr>
               <a:t>1.2–2.2 s per reply</a:t>
             </a:r>
-            <a:endParaRPr lang="en-US" sz="1100" dirty="0"/>
-          </a:p>
-        </p:txBody>
-      </p:sp>
-      <p:sp>
-        <p:nvSpPr>
-          <p:cNvPr id="34" name="Text 27"/>
-          <p:cNvSpPr txBox="1"/>
-          <p:nvPr/>
-        </p:nvSpPr>
-        <p:spPr>
-          <a:xfrm>
-            <a:off x="6880860" y="1810512"/>
-            <a:ext cx="1874520" cy="256032"/>
+            <a:endParaRPr lang="en-US" sz="1050" dirty="0"/>
+          </a:p>
+        </p:txBody>
+      </p:sp>
+      <p:sp>
+        <p:nvSpPr>
+          <p:cNvPr id="37" name="Text 30"/>
+          <p:cNvSpPr txBox="1"/>
+          <p:nvPr/>
+        </p:nvSpPr>
+        <p:spPr>
+          <a:xfrm>
+            <a:off x="7283196" y="1664208"/>
+            <a:ext cx="1472184" cy="146304"/>
+          </a:xfrm>
+          <a:prstGeom prst="rect">
+            <a:avLst/>
+          </a:prstGeom>
+          <a:noFill/>
+          <a:ln/>
+        </p:spPr>
+        <p:txBody>
+          <a:bodyPr wrap="square" lIns="0" tIns="0" rIns="0" bIns="0" rtlCol="0" anchor="ctr"/>
+          <a:lstStyle/>
+          <a:p>
+            <a:pPr indent="0" marL="0">
+              <a:buNone/>
+            </a:pPr>
+            <a:r>
+              <a:rPr lang="en-US" sz="730" b="1" dirty="0">
+                <a:solidFill>
+                  <a:srgbClr val="5B6B7F"/>
+                </a:solidFill>
+                <a:latin typeface="Calibri" pitchFamily="34" charset="0"/>
+                <a:ea typeface="Calibri" pitchFamily="34" charset="-122"/>
+                <a:cs typeface="Calibri" pitchFamily="34" charset="-120"/>
+              </a:rPr>
+              <a:t>fast enough to feel like a talk</a:t>
+            </a:r>
+            <a:endParaRPr lang="en-US" sz="730" dirty="0"/>
+          </a:p>
+        </p:txBody>
+      </p:sp>
+      <p:sp>
+        <p:nvSpPr>
+          <p:cNvPr id="38" name="Text 31"/>
+          <p:cNvSpPr txBox="1"/>
+          <p:nvPr/>
+        </p:nvSpPr>
+        <p:spPr>
+          <a:xfrm>
+            <a:off x="6880860" y="1865376"/>
+            <a:ext cx="1874520" cy="219456"/>
           </a:xfrm>
           <a:prstGeom prst="rect">
             <a:avLst/>
@@ -12874,14 +13597,14 @@
       </p:sp>
       <p:sp>
         <p:nvSpPr>
-          <p:cNvPr id="35" name="Shape 28"/>
+          <p:cNvPr id="39" name="Shape 32"/>
           <p:cNvSpPr/>
           <p:nvPr/>
         </p:nvSpPr>
         <p:spPr>
           <a:xfrm>
-            <a:off x="6880860" y="2057400"/>
-            <a:ext cx="1737360" cy="137160"/>
+            <a:off x="6880860" y="2103120"/>
+            <a:ext cx="1874520" cy="137160"/>
           </a:xfrm>
           <a:prstGeom prst="roundRect">
             <a:avLst>
@@ -12901,14 +13624,14 @@
       </p:sp>
       <p:sp>
         <p:nvSpPr>
-          <p:cNvPr id="36" name="Text 29"/>
-          <p:cNvSpPr txBox="1"/>
-          <p:nvPr/>
-        </p:nvSpPr>
-        <p:spPr>
-          <a:xfrm>
-            <a:off x="6935724" y="2057400"/>
-            <a:ext cx="1645920" cy="137160"/>
+          <p:cNvPr id="40" name="Text 33"/>
+          <p:cNvSpPr txBox="1"/>
+          <p:nvPr/>
+        </p:nvSpPr>
+        <p:spPr>
+          <a:xfrm>
+            <a:off x="6935724" y="2103120"/>
+            <a:ext cx="1783080" cy="137160"/>
           </a:xfrm>
           <a:prstGeom prst="rect">
             <a:avLst/>
@@ -12940,13 +13663,13 @@
       </p:sp>
       <p:sp>
         <p:nvSpPr>
-          <p:cNvPr id="37" name="Text 30"/>
-          <p:cNvSpPr txBox="1"/>
-          <p:nvPr/>
-        </p:nvSpPr>
-        <p:spPr>
-          <a:xfrm>
-            <a:off x="274320" y="2304288"/>
+          <p:cNvPr id="41" name="Text 34"/>
+          <p:cNvSpPr txBox="1"/>
+          <p:nvPr/>
+        </p:nvSpPr>
+        <p:spPr>
+          <a:xfrm>
+            <a:off x="274320" y="2395728"/>
             <a:ext cx="4297680" cy="182880"/>
           </a:xfrm>
           <a:prstGeom prst="rect">
@@ -12956,6 +13679,56 @@
           <a:ln/>
         </p:spPr>
         <p:txBody>
+          <a:bodyPr wrap="square" lIns="0" tIns="0" rIns="0" bIns="0" rtlCol="0" anchor="ctr"/>
+          <a:lstStyle/>
+          <a:p>
+            <a:pPr indent="0" marL="0">
+              <a:buNone/>
+            </a:pPr>
+            <a:r>
+              <a:rPr lang="en-US" sz="850" b="1" spc="120" kern="0" dirty="0">
+                <a:solidFill>
+                  <a:srgbClr val="1F4E79"/>
+                </a:solidFill>
+                <a:latin typeface="Calibri" pitchFamily="34" charset="0"/>
+                <a:ea typeface="Calibri" pitchFamily="34" charset="-122"/>
+                <a:cs typeface="Calibri" pitchFamily="34" charset="-120"/>
+              </a:rPr>
+              <a:t>ONE COMPLETED CALL COSTS ₹25–54  </a:t>
+            </a:r>
+            <a:r>
+              <a:rPr lang="en-US" sz="750" i="1" dirty="0">
+                <a:solidFill>
+                  <a:srgbClr val="6B7280"/>
+                </a:solidFill>
+                <a:latin typeface="Calibri" pitchFamily="34" charset="0"/>
+                <a:ea typeface="Calibri" pitchFamily="34" charset="-122"/>
+                <a:cs typeface="Calibri" pitchFamily="34" charset="-120"/>
+              </a:rPr>
+              <a:t>per person, all-in: phone + AI + SMS + human help</a:t>
+            </a:r>
+            <a:endParaRPr lang="en-US" sz="850" dirty="0"/>
+          </a:p>
+        </p:txBody>
+      </p:sp>
+      <p:sp>
+        <p:nvSpPr>
+          <p:cNvPr id="42" name="Text 35"/>
+          <p:cNvSpPr txBox="1"/>
+          <p:nvPr/>
+        </p:nvSpPr>
+        <p:spPr>
+          <a:xfrm>
+            <a:off x="274320" y="2560320"/>
+            <a:ext cx="4206240" cy="137160"/>
+          </a:xfrm>
+          <a:prstGeom prst="rect">
+            <a:avLst/>
+          </a:prstGeom>
+          <a:noFill/>
+          <a:ln/>
+        </p:spPr>
+        <p:txBody>
           <a:bodyPr wrap="square" lIns="0" tIns="0" rIns="0" bIns="0" rtlCol="0" anchor="t"/>
           <a:lstStyle/>
           <a:p>
@@ -12963,46 +13736,7 @@
               <a:buNone/>
             </a:pPr>
             <a:r>
-              <a:rPr lang="en-US" sz="850" b="1" spc="120" kern="0" dirty="0">
-                <a:solidFill>
-                  <a:srgbClr val="1F4E79"/>
-                </a:solidFill>
-                <a:latin typeface="Calibri" pitchFamily="34" charset="0"/>
-                <a:ea typeface="Calibri" pitchFamily="34" charset="-122"/>
-                <a:cs typeface="Calibri" pitchFamily="34" charset="-120"/>
-              </a:rPr>
-              <a:t>WHAT ONE COMPLETED CALL COSTS — ₹ PER PERSON</a:t>
-            </a:r>
-            <a:endParaRPr lang="en-US" sz="850" dirty="0"/>
-          </a:p>
-        </p:txBody>
-      </p:sp>
-      <p:sp>
-        <p:nvSpPr>
-          <p:cNvPr id="38" name="Text 31"/>
-          <p:cNvSpPr txBox="1"/>
-          <p:nvPr/>
-        </p:nvSpPr>
-        <p:spPr>
-          <a:xfrm>
-            <a:off x="274320" y="2468880"/>
-            <a:ext cx="4206240" cy="137160"/>
-          </a:xfrm>
-          <a:prstGeom prst="rect">
-            <a:avLst/>
-          </a:prstGeom>
-          <a:noFill/>
-          <a:ln/>
-        </p:spPr>
-        <p:txBody>
-          <a:bodyPr wrap="square" lIns="0" tIns="0" rIns="0" bIns="0" rtlCol="0" anchor="t"/>
-          <a:lstStyle/>
-          <a:p>
-            <a:pPr indent="0" marL="0">
-              <a:buNone/>
-            </a:pPr>
-            <a:r>
-              <a:rPr lang="en-US" sz="660" i="1" dirty="0">
+              <a:rPr lang="en-US" sz="640" i="1" dirty="0">
                 <a:solidFill>
                   <a:srgbClr val="6B7280"/>
                 </a:solidFill>
@@ -13012,7 +13746,7 @@
               </a:rPr>
               <a:t>Completed call = 10-min interview + options, plus 3 follow-up calls of 2 min (≈ 16 min of phone time).</a:t>
             </a:r>
-            <a:endParaRPr lang="en-US" sz="660" dirty="0"/>
+            <a:endParaRPr lang="en-US" sz="640" dirty="0"/>
           </a:p>
         </p:txBody>
       </p:sp>
@@ -13031,7 +13765,7 @@
           </p:nvPr>
         </p:nvGraphicFramePr>
         <p:xfrm>
-          <a:off x="274320" y="2615184"/>
+          <a:off x="274320" y="2706624"/>
           <a:ext cx="4206240" cy="914400"/>
         </p:xfrm>
         <a:graphic>
@@ -13044,7 +13778,7 @@
                 <a:gridCol w="365760"/>
                 <a:gridCol w="365760"/>
               </a:tblGrid>
-              <a:tr h="146304">
+              <a:tr h="141732">
                 <a:tc>
                   <a:txBody>
                     <a:bodyPr/>
@@ -13222,7 +13956,7 @@
                   </a:tcPr>
                 </a:tc>
               </a:tr>
-              <a:tr h="146304">
+              <a:tr h="141732">
                 <a:tc>
                   <a:txBody>
                     <a:bodyPr/>
@@ -13232,7 +13966,7 @@
                         <a:buNone/>
                       </a:pPr>
                       <a:r>
-                        <a:rPr lang="en-US" sz="670" b="1" dirty="0">
+                        <a:rPr lang="en-US" sz="660" b="1" dirty="0">
                           <a:solidFill>
                             <a:srgbClr val="1F2937"/>
                           </a:solidFill>
@@ -13242,7 +13976,7 @@
                         </a:rPr>
                         <a:t>Phone line (Exotel)</a:t>
                       </a:r>
-                      <a:endParaRPr lang="en-US" sz="670" dirty="0">
+                      <a:endParaRPr lang="en-US" sz="660" dirty="0">
                         <a:latin typeface="Calibri" charset="0"/>
                         <a:ea typeface="Calibri" charset="0"/>
                         <a:cs typeface="Calibri" charset="0"/>
@@ -13276,7 +14010,7 @@
                         <a:buNone/>
                       </a:pPr>
                       <a:r>
-                        <a:rPr lang="en-US" sz="670" dirty="0">
+                        <a:rPr lang="en-US" sz="660" dirty="0">
                           <a:solidFill>
                             <a:srgbClr val="1F2937"/>
                           </a:solidFill>
@@ -13286,7 +14020,7 @@
                         </a:rPr>
                         <a:t>16 min × ₹0.80–1.80, + unfinished calls &amp; 30-s billing</a:t>
                       </a:r>
-                      <a:endParaRPr lang="en-US" sz="670" dirty="0">
+                      <a:endParaRPr lang="en-US" sz="660" dirty="0">
                         <a:latin typeface="Calibri" charset="0"/>
                         <a:ea typeface="Calibri" charset="0"/>
                         <a:cs typeface="Calibri" charset="0"/>
@@ -13320,7 +14054,7 @@
                         <a:buNone/>
                       </a:pPr>
                       <a:r>
-                        <a:rPr lang="en-US" sz="670" dirty="0">
+                        <a:rPr lang="en-US" sz="660" dirty="0">
                           <a:solidFill>
                             <a:srgbClr val="1F2937"/>
                           </a:solidFill>
@@ -13330,7 +14064,7 @@
                         </a:rPr>
                         <a:t>₹14.7</a:t>
                       </a:r>
-                      <a:endParaRPr lang="en-US" sz="670" dirty="0">
+                      <a:endParaRPr lang="en-US" sz="660" dirty="0">
                         <a:latin typeface="Calibri" charset="0"/>
                         <a:ea typeface="Calibri" charset="0"/>
                         <a:cs typeface="Calibri" charset="0"/>
@@ -13364,7 +14098,7 @@
                         <a:buNone/>
                       </a:pPr>
                       <a:r>
-                        <a:rPr lang="en-US" sz="670" dirty="0">
+                        <a:rPr lang="en-US" sz="660" dirty="0">
                           <a:solidFill>
                             <a:srgbClr val="1F2937"/>
                           </a:solidFill>
@@ -13374,7 +14108,7 @@
                         </a:rPr>
                         <a:t>₹33.7</a:t>
                       </a:r>
-                      <a:endParaRPr lang="en-US" sz="670" dirty="0">
+                      <a:endParaRPr lang="en-US" sz="660" dirty="0">
                         <a:latin typeface="Calibri" charset="0"/>
                         <a:ea typeface="Calibri" charset="0"/>
                         <a:cs typeface="Calibri" charset="0"/>
@@ -13400,7 +14134,7 @@
                   </a:tcPr>
                 </a:tc>
               </a:tr>
-              <a:tr h="146304">
+              <a:tr h="141732">
                 <a:tc>
                   <a:txBody>
                     <a:bodyPr/>
@@ -13410,7 +14144,7 @@
                         <a:buNone/>
                       </a:pPr>
                       <a:r>
-                        <a:rPr lang="en-US" sz="670" b="1" dirty="0">
+                        <a:rPr lang="en-US" sz="660" b="1" dirty="0">
                           <a:solidFill>
                             <a:srgbClr val="1F2937"/>
                           </a:solidFill>
@@ -13420,7 +14154,7 @@
                         </a:rPr>
                         <a:t>Speech → text (Saaras v3)</a:t>
                       </a:r>
-                      <a:endParaRPr lang="en-US" sz="670" dirty="0">
+                      <a:endParaRPr lang="en-US" sz="660" dirty="0">
                         <a:latin typeface="Calibri" charset="0"/>
                         <a:ea typeface="Calibri" charset="0"/>
                         <a:cs typeface="Calibri" charset="0"/>
@@ -13454,7 +14188,7 @@
                         <a:buNone/>
                       </a:pPr>
                       <a:r>
-                        <a:rPr lang="en-US" sz="670" dirty="0">
+                        <a:rPr lang="en-US" sz="660" dirty="0">
                           <a:solidFill>
                             <a:srgbClr val="1F2937"/>
                           </a:solidFill>
@@ -13464,7 +14198,7 @@
                         </a:rPr>
                         <a:t>₹30 per hour; only his speech (50–60% of the call)</a:t>
                       </a:r>
-                      <a:endParaRPr lang="en-US" sz="670" dirty="0">
+                      <a:endParaRPr lang="en-US" sz="660" dirty="0">
                         <a:latin typeface="Calibri" charset="0"/>
                         <a:ea typeface="Calibri" charset="0"/>
                         <a:cs typeface="Calibri" charset="0"/>
@@ -13498,7 +14232,7 @@
                         <a:buNone/>
                       </a:pPr>
                       <a:r>
-                        <a:rPr lang="en-US" sz="670" dirty="0">
+                        <a:rPr lang="en-US" sz="660" dirty="0">
                           <a:solidFill>
                             <a:srgbClr val="1F2937"/>
                           </a:solidFill>
@@ -13508,7 +14242,7 @@
                         </a:rPr>
                         <a:t>₹4.2</a:t>
                       </a:r>
-                      <a:endParaRPr lang="en-US" sz="670" dirty="0">
+                      <a:endParaRPr lang="en-US" sz="660" dirty="0">
                         <a:latin typeface="Calibri" charset="0"/>
                         <a:ea typeface="Calibri" charset="0"/>
                         <a:cs typeface="Calibri" charset="0"/>
@@ -13542,7 +14276,7 @@
                         <a:buNone/>
                       </a:pPr>
                       <a:r>
-                        <a:rPr lang="en-US" sz="670" dirty="0">
+                        <a:rPr lang="en-US" sz="660" dirty="0">
                           <a:solidFill>
                             <a:srgbClr val="1F2937"/>
                           </a:solidFill>
@@ -13552,7 +14286,7 @@
                         </a:rPr>
                         <a:t>₹5.1</a:t>
                       </a:r>
-                      <a:endParaRPr lang="en-US" sz="670" dirty="0">
+                      <a:endParaRPr lang="en-US" sz="660" dirty="0">
                         <a:latin typeface="Calibri" charset="0"/>
                         <a:ea typeface="Calibri" charset="0"/>
                         <a:cs typeface="Calibri" charset="0"/>
@@ -13578,7 +14312,7 @@
                   </a:tcPr>
                 </a:tc>
               </a:tr>
-              <a:tr h="146304">
+              <a:tr h="141732">
                 <a:tc>
                   <a:txBody>
                     <a:bodyPr/>
@@ -13588,7 +14322,7 @@
                         <a:buNone/>
                       </a:pPr>
                       <a:r>
-                        <a:rPr lang="en-US" sz="670" b="1" dirty="0">
+                        <a:rPr lang="en-US" sz="660" b="1" dirty="0">
                           <a:solidFill>
                             <a:srgbClr val="1F2937"/>
                           </a:solidFill>
@@ -13598,7 +14332,7 @@
                         </a:rPr>
                         <a:t>Text → speech (Bulbul v3)</a:t>
                       </a:r>
-                      <a:endParaRPr lang="en-US" sz="670" dirty="0">
+                      <a:endParaRPr lang="en-US" sz="660" dirty="0">
                         <a:latin typeface="Calibri" charset="0"/>
                         <a:ea typeface="Calibri" charset="0"/>
                         <a:cs typeface="Calibri" charset="0"/>
@@ -13632,7 +14366,7 @@
                         <a:buNone/>
                       </a:pPr>
                       <a:r>
-                        <a:rPr lang="en-US" sz="670" dirty="0">
+                        <a:rPr lang="en-US" sz="660" dirty="0">
                           <a:solidFill>
                             <a:srgbClr val="1F2937"/>
                           </a:solidFill>
@@ -13642,7 +14376,7 @@
                         </a:rPr>
                         <a:t>₹3 per 1,000 characters; fixed questions pre-recorded</a:t>
                       </a:r>
-                      <a:endParaRPr lang="en-US" sz="670" dirty="0">
+                      <a:endParaRPr lang="en-US" sz="660" dirty="0">
                         <a:latin typeface="Calibri" charset="0"/>
                         <a:ea typeface="Calibri" charset="0"/>
                         <a:cs typeface="Calibri" charset="0"/>
@@ -13676,7 +14410,7 @@
                         <a:buNone/>
                       </a:pPr>
                       <a:r>
-                        <a:rPr lang="en-US" sz="670" dirty="0">
+                        <a:rPr lang="en-US" sz="660" dirty="0">
                           <a:solidFill>
                             <a:srgbClr val="1F2937"/>
                           </a:solidFill>
@@ -13686,7 +14420,7 @@
                         </a:rPr>
                         <a:t>₹2.4</a:t>
                       </a:r>
-                      <a:endParaRPr lang="en-US" sz="670" dirty="0">
+                      <a:endParaRPr lang="en-US" sz="660" dirty="0">
                         <a:latin typeface="Calibri" charset="0"/>
                         <a:ea typeface="Calibri" charset="0"/>
                         <a:cs typeface="Calibri" charset="0"/>
@@ -13720,7 +14454,7 @@
                         <a:buNone/>
                       </a:pPr>
                       <a:r>
-                        <a:rPr lang="en-US" sz="670" dirty="0">
+                        <a:rPr lang="en-US" sz="660" dirty="0">
                           <a:solidFill>
                             <a:srgbClr val="1F2937"/>
                           </a:solidFill>
@@ -13730,7 +14464,7 @@
                         </a:rPr>
                         <a:t>₹6.0</a:t>
                       </a:r>
-                      <a:endParaRPr lang="en-US" sz="670" dirty="0">
+                      <a:endParaRPr lang="en-US" sz="660" dirty="0">
                         <a:latin typeface="Calibri" charset="0"/>
                         <a:ea typeface="Calibri" charset="0"/>
                         <a:cs typeface="Calibri" charset="0"/>
@@ -13756,7 +14490,7 @@
                   </a:tcPr>
                 </a:tc>
               </a:tr>
-              <a:tr h="146304">
+              <a:tr h="141732">
                 <a:tc>
                   <a:txBody>
                     <a:bodyPr/>
@@ -13766,7 +14500,7 @@
                         <a:buNone/>
                       </a:pPr>
                       <a:r>
-                        <a:rPr lang="en-US" sz="670" b="1" dirty="0">
+                        <a:rPr lang="en-US" sz="660" b="1" dirty="0">
                           <a:solidFill>
                             <a:srgbClr val="1F2937"/>
                           </a:solidFill>
@@ -13776,7 +14510,7 @@
                         </a:rPr>
                         <a:t>AI brain (Sarvam-30B / 105B)</a:t>
                       </a:r>
-                      <a:endParaRPr lang="en-US" sz="670" dirty="0">
+                      <a:endParaRPr lang="en-US" sz="660" dirty="0">
                         <a:latin typeface="Calibri" charset="0"/>
                         <a:ea typeface="Calibri" charset="0"/>
                         <a:cs typeface="Calibri" charset="0"/>
@@ -13810,7 +14544,7 @@
                         <a:buNone/>
                       </a:pPr>
                       <a:r>
-                        <a:rPr lang="en-US" sz="670" dirty="0">
+                        <a:rPr lang="en-US" sz="660" dirty="0">
                           <a:solidFill>
                             <a:srgbClr val="1F2937"/>
                           </a:solidFill>
@@ -13820,7 +14554,7 @@
                         </a:rPr>
                         <a:t>~90% of turns on 30B; 105B only when needed</a:t>
                       </a:r>
-                      <a:endParaRPr lang="en-US" sz="670" dirty="0">
+                      <a:endParaRPr lang="en-US" sz="660" dirty="0">
                         <a:latin typeface="Calibri" charset="0"/>
                         <a:ea typeface="Calibri" charset="0"/>
                         <a:cs typeface="Calibri" charset="0"/>
@@ -13854,7 +14588,7 @@
                         <a:buNone/>
                       </a:pPr>
                       <a:r>
-                        <a:rPr lang="en-US" sz="670" dirty="0">
+                        <a:rPr lang="en-US" sz="660" dirty="0">
                           <a:solidFill>
                             <a:srgbClr val="1F2937"/>
                           </a:solidFill>
@@ -13864,7 +14598,7 @@
                         </a:rPr>
                         <a:t>₹0.25</a:t>
                       </a:r>
-                      <a:endParaRPr lang="en-US" sz="670" dirty="0">
+                      <a:endParaRPr lang="en-US" sz="660" dirty="0">
                         <a:latin typeface="Calibri" charset="0"/>
                         <a:ea typeface="Calibri" charset="0"/>
                         <a:cs typeface="Calibri" charset="0"/>
@@ -13898,7 +14632,7 @@
                         <a:buNone/>
                       </a:pPr>
                       <a:r>
-                        <a:rPr lang="en-US" sz="670" dirty="0">
+                        <a:rPr lang="en-US" sz="660" dirty="0">
                           <a:solidFill>
                             <a:srgbClr val="1F2937"/>
                           </a:solidFill>
@@ -13908,7 +14642,7 @@
                         </a:rPr>
                         <a:t>₹0.5</a:t>
                       </a:r>
-                      <a:endParaRPr lang="en-US" sz="670" dirty="0">
+                      <a:endParaRPr lang="en-US" sz="660" dirty="0">
                         <a:latin typeface="Calibri" charset="0"/>
                         <a:ea typeface="Calibri" charset="0"/>
                         <a:cs typeface="Calibri" charset="0"/>
@@ -13934,7 +14668,7 @@
                   </a:tcPr>
                 </a:tc>
               </a:tr>
-              <a:tr h="146304">
+              <a:tr h="141732">
                 <a:tc>
                   <a:txBody>
                     <a:bodyPr/>
@@ -13944,7 +14678,7 @@
                         <a:buNone/>
                       </a:pPr>
                       <a:r>
-                        <a:rPr lang="en-US" sz="670" b="1" dirty="0">
+                        <a:rPr lang="en-US" sz="660" b="1" dirty="0">
                           <a:solidFill>
                             <a:srgbClr val="1F2937"/>
                           </a:solidFill>
@@ -13954,7 +14688,7 @@
                         </a:rPr>
                         <a:t>SMS + human call-back</a:t>
                       </a:r>
-                      <a:endParaRPr lang="en-US" sz="670" dirty="0">
+                      <a:endParaRPr lang="en-US" sz="660" dirty="0">
                         <a:latin typeface="Calibri" charset="0"/>
                         <a:ea typeface="Calibri" charset="0"/>
                         <a:cs typeface="Calibri" charset="0"/>
@@ -13988,7 +14722,7 @@
                         <a:buNone/>
                       </a:pPr>
                       <a:r>
-                        <a:rPr lang="en-US" sz="670" dirty="0">
+                        <a:rPr lang="en-US" sz="660" dirty="0">
                           <a:solidFill>
                             <a:srgbClr val="1F2937"/>
                           </a:solidFill>
@@ -13998,7 +14732,7 @@
                         </a:rPr>
                         <a:t>4–6 SMS; 10–20% of callers need a human for 5–6 min</a:t>
                       </a:r>
-                      <a:endParaRPr lang="en-US" sz="670" dirty="0">
+                      <a:endParaRPr lang="en-US" sz="660" dirty="0">
                         <a:latin typeface="Calibri" charset="0"/>
                         <a:ea typeface="Calibri" charset="0"/>
                         <a:cs typeface="Calibri" charset="0"/>
@@ -14032,7 +14766,7 @@
                         <a:buNone/>
                       </a:pPr>
                       <a:r>
-                        <a:rPr lang="en-US" sz="670" dirty="0">
+                        <a:rPr lang="en-US" sz="660" dirty="0">
                           <a:solidFill>
                             <a:srgbClr val="1F2937"/>
                           </a:solidFill>
@@ -14042,7 +14776,7 @@
                         </a:rPr>
                         <a:t>₹2.2</a:t>
                       </a:r>
-                      <a:endParaRPr lang="en-US" sz="670" dirty="0">
+                      <a:endParaRPr lang="en-US" sz="660" dirty="0">
                         <a:latin typeface="Calibri" charset="0"/>
                         <a:ea typeface="Calibri" charset="0"/>
                         <a:cs typeface="Calibri" charset="0"/>
@@ -14076,7 +14810,7 @@
                         <a:buNone/>
                       </a:pPr>
                       <a:r>
-                        <a:rPr lang="en-US" sz="670" dirty="0">
+                        <a:rPr lang="en-US" sz="660" dirty="0">
                           <a:solidFill>
                             <a:srgbClr val="1F2937"/>
                           </a:solidFill>
@@ -14086,7 +14820,7 @@
                         </a:rPr>
                         <a:t>₹5.3</a:t>
                       </a:r>
-                      <a:endParaRPr lang="en-US" sz="670" dirty="0">
+                      <a:endParaRPr lang="en-US" sz="660" dirty="0">
                         <a:latin typeface="Calibri" charset="0"/>
                         <a:ea typeface="Calibri" charset="0"/>
                         <a:cs typeface="Calibri" charset="0"/>
@@ -14112,7 +14846,7 @@
                   </a:tcPr>
                 </a:tc>
               </a:tr>
-              <a:tr h="146304">
+              <a:tr h="141732">
                 <a:tc>
                   <a:txBody>
                     <a:bodyPr/>
@@ -14122,7 +14856,7 @@
                         <a:buNone/>
                       </a:pPr>
                       <a:r>
-                        <a:rPr lang="en-US" sz="670" b="1" dirty="0">
+                        <a:rPr lang="en-US" sz="660" b="1" dirty="0">
                           <a:solidFill>
                             <a:srgbClr val="1F2937"/>
                           </a:solidFill>
@@ -14132,7 +14866,7 @@
                         </a:rPr>
                         <a:t>Hosting &amp; helpline number</a:t>
                       </a:r>
-                      <a:endParaRPr lang="en-US" sz="670" dirty="0">
+                      <a:endParaRPr lang="en-US" sz="660" dirty="0">
                         <a:latin typeface="Calibri" charset="0"/>
                         <a:ea typeface="Calibri" charset="0"/>
                         <a:cs typeface="Calibri" charset="0"/>
@@ -14166,7 +14900,7 @@
                         <a:buNone/>
                       </a:pPr>
                       <a:r>
-                        <a:rPr lang="en-US" sz="670" dirty="0">
+                        <a:rPr lang="en-US" sz="660" dirty="0">
                           <a:solidFill>
                             <a:srgbClr val="1F2937"/>
                           </a:solidFill>
@@ -14176,7 +14910,7 @@
                         </a:rPr>
                         <a:t>servers, database, number — spread per call</a:t>
                       </a:r>
-                      <a:endParaRPr lang="en-US" sz="670" dirty="0">
+                      <a:endParaRPr lang="en-US" sz="660" dirty="0">
                         <a:latin typeface="Calibri" charset="0"/>
                         <a:ea typeface="Calibri" charset="0"/>
                         <a:cs typeface="Calibri" charset="0"/>
@@ -14210,7 +14944,7 @@
                         <a:buNone/>
                       </a:pPr>
                       <a:r>
-                        <a:rPr lang="en-US" sz="670" dirty="0">
+                        <a:rPr lang="en-US" sz="660" dirty="0">
                           <a:solidFill>
                             <a:srgbClr val="1F2937"/>
                           </a:solidFill>
@@ -14220,7 +14954,7 @@
                         </a:rPr>
                         <a:t>₹1.0</a:t>
                       </a:r>
-                      <a:endParaRPr lang="en-US" sz="670" dirty="0">
+                      <a:endParaRPr lang="en-US" sz="660" dirty="0">
                         <a:latin typeface="Calibri" charset="0"/>
                         <a:ea typeface="Calibri" charset="0"/>
                         <a:cs typeface="Calibri" charset="0"/>
@@ -14254,7 +14988,7 @@
                         <a:buNone/>
                       </a:pPr>
                       <a:r>
-                        <a:rPr lang="en-US" sz="670" dirty="0">
+                        <a:rPr lang="en-US" sz="660" dirty="0">
                           <a:solidFill>
                             <a:srgbClr val="1F2937"/>
                           </a:solidFill>
@@ -14264,7 +14998,7 @@
                         </a:rPr>
                         <a:t>₹3.0</a:t>
                       </a:r>
-                      <a:endParaRPr lang="en-US" sz="670" dirty="0">
+                      <a:endParaRPr lang="en-US" sz="660" dirty="0">
                         <a:latin typeface="Calibri" charset="0"/>
                         <a:ea typeface="Calibri" charset="0"/>
                         <a:cs typeface="Calibri" charset="0"/>
@@ -14290,7 +15024,7 @@
                   </a:tcPr>
                 </a:tc>
               </a:tr>
-              <a:tr h="146304">
+              <a:tr h="141732">
                 <a:tc>
                   <a:txBody>
                     <a:bodyPr/>
@@ -14300,7 +15034,7 @@
                         <a:buNone/>
                       </a:pPr>
                       <a:r>
-                        <a:rPr lang="en-US" sz="670" b="1" dirty="0">
+                        <a:rPr lang="en-US" sz="660" b="1" dirty="0">
                           <a:solidFill>
                             <a:srgbClr val="FFFFFF"/>
                           </a:solidFill>
@@ -14310,7 +15044,7 @@
                         </a:rPr>
                         <a:t>TOTAL per completed profile</a:t>
                       </a:r>
-                      <a:endParaRPr lang="en-US" sz="670" dirty="0">
+                      <a:endParaRPr lang="en-US" sz="660" dirty="0">
                         <a:latin typeface="Calibri" charset="0"/>
                         <a:ea typeface="Calibri" charset="0"/>
                         <a:cs typeface="Calibri" charset="0"/>
@@ -14344,7 +15078,7 @@
                         <a:buNone/>
                       </a:pPr>
                       <a:r>
-                        <a:rPr lang="en-US" sz="670" b="1" dirty="0">
+                        <a:rPr lang="en-US" sz="660" b="1" dirty="0">
                           <a:solidFill>
                             <a:srgbClr val="FFFFFF"/>
                           </a:solidFill>
@@ -14354,7 +15088,7 @@
                         </a:rPr>
                         <a:t>1,000 missed calls → 420–517 finished profiles</a:t>
                       </a:r>
-                      <a:endParaRPr lang="en-US" sz="670" dirty="0">
+                      <a:endParaRPr lang="en-US" sz="660" dirty="0">
                         <a:latin typeface="Calibri" charset="0"/>
                         <a:ea typeface="Calibri" charset="0"/>
                         <a:cs typeface="Calibri" charset="0"/>
@@ -14388,7 +15122,7 @@
                         <a:buNone/>
                       </a:pPr>
                       <a:r>
-                        <a:rPr lang="en-US" sz="670" b="1" dirty="0">
+                        <a:rPr lang="en-US" sz="660" b="1" dirty="0">
                           <a:solidFill>
                             <a:srgbClr val="FFFFFF"/>
                           </a:solidFill>
@@ -14398,7 +15132,7 @@
                         </a:rPr>
                         <a:t>≈ ₹25</a:t>
                       </a:r>
-                      <a:endParaRPr lang="en-US" sz="670" dirty="0">
+                      <a:endParaRPr lang="en-US" sz="660" dirty="0">
                         <a:latin typeface="Calibri" charset="0"/>
                         <a:ea typeface="Calibri" charset="0"/>
                         <a:cs typeface="Calibri" charset="0"/>
@@ -14432,7 +15166,7 @@
                         <a:buNone/>
                       </a:pPr>
                       <a:r>
-                        <a:rPr lang="en-US" sz="670" b="1" dirty="0">
+                        <a:rPr lang="en-US" sz="660" b="1" dirty="0">
                           <a:solidFill>
                             <a:srgbClr val="FFFFFF"/>
                           </a:solidFill>
@@ -14442,7 +15176,7 @@
                         </a:rPr>
                         <a:t>≈ ₹54</a:t>
                       </a:r>
-                      <a:endParaRPr lang="en-US" sz="670" dirty="0">
+                      <a:endParaRPr lang="en-US" sz="660" dirty="0">
                         <a:latin typeface="Calibri" charset="0"/>
                         <a:ea typeface="Calibri" charset="0"/>
                         <a:cs typeface="Calibri" charset="0"/>
@@ -14474,18 +15208,18 @@
       </p:graphicFrame>
       <p:sp>
         <p:nvSpPr>
-          <p:cNvPr id="40" name="Shape 32"/>
+          <p:cNvPr id="44" name="Shape 36"/>
           <p:cNvSpPr/>
           <p:nvPr/>
         </p:nvSpPr>
         <p:spPr>
           <a:xfrm>
-            <a:off x="274320" y="3822192"/>
-            <a:ext cx="4206240" cy="329184"/>
+            <a:off x="274320" y="3877056"/>
+            <a:ext cx="4206240" cy="365760"/>
           </a:xfrm>
           <a:prstGeom prst="roundRect">
             <a:avLst>
-              <a:gd name="adj" fmla="val 13889"/>
+              <a:gd name="adj" fmla="val 12500"/>
             </a:avLst>
           </a:prstGeom>
           <a:solidFill>
@@ -14501,30 +15235,30 @@
       </p:sp>
       <p:sp>
         <p:nvSpPr>
-          <p:cNvPr id="41" name="Text 33"/>
-          <p:cNvSpPr txBox="1"/>
-          <p:nvPr/>
-        </p:nvSpPr>
-        <p:spPr>
-          <a:xfrm>
-            <a:off x="347472" y="3822192"/>
-            <a:ext cx="4069080" cy="329184"/>
-          </a:xfrm>
-          <a:prstGeom prst="rect">
-            <a:avLst/>
-          </a:prstGeom>
-          <a:noFill/>
-          <a:ln/>
-        </p:spPr>
-        <p:txBody>
-          <a:bodyPr wrap="square" lIns="0" tIns="0" rIns="0" bIns="0" rtlCol="0" anchor="ctr"/>
-          <a:lstStyle/>
-          <a:p>
-            <a:pPr indent="0" marL="0">
-              <a:buNone/>
-            </a:pPr>
-            <a:r>
-              <a:rPr lang="en-US" sz="620" b="1" dirty="0">
+          <p:cNvPr id="45" name="Text 37"/>
+          <p:cNvSpPr txBox="1"/>
+          <p:nvPr/>
+        </p:nvSpPr>
+        <p:spPr>
+          <a:xfrm>
+            <a:off x="347472" y="3886200"/>
+            <a:ext cx="4069080" cy="347472"/>
+          </a:xfrm>
+          <a:prstGeom prst="rect">
+            <a:avLst/>
+          </a:prstGeom>
+          <a:noFill/>
+          <a:ln/>
+        </p:spPr>
+        <p:txBody>
+          <a:bodyPr wrap="square" lIns="0" tIns="0" rIns="0" bIns="0" rtlCol="0" anchor="t"/>
+          <a:lstStyle/>
+          <a:p>
+            <a:pPr indent="0" marL="0">
+              <a:buNone/>
+            </a:pPr>
+            <a:r>
+              <a:rPr lang="en-US" sz="750" b="1" dirty="0">
                 <a:solidFill>
                   <a:srgbClr val="1F9D63"/>
                 </a:solidFill>
@@ -14532,10 +15266,21 @@
                 <a:ea typeface="Calibri" pitchFamily="34" charset="-122"/>
                 <a:cs typeface="Calibri" pitchFamily="34" charset="-120"/>
               </a:rPr>
-              <a:t>Falls further over time: </a:t>
-            </a:r>
-            <a:r>
-              <a:rPr lang="en-US" sz="620" dirty="0">
+              <a:t>Cost falls further over time  </a:t>
+            </a:r>
+            <a:r>
+              <a:rPr lang="en-US" sz="650" b="1" dirty="0">
+                <a:solidFill>
+                  <a:srgbClr val="5B6B7F"/>
+                </a:solidFill>
+                <a:latin typeface="Calibri" pitchFamily="34" charset="0"/>
+                <a:ea typeface="Calibri" pitchFamily="34" charset="-122"/>
+                <a:cs typeface="Calibri" pitchFamily="34" charset="-120"/>
+              </a:rPr>
+              <a:t>cached answers, cheaper cached tokens, free self-hosted speech</a:t>
+            </a:r>
+            <a:r>
+              <a:rPr lang="en-US" sz="610" dirty="0">
                 <a:solidFill>
                   <a:srgbClr val="1F2937"/>
                 </a:solidFill>
@@ -14543,21 +15288,33 @@
                 <a:ea typeface="Calibri" pitchFamily="34" charset="-122"/>
                 <a:cs typeface="Calibri" pitchFamily="34" charset="-120"/>
               </a:rPr>
-              <a:t>frequent questions get pre-written, verified answers and pre-recorded audio (answer cache, slide 3), and Sarvam bills cached input at ₹10.98 vs ₹29.28 per 1M tokens. At national scale ~70% of speech moves to free self-hosted IndicConformer → ₹21–49 per profile.</a:t>
-            </a:r>
-            <a:endParaRPr lang="en-US" sz="620" dirty="0"/>
-          </a:p>
-        </p:txBody>
-      </p:sp>
-      <p:sp>
-        <p:nvSpPr>
-          <p:cNvPr id="42" name="Shape 34"/>
+              <a:t>
+</a:t>
+            </a:r>
+            <a:r>
+              <a:rPr lang="en-US" sz="610" dirty="0">
+                <a:solidFill>
+                  <a:srgbClr val="1F2937"/>
+                </a:solidFill>
+                <a:latin typeface="Calibri" pitchFamily="34" charset="0"/>
+                <a:ea typeface="Calibri" pitchFamily="34" charset="-122"/>
+                <a:cs typeface="Calibri" pitchFamily="34" charset="-120"/>
+              </a:rPr>
+              <a:t>Frequent questions get pre-written, verified answers and audio (answer cache, slide 3); Sarvam bills cached input at ₹10.98 vs ₹29.28 per 1M tokens; at national scale ~70% of speech moves to free IndicConformer → ₹21–49 per profile.</a:t>
+            </a:r>
+            <a:endParaRPr lang="en-US" sz="610" dirty="0"/>
+          </a:p>
+        </p:txBody>
+      </p:sp>
+      <p:sp>
+        <p:nvSpPr>
+          <p:cNvPr id="46" name="Shape 38"/>
           <p:cNvSpPr/>
           <p:nvPr/>
         </p:nvSpPr>
         <p:spPr>
           <a:xfrm>
-            <a:off x="274320" y="4178808"/>
+            <a:off x="274320" y="4279392"/>
             <a:ext cx="4206240" cy="137160"/>
           </a:xfrm>
           <a:prstGeom prst="roundRect">
@@ -14578,13 +15335,13 @@
       </p:sp>
       <p:sp>
         <p:nvSpPr>
-          <p:cNvPr id="43" name="Text 35"/>
-          <p:cNvSpPr txBox="1"/>
-          <p:nvPr/>
-        </p:nvSpPr>
-        <p:spPr>
-          <a:xfrm>
-            <a:off x="329184" y="4178808"/>
+          <p:cNvPr id="47" name="Text 39"/>
+          <p:cNvSpPr txBox="1"/>
+          <p:nvPr/>
+        </p:nvSpPr>
+        <p:spPr>
+          <a:xfrm>
+            <a:off x="329184" y="4279392"/>
             <a:ext cx="4114800" cy="137160"/>
           </a:xfrm>
           <a:prstGeom prst="rect">
@@ -14617,23 +15374,23 @@
       </p:sp>
       <p:sp>
         <p:nvSpPr>
-          <p:cNvPr id="44" name="Text 36"/>
-          <p:cNvSpPr txBox="1"/>
-          <p:nvPr/>
-        </p:nvSpPr>
-        <p:spPr>
-          <a:xfrm>
-            <a:off x="4709160" y="2304288"/>
-            <a:ext cx="4114800" cy="182880"/>
-          </a:xfrm>
-          <a:prstGeom prst="rect">
-            <a:avLst/>
-          </a:prstGeom>
-          <a:noFill/>
-          <a:ln/>
-        </p:spPr>
-        <p:txBody>
-          <a:bodyPr wrap="square" lIns="0" tIns="0" rIns="0" bIns="0" rtlCol="0" anchor="t"/>
+          <p:cNvPr id="48" name="Text 40"/>
+          <p:cNvSpPr txBox="1"/>
+          <p:nvPr/>
+        </p:nvSpPr>
+        <p:spPr>
+          <a:xfrm>
+            <a:off x="4709160" y="2395728"/>
+            <a:ext cx="4160520" cy="182880"/>
+          </a:xfrm>
+          <a:prstGeom prst="rect">
+            <a:avLst/>
+          </a:prstGeom>
+          <a:noFill/>
+          <a:ln/>
+        </p:spPr>
+        <p:txBody>
+          <a:bodyPr wrap="square" lIns="0" tIns="0" rIns="0" bIns="0" rtlCol="0" anchor="ctr"/>
           <a:lstStyle/>
           <a:p>
             <a:pPr indent="0" marL="0">
@@ -14648,7 +15405,18 @@
                 <a:ea typeface="Calibri" pitchFamily="34" charset="-122"/>
                 <a:cs typeface="Calibri" pitchFamily="34" charset="-120"/>
               </a:rPr>
-              <a:t>WHO GETS THROUGH — AND WHO NEEDS A HUMAN</a:t>
+              <a:t>76% OF CALLS ANSWERED BY THE 3RD TRY  </a:t>
+            </a:r>
+            <a:r>
+              <a:rPr lang="en-US" sz="750" i="1" dirty="0">
+                <a:solidFill>
+                  <a:srgbClr val="6B7280"/>
+                </a:solidFill>
+                <a:latin typeface="Calibri" pitchFamily="34" charset="0"/>
+                <a:ea typeface="Calibri" pitchFamily="34" charset="-122"/>
+                <a:cs typeface="Calibri" pitchFamily="34" charset="-120"/>
+              </a:rPr>
+              <a:t>and only 10–20% ever need a human</a:t>
             </a:r>
             <a:endParaRPr lang="en-US" sz="850" dirty="0"/>
           </a:p>
@@ -14656,18 +15424,18 @@
       </p:sp>
       <p:sp>
         <p:nvSpPr>
-          <p:cNvPr id="45" name="Shape 37"/>
+          <p:cNvPr id="49" name="Shape 41"/>
           <p:cNvSpPr/>
           <p:nvPr/>
         </p:nvSpPr>
         <p:spPr>
           <a:xfrm>
-            <a:off x="4709160" y="2487168"/>
-            <a:ext cx="4160520" cy="932688"/>
+            <a:off x="4709160" y="2596896"/>
+            <a:ext cx="4160520" cy="914400"/>
           </a:xfrm>
           <a:prstGeom prst="roundRect">
             <a:avLst>
-              <a:gd name="adj" fmla="val 7843"/>
+              <a:gd name="adj" fmla="val 8000"/>
             </a:avLst>
           </a:prstGeom>
           <a:solidFill>
@@ -14683,13 +15451,13 @@
       </p:sp>
       <p:sp>
         <p:nvSpPr>
-          <p:cNvPr id="46" name="Shape 38"/>
+          <p:cNvPr id="50" name="Shape 42"/>
           <p:cNvSpPr/>
           <p:nvPr/>
         </p:nvSpPr>
         <p:spPr>
           <a:xfrm>
-            <a:off x="4800600" y="2587752"/>
+            <a:off x="4800600" y="2697480"/>
             <a:ext cx="91440" cy="91440"/>
           </a:xfrm>
           <a:prstGeom prst="ellipse">
@@ -14708,13 +15476,13 @@
       </p:sp>
       <p:sp>
         <p:nvSpPr>
-          <p:cNvPr id="47" name="Text 39"/>
-          <p:cNvSpPr txBox="1"/>
-          <p:nvPr/>
-        </p:nvSpPr>
-        <p:spPr>
-          <a:xfrm>
-            <a:off x="4956048" y="2532888"/>
+          <p:cNvPr id="51" name="Text 43"/>
+          <p:cNvSpPr txBox="1"/>
+          <p:nvPr/>
+        </p:nvSpPr>
+        <p:spPr>
+          <a:xfrm>
+            <a:off x="4956048" y="2642616"/>
             <a:ext cx="2487168" cy="201168"/>
           </a:xfrm>
           <a:prstGeom prst="rect">
@@ -14731,7 +15499,7 @@
               <a:buNone/>
             </a:pPr>
             <a:r>
-              <a:rPr lang="en-US" sz="660" dirty="0">
+              <a:rPr lang="en-US" sz="650" dirty="0">
                 <a:solidFill>
                   <a:srgbClr val="1F2937"/>
                 </a:solidFill>
@@ -14741,19 +15509,19 @@
               </a:rPr>
               <a:t>50% answer on the 1st attempt, 76% by the 3rd, 99.5% by the 9th</a:t>
             </a:r>
-            <a:endParaRPr lang="en-US" sz="660" dirty="0"/>
-          </a:p>
-        </p:txBody>
-      </p:sp>
-      <p:sp>
-        <p:nvSpPr>
-          <p:cNvPr id="48" name="Shape 40"/>
+            <a:endParaRPr lang="en-US" sz="650" dirty="0"/>
+          </a:p>
+        </p:txBody>
+      </p:sp>
+      <p:sp>
+        <p:nvSpPr>
+          <p:cNvPr id="52" name="Shape 44"/>
           <p:cNvSpPr/>
           <p:nvPr/>
         </p:nvSpPr>
         <p:spPr>
           <a:xfrm>
-            <a:off x="7479792" y="2564892"/>
+            <a:off x="7479792" y="2674620"/>
             <a:ext cx="1344168" cy="137160"/>
           </a:xfrm>
           <a:prstGeom prst="roundRect">
@@ -14774,13 +15542,13 @@
       </p:sp>
       <p:sp>
         <p:nvSpPr>
-          <p:cNvPr id="49" name="Text 41"/>
-          <p:cNvSpPr txBox="1"/>
-          <p:nvPr/>
-        </p:nvSpPr>
-        <p:spPr>
-          <a:xfrm>
-            <a:off x="7534656" y="2564892"/>
+          <p:cNvPr id="53" name="Text 45"/>
+          <p:cNvSpPr txBox="1"/>
+          <p:nvPr/>
+        </p:nvSpPr>
+        <p:spPr>
+          <a:xfrm>
+            <a:off x="7534656" y="2674620"/>
             <a:ext cx="1252728" cy="137160"/>
           </a:xfrm>
           <a:prstGeom prst="rect">
@@ -14813,13 +15581,13 @@
       </p:sp>
       <p:sp>
         <p:nvSpPr>
-          <p:cNvPr id="50" name="Shape 42"/>
+          <p:cNvPr id="54" name="Shape 46"/>
           <p:cNvSpPr/>
           <p:nvPr/>
         </p:nvSpPr>
         <p:spPr>
           <a:xfrm>
-            <a:off x="4800600" y="2807208"/>
+            <a:off x="4800600" y="2912364"/>
             <a:ext cx="91440" cy="91440"/>
           </a:xfrm>
           <a:prstGeom prst="ellipse">
@@ -14838,13 +15606,13 @@
       </p:sp>
       <p:sp>
         <p:nvSpPr>
-          <p:cNvPr id="51" name="Text 43"/>
-          <p:cNvSpPr txBox="1"/>
-          <p:nvPr/>
-        </p:nvSpPr>
-        <p:spPr>
-          <a:xfrm>
-            <a:off x="4956048" y="2752344"/>
+          <p:cNvPr id="55" name="Text 47"/>
+          <p:cNvSpPr txBox="1"/>
+          <p:nvPr/>
+        </p:nvSpPr>
+        <p:spPr>
+          <a:xfrm>
+            <a:off x="4956048" y="2857500"/>
             <a:ext cx="2487168" cy="201168"/>
           </a:xfrm>
           <a:prstGeom prst="rect">
@@ -14861,7 +15629,7 @@
               <a:buNone/>
             </a:pPr>
             <a:r>
-              <a:rPr lang="en-US" sz="660" dirty="0">
+              <a:rPr lang="en-US" sz="650" dirty="0">
                 <a:solidFill>
                   <a:srgbClr val="1F2937"/>
                 </a:solidFill>
@@ -14871,19 +15639,19 @@
               </a:rPr>
               <a:t>~80% of answered calls finish the interview; ~85% of those finish the options → 420–517 profiles per 1,000 missed calls</a:t>
             </a:r>
-            <a:endParaRPr lang="en-US" sz="660" dirty="0"/>
-          </a:p>
-        </p:txBody>
-      </p:sp>
-      <p:sp>
-        <p:nvSpPr>
-          <p:cNvPr id="52" name="Shape 44"/>
+            <a:endParaRPr lang="en-US" sz="650" dirty="0"/>
+          </a:p>
+        </p:txBody>
+      </p:sp>
+      <p:sp>
+        <p:nvSpPr>
+          <p:cNvPr id="56" name="Shape 48"/>
           <p:cNvSpPr/>
           <p:nvPr/>
         </p:nvSpPr>
         <p:spPr>
           <a:xfrm>
-            <a:off x="7479792" y="2784348"/>
+            <a:off x="7479792" y="2889504"/>
             <a:ext cx="1344168" cy="137160"/>
           </a:xfrm>
           <a:prstGeom prst="roundRect">
@@ -14904,13 +15672,13 @@
       </p:sp>
       <p:sp>
         <p:nvSpPr>
-          <p:cNvPr id="53" name="Text 45"/>
-          <p:cNvSpPr txBox="1"/>
-          <p:nvPr/>
-        </p:nvSpPr>
-        <p:spPr>
-          <a:xfrm>
-            <a:off x="7534656" y="2784348"/>
+          <p:cNvPr id="57" name="Text 49"/>
+          <p:cNvSpPr txBox="1"/>
+          <p:nvPr/>
+        </p:nvSpPr>
+        <p:spPr>
+          <a:xfrm>
+            <a:off x="7534656" y="2889504"/>
             <a:ext cx="1252728" cy="137160"/>
           </a:xfrm>
           <a:prstGeom prst="rect">
@@ -14943,13 +15711,13 @@
       </p:sp>
       <p:sp>
         <p:nvSpPr>
-          <p:cNvPr id="54" name="Shape 46"/>
+          <p:cNvPr id="58" name="Shape 50"/>
           <p:cNvSpPr/>
           <p:nvPr/>
         </p:nvSpPr>
         <p:spPr>
           <a:xfrm>
-            <a:off x="4800600" y="3026664"/>
+            <a:off x="4800600" y="3127248"/>
             <a:ext cx="91440" cy="91440"/>
           </a:xfrm>
           <a:prstGeom prst="ellipse">
@@ -14968,13 +15736,13 @@
       </p:sp>
       <p:sp>
         <p:nvSpPr>
-          <p:cNvPr id="55" name="Text 47"/>
-          <p:cNvSpPr txBox="1"/>
-          <p:nvPr/>
-        </p:nvSpPr>
-        <p:spPr>
-          <a:xfrm>
-            <a:off x="4956048" y="2971800"/>
+          <p:cNvPr id="59" name="Text 51"/>
+          <p:cNvSpPr txBox="1"/>
+          <p:nvPr/>
+        </p:nvSpPr>
+        <p:spPr>
+          <a:xfrm>
+            <a:off x="4956048" y="3072384"/>
             <a:ext cx="2487168" cy="201168"/>
           </a:xfrm>
           <a:prstGeom prst="rect">
@@ -14991,7 +15759,7 @@
               <a:buNone/>
             </a:pPr>
             <a:r>
-              <a:rPr lang="en-US" sz="660" dirty="0">
+              <a:rPr lang="en-US" sz="650" dirty="0">
                 <a:solidFill>
                   <a:srgbClr val="1F2937"/>
                 </a:solidFill>
@@ -15001,19 +15769,19 @@
               </a:rPr>
               <a:t>10–20% need a human counsellor call-back — design target ≤ 20%</a:t>
             </a:r>
-            <a:endParaRPr lang="en-US" sz="660" dirty="0"/>
-          </a:p>
-        </p:txBody>
-      </p:sp>
-      <p:sp>
-        <p:nvSpPr>
-          <p:cNvPr id="56" name="Shape 48"/>
+            <a:endParaRPr lang="en-US" sz="650" dirty="0"/>
+          </a:p>
+        </p:txBody>
+      </p:sp>
+      <p:sp>
+        <p:nvSpPr>
+          <p:cNvPr id="60" name="Shape 52"/>
           <p:cNvSpPr/>
           <p:nvPr/>
         </p:nvSpPr>
         <p:spPr>
           <a:xfrm>
-            <a:off x="7479792" y="3003804"/>
+            <a:off x="7479792" y="3104388"/>
             <a:ext cx="1344168" cy="137160"/>
           </a:xfrm>
           <a:prstGeom prst="roundRect">
@@ -15034,13 +15802,13 @@
       </p:sp>
       <p:sp>
         <p:nvSpPr>
-          <p:cNvPr id="57" name="Text 49"/>
-          <p:cNvSpPr txBox="1"/>
-          <p:nvPr/>
-        </p:nvSpPr>
-        <p:spPr>
-          <a:xfrm>
-            <a:off x="7534656" y="3003804"/>
+          <p:cNvPr id="61" name="Text 53"/>
+          <p:cNvSpPr txBox="1"/>
+          <p:nvPr/>
+        </p:nvSpPr>
+        <p:spPr>
+          <a:xfrm>
+            <a:off x="7534656" y="3104388"/>
             <a:ext cx="1252728" cy="137160"/>
           </a:xfrm>
           <a:prstGeom prst="rect">
@@ -15073,13 +15841,13 @@
       </p:sp>
       <p:sp>
         <p:nvSpPr>
-          <p:cNvPr id="58" name="Shape 50"/>
+          <p:cNvPr id="62" name="Shape 54"/>
           <p:cNvSpPr/>
           <p:nvPr/>
         </p:nvSpPr>
         <p:spPr>
           <a:xfrm>
-            <a:off x="4800600" y="3246120"/>
+            <a:off x="4800600" y="3342132"/>
             <a:ext cx="91440" cy="91440"/>
           </a:xfrm>
           <a:prstGeom prst="ellipse">
@@ -15098,13 +15866,13 @@
       </p:sp>
       <p:sp>
         <p:nvSpPr>
-          <p:cNvPr id="59" name="Text 51"/>
-          <p:cNvSpPr txBox="1"/>
-          <p:nvPr/>
-        </p:nvSpPr>
-        <p:spPr>
-          <a:xfrm>
-            <a:off x="4956048" y="3191256"/>
+          <p:cNvPr id="63" name="Text 55"/>
+          <p:cNvSpPr txBox="1"/>
+          <p:nvPr/>
+        </p:nvSpPr>
+        <p:spPr>
+          <a:xfrm>
+            <a:off x="4956048" y="3287268"/>
             <a:ext cx="2487168" cy="201168"/>
           </a:xfrm>
           <a:prstGeom prst="rect">
@@ -15121,7 +15889,7 @@
               <a:buNone/>
             </a:pPr>
             <a:r>
-              <a:rPr lang="en-US" sz="660" dirty="0">
+              <a:rPr lang="en-US" sz="650" dirty="0">
                 <a:solidFill>
                   <a:srgbClr val="1F2937"/>
                 </a:solidFill>
@@ -15131,29 +15899,29 @@
               </a:rPr>
               <a:t>Can't be reached by phone? The web portal (mobile + OTP) is always open.</a:t>
             </a:r>
-            <a:endParaRPr lang="en-US" sz="660" dirty="0"/>
-          </a:p>
-        </p:txBody>
-      </p:sp>
-      <p:sp>
-        <p:nvSpPr>
-          <p:cNvPr id="60" name="Text 52"/>
-          <p:cNvSpPr txBox="1"/>
-          <p:nvPr/>
-        </p:nvSpPr>
-        <p:spPr>
-          <a:xfrm>
-            <a:off x="4709160" y="3493008"/>
-            <a:ext cx="4114800" cy="182880"/>
-          </a:xfrm>
-          <a:prstGeom prst="rect">
-            <a:avLst/>
-          </a:prstGeom>
-          <a:noFill/>
-          <a:ln/>
-        </p:spPr>
-        <p:txBody>
-          <a:bodyPr wrap="square" lIns="0" tIns="0" rIns="0" bIns="0" rtlCol="0" anchor="t"/>
+            <a:endParaRPr lang="en-US" sz="650" dirty="0"/>
+          </a:p>
+        </p:txBody>
+      </p:sp>
+      <p:sp>
+        <p:nvSpPr>
+          <p:cNvPr id="64" name="Text 56"/>
+          <p:cNvSpPr txBox="1"/>
+          <p:nvPr/>
+        </p:nvSpPr>
+        <p:spPr>
+          <a:xfrm>
+            <a:off x="4709160" y="3602736"/>
+            <a:ext cx="4160520" cy="182880"/>
+          </a:xfrm>
+          <a:prstGeom prst="rect">
+            <a:avLst/>
+          </a:prstGeom>
+          <a:noFill/>
+          <a:ln/>
+        </p:spPr>
+        <p:txBody>
+          <a:bodyPr wrap="square" lIns="0" tIns="0" rIns="0" bIns="0" rtlCol="0" anchor="ctr"/>
           <a:lstStyle/>
           <a:p>
             <a:pPr indent="0" marL="0">
@@ -15168,7 +15936,18 @@
                 <a:ea typeface="Calibri" pitchFamily="34" charset="-122"/>
                 <a:cs typeface="Calibri" pitchFamily="34" charset="-120"/>
               </a:rPr>
-              <a:t>CAN THE GOVERNMENT AFFORD IT?</a:t>
+              <a:t>THE GOVERNMENT CAN AFFORD IT  </a:t>
+            </a:r>
+            <a:r>
+              <a:rPr lang="en-US" sz="750" i="1" dirty="0">
+                <a:solidFill>
+                  <a:srgbClr val="6B7280"/>
+                </a:solidFill>
+                <a:latin typeface="Calibri" pitchFamily="34" charset="0"/>
+                <a:ea typeface="Calibri" pitchFamily="34" charset="-122"/>
+                <a:cs typeface="Calibri" pitchFamily="34" charset="-120"/>
+              </a:rPr>
+              <a:t>less than ₹1 of every ₹100 it already spends</a:t>
             </a:r>
             <a:endParaRPr lang="en-US" sz="850" dirty="0"/>
           </a:p>
@@ -15176,18 +15955,18 @@
       </p:sp>
       <p:sp>
         <p:nvSpPr>
-          <p:cNvPr id="61" name="Shape 53"/>
+          <p:cNvPr id="65" name="Shape 57"/>
           <p:cNvSpPr/>
           <p:nvPr/>
         </p:nvSpPr>
         <p:spPr>
           <a:xfrm>
-            <a:off x="4709160" y="3675888"/>
-            <a:ext cx="4160520" cy="347472"/>
+            <a:off x="4709160" y="3803904"/>
+            <a:ext cx="4160520" cy="329184"/>
           </a:xfrm>
           <a:prstGeom prst="roundRect">
             <a:avLst>
-              <a:gd name="adj" fmla="val 21053"/>
+              <a:gd name="adj" fmla="val 22222"/>
             </a:avLst>
           </a:prstGeom>
           <a:solidFill>
@@ -15203,14 +15982,14 @@
       </p:sp>
       <p:sp>
         <p:nvSpPr>
-          <p:cNvPr id="62" name="Shape 54"/>
+          <p:cNvPr id="66" name="Shape 58"/>
           <p:cNvSpPr/>
           <p:nvPr/>
         </p:nvSpPr>
         <p:spPr>
           <a:xfrm>
-            <a:off x="4773168" y="3726180"/>
-            <a:ext cx="246888" cy="246888"/>
+            <a:off x="4773168" y="3849624"/>
+            <a:ext cx="237744" cy="237744"/>
           </a:xfrm>
           <a:prstGeom prst="roundRect">
             <a:avLst>
@@ -15230,7 +16009,7 @@
       </p:sp>
       <p:pic>
         <p:nvPicPr>
-          <p:cNvPr id="63" name="Image 5" descr="preencoded.png">    </p:cNvPr>
+          <p:cNvPr id="67" name="Image 5" descr="preencoded.png">    </p:cNvPr>
           <p:cNvPicPr>
             <a:picLocks noChangeAspect="1"/>
           </p:cNvPicPr>
@@ -15244,8 +16023,8 @@
         </p:blipFill>
         <p:spPr>
           <a:xfrm>
-            <a:off x="4810201" y="3763213"/>
-            <a:ext cx="172822" cy="172822"/>
+            <a:off x="4808830" y="3885286"/>
+            <a:ext cx="166421" cy="166421"/>
           </a:xfrm>
           <a:prstGeom prst="rect">
             <a:avLst/>
@@ -15254,14 +16033,14 @@
       </p:pic>
       <p:sp>
         <p:nvSpPr>
-          <p:cNvPr id="64" name="Text 55"/>
-          <p:cNvSpPr txBox="1"/>
-          <p:nvPr/>
-        </p:nvSpPr>
-        <p:spPr>
-          <a:xfrm>
-            <a:off x="5084064" y="3675888"/>
-            <a:ext cx="3730752" cy="347472"/>
+          <p:cNvPr id="68" name="Text 59"/>
+          <p:cNvSpPr txBox="1"/>
+          <p:nvPr/>
+        </p:nvSpPr>
+        <p:spPr>
+          <a:xfrm>
+            <a:off x="5084064" y="3822192"/>
+            <a:ext cx="3730752" cy="310896"/>
           </a:xfrm>
           <a:prstGeom prst="rect">
             <a:avLst/>
@@ -15277,7 +16056,7 @@
               <a:buNone/>
             </a:pPr>
             <a:r>
-              <a:rPr lang="en-US" sz="750" b="1" dirty="0">
+              <a:rPr lang="en-US" sz="780" b="1" dirty="0">
                 <a:solidFill>
                   <a:srgbClr val="1F9D63"/>
                 </a:solidFill>
@@ -15288,7 +16067,24 @@
               <a:t>0.05–0.10% of the budget  </a:t>
             </a:r>
             <a:r>
-              <a:rPr lang="en-US" sz="650" dirty="0">
+              <a:rPr lang="en-US" sz="650" b="1" dirty="0">
+                <a:solidFill>
+                  <a:srgbClr val="5B6B7F"/>
+                </a:solidFill>
+                <a:latin typeface="Calibri" pitchFamily="34" charset="0"/>
+                <a:ea typeface="Calibri" pitchFamily="34" charset="-122"/>
+                <a:cs typeface="Calibri" pitchFamily="34" charset="-120"/>
+              </a:rPr>
+              <a:t>is all SkillCall needs</a:t>
+            </a:r>
+            <a:endParaRPr lang="en-US" sz="780" dirty="0"/>
+          </a:p>
+          <a:p>
+            <a:pPr indent="0" marL="0">
+              <a:buNone/>
+            </a:pPr>
+            <a:r>
+              <a:rPr lang="en-US" sz="620" dirty="0">
                 <a:solidFill>
                   <a:srgbClr val="1F2937"/>
                 </a:solidFill>
@@ -15298,24 +16094,24 @@
               </a:rPr>
               <a:t>All of India: ₹1.1–2.1 crore a year vs PM-AJAY's ₹2,140 crore (2026-27).</a:t>
             </a:r>
-            <a:endParaRPr lang="en-US" sz="650" dirty="0"/>
-          </a:p>
-        </p:txBody>
-      </p:sp>
-      <p:sp>
-        <p:nvSpPr>
-          <p:cNvPr id="65" name="Shape 56"/>
+            <a:endParaRPr lang="en-US" sz="780" dirty="0"/>
+          </a:p>
+        </p:txBody>
+      </p:sp>
+      <p:sp>
+        <p:nvSpPr>
+          <p:cNvPr id="69" name="Shape 60"/>
           <p:cNvSpPr/>
           <p:nvPr/>
         </p:nvSpPr>
         <p:spPr>
           <a:xfrm>
-            <a:off x="4709160" y="4059936"/>
-            <a:ext cx="4160520" cy="347472"/>
+            <a:off x="4709160" y="4169664"/>
+            <a:ext cx="4160520" cy="329184"/>
           </a:xfrm>
           <a:prstGeom prst="roundRect">
             <a:avLst>
-              <a:gd name="adj" fmla="val 21053"/>
+              <a:gd name="adj" fmla="val 22222"/>
             </a:avLst>
           </a:prstGeom>
           <a:solidFill>
@@ -15331,14 +16127,14 @@
       </p:sp>
       <p:sp>
         <p:nvSpPr>
-          <p:cNvPr id="66" name="Shape 57"/>
+          <p:cNvPr id="70" name="Shape 61"/>
           <p:cNvSpPr/>
           <p:nvPr/>
         </p:nvSpPr>
         <p:spPr>
           <a:xfrm>
-            <a:off x="4773168" y="4110228"/>
-            <a:ext cx="246888" cy="246888"/>
+            <a:off x="4773168" y="4215384"/>
+            <a:ext cx="237744" cy="237744"/>
           </a:xfrm>
           <a:prstGeom prst="roundRect">
             <a:avLst>
@@ -15358,7 +16154,7 @@
       </p:sp>
       <p:pic>
         <p:nvPicPr>
-          <p:cNvPr id="67" name="Image 6" descr="preencoded.png">    </p:cNvPr>
+          <p:cNvPr id="71" name="Image 6" descr="preencoded.png">    </p:cNvPr>
           <p:cNvPicPr>
             <a:picLocks noChangeAspect="1"/>
           </p:cNvPicPr>
@@ -15372,8 +16168,8 @@
         </p:blipFill>
         <p:spPr>
           <a:xfrm>
-            <a:off x="4810201" y="4147261"/>
-            <a:ext cx="172822" cy="172822"/>
+            <a:off x="4808830" y="4251046"/>
+            <a:ext cx="166421" cy="166421"/>
           </a:xfrm>
           <a:prstGeom prst="rect">
             <a:avLst/>
@@ -15382,14 +16178,14 @@
       </p:pic>
       <p:sp>
         <p:nvSpPr>
-          <p:cNvPr id="68" name="Text 58"/>
-          <p:cNvSpPr txBox="1"/>
-          <p:nvPr/>
-        </p:nvSpPr>
-        <p:spPr>
-          <a:xfrm>
-            <a:off x="5084064" y="4059936"/>
-            <a:ext cx="3730752" cy="347472"/>
+          <p:cNvPr id="72" name="Text 62"/>
+          <p:cNvSpPr txBox="1"/>
+          <p:nvPr/>
+        </p:nvSpPr>
+        <p:spPr>
+          <a:xfrm>
+            <a:off x="5084064" y="4187952"/>
+            <a:ext cx="3730752" cy="310896"/>
           </a:xfrm>
           <a:prstGeom prst="rect">
             <a:avLst/>
@@ -15405,7 +16201,7 @@
               <a:buNone/>
             </a:pPr>
             <a:r>
-              <a:rPr lang="en-US" sz="750" b="1" dirty="0">
+              <a:rPr lang="en-US" sz="780" b="1" dirty="0">
                 <a:solidFill>
                   <a:srgbClr val="2E6FD6"/>
                 </a:solidFill>
@@ -15416,7 +16212,24 @@
               <a:t>Under ₹1 in every ₹100  </a:t>
             </a:r>
             <a:r>
-              <a:rPr lang="en-US" sz="650" dirty="0">
+              <a:rPr lang="en-US" sz="650" b="1" dirty="0">
+                <a:solidFill>
+                  <a:srgbClr val="5B6B7F"/>
+                </a:solidFill>
+                <a:latin typeface="Calibri" pitchFamily="34" charset="0"/>
+                <a:ea typeface="Calibri" pitchFamily="34" charset="-122"/>
+                <a:cs typeface="Calibri" pitchFamily="34" charset="-120"/>
+              </a:rPr>
+              <a:t>of what each beneficiary already gets</a:t>
+            </a:r>
+            <a:endParaRPr lang="en-US" sz="780" dirty="0"/>
+          </a:p>
+          <a:p>
+            <a:pPr indent="0" marL="0">
+              <a:buNone/>
+            </a:pPr>
+            <a:r>
+              <a:rPr lang="en-US" sz="620" dirty="0">
                 <a:solidFill>
                   <a:srgbClr val="1F2937"/>
                 </a:solidFill>
@@ -15426,24 +16239,24 @@
               </a:rPr>
               <a:t>≈ ₹220–420 per beneficiary vs ≈ ₹60,700 average GIA support (₹1,219.80 cr ÷ 2,01,006).</a:t>
             </a:r>
-            <a:endParaRPr lang="en-US" sz="650" dirty="0"/>
-          </a:p>
-        </p:txBody>
-      </p:sp>
-      <p:sp>
-        <p:nvSpPr>
-          <p:cNvPr id="69" name="Shape 59"/>
+            <a:endParaRPr lang="en-US" sz="780" dirty="0"/>
+          </a:p>
+        </p:txBody>
+      </p:sp>
+      <p:sp>
+        <p:nvSpPr>
+          <p:cNvPr id="73" name="Shape 63"/>
           <p:cNvSpPr/>
           <p:nvPr/>
         </p:nvSpPr>
         <p:spPr>
           <a:xfrm>
-            <a:off x="4709160" y="4443984"/>
-            <a:ext cx="4160520" cy="347472"/>
+            <a:off x="4709160" y="4535424"/>
+            <a:ext cx="4160520" cy="329184"/>
           </a:xfrm>
           <a:prstGeom prst="roundRect">
             <a:avLst>
-              <a:gd name="adj" fmla="val 21053"/>
+              <a:gd name="adj" fmla="val 22222"/>
             </a:avLst>
           </a:prstGeom>
           <a:solidFill>
@@ -15459,14 +16272,14 @@
       </p:sp>
       <p:sp>
         <p:nvSpPr>
-          <p:cNvPr id="70" name="Shape 60"/>
+          <p:cNvPr id="74" name="Shape 64"/>
           <p:cNvSpPr/>
           <p:nvPr/>
         </p:nvSpPr>
         <p:spPr>
           <a:xfrm>
-            <a:off x="4773168" y="4494276"/>
-            <a:ext cx="246888" cy="246888"/>
+            <a:off x="4773168" y="4581144"/>
+            <a:ext cx="237744" cy="237744"/>
           </a:xfrm>
           <a:prstGeom prst="roundRect">
             <a:avLst>
@@ -15486,7 +16299,7 @@
       </p:sp>
       <p:pic>
         <p:nvPicPr>
-          <p:cNvPr id="71" name="Image 7" descr="preencoded.png">    </p:cNvPr>
+          <p:cNvPr id="75" name="Image 7" descr="preencoded.png">    </p:cNvPr>
           <p:cNvPicPr>
             <a:picLocks noChangeAspect="1"/>
           </p:cNvPicPr>
@@ -15500,8 +16313,8 @@
         </p:blipFill>
         <p:spPr>
           <a:xfrm>
-            <a:off x="4810201" y="4531309"/>
-            <a:ext cx="172822" cy="172822"/>
+            <a:off x="4808830" y="4616806"/>
+            <a:ext cx="166421" cy="166421"/>
           </a:xfrm>
           <a:prstGeom prst="rect">
             <a:avLst/>
@@ -15510,14 +16323,14 @@
       </p:pic>
       <p:sp>
         <p:nvSpPr>
-          <p:cNvPr id="72" name="Text 61"/>
-          <p:cNvSpPr txBox="1"/>
-          <p:nvPr/>
-        </p:nvSpPr>
-        <p:spPr>
-          <a:xfrm>
-            <a:off x="5084064" y="4443984"/>
-            <a:ext cx="3730752" cy="347472"/>
+          <p:cNvPr id="76" name="Text 65"/>
+          <p:cNvSpPr txBox="1"/>
+          <p:nvPr/>
+        </p:nvSpPr>
+        <p:spPr>
+          <a:xfrm>
+            <a:off x="5084064" y="4553712"/>
+            <a:ext cx="3730752" cy="310896"/>
           </a:xfrm>
           <a:prstGeom prst="rect">
             <a:avLst/>
@@ -15533,7 +16346,7 @@
               <a:buNone/>
             </a:pPr>
             <a:r>
-              <a:rPr lang="en-US" sz="750" b="1" dirty="0">
+              <a:rPr lang="en-US" sz="780" b="1" dirty="0">
                 <a:solidFill>
                   <a:srgbClr val="7A5AF8"/>
                 </a:solidFill>
@@ -15544,7 +16357,24 @@
               <a:t>₹9–13 lakh to start  </a:t>
             </a:r>
             <a:r>
-              <a:rPr lang="en-US" sz="650" dirty="0">
+              <a:rPr lang="en-US" sz="650" b="1" dirty="0">
+                <a:solidFill>
+                  <a:srgbClr val="5B6B7F"/>
+                </a:solidFill>
+                <a:latin typeface="Calibri" pitchFamily="34" charset="0"/>
+                <a:ea typeface="Calibri" pitchFamily="34" charset="-122"/>
+                <a:cs typeface="Calibri" pitchFamily="34" charset="-120"/>
+              </a:rPr>
+              <a:t>a 6-month pilot in one block</a:t>
+            </a:r>
+            <a:endParaRPr lang="en-US" sz="780" dirty="0"/>
+          </a:p>
+          <a:p>
+            <a:pPr indent="0" marL="0">
+              <a:buNone/>
+            </a:pPr>
+            <a:r>
+              <a:rPr lang="en-US" sz="620" dirty="0">
                 <a:solidFill>
                   <a:srgbClr val="1F2937"/>
                 </a:solidFill>
@@ -15552,21 +16382,21 @@
                 <a:ea typeface="Calibri" pitchFamily="34" charset="-122"/>
                 <a:cs typeface="Calibri" pitchFamily="34" charset="-120"/>
               </a:rPr>
-              <a:t>6-month pilot in one block (≈ 1,000 families): build, test with real users, then scale.</a:t>
-            </a:r>
-            <a:endParaRPr lang="en-US" sz="650" dirty="0"/>
-          </a:p>
-        </p:txBody>
-      </p:sp>
-      <p:sp>
-        <p:nvSpPr>
-          <p:cNvPr id="73" name="Text 62"/>
-          <p:cNvSpPr txBox="1"/>
-          <p:nvPr/>
-        </p:nvSpPr>
-        <p:spPr>
-          <a:xfrm>
-            <a:off x="274320" y="4352544"/>
+              <a:t>≈ 1,000 families: build, test with real users, then scale to the state.</a:t>
+            </a:r>
+            <a:endParaRPr lang="en-US" sz="780" dirty="0"/>
+          </a:p>
+        </p:txBody>
+      </p:sp>
+      <p:sp>
+        <p:nvSpPr>
+          <p:cNvPr id="77" name="Text 66"/>
+          <p:cNvSpPr txBox="1"/>
+          <p:nvPr/>
+        </p:nvSpPr>
+        <p:spPr>
+          <a:xfrm>
+            <a:off x="274320" y="4462272"/>
             <a:ext cx="4206240" cy="182880"/>
           </a:xfrm>
           <a:prstGeom prst="rect">
@@ -15576,7 +16406,7 @@
           <a:ln/>
         </p:spPr>
         <p:txBody>
-          <a:bodyPr wrap="square" lIns="0" tIns="0" rIns="0" bIns="0" rtlCol="0" anchor="t"/>
+          <a:bodyPr wrap="square" lIns="0" tIns="0" rIns="0" bIns="0" rtlCol="0" anchor="ctr"/>
           <a:lstStyle/>
           <a:p>
             <a:pPr indent="0" marL="0">
@@ -15591,7 +16421,7 @@
                 <a:ea typeface="Calibri" pitchFamily="34" charset="-122"/>
                 <a:cs typeface="Calibri" pitchFamily="34" charset="-120"/>
               </a:rPr>
-              <a:t>RISKS → HOW WE HANDLE THEM</a:t>
+              <a:t>4 RISKS, EACH WITH AN ANSWER  </a:t>
             </a:r>
             <a:endParaRPr lang="en-US" sz="850" dirty="0"/>
           </a:p>
@@ -15599,13 +16429,13 @@
       </p:sp>
       <p:sp>
         <p:nvSpPr>
-          <p:cNvPr id="74" name="Text 63"/>
-          <p:cNvSpPr txBox="1"/>
-          <p:nvPr/>
-        </p:nvSpPr>
-        <p:spPr>
-          <a:xfrm>
-            <a:off x="274320" y="4526280"/>
+          <p:cNvPr id="78" name="Text 67"/>
+          <p:cNvSpPr txBox="1"/>
+          <p:nvPr/>
+        </p:nvSpPr>
+        <p:spPr>
+          <a:xfrm>
+            <a:off x="274320" y="4626864"/>
             <a:ext cx="4206240" cy="105156"/>
           </a:xfrm>
           <a:prstGeom prst="rect">
@@ -15649,13 +16479,13 @@
       </p:sp>
       <p:sp>
         <p:nvSpPr>
-          <p:cNvPr id="75" name="Text 64"/>
-          <p:cNvSpPr txBox="1"/>
-          <p:nvPr/>
-        </p:nvSpPr>
-        <p:spPr>
-          <a:xfrm>
-            <a:off x="274320" y="4631436"/>
+          <p:cNvPr id="79" name="Text 68"/>
+          <p:cNvSpPr txBox="1"/>
+          <p:nvPr/>
+        </p:nvSpPr>
+        <p:spPr>
+          <a:xfrm>
+            <a:off x="274320" y="4732020"/>
             <a:ext cx="4206240" cy="105156"/>
           </a:xfrm>
           <a:prstGeom prst="rect">
@@ -15699,13 +16529,13 @@
       </p:sp>
       <p:sp>
         <p:nvSpPr>
-          <p:cNvPr id="76" name="Text 65"/>
-          <p:cNvSpPr txBox="1"/>
-          <p:nvPr/>
-        </p:nvSpPr>
-        <p:spPr>
-          <a:xfrm>
-            <a:off x="274320" y="4736592"/>
+          <p:cNvPr id="80" name="Text 69"/>
+          <p:cNvSpPr txBox="1"/>
+          <p:nvPr/>
+        </p:nvSpPr>
+        <p:spPr>
+          <a:xfrm>
+            <a:off x="274320" y="4837176"/>
             <a:ext cx="4206240" cy="105156"/>
           </a:xfrm>
           <a:prstGeom prst="rect">
@@ -15749,13 +16579,13 @@
       </p:sp>
       <p:sp>
         <p:nvSpPr>
-          <p:cNvPr id="77" name="Text 66"/>
-          <p:cNvSpPr txBox="1"/>
-          <p:nvPr/>
-        </p:nvSpPr>
-        <p:spPr>
-          <a:xfrm>
-            <a:off x="274320" y="4841748"/>
+          <p:cNvPr id="81" name="Text 70"/>
+          <p:cNvSpPr txBox="1"/>
+          <p:nvPr/>
+        </p:nvSpPr>
+        <p:spPr>
+          <a:xfrm>
+            <a:off x="274320" y="4942332"/>
             <a:ext cx="4206240" cy="105156"/>
           </a:xfrm>
           <a:prstGeom prst="rect">
@@ -16054,16 +16884,16 @@
         <p:spPr>
           <a:xfrm>
             <a:off x="274320" y="1188720"/>
-            <a:ext cx="4572000" cy="182880"/>
-          </a:xfrm>
-          <a:prstGeom prst="rect">
-            <a:avLst/>
-          </a:prstGeom>
-          <a:noFill/>
-          <a:ln/>
-        </p:spPr>
-        <p:txBody>
-          <a:bodyPr wrap="square" lIns="0" tIns="0" rIns="0" bIns="0" rtlCol="0" anchor="t"/>
+            <a:ext cx="5486400" cy="182880"/>
+          </a:xfrm>
+          <a:prstGeom prst="rect">
+            <a:avLst/>
+          </a:prstGeom>
+          <a:noFill/>
+          <a:ln/>
+        </p:spPr>
+        <p:txBody>
+          <a:bodyPr wrap="square" lIns="0" tIns="0" rIns="0" bIns="0" rtlCol="0" anchor="ctr"/>
           <a:lstStyle/>
           <a:p>
             <a:pPr indent="0" marL="0">
@@ -16078,7 +16908,18 @@
                 <a:ea typeface="Calibri" pitchFamily="34" charset="-122"/>
                 <a:cs typeface="Calibri" pitchFamily="34" charset="-120"/>
               </a:rPr>
-              <a:t>WHAT CHANGES</a:t>
+              <a:t>WHAT CHANGES  </a:t>
+            </a:r>
+            <a:r>
+              <a:rPr lang="en-US" sz="750" i="1" dirty="0">
+                <a:solidFill>
+                  <a:srgbClr val="6B7280"/>
+                </a:solidFill>
+                <a:latin typeface="Calibri" pitchFamily="34" charset="0"/>
+                <a:ea typeface="Calibri" pitchFamily="34" charset="-122"/>
+                <a:cs typeface="Calibri" pitchFamily="34" charset="-120"/>
+              </a:rPr>
+              <a:t>four numbers, each with its working</a:t>
             </a:r>
             <a:endParaRPr lang="en-US" sz="850" dirty="0"/>
           </a:p>
@@ -16093,11 +16934,11 @@
         <p:spPr>
           <a:xfrm>
             <a:off x="274320" y="1389888"/>
-            <a:ext cx="2057400" cy="1371600"/>
+            <a:ext cx="2057400" cy="1298448"/>
           </a:xfrm>
           <a:prstGeom prst="roundRect">
             <a:avLst>
-              <a:gd name="adj" fmla="val 5333"/>
+              <a:gd name="adj" fmla="val 5634"/>
             </a:avLst>
           </a:prstGeom>
           <a:solidFill>
@@ -16119,7 +16960,7 @@
         </p:nvSpPr>
         <p:spPr>
           <a:xfrm>
-            <a:off x="365760" y="1463040"/>
+            <a:off x="365760" y="1481328"/>
             <a:ext cx="310896" cy="310896"/>
           </a:xfrm>
           <a:prstGeom prst="roundRect">
@@ -16154,7 +16995,7 @@
         </p:blipFill>
         <p:spPr>
           <a:xfrm>
-            <a:off x="412394" y="1509674"/>
+            <a:off x="412394" y="1527962"/>
             <a:ext cx="217627" cy="217627"/>
           </a:xfrm>
           <a:prstGeom prst="rect">
@@ -16170,8 +17011,8 @@
         </p:nvSpPr>
         <p:spPr>
           <a:xfrm>
-            <a:off x="749808" y="1444752"/>
-            <a:ext cx="1536192" cy="329184"/>
+            <a:off x="768096" y="1453896"/>
+            <a:ext cx="1472184" cy="219456"/>
           </a:xfrm>
           <a:prstGeom prst="rect">
             <a:avLst/>
@@ -16187,7 +17028,7 @@
               <a:buNone/>
             </a:pPr>
             <a:r>
-              <a:rPr lang="en-US" sz="850" b="1" dirty="0">
+              <a:rPr lang="en-US" sz="1000" b="1" dirty="0">
                 <a:solidFill>
                   <a:srgbClr val="1F9D63"/>
                 </a:solidFill>
@@ -16195,9 +17036,9 @@
                 <a:ea typeface="Calibri" pitchFamily="34" charset="-122"/>
                 <a:cs typeface="Calibri" pitchFamily="34" charset="-120"/>
               </a:rPr>
-              <a:t>More trained people get jobs</a:t>
-            </a:r>
-            <a:endParaRPr lang="en-US" sz="850" dirty="0"/>
+              <a:t>41% → 70% placed</a:t>
+            </a:r>
+            <a:endParaRPr lang="en-US" sz="1000" dirty="0"/>
           </a:p>
         </p:txBody>
       </p:sp>
@@ -16209,8 +17050,8 @@
         </p:nvSpPr>
         <p:spPr>
           <a:xfrm>
-            <a:off x="365760" y="1810512"/>
-            <a:ext cx="1874520" cy="274320"/>
+            <a:off x="768096" y="1664208"/>
+            <a:ext cx="1472184" cy="146304"/>
           </a:xfrm>
           <a:prstGeom prst="rect">
             <a:avLst/>
@@ -16226,17 +17067,17 @@
               <a:buNone/>
             </a:pPr>
             <a:r>
-              <a:rPr lang="en-US" sz="1400" b="1" dirty="0">
-                <a:solidFill>
-                  <a:srgbClr val="1F9D63"/>
-                </a:solidFill>
-                <a:latin typeface="Calibri" pitchFamily="34" charset="0"/>
-                <a:ea typeface="Calibri" pitchFamily="34" charset="-122"/>
-                <a:cs typeface="Calibri" pitchFamily="34" charset="-120"/>
-              </a:rPr>
-              <a:t>41% → 70%</a:t>
-            </a:r>
-            <a:endParaRPr lang="en-US" sz="1400" dirty="0"/>
+              <a:rPr lang="en-US" sz="730" b="1" dirty="0">
+                <a:solidFill>
+                  <a:srgbClr val="5B6B7F"/>
+                </a:solidFill>
+                <a:latin typeface="Calibri" pitchFamily="34" charset="0"/>
+                <a:ea typeface="Calibri" pitchFamily="34" charset="-122"/>
+                <a:cs typeface="Calibri" pitchFamily="34" charset="-120"/>
+              </a:rPr>
+              <a:t>the gap we close</a:t>
+            </a:r>
+            <a:endParaRPr lang="en-US" sz="730" dirty="0"/>
           </a:p>
         </p:txBody>
       </p:sp>
@@ -16248,8 +17089,8 @@
         </p:nvSpPr>
         <p:spPr>
           <a:xfrm>
-            <a:off x="365760" y="2093976"/>
-            <a:ext cx="1874520" cy="493776"/>
+            <a:off x="365760" y="1865376"/>
+            <a:ext cx="1874520" cy="603504"/>
           </a:xfrm>
           <a:prstGeom prst="rect">
             <a:avLst/>
@@ -16265,7 +17106,7 @@
               <a:buNone/>
             </a:pPr>
             <a:r>
-              <a:rPr lang="en-US" sz="650" dirty="0">
+              <a:rPr lang="en-US" sz="640" dirty="0">
                 <a:solidFill>
                   <a:srgbClr val="1F2937"/>
                 </a:solidFill>
@@ -16273,9 +17114,9 @@
                 <a:ea typeface="Calibri" pitchFamily="34" charset="-122"/>
                 <a:cs typeface="Calibri" pitchFamily="34" charset="-120"/>
               </a:rPr>
-              <a:t>Only 41% got a job; 70% is the govt's own target. Per 1,000 trainees, even 50% means 90 more people working.</a:t>
-            </a:r>
-            <a:endParaRPr lang="en-US" sz="650" dirty="0"/>
+              <a:t>Only 41% of trained people get a job today; 70% is the govt's own target. Per 1,000 trainees, even 50% means 90 more people working.</a:t>
+            </a:r>
+            <a:endParaRPr lang="en-US" sz="640" dirty="0"/>
           </a:p>
         </p:txBody>
       </p:sp>
@@ -16287,7 +17128,7 @@
         </p:nvSpPr>
         <p:spPr>
           <a:xfrm>
-            <a:off x="365760" y="2587752"/>
+            <a:off x="365760" y="2487168"/>
             <a:ext cx="1874520" cy="137160"/>
           </a:xfrm>
           <a:prstGeom prst="roundRect">
@@ -16314,7 +17155,7 @@
         </p:nvSpPr>
         <p:spPr>
           <a:xfrm>
-            <a:off x="420624" y="2587752"/>
+            <a:off x="420624" y="2487168"/>
             <a:ext cx="1783080" cy="137160"/>
           </a:xfrm>
           <a:prstGeom prst="rect">
@@ -16354,11 +17195,11 @@
         <p:spPr>
           <a:xfrm>
             <a:off x="2446020" y="1389888"/>
-            <a:ext cx="2057400" cy="1371600"/>
+            <a:ext cx="2057400" cy="1298448"/>
           </a:xfrm>
           <a:prstGeom prst="roundRect">
             <a:avLst>
-              <a:gd name="adj" fmla="val 5333"/>
+              <a:gd name="adj" fmla="val 5634"/>
             </a:avLst>
           </a:prstGeom>
           <a:solidFill>
@@ -16380,7 +17221,7 @@
         </p:nvSpPr>
         <p:spPr>
           <a:xfrm>
-            <a:off x="2537460" y="1463040"/>
+            <a:off x="2537460" y="1481328"/>
             <a:ext cx="310896" cy="310896"/>
           </a:xfrm>
           <a:prstGeom prst="roundRect">
@@ -16415,7 +17256,7 @@
         </p:blipFill>
         <p:spPr>
           <a:xfrm>
-            <a:off x="2584094" y="1509674"/>
+            <a:off x="2584094" y="1527962"/>
             <a:ext cx="217627" cy="217627"/>
           </a:xfrm>
           <a:prstGeom prst="rect">
@@ -16431,8 +17272,8 @@
         </p:nvSpPr>
         <p:spPr>
           <a:xfrm>
-            <a:off x="2921508" y="1444752"/>
-            <a:ext cx="1536192" cy="329184"/>
+            <a:off x="2939796" y="1453896"/>
+            <a:ext cx="1472184" cy="219456"/>
           </a:xfrm>
           <a:prstGeom prst="rect">
             <a:avLst/>
@@ -16448,7 +17289,7 @@
               <a:buNone/>
             </a:pPr>
             <a:r>
-              <a:rPr lang="en-US" sz="850" b="1" dirty="0">
+              <a:rPr lang="en-US" sz="1000" b="1" dirty="0">
                 <a:solidFill>
                   <a:srgbClr val="2E6FD6"/>
                 </a:solidFill>
@@ -16456,9 +17297,9 @@
                 <a:ea typeface="Calibri" pitchFamily="34" charset="-122"/>
                 <a:cs typeface="Calibri" pitchFamily="34" charset="-120"/>
               </a:rPr>
-              <a:t>More people stay in the job</a:t>
-            </a:r>
-            <a:endParaRPr lang="en-US" sz="850" dirty="0"/>
+              <a:t>62% → 73% stay in the job</a:t>
+            </a:r>
+            <a:endParaRPr lang="en-US" sz="1000" dirty="0"/>
           </a:p>
         </p:txBody>
       </p:sp>
@@ -16470,8 +17311,8 @@
         </p:nvSpPr>
         <p:spPr>
           <a:xfrm>
-            <a:off x="2537460" y="1810512"/>
-            <a:ext cx="1874520" cy="274320"/>
+            <a:off x="2939796" y="1664208"/>
+            <a:ext cx="1472184" cy="146304"/>
           </a:xfrm>
           <a:prstGeom prst="rect">
             <a:avLst/>
@@ -16487,17 +17328,17 @@
               <a:buNone/>
             </a:pPr>
             <a:r>
-              <a:rPr lang="en-US" sz="1400" b="1" dirty="0">
-                <a:solidFill>
-                  <a:srgbClr val="2E6FD6"/>
-                </a:solidFill>
-                <a:latin typeface="Calibri" pitchFamily="34" charset="0"/>
-                <a:ea typeface="Calibri" pitchFamily="34" charset="-122"/>
-                <a:cs typeface="Calibri" pitchFamily="34" charset="-120"/>
-              </a:rPr>
-              <a:t>62% → 73%</a:t>
-            </a:r>
-            <a:endParaRPr lang="en-US" sz="1400" dirty="0"/>
+              <a:rPr lang="en-US" sz="730" b="1" dirty="0">
+                <a:solidFill>
+                  <a:srgbClr val="5B6B7F"/>
+                </a:solidFill>
+                <a:latin typeface="Calibri" pitchFamily="34" charset="0"/>
+                <a:ea typeface="Calibri" pitchFamily="34" charset="-122"/>
+                <a:cs typeface="Calibri" pitchFamily="34" charset="-120"/>
+              </a:rPr>
+              <a:t>when told the truth before joining</a:t>
+            </a:r>
+            <a:endParaRPr lang="en-US" sz="730" dirty="0"/>
           </a:p>
         </p:txBody>
       </p:sp>
@@ -16509,8 +17350,8 @@
         </p:nvSpPr>
         <p:spPr>
           <a:xfrm>
-            <a:off x="2537460" y="2093976"/>
-            <a:ext cx="1874520" cy="493776"/>
+            <a:off x="2537460" y="1865376"/>
+            <a:ext cx="1874520" cy="603504"/>
           </a:xfrm>
           <a:prstGeom prst="rect">
             <a:avLst/>
@@ -16526,7 +17367,7 @@
               <a:buNone/>
             </a:pPr>
             <a:r>
-              <a:rPr lang="en-US" sz="650" dirty="0">
+              <a:rPr lang="en-US" sz="640" dirty="0">
                 <a:solidFill>
                   <a:srgbClr val="1F2937"/>
                 </a:solidFill>
@@ -16534,9 +17375,9 @@
                 <a:ea typeface="Calibri" pitchFamily="34" charset="-122"/>
                 <a:cs typeface="Calibri" pitchFamily="34" charset="-120"/>
               </a:rPr>
-              <a:t>Trainees told the real pay and place before joining were 11 percentage points more likely to stay 5+ months (men). SkillCall tells him on the call.</a:t>
-            </a:r>
-            <a:endParaRPr lang="en-US" sz="650" dirty="0"/>
+              <a:t>+11 percentage points (men) in a field trial of two honest job-information sessions. SkillCall gives that on the call.</a:t>
+            </a:r>
+            <a:endParaRPr lang="en-US" sz="640" dirty="0"/>
           </a:p>
         </p:txBody>
       </p:sp>
@@ -16548,7 +17389,7 @@
         </p:nvSpPr>
         <p:spPr>
           <a:xfrm>
-            <a:off x="2537460" y="2587752"/>
+            <a:off x="2537460" y="2487168"/>
             <a:ext cx="1874520" cy="137160"/>
           </a:xfrm>
           <a:prstGeom prst="roundRect">
@@ -16575,7 +17416,7 @@
         </p:nvSpPr>
         <p:spPr>
           <a:xfrm>
-            <a:off x="2592324" y="2587752"/>
+            <a:off x="2592324" y="2487168"/>
             <a:ext cx="1783080" cy="137160"/>
           </a:xfrm>
           <a:prstGeom prst="rect">
@@ -16615,11 +17456,11 @@
         <p:spPr>
           <a:xfrm>
             <a:off x="4617720" y="1389888"/>
-            <a:ext cx="2057400" cy="1371600"/>
+            <a:ext cx="2057400" cy="1298448"/>
           </a:xfrm>
           <a:prstGeom prst="roundRect">
             <a:avLst>
-              <a:gd name="adj" fmla="val 5333"/>
+              <a:gd name="adj" fmla="val 5634"/>
             </a:avLst>
           </a:prstGeom>
           <a:solidFill>
@@ -16641,7 +17482,7 @@
         </p:nvSpPr>
         <p:spPr>
           <a:xfrm>
-            <a:off x="4709160" y="1463040"/>
+            <a:off x="4709160" y="1481328"/>
             <a:ext cx="310896" cy="310896"/>
           </a:xfrm>
           <a:prstGeom prst="roundRect">
@@ -16676,7 +17517,7 @@
         </p:blipFill>
         <p:spPr>
           <a:xfrm>
-            <a:off x="4755794" y="1509674"/>
+            <a:off x="4755794" y="1527962"/>
             <a:ext cx="217627" cy="217627"/>
           </a:xfrm>
           <a:prstGeom prst="rect">
@@ -16692,8 +17533,8 @@
         </p:nvSpPr>
         <p:spPr>
           <a:xfrm>
-            <a:off x="5093208" y="1444752"/>
-            <a:ext cx="1536192" cy="329184"/>
+            <a:off x="5111496" y="1453896"/>
+            <a:ext cx="1472184" cy="219456"/>
           </a:xfrm>
           <a:prstGeom prst="rect">
             <a:avLst/>
@@ -16709,7 +17550,7 @@
               <a:buNone/>
             </a:pPr>
             <a:r>
-              <a:rPr lang="en-US" sz="850" b="1" dirty="0">
+              <a:rPr lang="en-US" sz="1000" b="1" dirty="0">
                 <a:solidFill>
                   <a:srgbClr val="7A5AF8"/>
                 </a:solidFill>
@@ -16717,9 +17558,9 @@
                 <a:ea typeface="Calibri" pitchFamily="34" charset="-122"/>
                 <a:cs typeface="Calibri" pitchFamily="34" charset="-120"/>
               </a:rPr>
-              <a:t>Officers get their time back</a:t>
-            </a:r>
-            <a:endParaRPr lang="en-US" sz="850" dirty="0"/>
+              <a:t>30 h → 5 h a month</a:t>
+            </a:r>
+            <a:endParaRPr lang="en-US" sz="1000" dirty="0"/>
           </a:p>
         </p:txBody>
       </p:sp>
@@ -16731,8 +17572,8 @@
         </p:nvSpPr>
         <p:spPr>
           <a:xfrm>
-            <a:off x="4709160" y="1810512"/>
-            <a:ext cx="1874520" cy="274320"/>
+            <a:off x="5111496" y="1664208"/>
+            <a:ext cx="1472184" cy="146304"/>
           </a:xfrm>
           <a:prstGeom prst="rect">
             <a:avLst/>
@@ -16748,17 +17589,17 @@
               <a:buNone/>
             </a:pPr>
             <a:r>
-              <a:rPr lang="en-US" sz="1400" b="1" dirty="0">
-                <a:solidFill>
-                  <a:srgbClr val="7A5AF8"/>
-                </a:solidFill>
-                <a:latin typeface="Calibri" pitchFamily="34" charset="0"/>
-                <a:ea typeface="Calibri" pitchFamily="34" charset="-122"/>
-                <a:cs typeface="Calibri" pitchFamily="34" charset="-120"/>
-              </a:rPr>
-              <a:t>30 h → 5 h a month</a:t>
-            </a:r>
-            <a:endParaRPr lang="en-US" sz="1400" dirty="0"/>
+              <a:rPr lang="en-US" sz="730" b="1" dirty="0">
+                <a:solidFill>
+                  <a:srgbClr val="5B6B7F"/>
+                </a:solidFill>
+                <a:latin typeface="Calibri" pitchFamily="34" charset="0"/>
+                <a:ea typeface="Calibri" pitchFamily="34" charset="-122"/>
+                <a:cs typeface="Calibri" pitchFamily="34" charset="-120"/>
+              </a:rPr>
+              <a:t>of officer time, per 40 cases</a:t>
+            </a:r>
+            <a:endParaRPr lang="en-US" sz="730" dirty="0"/>
           </a:p>
         </p:txBody>
       </p:sp>
@@ -16770,8 +17611,8 @@
         </p:nvSpPr>
         <p:spPr>
           <a:xfrm>
-            <a:off x="4709160" y="2093976"/>
-            <a:ext cx="1874520" cy="493776"/>
+            <a:off x="4709160" y="1865376"/>
+            <a:ext cx="1874520" cy="603504"/>
           </a:xfrm>
           <a:prstGeom prst="rect">
             <a:avLst/>
@@ -16787,7 +17628,7 @@
               <a:buNone/>
             </a:pPr>
             <a:r>
-              <a:rPr lang="en-US" sz="650" dirty="0">
+              <a:rPr lang="en-US" sz="640" dirty="0">
                 <a:solidFill>
                   <a:srgbClr val="1F2937"/>
                 </a:solidFill>
@@ -16795,9 +17636,9 @@
                 <a:ea typeface="Calibri" pitchFamily="34" charset="-122"/>
                 <a:cs typeface="Calibri" pitchFamily="34" charset="-120"/>
               </a:rPr>
-              <a:t>Per officer, 40 cases a month: today 45 min each (interview + 3 follow-up calls) = 30 h; with SkillCall a 7.5-min review = 5 h. India: 50,000 cases × 37.5 min ≈ 31,250 h a year ≈ 18 full-time officers.</a:t>
-            </a:r>
-            <a:endParaRPr lang="en-US" sz="650" dirty="0"/>
+              <a:t>Today 45 min each (interview + 3 follow-up calls); with SkillCall a 7.5-min review. India: 50,000 × 37.5 min ≈ 31,250 h a year ≈ 18 full-time officers.</a:t>
+            </a:r>
+            <a:endParaRPr lang="en-US" sz="640" dirty="0"/>
           </a:p>
         </p:txBody>
       </p:sp>
@@ -16809,7 +17650,7 @@
         </p:nvSpPr>
         <p:spPr>
           <a:xfrm>
-            <a:off x="4709160" y="2587752"/>
+            <a:off x="4709160" y="2487168"/>
             <a:ext cx="1874520" cy="137160"/>
           </a:xfrm>
           <a:prstGeom prst="roundRect">
@@ -16836,7 +17677,7 @@
         </p:nvSpPr>
         <p:spPr>
           <a:xfrm>
-            <a:off x="4764024" y="2587752"/>
+            <a:off x="4764024" y="2487168"/>
             <a:ext cx="1783080" cy="137160"/>
           </a:xfrm>
           <a:prstGeom prst="rect">
@@ -16876,11 +17717,11 @@
         <p:spPr>
           <a:xfrm>
             <a:off x="6789420" y="1389888"/>
-            <a:ext cx="2057400" cy="1371600"/>
+            <a:ext cx="2057400" cy="1298448"/>
           </a:xfrm>
           <a:prstGeom prst="roundRect">
             <a:avLst>
-              <a:gd name="adj" fmla="val 5333"/>
+              <a:gd name="adj" fmla="val 5634"/>
             </a:avLst>
           </a:prstGeom>
           <a:solidFill>
@@ -16902,7 +17743,7 @@
         </p:nvSpPr>
         <p:spPr>
           <a:xfrm>
-            <a:off x="6880860" y="1463040"/>
+            <a:off x="6880860" y="1481328"/>
             <a:ext cx="310896" cy="310896"/>
           </a:xfrm>
           <a:prstGeom prst="roundRect">
@@ -16937,7 +17778,7 @@
         </p:blipFill>
         <p:spPr>
           <a:xfrm>
-            <a:off x="6927494" y="1509674"/>
+            <a:off x="6927494" y="1527962"/>
             <a:ext cx="217627" cy="217627"/>
           </a:xfrm>
           <a:prstGeom prst="rect">
@@ -16953,8 +17794,8 @@
         </p:nvSpPr>
         <p:spPr>
           <a:xfrm>
-            <a:off x="7264908" y="1444752"/>
-            <a:ext cx="1536192" cy="329184"/>
+            <a:off x="7283196" y="1453896"/>
+            <a:ext cx="1472184" cy="219456"/>
           </a:xfrm>
           <a:prstGeom prst="rect">
             <a:avLst/>
@@ -16970,7 +17811,7 @@
               <a:buNone/>
             </a:pPr>
             <a:r>
-              <a:rPr lang="en-US" sz="850" b="1" dirty="0">
+              <a:rPr lang="en-US" sz="1000" b="1" dirty="0">
                 <a:solidFill>
                   <a:srgbClr val="EF8A22"/>
                 </a:solidFill>
@@ -16978,9 +17819,9 @@
                 <a:ea typeface="Calibri" pitchFamily="34" charset="-122"/>
                 <a:cs typeface="Calibri" pitchFamily="34" charset="-120"/>
               </a:rPr>
-              <a:t>Less money wasted</a:t>
-            </a:r>
-            <a:endParaRPr lang="en-US" sz="850" dirty="0"/>
+              <a:t>₹12.5–15 cr a year</a:t>
+            </a:r>
+            <a:endParaRPr lang="en-US" sz="1000" dirty="0"/>
           </a:p>
         </p:txBody>
       </p:sp>
@@ -16992,8 +17833,8 @@
         </p:nvSpPr>
         <p:spPr>
           <a:xfrm>
-            <a:off x="6880860" y="1810512"/>
-            <a:ext cx="1874520" cy="274320"/>
+            <a:off x="7283196" y="1664208"/>
+            <a:ext cx="1472184" cy="146304"/>
           </a:xfrm>
           <a:prstGeom prst="rect">
             <a:avLst/>
@@ -17009,17 +17850,17 @@
               <a:buNone/>
             </a:pPr>
             <a:r>
-              <a:rPr lang="en-US" sz="1400" b="1" dirty="0">
-                <a:solidFill>
-                  <a:srgbClr val="EF8A22"/>
-                </a:solidFill>
-                <a:latin typeface="Calibri" pitchFamily="34" charset="0"/>
-                <a:ea typeface="Calibri" pitchFamily="34" charset="-122"/>
-                <a:cs typeface="Calibri" pitchFamily="34" charset="-120"/>
-              </a:rPr>
-              <a:t>₹12.5–15 cr a year</a:t>
-            </a:r>
-            <a:endParaRPr lang="en-US" sz="1400" dirty="0"/>
+              <a:rPr lang="en-US" sz="730" b="1" dirty="0">
+                <a:solidFill>
+                  <a:srgbClr val="5B6B7F"/>
+                </a:solidFill>
+                <a:latin typeface="Calibri" pitchFamily="34" charset="0"/>
+                <a:ea typeface="Calibri" pitchFamily="34" charset="-122"/>
+                <a:cs typeface="Calibri" pitchFamily="34" charset="-120"/>
+              </a:rPr>
+              <a:t>not wasted on wrong matches</a:t>
+            </a:r>
+            <a:endParaRPr lang="en-US" sz="730" dirty="0"/>
           </a:p>
         </p:txBody>
       </p:sp>
@@ -17031,8 +17872,8 @@
         </p:nvSpPr>
         <p:spPr>
           <a:xfrm>
-            <a:off x="6880860" y="2093976"/>
-            <a:ext cx="1874520" cy="493776"/>
+            <a:off x="6880860" y="1865376"/>
+            <a:ext cx="1874520" cy="603504"/>
           </a:xfrm>
           <a:prstGeom prst="rect">
             <a:avLst/>
@@ -17048,7 +17889,7 @@
               <a:buNone/>
             </a:pPr>
             <a:r>
-              <a:rPr lang="en-US" sz="650" dirty="0">
+              <a:rPr lang="en-US" sz="640" dirty="0">
                 <a:solidFill>
                   <a:srgbClr val="1F2937"/>
                 </a:solidFill>
@@ -17058,7 +17899,7 @@
               </a:rPr>
               <a:t>If wrong matches fall in 5 of every 100 cases: 2,500 × ₹50,000–60,700 support = 6–14× SkillCall's yearly cost.</a:t>
             </a:r>
-            <a:endParaRPr lang="en-US" sz="650" dirty="0"/>
+            <a:endParaRPr lang="en-US" sz="640" dirty="0"/>
           </a:p>
         </p:txBody>
       </p:sp>
@@ -17070,7 +17911,7 @@
         </p:nvSpPr>
         <p:spPr>
           <a:xfrm>
-            <a:off x="6880860" y="2587752"/>
+            <a:off x="6880860" y="2487168"/>
             <a:ext cx="1874520" cy="137160"/>
           </a:xfrm>
           <a:prstGeom prst="roundRect">
@@ -17097,7 +17938,7 @@
         </p:nvSpPr>
         <p:spPr>
           <a:xfrm>
-            <a:off x="6935724" y="2587752"/>
+            <a:off x="6935724" y="2487168"/>
             <a:ext cx="1783080" cy="137160"/>
           </a:xfrm>
           <a:prstGeom prst="rect">
@@ -17136,12 +17977,12 @@
         </p:nvSpPr>
         <p:spPr>
           <a:xfrm>
-            <a:off x="274320" y="2834640"/>
-            <a:ext cx="8595360" cy="256032"/>
+            <a:off x="274320" y="2761488"/>
+            <a:ext cx="8595360" cy="274320"/>
           </a:xfrm>
           <a:prstGeom prst="roundRect">
             <a:avLst>
-              <a:gd name="adj" fmla="val 28571"/>
+              <a:gd name="adj" fmla="val 26667"/>
             </a:avLst>
           </a:prstGeom>
           <a:solidFill>
@@ -17163,8 +18004,8 @@
         </p:nvSpPr>
         <p:spPr>
           <a:xfrm>
-            <a:off x="384048" y="2834640"/>
-            <a:ext cx="8412480" cy="256032"/>
+            <a:off x="384048" y="2761488"/>
+            <a:ext cx="8412480" cy="274320"/>
           </a:xfrm>
           <a:prstGeom prst="rect">
             <a:avLst/>
@@ -17180,7 +18021,7 @@
               <a:buNone/>
             </a:pPr>
             <a:r>
-              <a:rPr lang="en-US" sz="730" b="1" dirty="0">
+              <a:rPr lang="en-US" sz="850" b="1" dirty="0">
                 <a:solidFill>
                   <a:srgbClr val="1F4E79"/>
                 </a:solidFill>
@@ -17188,10 +18029,21 @@
                 <a:ea typeface="Calibri" pitchFamily="34" charset="-122"/>
                 <a:cs typeface="Calibri" pitchFamily="34" charset="-120"/>
               </a:rPr>
-              <a:t>REACH  </a:t>
-            </a:r>
-            <a:r>
-              <a:rPr lang="en-US" sz="730" dirty="0">
+              <a:t>1–1.5 lakh profiles a year  </a:t>
+            </a:r>
+            <a:r>
+              <a:rPr lang="en-US" sz="700" b="1" dirty="0">
+                <a:solidFill>
+                  <a:srgbClr val="5B6B7F"/>
+                </a:solidFill>
+                <a:latin typeface="Calibri" pitchFamily="34" charset="0"/>
+                <a:ea typeface="Calibri" pitchFamily="34" charset="-122"/>
+                <a:cs typeface="Calibri" pitchFamily="34" charset="-120"/>
+              </a:rPr>
+              <a:t>so every one of the ≈ 50,000 GIA seats goes to the person it fits  </a:t>
+            </a:r>
+            <a:r>
+              <a:rPr lang="en-US" sz="660" dirty="0">
                 <a:solidFill>
                   <a:srgbClr val="1F2937"/>
                 </a:solidFill>
@@ -17199,9 +18051,9 @@
                 <a:ea typeface="Calibri" pitchFamily="34" charset="-122"/>
                 <a:cs typeface="Calibri" pitchFamily="34" charset="-120"/>
               </a:rPr>
-              <a:t>SkillCall can profile 1–1.5 lakh people a year (2–3 applicants screened per GIA seat), so each of the ≈ 50,000 yearly seats goes to the person it fits best.</a:t>
-            </a:r>
-            <a:endParaRPr lang="en-US" sz="730" dirty="0"/>
+              <a:t>— 2–3 applicants screened per seat (calculations sheet §1.9)</a:t>
+            </a:r>
+            <a:endParaRPr lang="en-US" sz="850" dirty="0"/>
           </a:p>
         </p:txBody>
       </p:sp>
@@ -17213,17 +18065,17 @@
         </p:nvSpPr>
         <p:spPr>
           <a:xfrm>
-            <a:off x="274320" y="3163824"/>
-            <a:ext cx="4572000" cy="182880"/>
-          </a:xfrm>
-          <a:prstGeom prst="rect">
-            <a:avLst/>
-          </a:prstGeom>
-          <a:noFill/>
-          <a:ln/>
-        </p:spPr>
-        <p:txBody>
-          <a:bodyPr wrap="square" lIns="0" tIns="0" rIns="0" bIns="0" rtlCol="0" anchor="t"/>
+            <a:off x="274320" y="3108960"/>
+            <a:ext cx="5486400" cy="182880"/>
+          </a:xfrm>
+          <a:prstGeom prst="rect">
+            <a:avLst/>
+          </a:prstGeom>
+          <a:noFill/>
+          <a:ln/>
+        </p:spPr>
+        <p:txBody>
+          <a:bodyPr wrap="square" lIns="0" tIns="0" rIns="0" bIns="0" rtlCol="0" anchor="ctr"/>
           <a:lstStyle/>
           <a:p>
             <a:pPr indent="0" marL="0">
@@ -17238,7 +18090,18 @@
                 <a:ea typeface="Calibri" pitchFamily="34" charset="-122"/>
                 <a:cs typeface="Calibri" pitchFamily="34" charset="-120"/>
               </a:rPr>
-              <a:t>WHO WINS</a:t>
+              <a:t>WHO WINS  </a:t>
+            </a:r>
+            <a:r>
+              <a:rPr lang="en-US" sz="750" i="1" dirty="0">
+                <a:solidFill>
+                  <a:srgbClr val="6B7280"/>
+                </a:solidFill>
+                <a:latin typeface="Calibri" pitchFamily="34" charset="0"/>
+                <a:ea typeface="Calibri" pitchFamily="34" charset="-122"/>
+                <a:cs typeface="Calibri" pitchFamily="34" charset="-120"/>
+              </a:rPr>
+              <a:t>and what each one actually gets</a:t>
             </a:r>
             <a:endParaRPr lang="en-US" sz="850" dirty="0"/>
           </a:p>
@@ -17252,12 +18115,12 @@
         </p:nvSpPr>
         <p:spPr>
           <a:xfrm>
-            <a:off x="274320" y="3328416"/>
-            <a:ext cx="2057400" cy="713232"/>
+            <a:off x="274320" y="3310128"/>
+            <a:ext cx="2057400" cy="786384"/>
           </a:xfrm>
           <a:prstGeom prst="roundRect">
             <a:avLst>
-              <a:gd name="adj" fmla="val 10256"/>
+              <a:gd name="adj" fmla="val 9302"/>
             </a:avLst>
           </a:prstGeom>
           <a:solidFill>
@@ -17279,7 +18142,7 @@
         </p:nvSpPr>
         <p:spPr>
           <a:xfrm>
-            <a:off x="365760" y="3392424"/>
+            <a:off x="365760" y="3401568"/>
             <a:ext cx="274320" cy="274320"/>
           </a:xfrm>
           <a:prstGeom prst="roundRect">
@@ -17314,7 +18177,7 @@
         </p:blipFill>
         <p:spPr>
           <a:xfrm>
-            <a:off x="406908" y="3433572"/>
+            <a:off x="406908" y="3442716"/>
             <a:ext cx="192024" cy="192024"/>
           </a:xfrm>
           <a:prstGeom prst="rect">
@@ -17330,8 +18193,8 @@
         </p:nvSpPr>
         <p:spPr>
           <a:xfrm>
-            <a:off x="713232" y="3374136"/>
-            <a:ext cx="1554480" cy="292608"/>
+            <a:off x="731520" y="3374136"/>
+            <a:ext cx="1508760" cy="219456"/>
           </a:xfrm>
           <a:prstGeom prst="rect">
             <a:avLst/>
@@ -17369,8 +18232,47 @@
         </p:nvSpPr>
         <p:spPr>
           <a:xfrm>
-            <a:off x="365760" y="3712464"/>
-            <a:ext cx="1874520" cy="310896"/>
+            <a:off x="731520" y="3584448"/>
+            <a:ext cx="1508760" cy="146304"/>
+          </a:xfrm>
+          <a:prstGeom prst="rect">
+            <a:avLst/>
+          </a:prstGeom>
+          <a:noFill/>
+          <a:ln/>
+        </p:spPr>
+        <p:txBody>
+          <a:bodyPr wrap="square" lIns="0" tIns="0" rIns="0" bIns="0" rtlCol="0" anchor="ctr"/>
+          <a:lstStyle/>
+          <a:p>
+            <a:pPr indent="0" marL="0">
+              <a:buNone/>
+            </a:pPr>
+            <a:r>
+              <a:rPr lang="en-US" sz="730" b="1" dirty="0">
+                <a:solidFill>
+                  <a:srgbClr val="5B6B7F"/>
+                </a:solidFill>
+                <a:latin typeface="Calibri" pitchFamily="34" charset="0"/>
+                <a:ea typeface="Calibri" pitchFamily="34" charset="-122"/>
+                <a:cs typeface="Calibri" pitchFamily="34" charset="-120"/>
+              </a:rPr>
+              <a:t>right course, first time</a:t>
+            </a:r>
+            <a:endParaRPr lang="en-US" sz="730" dirty="0"/>
+          </a:p>
+        </p:txBody>
+      </p:sp>
+      <p:sp>
+        <p:nvSpPr>
+          <p:cNvPr id="49" name="Text 41"/>
+          <p:cNvSpPr txBox="1"/>
+          <p:nvPr/>
+        </p:nvSpPr>
+        <p:spPr>
+          <a:xfrm>
+            <a:off x="365760" y="3785616"/>
+            <a:ext cx="1874520" cy="237744"/>
           </a:xfrm>
           <a:prstGeom prst="rect">
             <a:avLst/>
@@ -17386,7 +18288,7 @@
               <a:buNone/>
             </a:pPr>
             <a:r>
-              <a:rPr lang="en-US" sz="690" dirty="0">
+              <a:rPr lang="en-US" sz="670" dirty="0">
                 <a:solidFill>
                   <a:srgbClr val="1F2937"/>
                 </a:solidFill>
@@ -17394,26 +18296,26 @@
                 <a:ea typeface="Calibri" pitchFamily="34" charset="-122"/>
                 <a:cs typeface="Calibri" pitchFamily="34" charset="-120"/>
               </a:rPr>
-              <a:t>Right course the first time, free, in his own language — and calls until he is earning.</a:t>
-            </a:r>
-            <a:endParaRPr lang="en-US" sz="690" dirty="0"/>
-          </a:p>
-        </p:txBody>
-      </p:sp>
-      <p:sp>
-        <p:nvSpPr>
-          <p:cNvPr id="49" name="Shape 41"/>
+              <a:t>Free, in his own language — and calls until he is earning.</a:t>
+            </a:r>
+            <a:endParaRPr lang="en-US" sz="670" dirty="0"/>
+          </a:p>
+        </p:txBody>
+      </p:sp>
+      <p:sp>
+        <p:nvSpPr>
+          <p:cNvPr id="50" name="Shape 42"/>
           <p:cNvSpPr/>
           <p:nvPr/>
         </p:nvSpPr>
         <p:spPr>
           <a:xfrm>
-            <a:off x="2446020" y="3328416"/>
-            <a:ext cx="2057400" cy="713232"/>
+            <a:off x="2446020" y="3310128"/>
+            <a:ext cx="2057400" cy="786384"/>
           </a:xfrm>
           <a:prstGeom prst="roundRect">
             <a:avLst>
-              <a:gd name="adj" fmla="val 10256"/>
+              <a:gd name="adj" fmla="val 9302"/>
             </a:avLst>
           </a:prstGeom>
           <a:solidFill>
@@ -17429,13 +18331,13 @@
       </p:sp>
       <p:sp>
         <p:nvSpPr>
-          <p:cNvPr id="50" name="Shape 42"/>
+          <p:cNvPr id="51" name="Shape 43"/>
           <p:cNvSpPr/>
           <p:nvPr/>
         </p:nvSpPr>
         <p:spPr>
           <a:xfrm>
-            <a:off x="2537460" y="3392424"/>
+            <a:off x="2537460" y="3401568"/>
             <a:ext cx="274320" cy="274320"/>
           </a:xfrm>
           <a:prstGeom prst="roundRect">
@@ -17456,7 +18358,7 @@
       </p:sp>
       <p:pic>
         <p:nvPicPr>
-          <p:cNvPr id="51" name="Image 6" descr="preencoded.png">    </p:cNvPr>
+          <p:cNvPr id="52" name="Image 6" descr="preencoded.png">    </p:cNvPr>
           <p:cNvPicPr>
             <a:picLocks noChangeAspect="1"/>
           </p:cNvPicPr>
@@ -17470,7 +18372,7 @@
         </p:blipFill>
         <p:spPr>
           <a:xfrm>
-            <a:off x="2578608" y="3433572"/>
+            <a:off x="2578608" y="3442716"/>
             <a:ext cx="192024" cy="192024"/>
           </a:xfrm>
           <a:prstGeom prst="rect">
@@ -17480,14 +18382,14 @@
       </p:pic>
       <p:sp>
         <p:nvSpPr>
-          <p:cNvPr id="52" name="Text 43"/>
-          <p:cNvSpPr txBox="1"/>
-          <p:nvPr/>
-        </p:nvSpPr>
-        <p:spPr>
-          <a:xfrm>
-            <a:off x="2884932" y="3374136"/>
-            <a:ext cx="1554480" cy="292608"/>
+          <p:cNvPr id="53" name="Text 44"/>
+          <p:cNvSpPr txBox="1"/>
+          <p:nvPr/>
+        </p:nvSpPr>
+        <p:spPr>
+          <a:xfrm>
+            <a:off x="2903220" y="3374136"/>
+            <a:ext cx="1508760" cy="219456"/>
           </a:xfrm>
           <a:prstGeom prst="rect">
             <a:avLst/>
@@ -17519,14 +18421,53 @@
       </p:sp>
       <p:sp>
         <p:nvSpPr>
-          <p:cNvPr id="53" name="Text 44"/>
-          <p:cNvSpPr txBox="1"/>
-          <p:nvPr/>
-        </p:nvSpPr>
-        <p:spPr>
-          <a:xfrm>
-            <a:off x="2537460" y="3712464"/>
-            <a:ext cx="1874520" cy="310896"/>
+          <p:cNvPr id="54" name="Text 45"/>
+          <p:cNvSpPr txBox="1"/>
+          <p:nvPr/>
+        </p:nvSpPr>
+        <p:spPr>
+          <a:xfrm>
+            <a:off x="2903220" y="3584448"/>
+            <a:ext cx="1508760" cy="146304"/>
+          </a:xfrm>
+          <a:prstGeom prst="rect">
+            <a:avLst/>
+          </a:prstGeom>
+          <a:noFill/>
+          <a:ln/>
+        </p:spPr>
+        <p:txBody>
+          <a:bodyPr wrap="square" lIns="0" tIns="0" rIns="0" bIns="0" rtlCol="0" anchor="ctr"/>
+          <a:lstStyle/>
+          <a:p>
+            <a:pPr indent="0" marL="0">
+              <a:buNone/>
+            </a:pPr>
+            <a:r>
+              <a:rPr lang="en-US" sz="730" b="1" dirty="0">
+                <a:solidFill>
+                  <a:srgbClr val="5B6B7F"/>
+                </a:solidFill>
+                <a:latin typeface="Calibri" pitchFamily="34" charset="0"/>
+                <a:ea typeface="Calibri" pitchFamily="34" charset="-122"/>
+                <a:cs typeface="Calibri" pitchFamily="34" charset="-120"/>
+              </a:rPr>
+              <a:t>the case arrives pre-filled</a:t>
+            </a:r>
+            <a:endParaRPr lang="en-US" sz="730" dirty="0"/>
+          </a:p>
+        </p:txBody>
+      </p:sp>
+      <p:sp>
+        <p:nvSpPr>
+          <p:cNvPr id="55" name="Text 46"/>
+          <p:cNvSpPr txBox="1"/>
+          <p:nvPr/>
+        </p:nvSpPr>
+        <p:spPr>
+          <a:xfrm>
+            <a:off x="2537460" y="3785616"/>
+            <a:ext cx="1874520" cy="237744"/>
           </a:xfrm>
           <a:prstGeom prst="rect">
             <a:avLst/>
@@ -17542,7 +18483,7 @@
               <a:buNone/>
             </a:pPr>
             <a:r>
-              <a:rPr lang="en-US" sz="690" dirty="0">
+              <a:rPr lang="en-US" sz="670" dirty="0">
                 <a:solidFill>
                   <a:srgbClr val="1F2937"/>
                 </a:solidFill>
@@ -17550,26 +18491,26 @@
                 <a:ea typeface="Calibri" pitchFamily="34" charset="-122"/>
                 <a:cs typeface="Calibri" pitchFamily="34" charset="-120"/>
               </a:rPr>
-              <a:t>The case arrives pre-filled; only documents and e-KYC are left to do.</a:t>
-            </a:r>
-            <a:endParaRPr lang="en-US" sz="690" dirty="0"/>
-          </a:p>
-        </p:txBody>
-      </p:sp>
-      <p:sp>
-        <p:nvSpPr>
-          <p:cNvPr id="54" name="Shape 45"/>
+              <a:t>Only documents and Aadhaar e-KYC are left to do.</a:t>
+            </a:r>
+            <a:endParaRPr lang="en-US" sz="670" dirty="0"/>
+          </a:p>
+        </p:txBody>
+      </p:sp>
+      <p:sp>
+        <p:nvSpPr>
+          <p:cNvPr id="56" name="Shape 47"/>
           <p:cNvSpPr/>
           <p:nvPr/>
         </p:nvSpPr>
         <p:spPr>
           <a:xfrm>
-            <a:off x="4617720" y="3328416"/>
-            <a:ext cx="2057400" cy="713232"/>
+            <a:off x="4617720" y="3310128"/>
+            <a:ext cx="2057400" cy="786384"/>
           </a:xfrm>
           <a:prstGeom prst="roundRect">
             <a:avLst>
-              <a:gd name="adj" fmla="val 10256"/>
+              <a:gd name="adj" fmla="val 9302"/>
             </a:avLst>
           </a:prstGeom>
           <a:solidFill>
@@ -17585,13 +18526,13 @@
       </p:sp>
       <p:sp>
         <p:nvSpPr>
-          <p:cNvPr id="55" name="Shape 46"/>
+          <p:cNvPr id="57" name="Shape 48"/>
           <p:cNvSpPr/>
           <p:nvPr/>
         </p:nvSpPr>
         <p:spPr>
           <a:xfrm>
-            <a:off x="4709160" y="3392424"/>
+            <a:off x="4709160" y="3401568"/>
             <a:ext cx="274320" cy="274320"/>
           </a:xfrm>
           <a:prstGeom prst="roundRect">
@@ -17612,7 +18553,7 @@
       </p:sp>
       <p:pic>
         <p:nvPicPr>
-          <p:cNvPr id="56" name="Image 7" descr="preencoded.png">    </p:cNvPr>
+          <p:cNvPr id="58" name="Image 7" descr="preencoded.png">    </p:cNvPr>
           <p:cNvPicPr>
             <a:picLocks noChangeAspect="1"/>
           </p:cNvPicPr>
@@ -17626,7 +18567,7 @@
         </p:blipFill>
         <p:spPr>
           <a:xfrm>
-            <a:off x="4750308" y="3433572"/>
+            <a:off x="4750308" y="3442716"/>
             <a:ext cx="192024" cy="192024"/>
           </a:xfrm>
           <a:prstGeom prst="rect">
@@ -17636,14 +18577,14 @@
       </p:pic>
       <p:sp>
         <p:nvSpPr>
-          <p:cNvPr id="57" name="Text 47"/>
-          <p:cNvSpPr txBox="1"/>
-          <p:nvPr/>
-        </p:nvSpPr>
-        <p:spPr>
-          <a:xfrm>
-            <a:off x="5056632" y="3374136"/>
-            <a:ext cx="1554480" cy="292608"/>
+          <p:cNvPr id="59" name="Text 49"/>
+          <p:cNvSpPr txBox="1"/>
+          <p:nvPr/>
+        </p:nvSpPr>
+        <p:spPr>
+          <a:xfrm>
+            <a:off x="5074920" y="3374136"/>
+            <a:ext cx="1508760" cy="219456"/>
           </a:xfrm>
           <a:prstGeom prst="rect">
             <a:avLst/>
@@ -17675,14 +18616,53 @@
       </p:sp>
       <p:sp>
         <p:nvSpPr>
-          <p:cNvPr id="58" name="Text 48"/>
-          <p:cNvSpPr txBox="1"/>
-          <p:nvPr/>
-        </p:nvSpPr>
-        <p:spPr>
-          <a:xfrm>
-            <a:off x="4709160" y="3712464"/>
-            <a:ext cx="1874520" cy="310896"/>
+          <p:cNvPr id="60" name="Text 50"/>
+          <p:cNvSpPr txBox="1"/>
+          <p:nvPr/>
+        </p:nvSpPr>
+        <p:spPr>
+          <a:xfrm>
+            <a:off x="5074920" y="3584448"/>
+            <a:ext cx="1508760" cy="146304"/>
+          </a:xfrm>
+          <a:prstGeom prst="rect">
+            <a:avLst/>
+          </a:prstGeom>
+          <a:noFill/>
+          <a:ln/>
+        </p:spPr>
+        <p:txBody>
+          <a:bodyPr wrap="square" lIns="0" tIns="0" rIns="0" bIns="0" rtlCol="0" anchor="ctr"/>
+          <a:lstStyle/>
+          <a:p>
+            <a:pPr indent="0" marL="0">
+              <a:buNone/>
+            </a:pPr>
+            <a:r>
+              <a:rPr lang="en-US" sz="730" b="1" dirty="0">
+                <a:solidFill>
+                  <a:srgbClr val="5B6B7F"/>
+                </a:solidFill>
+                <a:latin typeface="Calibri" pitchFamily="34" charset="0"/>
+                <a:ea typeface="Calibri" pitchFamily="34" charset="-122"/>
+                <a:cs typeface="Calibri" pitchFamily="34" charset="-120"/>
+              </a:rPr>
+              <a:t>ready, checked cases</a:t>
+            </a:r>
+            <a:endParaRPr lang="en-US" sz="730" dirty="0"/>
+          </a:p>
+        </p:txBody>
+      </p:sp>
+      <p:sp>
+        <p:nvSpPr>
+          <p:cNvPr id="61" name="Text 51"/>
+          <p:cNvSpPr txBox="1"/>
+          <p:nvPr/>
+        </p:nvSpPr>
+        <p:spPr>
+          <a:xfrm>
+            <a:off x="4709160" y="3785616"/>
+            <a:ext cx="1874520" cy="237744"/>
           </a:xfrm>
           <a:prstGeom prst="rect">
             <a:avLst/>
@@ -17698,7 +18678,7 @@
               <a:buNone/>
             </a:pPr>
             <a:r>
-              <a:rPr lang="en-US" sz="690" dirty="0">
+              <a:rPr lang="en-US" sz="670" dirty="0">
                 <a:solidFill>
                   <a:srgbClr val="1F2937"/>
                 </a:solidFill>
@@ -17706,26 +18686,26 @@
                 <a:ea typeface="Calibri" pitchFamily="34" charset="-122"/>
                 <a:cs typeface="Calibri" pitchFamily="34" charset="-120"/>
               </a:rPr>
-              <a:t>Ready, checked cases in the AJAY app; a demand map by block for the yearly plan.</a:t>
-            </a:r>
-            <a:endParaRPr lang="en-US" sz="690" dirty="0"/>
-          </a:p>
-        </p:txBody>
-      </p:sp>
-      <p:sp>
-        <p:nvSpPr>
-          <p:cNvPr id="59" name="Shape 49"/>
+              <a:t>In the AJAY app, plus a demand map by block for the yearly plan.</a:t>
+            </a:r>
+            <a:endParaRPr lang="en-US" sz="670" dirty="0"/>
+          </a:p>
+        </p:txBody>
+      </p:sp>
+      <p:sp>
+        <p:nvSpPr>
+          <p:cNvPr id="62" name="Shape 52"/>
           <p:cNvSpPr/>
           <p:nvPr/>
         </p:nvSpPr>
         <p:spPr>
           <a:xfrm>
-            <a:off x="6789420" y="3328416"/>
-            <a:ext cx="2057400" cy="713232"/>
+            <a:off x="6789420" y="3310128"/>
+            <a:ext cx="2057400" cy="786384"/>
           </a:xfrm>
           <a:prstGeom prst="roundRect">
             <a:avLst>
-              <a:gd name="adj" fmla="val 10256"/>
+              <a:gd name="adj" fmla="val 9302"/>
             </a:avLst>
           </a:prstGeom>
           <a:solidFill>
@@ -17741,13 +18721,13 @@
       </p:sp>
       <p:sp>
         <p:nvSpPr>
-          <p:cNvPr id="60" name="Shape 50"/>
+          <p:cNvPr id="63" name="Shape 53"/>
           <p:cNvSpPr/>
           <p:nvPr/>
         </p:nvSpPr>
         <p:spPr>
           <a:xfrm>
-            <a:off x="6880860" y="3392424"/>
+            <a:off x="6880860" y="3401568"/>
             <a:ext cx="274320" cy="274320"/>
           </a:xfrm>
           <a:prstGeom prst="roundRect">
@@ -17768,7 +18748,7 @@
       </p:sp>
       <p:pic>
         <p:nvPicPr>
-          <p:cNvPr id="61" name="Image 8" descr="preencoded.png">    </p:cNvPr>
+          <p:cNvPr id="64" name="Image 8" descr="preencoded.png">    </p:cNvPr>
           <p:cNvPicPr>
             <a:picLocks noChangeAspect="1"/>
           </p:cNvPicPr>
@@ -17782,7 +18762,7 @@
         </p:blipFill>
         <p:spPr>
           <a:xfrm>
-            <a:off x="6922008" y="3433572"/>
+            <a:off x="6922008" y="3442716"/>
             <a:ext cx="192024" cy="192024"/>
           </a:xfrm>
           <a:prstGeom prst="rect">
@@ -17792,14 +18772,14 @@
       </p:pic>
       <p:sp>
         <p:nvSpPr>
-          <p:cNvPr id="62" name="Text 51"/>
-          <p:cNvSpPr txBox="1"/>
-          <p:nvPr/>
-        </p:nvSpPr>
-        <p:spPr>
-          <a:xfrm>
-            <a:off x="7228332" y="3374136"/>
-            <a:ext cx="1554480" cy="292608"/>
+          <p:cNvPr id="65" name="Text 54"/>
+          <p:cNvSpPr txBox="1"/>
+          <p:nvPr/>
+        </p:nvSpPr>
+        <p:spPr>
+          <a:xfrm>
+            <a:off x="7246620" y="3374136"/>
+            <a:ext cx="1508760" cy="219456"/>
           </a:xfrm>
           <a:prstGeom prst="rect">
             <a:avLst/>
@@ -17831,14 +18811,53 @@
       </p:sp>
       <p:sp>
         <p:nvSpPr>
-          <p:cNvPr id="63" name="Text 52"/>
-          <p:cNvSpPr txBox="1"/>
-          <p:nvPr/>
-        </p:nvSpPr>
-        <p:spPr>
-          <a:xfrm>
-            <a:off x="6880860" y="3712464"/>
-            <a:ext cx="1874520" cy="310896"/>
+          <p:cNvPr id="66" name="Text 55"/>
+          <p:cNvSpPr txBox="1"/>
+          <p:nvPr/>
+        </p:nvSpPr>
+        <p:spPr>
+          <a:xfrm>
+            <a:off x="7246620" y="3584448"/>
+            <a:ext cx="1508760" cy="146304"/>
+          </a:xfrm>
+          <a:prstGeom prst="rect">
+            <a:avLst/>
+          </a:prstGeom>
+          <a:noFill/>
+          <a:ln/>
+        </p:spPr>
+        <p:txBody>
+          <a:bodyPr wrap="square" lIns="0" tIns="0" rIns="0" bIns="0" rtlCol="0" anchor="ctr"/>
+          <a:lstStyle/>
+          <a:p>
+            <a:pPr indent="0" marL="0">
+              <a:buNone/>
+            </a:pPr>
+            <a:r>
+              <a:rPr lang="en-US" sz="730" b="1" dirty="0">
+                <a:solidFill>
+                  <a:srgbClr val="5B6B7F"/>
+                </a:solidFill>
+                <a:latin typeface="Calibri" pitchFamily="34" charset="0"/>
+                <a:ea typeface="Calibri" pitchFamily="34" charset="-122"/>
+                <a:cs typeface="Calibri" pitchFamily="34" charset="-120"/>
+              </a:rPr>
+              <a:t>one record, call to job</a:t>
+            </a:r>
+            <a:endParaRPr lang="en-US" sz="730" dirty="0"/>
+          </a:p>
+        </p:txBody>
+      </p:sp>
+      <p:sp>
+        <p:nvSpPr>
+          <p:cNvPr id="67" name="Text 56"/>
+          <p:cNvSpPr txBox="1"/>
+          <p:nvPr/>
+        </p:nvSpPr>
+        <p:spPr>
+          <a:xfrm>
+            <a:off x="6880860" y="3785616"/>
+            <a:ext cx="1874520" cy="237744"/>
           </a:xfrm>
           <a:prstGeom prst="rect">
             <a:avLst/>
@@ -17854,7 +18873,7 @@
               <a:buNone/>
             </a:pPr>
             <a:r>
-              <a:rPr lang="en-US" sz="690" dirty="0">
+              <a:rPr lang="en-US" sz="670" dirty="0">
                 <a:solidFill>
                   <a:srgbClr val="1F2937"/>
                 </a:solidFill>
@@ -17862,31 +18881,31 @@
                 <a:ea typeface="Calibri" pitchFamily="34" charset="-122"/>
                 <a:cs typeface="Calibri" pitchFamily="34" charset="-120"/>
               </a:rPr>
-              <a:t>One record from call to job; each outcome marked confirmed (employer / EPFO*) or self-reported.</a:t>
-            </a:r>
-            <a:endParaRPr lang="en-US" sz="690" dirty="0"/>
-          </a:p>
-        </p:txBody>
-      </p:sp>
-      <p:sp>
-        <p:nvSpPr>
-          <p:cNvPr id="64" name="Text 53"/>
-          <p:cNvSpPr txBox="1"/>
-          <p:nvPr/>
-        </p:nvSpPr>
-        <p:spPr>
-          <a:xfrm>
-            <a:off x="274320" y="4114800"/>
-            <a:ext cx="4572000" cy="182880"/>
-          </a:xfrm>
-          <a:prstGeom prst="rect">
-            <a:avLst/>
-          </a:prstGeom>
-          <a:noFill/>
-          <a:ln/>
-        </p:spPr>
-        <p:txBody>
-          <a:bodyPr wrap="square" lIns="0" tIns="0" rIns="0" bIns="0" rtlCol="0" anchor="t"/>
+              <a:t>Each outcome marked confirmed (employer / EPFO*) or self-reported.</a:t>
+            </a:r>
+            <a:endParaRPr lang="en-US" sz="670" dirty="0"/>
+          </a:p>
+        </p:txBody>
+      </p:sp>
+      <p:sp>
+        <p:nvSpPr>
+          <p:cNvPr id="68" name="Text 57"/>
+          <p:cNvSpPr txBox="1"/>
+          <p:nvPr/>
+        </p:nvSpPr>
+        <p:spPr>
+          <a:xfrm>
+            <a:off x="274320" y="4187952"/>
+            <a:ext cx="5486400" cy="182880"/>
+          </a:xfrm>
+          <a:prstGeom prst="rect">
+            <a:avLst/>
+          </a:prstGeom>
+          <a:noFill/>
+          <a:ln/>
+        </p:spPr>
+        <p:txBody>
+          <a:bodyPr wrap="square" lIns="0" tIns="0" rIns="0" bIns="0" rtlCol="0" anchor="ctr"/>
           <a:lstStyle/>
           <a:p>
             <a:pPr indent="0" marL="0">
@@ -17901,7 +18920,18 @@
                 <a:ea typeface="Calibri" pitchFamily="34" charset="-122"/>
                 <a:cs typeface="Calibri" pitchFamily="34" charset="-120"/>
               </a:rPr>
-              <a:t>BENEFITS</a:t>
+              <a:t>BENEFITS  </a:t>
+            </a:r>
+            <a:r>
+              <a:rPr lang="en-US" sz="750" i="1" dirty="0">
+                <a:solidFill>
+                  <a:srgbClr val="6B7280"/>
+                </a:solidFill>
+                <a:latin typeface="Calibri" pitchFamily="34" charset="0"/>
+                <a:ea typeface="Calibri" pitchFamily="34" charset="-122"/>
+                <a:cs typeface="Calibri" pitchFamily="34" charset="-120"/>
+              </a:rPr>
+              <a:t>social · economic · governance · environment</a:t>
             </a:r>
             <a:endParaRPr lang="en-US" sz="850" dirty="0"/>
           </a:p>
@@ -17909,18 +18939,18 @@
       </p:sp>
       <p:sp>
         <p:nvSpPr>
-          <p:cNvPr id="65" name="Shape 54"/>
+          <p:cNvPr id="69" name="Shape 58"/>
           <p:cNvSpPr/>
           <p:nvPr/>
         </p:nvSpPr>
         <p:spPr>
           <a:xfrm>
-            <a:off x="274320" y="4279392"/>
-            <a:ext cx="2057400" cy="548640"/>
+            <a:off x="274320" y="4370832"/>
+            <a:ext cx="2057400" cy="457200"/>
           </a:xfrm>
           <a:prstGeom prst="roundRect">
             <a:avLst>
-              <a:gd name="adj" fmla="val 13333"/>
+              <a:gd name="adj" fmla="val 16000"/>
             </a:avLst>
           </a:prstGeom>
           <a:solidFill>
@@ -17936,13 +18966,13 @@
       </p:sp>
       <p:sp>
         <p:nvSpPr>
-          <p:cNvPr id="66" name="Shape 55"/>
+          <p:cNvPr id="70" name="Shape 59"/>
           <p:cNvSpPr/>
           <p:nvPr/>
         </p:nvSpPr>
         <p:spPr>
           <a:xfrm>
-            <a:off x="365760" y="4343400"/>
+            <a:off x="365760" y="4434840"/>
             <a:ext cx="237744" cy="237744"/>
           </a:xfrm>
           <a:prstGeom prst="roundRect">
@@ -17963,7 +18993,7 @@
       </p:sp>
       <p:pic>
         <p:nvPicPr>
-          <p:cNvPr id="67" name="Image 9" descr="preencoded.png">    </p:cNvPr>
+          <p:cNvPr id="71" name="Image 9" descr="preencoded.png">    </p:cNvPr>
           <p:cNvPicPr>
             <a:picLocks noChangeAspect="1"/>
           </p:cNvPicPr>
@@ -17977,7 +19007,7 @@
         </p:blipFill>
         <p:spPr>
           <a:xfrm>
-            <a:off x="401422" y="4379062"/>
+            <a:off x="401422" y="4470502"/>
             <a:ext cx="166421" cy="166421"/>
           </a:xfrm>
           <a:prstGeom prst="rect">
@@ -17987,14 +19017,14 @@
       </p:pic>
       <p:sp>
         <p:nvSpPr>
-          <p:cNvPr id="68" name="Text 56"/>
-          <p:cNvSpPr txBox="1"/>
-          <p:nvPr/>
-        </p:nvSpPr>
-        <p:spPr>
-          <a:xfrm>
-            <a:off x="676656" y="4279392"/>
-            <a:ext cx="1600200" cy="548640"/>
+          <p:cNvPr id="72" name="Text 60"/>
+          <p:cNvSpPr txBox="1"/>
+          <p:nvPr/>
+        </p:nvSpPr>
+        <p:spPr>
+          <a:xfrm>
+            <a:off x="676656" y="4370832"/>
+            <a:ext cx="1600200" cy="457200"/>
           </a:xfrm>
           <a:prstGeom prst="rect">
             <a:avLst/>
@@ -18021,7 +19051,7 @@
               <a:t>Social  </a:t>
             </a:r>
             <a:r>
-              <a:rPr lang="en-US" sz="670" dirty="0">
+              <a:rPr lang="en-US" sz="650" dirty="0">
                 <a:solidFill>
                   <a:srgbClr val="1F2937"/>
                 </a:solidFill>
@@ -18031,24 +19061,24 @@
               </a:rPr>
               <a:t>Women and non-readers included; right course the first time.</a:t>
             </a:r>
-            <a:endParaRPr lang="en-US" sz="670" dirty="0"/>
-          </a:p>
-        </p:txBody>
-      </p:sp>
-      <p:sp>
-        <p:nvSpPr>
-          <p:cNvPr id="69" name="Shape 57"/>
+            <a:endParaRPr lang="en-US" sz="650" dirty="0"/>
+          </a:p>
+        </p:txBody>
+      </p:sp>
+      <p:sp>
+        <p:nvSpPr>
+          <p:cNvPr id="73" name="Shape 61"/>
           <p:cNvSpPr/>
           <p:nvPr/>
         </p:nvSpPr>
         <p:spPr>
           <a:xfrm>
-            <a:off x="2446020" y="4279392"/>
-            <a:ext cx="2057400" cy="548640"/>
+            <a:off x="2446020" y="4370832"/>
+            <a:ext cx="2057400" cy="457200"/>
           </a:xfrm>
           <a:prstGeom prst="roundRect">
             <a:avLst>
-              <a:gd name="adj" fmla="val 13333"/>
+              <a:gd name="adj" fmla="val 16000"/>
             </a:avLst>
           </a:prstGeom>
           <a:solidFill>
@@ -18064,13 +19094,13 @@
       </p:sp>
       <p:sp>
         <p:nvSpPr>
-          <p:cNvPr id="70" name="Shape 58"/>
+          <p:cNvPr id="74" name="Shape 62"/>
           <p:cNvSpPr/>
           <p:nvPr/>
         </p:nvSpPr>
         <p:spPr>
           <a:xfrm>
-            <a:off x="2537460" y="4343400"/>
+            <a:off x="2537460" y="4434840"/>
             <a:ext cx="237744" cy="237744"/>
           </a:xfrm>
           <a:prstGeom prst="roundRect">
@@ -18091,7 +19121,7 @@
       </p:sp>
       <p:pic>
         <p:nvPicPr>
-          <p:cNvPr id="71" name="Image 10" descr="preencoded.png">    </p:cNvPr>
+          <p:cNvPr id="75" name="Image 10" descr="preencoded.png">    </p:cNvPr>
           <p:cNvPicPr>
             <a:picLocks noChangeAspect="1"/>
           </p:cNvPicPr>
@@ -18105,7 +19135,7 @@
         </p:blipFill>
         <p:spPr>
           <a:xfrm>
-            <a:off x="2573122" y="4379062"/>
+            <a:off x="2573122" y="4470502"/>
             <a:ext cx="166421" cy="166421"/>
           </a:xfrm>
           <a:prstGeom prst="rect">
@@ -18115,14 +19145,14 @@
       </p:pic>
       <p:sp>
         <p:nvSpPr>
-          <p:cNvPr id="72" name="Text 59"/>
-          <p:cNvSpPr txBox="1"/>
-          <p:nvPr/>
-        </p:nvSpPr>
-        <p:spPr>
-          <a:xfrm>
-            <a:off x="2848356" y="4279392"/>
-            <a:ext cx="1600200" cy="548640"/>
+          <p:cNvPr id="76" name="Text 63"/>
+          <p:cNvSpPr txBox="1"/>
+          <p:nvPr/>
+        </p:nvSpPr>
+        <p:spPr>
+          <a:xfrm>
+            <a:off x="2848356" y="4370832"/>
+            <a:ext cx="1600200" cy="457200"/>
           </a:xfrm>
           <a:prstGeom prst="rect">
             <a:avLst/>
@@ -18149,7 +19179,7 @@
               <a:t>Economic  </a:t>
             </a:r>
             <a:r>
-              <a:rPr lang="en-US" sz="670" dirty="0">
+              <a:rPr lang="en-US" sz="650" dirty="0">
                 <a:solidFill>
                   <a:srgbClr val="1F2937"/>
                 </a:solidFill>
@@ -18159,24 +19189,24 @@
               </a:rPr>
               <a:t>Less money on wrong training; more people earning — proved by follow-up.</a:t>
             </a:r>
-            <a:endParaRPr lang="en-US" sz="670" dirty="0"/>
-          </a:p>
-        </p:txBody>
-      </p:sp>
-      <p:sp>
-        <p:nvSpPr>
-          <p:cNvPr id="73" name="Shape 60"/>
+            <a:endParaRPr lang="en-US" sz="650" dirty="0"/>
+          </a:p>
+        </p:txBody>
+      </p:sp>
+      <p:sp>
+        <p:nvSpPr>
+          <p:cNvPr id="77" name="Shape 64"/>
           <p:cNvSpPr/>
           <p:nvPr/>
         </p:nvSpPr>
         <p:spPr>
           <a:xfrm>
-            <a:off x="4617720" y="4279392"/>
-            <a:ext cx="2057400" cy="548640"/>
+            <a:off x="4617720" y="4370832"/>
+            <a:ext cx="2057400" cy="457200"/>
           </a:xfrm>
           <a:prstGeom prst="roundRect">
             <a:avLst>
-              <a:gd name="adj" fmla="val 13333"/>
+              <a:gd name="adj" fmla="val 16000"/>
             </a:avLst>
           </a:prstGeom>
           <a:solidFill>
@@ -18192,13 +19222,13 @@
       </p:sp>
       <p:sp>
         <p:nvSpPr>
-          <p:cNvPr id="74" name="Shape 61"/>
+          <p:cNvPr id="78" name="Shape 65"/>
           <p:cNvSpPr/>
           <p:nvPr/>
         </p:nvSpPr>
         <p:spPr>
           <a:xfrm>
-            <a:off x="4709160" y="4343400"/>
+            <a:off x="4709160" y="4434840"/>
             <a:ext cx="237744" cy="237744"/>
           </a:xfrm>
           <a:prstGeom prst="roundRect">
@@ -18219,7 +19249,7 @@
       </p:sp>
       <p:pic>
         <p:nvPicPr>
-          <p:cNvPr id="75" name="Image 11" descr="preencoded.png">    </p:cNvPr>
+          <p:cNvPr id="79" name="Image 11" descr="preencoded.png">    </p:cNvPr>
           <p:cNvPicPr>
             <a:picLocks noChangeAspect="1"/>
           </p:cNvPicPr>
@@ -18233,7 +19263,7 @@
         </p:blipFill>
         <p:spPr>
           <a:xfrm>
-            <a:off x="4744822" y="4379062"/>
+            <a:off x="4744822" y="4470502"/>
             <a:ext cx="166421" cy="166421"/>
           </a:xfrm>
           <a:prstGeom prst="rect">
@@ -18243,14 +19273,14 @@
       </p:pic>
       <p:sp>
         <p:nvSpPr>
-          <p:cNvPr id="76" name="Text 62"/>
-          <p:cNvSpPr txBox="1"/>
-          <p:nvPr/>
-        </p:nvSpPr>
-        <p:spPr>
-          <a:xfrm>
-            <a:off x="5020056" y="4279392"/>
-            <a:ext cx="1600200" cy="548640"/>
+          <p:cNvPr id="80" name="Text 66"/>
+          <p:cNvSpPr txBox="1"/>
+          <p:nvPr/>
+        </p:nvSpPr>
+        <p:spPr>
+          <a:xfrm>
+            <a:off x="5020056" y="4370832"/>
+            <a:ext cx="1600200" cy="457200"/>
           </a:xfrm>
           <a:prstGeom prst="rect">
             <a:avLst/>
@@ -18277,7 +19307,7 @@
               <a:t>Governance  </a:t>
             </a:r>
             <a:r>
-              <a:rPr lang="en-US" sz="670" dirty="0">
+              <a:rPr lang="en-US" sz="650" dirty="0">
                 <a:solidFill>
                   <a:srgbClr val="1F2937"/>
                 </a:solidFill>
@@ -18287,24 +19317,24 @@
               </a:rPr>
               <a:t>One shared case for CSC, officer, partner and bank; planning data, not paper.</a:t>
             </a:r>
-            <a:endParaRPr lang="en-US" sz="670" dirty="0"/>
-          </a:p>
-        </p:txBody>
-      </p:sp>
-      <p:sp>
-        <p:nvSpPr>
-          <p:cNvPr id="77" name="Shape 63"/>
+            <a:endParaRPr lang="en-US" sz="650" dirty="0"/>
+          </a:p>
+        </p:txBody>
+      </p:sp>
+      <p:sp>
+        <p:nvSpPr>
+          <p:cNvPr id="81" name="Shape 67"/>
           <p:cNvSpPr/>
           <p:nvPr/>
         </p:nvSpPr>
         <p:spPr>
           <a:xfrm>
-            <a:off x="6789420" y="4279392"/>
-            <a:ext cx="2057400" cy="548640"/>
+            <a:off x="6789420" y="4370832"/>
+            <a:ext cx="2057400" cy="457200"/>
           </a:xfrm>
           <a:prstGeom prst="roundRect">
             <a:avLst>
-              <a:gd name="adj" fmla="val 13333"/>
+              <a:gd name="adj" fmla="val 16000"/>
             </a:avLst>
           </a:prstGeom>
           <a:solidFill>
@@ -18320,13 +19350,13 @@
       </p:sp>
       <p:sp>
         <p:nvSpPr>
-          <p:cNvPr id="78" name="Shape 64"/>
+          <p:cNvPr id="82" name="Shape 68"/>
           <p:cNvSpPr/>
           <p:nvPr/>
         </p:nvSpPr>
         <p:spPr>
           <a:xfrm>
-            <a:off x="6880860" y="4343400"/>
+            <a:off x="6880860" y="4434840"/>
             <a:ext cx="237744" cy="237744"/>
           </a:xfrm>
           <a:prstGeom prst="roundRect">
@@ -18347,7 +19377,7 @@
       </p:sp>
       <p:pic>
         <p:nvPicPr>
-          <p:cNvPr id="79" name="Image 12" descr="preencoded.png">    </p:cNvPr>
+          <p:cNvPr id="83" name="Image 12" descr="preencoded.png">    </p:cNvPr>
           <p:cNvPicPr>
             <a:picLocks noChangeAspect="1"/>
           </p:cNvPicPr>
@@ -18361,7 +19391,7 @@
         </p:blipFill>
         <p:spPr>
           <a:xfrm>
-            <a:off x="6916522" y="4379062"/>
+            <a:off x="6916522" y="4470502"/>
             <a:ext cx="166421" cy="166421"/>
           </a:xfrm>
           <a:prstGeom prst="rect">
@@ -18371,14 +19401,14 @@
       </p:pic>
       <p:sp>
         <p:nvSpPr>
-          <p:cNvPr id="80" name="Text 65"/>
-          <p:cNvSpPr txBox="1"/>
-          <p:nvPr/>
-        </p:nvSpPr>
-        <p:spPr>
-          <a:xfrm>
-            <a:off x="7191756" y="4279392"/>
-            <a:ext cx="1600200" cy="548640"/>
+          <p:cNvPr id="84" name="Text 69"/>
+          <p:cNvSpPr txBox="1"/>
+          <p:nvPr/>
+        </p:nvSpPr>
+        <p:spPr>
+          <a:xfrm>
+            <a:off x="7191756" y="4370832"/>
+            <a:ext cx="1600200" cy="457200"/>
           </a:xfrm>
           <a:prstGeom prst="rect">
             <a:avLst/>
@@ -18405,7 +19435,7 @@
               <a:t>Environment  </a:t>
             </a:r>
             <a:r>
-              <a:rPr lang="en-US" sz="670" dirty="0">
+              <a:rPr lang="en-US" sz="650" dirty="0">
                 <a:solidFill>
                   <a:srgbClr val="1F2937"/>
                 </a:solidFill>
@@ -18415,7 +19445,7 @@
               </a:rPr>
               <a:t>No paper forms, fewer trips to offices, runs on the shared govt cloud.</a:t>
             </a:r>
-            <a:endParaRPr lang="en-US" sz="670" dirty="0"/>
+            <a:endParaRPr lang="en-US" sz="650" dirty="0"/>
           </a:p>
         </p:txBody>
       </p:sp>
@@ -20615,7 +21645,7 @@
           <a:ln/>
         </p:spPr>
         <p:txBody>
-          <a:bodyPr wrap="square" lIns="0" tIns="0" rIns="0" bIns="0" rtlCol="0" anchor="t"/>
+          <a:bodyPr wrap="square" lIns="0" tIns="0" rIns="0" bIns="0" rtlCol="0" anchor="ctr"/>
           <a:lstStyle/>
           <a:p>
             <a:pPr indent="0" marL="0">
@@ -20630,7 +21660,18 @@
                 <a:ea typeface="Calibri" pitchFamily="34" charset="-122"/>
                 <a:cs typeface="Calibri" pitchFamily="34" charset="-120"/>
               </a:rPr>
-              <a:t>SEE MORE — EVERYTHING THE SIX SLIDES COULD NOT FIT</a:t>
+              <a:t>SEE MORE  </a:t>
+            </a:r>
+            <a:r>
+              <a:rPr lang="en-US" sz="750" i="1" dirty="0">
+                <a:solidFill>
+                  <a:srgbClr val="6B7280"/>
+                </a:solidFill>
+                <a:latin typeface="Calibri" pitchFamily="34" charset="0"/>
+                <a:ea typeface="Calibri" pitchFamily="34" charset="-122"/>
+                <a:cs typeface="Calibri" pitchFamily="34" charset="-120"/>
+              </a:rPr>
+              <a:t>code, prototype, video and every calculation — one click each</a:t>
             </a:r>
             <a:endParaRPr lang="en-US" sz="850" dirty="0"/>
           </a:p>

--- a/sih-26097/SkillCall_SIH26097_Cognify.pptx
+++ b/sih-26097/SkillCall_SIH26097_Cognify.pptx
@@ -595,7 +595,7 @@
           <a:p>
             <a:r>
               <a:rPr lang="en-US" dirty="0"/>
-              <a:t>Every headline states the point on its own: the problem, the three numbers, who we serve, the six steps and the six differentiators.</a:t>
+              <a:t>The problem, three numbers, who we serve, four merged call steps and five differentiators. Colour code: red = problem, green = solved/verified, blue = trust, amber = attention.</a:t>
             </a:r>
             <a:endParaRPr lang="en-US" dirty="0"/>
           </a:p>
@@ -771,7 +771,7 @@
           <a:p>
             <a:r>
               <a:rPr lang="en-US" dirty="0"/>
-              <a:t>Proof points, cost per completed call (₹25–54; calculations sheet §3), call funnel with sources, affordability (§4.3), four risks.</a:t>
+              <a:t>Proof points; cost as per-minute rates → per-call range → conclusion per 1,000 missed calls at the average ₹40; affordability; problems already solved. Full working: calculations sheet §3–4.</a:t>
             </a:r>
             <a:endParaRPr lang="en-US" dirty="0"/>
           </a:p>
@@ -1906,11 +1906,11 @@
         <p:spPr>
           <a:xfrm>
             <a:off x="274320" y="896112"/>
-            <a:ext cx="4846320" cy="804672"/>
+            <a:ext cx="4846320" cy="841248"/>
           </a:xfrm>
           <a:prstGeom prst="roundRect">
             <a:avLst>
-              <a:gd name="adj" fmla="val 9091"/>
+              <a:gd name="adj" fmla="val 8696"/>
             </a:avLst>
           </a:prstGeom>
           <a:solidFill>
@@ -1924,36 +1924,9 @@
           </a:ln>
         </p:spPr>
       </p:sp>
-      <p:sp>
-        <p:nvSpPr>
-          <p:cNvPr id="9" name="Shape 6"/>
-          <p:cNvSpPr/>
-          <p:nvPr/>
-        </p:nvSpPr>
-        <p:spPr>
-          <a:xfrm>
-            <a:off x="365760" y="987552"/>
-            <a:ext cx="310896" cy="310896"/>
-          </a:xfrm>
-          <a:prstGeom prst="roundRect">
-            <a:avLst>
-              <a:gd name="adj" fmla="val 22000"/>
-            </a:avLst>
-          </a:prstGeom>
-          <a:solidFill>
-            <a:srgbClr val="EF8A22"/>
-          </a:solidFill>
-          <a:ln w="12700">
-            <a:solidFill>
-              <a:srgbClr val="EF8A22"/>
-            </a:solidFill>
-            <a:prstDash val="solid"/>
-          </a:ln>
-        </p:spPr>
-      </p:sp>
       <p:pic>
         <p:nvPicPr>
-          <p:cNvPr id="10" name="Image 1" descr="preencoded.png">    </p:cNvPr>
+          <p:cNvPr id="9" name="Image 1" descr="preencoded.png">    </p:cNvPr>
           <p:cNvPicPr>
             <a:picLocks noChangeAspect="1"/>
           </p:cNvPicPr>
@@ -1967,8 +1940,8 @@
         </p:blipFill>
         <p:spPr>
           <a:xfrm>
-            <a:off x="412394" y="1034186"/>
-            <a:ext cx="217627" cy="217627"/>
+            <a:off x="365760" y="969264"/>
+            <a:ext cx="310896" cy="310896"/>
           </a:xfrm>
           <a:prstGeom prst="rect">
             <a:avLst/>
@@ -1977,14 +1950,53 @@
       </p:pic>
       <p:sp>
         <p:nvSpPr>
+          <p:cNvPr id="10" name="Text 6"/>
+          <p:cNvSpPr txBox="1"/>
+          <p:nvPr/>
+        </p:nvSpPr>
+        <p:spPr>
+          <a:xfrm>
+            <a:off x="749808" y="941832"/>
+            <a:ext cx="4279392" cy="201168"/>
+          </a:xfrm>
+          <a:prstGeom prst="rect">
+            <a:avLst/>
+          </a:prstGeom>
+          <a:noFill/>
+          <a:ln/>
+        </p:spPr>
+        <p:txBody>
+          <a:bodyPr wrap="square" lIns="0" tIns="0" rIns="0" bIns="0" rtlCol="0" anchor="ctr"/>
+          <a:lstStyle/>
+          <a:p>
+            <a:pPr indent="0" marL="0">
+              <a:buNone/>
+            </a:pPr>
+            <a:r>
+              <a:rPr lang="en-US" sz="1100" b="1" dirty="0">
+                <a:solidFill>
+                  <a:srgbClr val="EF8A22"/>
+                </a:solidFill>
+                <a:latin typeface="Calibri" pitchFamily="34" charset="0"/>
+                <a:ea typeface="Calibri" pitchFamily="34" charset="-122"/>
+                <a:cs typeface="Calibri" pitchFamily="34" charset="-120"/>
+              </a:rPr>
+              <a:t>Wrong course, then no job</a:t>
+            </a:r>
+            <a:endParaRPr lang="en-US" sz="1100" dirty="0"/>
+          </a:p>
+        </p:txBody>
+      </p:sp>
+      <p:sp>
+        <p:nvSpPr>
           <p:cNvPr id="11" name="Text 7"/>
           <p:cNvSpPr txBox="1"/>
           <p:nvPr/>
         </p:nvSpPr>
         <p:spPr>
           <a:xfrm>
-            <a:off x="768096" y="960120"/>
-            <a:ext cx="4261104" cy="219456"/>
+            <a:off x="749808" y="1133856"/>
+            <a:ext cx="4279392" cy="137160"/>
           </a:xfrm>
           <a:prstGeom prst="rect">
             <a:avLst/>
@@ -2000,7 +2012,57 @@
               <a:buNone/>
             </a:pPr>
             <a:r>
-              <a:rPr lang="en-US" sz="1100" b="1" dirty="0">
+              <a:rPr lang="en-US" sz="730" b="1" dirty="0">
+                <a:solidFill>
+                  <a:srgbClr val="5B6B7F"/>
+                </a:solidFill>
+                <a:latin typeface="Calibri" pitchFamily="34" charset="0"/>
+                <a:ea typeface="Calibri" pitchFamily="34" charset="-122"/>
+                <a:cs typeface="Calibri" pitchFamily="34" charset="-120"/>
+              </a:rPr>
+              <a:t>that is what happens to SC families today (SIH26097 · MoSJE)</a:t>
+            </a:r>
+            <a:endParaRPr lang="en-US" sz="730" dirty="0"/>
+          </a:p>
+        </p:txBody>
+      </p:sp>
+      <p:sp>
+        <p:nvSpPr>
+          <p:cNvPr id="12" name="Text 8"/>
+          <p:cNvSpPr txBox="1"/>
+          <p:nvPr/>
+        </p:nvSpPr>
+        <p:spPr>
+          <a:xfrm>
+            <a:off x="365760" y="1335024"/>
+            <a:ext cx="4663440" cy="329184"/>
+          </a:xfrm>
+          <a:prstGeom prst="rect">
+            <a:avLst/>
+          </a:prstGeom>
+          <a:noFill/>
+          <a:ln/>
+        </p:spPr>
+        <p:txBody>
+          <a:bodyPr wrap="square" lIns="0" tIns="0" rIns="0" bIns="0" rtlCol="0" anchor="t"/>
+          <a:lstStyle/>
+          <a:p>
+            <a:pPr indent="0" marL="0">
+              <a:buNone/>
+            </a:pPr>
+            <a:r>
+              <a:rPr lang="en-US" sz="670" dirty="0">
+                <a:solidFill>
+                  <a:srgbClr val="1F2937"/>
+                </a:solidFill>
+                <a:latin typeface="Calibri" pitchFamily="34" charset="0"/>
+                <a:ea typeface="Calibri" pitchFamily="34" charset="-122"/>
+                <a:cs typeface="Calibri" pitchFamily="34" charset="-120"/>
+              </a:rPr>
+              <a:t>PM-AJAY pays for </a:t>
+            </a:r>
+            <a:r>
+              <a:rPr lang="en-US" sz="670" b="1" dirty="0">
                 <a:solidFill>
                   <a:srgbClr val="EF8A22"/>
                 </a:solidFill>
@@ -2008,75 +2070,8 @@
                 <a:ea typeface="Calibri" pitchFamily="34" charset="-122"/>
                 <a:cs typeface="Calibri" pitchFamily="34" charset="-120"/>
               </a:rPr>
-              <a:t>Wrong course, then no job</a:t>
-            </a:r>
-            <a:endParaRPr lang="en-US" sz="1100" dirty="0"/>
-          </a:p>
-        </p:txBody>
-      </p:sp>
-      <p:sp>
-        <p:nvSpPr>
-          <p:cNvPr id="12" name="Text 8"/>
-          <p:cNvSpPr txBox="1"/>
-          <p:nvPr/>
-        </p:nvSpPr>
-        <p:spPr>
-          <a:xfrm>
-            <a:off x="768096" y="1170432"/>
-            <a:ext cx="4261104" cy="146304"/>
-          </a:xfrm>
-          <a:prstGeom prst="rect">
-            <a:avLst/>
-          </a:prstGeom>
-          <a:noFill/>
-          <a:ln/>
-        </p:spPr>
-        <p:txBody>
-          <a:bodyPr wrap="square" lIns="0" tIns="0" rIns="0" bIns="0" rtlCol="0" anchor="ctr"/>
-          <a:lstStyle/>
-          <a:p>
-            <a:pPr indent="0" marL="0">
-              <a:buNone/>
-            </a:pPr>
-            <a:r>
-              <a:rPr lang="en-US" sz="730" b="1" dirty="0">
-                <a:solidFill>
-                  <a:srgbClr val="5B6B7F"/>
-                </a:solidFill>
-                <a:latin typeface="Calibri" pitchFamily="34" charset="0"/>
-                <a:ea typeface="Calibri" pitchFamily="34" charset="-122"/>
-                <a:cs typeface="Calibri" pitchFamily="34" charset="-120"/>
-              </a:rPr>
-              <a:t>that is what happens to SC families today (SIH26097 · MoSJE)</a:t>
-            </a:r>
-            <a:endParaRPr lang="en-US" sz="730" dirty="0"/>
-          </a:p>
-        </p:txBody>
-      </p:sp>
-      <p:sp>
-        <p:nvSpPr>
-          <p:cNvPr id="13" name="Text 9"/>
-          <p:cNvSpPr txBox="1"/>
-          <p:nvPr/>
-        </p:nvSpPr>
-        <p:spPr>
-          <a:xfrm>
-            <a:off x="365760" y="1371600"/>
-            <a:ext cx="4663440" cy="256032"/>
-          </a:xfrm>
-          <a:prstGeom prst="rect">
-            <a:avLst/>
-          </a:prstGeom>
-          <a:noFill/>
-          <a:ln/>
-        </p:spPr>
-        <p:txBody>
-          <a:bodyPr wrap="square" lIns="0" tIns="0" rIns="0" bIns="0" rtlCol="0" anchor="t"/>
-          <a:lstStyle/>
-          <a:p>
-            <a:pPr indent="0" marL="0">
-              <a:buNone/>
-            </a:pPr>
+              <a:t>skill training</a:t>
+            </a:r>
             <a:r>
               <a:rPr lang="en-US" sz="670" dirty="0">
                 <a:solidFill>
@@ -2086,7 +2081,51 @@
                 <a:ea typeface="Calibri" pitchFamily="34" charset="-122"/>
                 <a:cs typeface="Calibri" pitchFamily="34" charset="-120"/>
               </a:rPr>
-              <a:t>PM-AJAY pays for skill training and small-business support (up to ₹50,000). But people are picked and placed through paper forms and field visits — those who can't read, or don't know the trades, land in the wrong course.</a:t>
+              <a:t> and </a:t>
+            </a:r>
+            <a:r>
+              <a:rPr lang="en-US" sz="670" b="1" dirty="0">
+                <a:solidFill>
+                  <a:srgbClr val="EF8A22"/>
+                </a:solidFill>
+                <a:latin typeface="Calibri" pitchFamily="34" charset="0"/>
+                <a:ea typeface="Calibri" pitchFamily="34" charset="-122"/>
+                <a:cs typeface="Calibri" pitchFamily="34" charset="-120"/>
+              </a:rPr>
+              <a:t>small-business support</a:t>
+            </a:r>
+            <a:r>
+              <a:rPr lang="en-US" sz="670" dirty="0">
+                <a:solidFill>
+                  <a:srgbClr val="1F2937"/>
+                </a:solidFill>
+                <a:latin typeface="Calibri" pitchFamily="34" charset="0"/>
+                <a:ea typeface="Calibri" pitchFamily="34" charset="-122"/>
+                <a:cs typeface="Calibri" pitchFamily="34" charset="-120"/>
+              </a:rPr>
+              <a:t> (up to ₹50,000). But people are picked and placed through </a:t>
+            </a:r>
+            <a:r>
+              <a:rPr lang="en-US" sz="670" b="1" dirty="0">
+                <a:solidFill>
+                  <a:srgbClr val="D64545"/>
+                </a:solidFill>
+                <a:latin typeface="Calibri" pitchFamily="34" charset="0"/>
+                <a:ea typeface="Calibri" pitchFamily="34" charset="-122"/>
+                <a:cs typeface="Calibri" pitchFamily="34" charset="-120"/>
+              </a:rPr>
+              <a:t>paper forms and field visits</a:t>
+            </a:r>
+            <a:r>
+              <a:rPr lang="en-US" sz="670" dirty="0">
+                <a:solidFill>
+                  <a:srgbClr val="1F2937"/>
+                </a:solidFill>
+                <a:latin typeface="Calibri" pitchFamily="34" charset="0"/>
+                <a:ea typeface="Calibri" pitchFamily="34" charset="-122"/>
+                <a:cs typeface="Calibri" pitchFamily="34" charset="-120"/>
+              </a:rPr>
+              <a:t> — those who can't read, or don't know the trades, land in the wrong course.</a:t>
             </a:r>
             <a:endParaRPr lang="en-US" sz="670" dirty="0"/>
           </a:p>
@@ -2094,18 +2133,18 @@
       </p:sp>
       <p:sp>
         <p:nvSpPr>
-          <p:cNvPr id="14" name="Shape 10"/>
+          <p:cNvPr id="13" name="Shape 9"/>
           <p:cNvSpPr/>
           <p:nvPr/>
         </p:nvSpPr>
         <p:spPr>
           <a:xfrm>
             <a:off x="5230368" y="896112"/>
-            <a:ext cx="1170432" cy="804672"/>
+            <a:ext cx="1170432" cy="841248"/>
           </a:xfrm>
           <a:prstGeom prst="roundRect">
             <a:avLst>
-              <a:gd name="adj" fmla="val 9091"/>
+              <a:gd name="adj" fmla="val 8696"/>
             </a:avLst>
           </a:prstGeom>
           <a:solidFill>
@@ -2121,7 +2160,7 @@
       </p:sp>
       <p:sp>
         <p:nvSpPr>
-          <p:cNvPr id="15" name="Text 11"/>
+          <p:cNvPr id="14" name="Text 10"/>
           <p:cNvSpPr txBox="1"/>
           <p:nvPr/>
         </p:nvSpPr>
@@ -2160,7 +2199,7 @@
       </p:sp>
       <p:sp>
         <p:nvSpPr>
-          <p:cNvPr id="16" name="Text 12"/>
+          <p:cNvPr id="15" name="Text 11"/>
           <p:cNvSpPr txBox="1"/>
           <p:nvPr/>
         </p:nvSpPr>
@@ -2199,13 +2238,13 @@
       </p:sp>
       <p:sp>
         <p:nvSpPr>
-          <p:cNvPr id="17" name="Shape 13"/>
+          <p:cNvPr id="16" name="Shape 12"/>
           <p:cNvSpPr/>
           <p:nvPr/>
         </p:nvSpPr>
         <p:spPr>
           <a:xfrm>
-            <a:off x="5303520" y="1499616"/>
+            <a:off x="5303520" y="1536192"/>
             <a:ext cx="1024128" cy="137160"/>
           </a:xfrm>
           <a:prstGeom prst="roundRect">
@@ -2226,13 +2265,13 @@
       </p:sp>
       <p:sp>
         <p:nvSpPr>
-          <p:cNvPr id="18" name="Text 14"/>
-          <p:cNvSpPr txBox="1"/>
-          <p:nvPr/>
-        </p:nvSpPr>
-        <p:spPr>
-          <a:xfrm>
-            <a:off x="5358384" y="1499616"/>
+          <p:cNvPr id="17" name="Text 13"/>
+          <p:cNvSpPr txBox="1"/>
+          <p:nvPr/>
+        </p:nvSpPr>
+        <p:spPr>
+          <a:xfrm>
+            <a:off x="5358384" y="1536192"/>
             <a:ext cx="932688" cy="137160"/>
           </a:xfrm>
           <a:prstGeom prst="rect">
@@ -2265,18 +2304,18 @@
       </p:sp>
       <p:sp>
         <p:nvSpPr>
-          <p:cNvPr id="19" name="Shape 15"/>
+          <p:cNvPr id="18" name="Shape 14"/>
           <p:cNvSpPr/>
           <p:nvPr/>
         </p:nvSpPr>
         <p:spPr>
           <a:xfrm>
             <a:off x="6455664" y="896112"/>
-            <a:ext cx="1170432" cy="804672"/>
+            <a:ext cx="1170432" cy="841248"/>
           </a:xfrm>
           <a:prstGeom prst="roundRect">
             <a:avLst>
-              <a:gd name="adj" fmla="val 9091"/>
+              <a:gd name="adj" fmla="val 8696"/>
             </a:avLst>
           </a:prstGeom>
           <a:solidFill>
@@ -2292,7 +2331,7 @@
       </p:sp>
       <p:sp>
         <p:nvSpPr>
-          <p:cNvPr id="20" name="Text 16"/>
+          <p:cNvPr id="19" name="Text 15"/>
           <p:cNvSpPr txBox="1"/>
           <p:nvPr/>
         </p:nvSpPr>
@@ -2331,7 +2370,7 @@
       </p:sp>
       <p:sp>
         <p:nvSpPr>
-          <p:cNvPr id="21" name="Text 17"/>
+          <p:cNvPr id="20" name="Text 16"/>
           <p:cNvSpPr txBox="1"/>
           <p:nvPr/>
         </p:nvSpPr>
@@ -2370,13 +2409,13 @@
       </p:sp>
       <p:sp>
         <p:nvSpPr>
-          <p:cNvPr id="22" name="Shape 18"/>
+          <p:cNvPr id="21" name="Shape 17"/>
           <p:cNvSpPr/>
           <p:nvPr/>
         </p:nvSpPr>
         <p:spPr>
           <a:xfrm>
-            <a:off x="6528816" y="1499616"/>
+            <a:off x="6528816" y="1536192"/>
             <a:ext cx="1024128" cy="137160"/>
           </a:xfrm>
           <a:prstGeom prst="roundRect">
@@ -2397,13 +2436,13 @@
       </p:sp>
       <p:sp>
         <p:nvSpPr>
-          <p:cNvPr id="23" name="Text 19"/>
-          <p:cNvSpPr txBox="1"/>
-          <p:nvPr/>
-        </p:nvSpPr>
-        <p:spPr>
-          <a:xfrm>
-            <a:off x="6583680" y="1499616"/>
+          <p:cNvPr id="22" name="Text 18"/>
+          <p:cNvSpPr txBox="1"/>
+          <p:nvPr/>
+        </p:nvSpPr>
+        <p:spPr>
+          <a:xfrm>
+            <a:off x="6583680" y="1536192"/>
             <a:ext cx="932688" cy="137160"/>
           </a:xfrm>
           <a:prstGeom prst="rect">
@@ -2436,18 +2475,18 @@
       </p:sp>
       <p:sp>
         <p:nvSpPr>
-          <p:cNvPr id="24" name="Shape 20"/>
+          <p:cNvPr id="23" name="Shape 19"/>
           <p:cNvSpPr/>
           <p:nvPr/>
         </p:nvSpPr>
         <p:spPr>
           <a:xfrm>
             <a:off x="7680960" y="896112"/>
-            <a:ext cx="1170432" cy="804672"/>
+            <a:ext cx="1170432" cy="841248"/>
           </a:xfrm>
           <a:prstGeom prst="roundRect">
             <a:avLst>
-              <a:gd name="adj" fmla="val 9091"/>
+              <a:gd name="adj" fmla="val 8696"/>
             </a:avLst>
           </a:prstGeom>
           <a:solidFill>
@@ -2463,7 +2502,7 @@
       </p:sp>
       <p:sp>
         <p:nvSpPr>
-          <p:cNvPr id="25" name="Text 21"/>
+          <p:cNvPr id="24" name="Text 20"/>
           <p:cNvSpPr txBox="1"/>
           <p:nvPr/>
         </p:nvSpPr>
@@ -2502,7 +2541,7 @@
       </p:sp>
       <p:sp>
         <p:nvSpPr>
-          <p:cNvPr id="26" name="Text 22"/>
+          <p:cNvPr id="25" name="Text 21"/>
           <p:cNvSpPr txBox="1"/>
           <p:nvPr/>
         </p:nvSpPr>
@@ -2541,13 +2580,13 @@
       </p:sp>
       <p:sp>
         <p:nvSpPr>
-          <p:cNvPr id="27" name="Shape 23"/>
+          <p:cNvPr id="26" name="Shape 22"/>
           <p:cNvSpPr/>
           <p:nvPr/>
         </p:nvSpPr>
         <p:spPr>
           <a:xfrm>
-            <a:off x="7754112" y="1499616"/>
+            <a:off x="7754112" y="1536192"/>
             <a:ext cx="1024128" cy="137160"/>
           </a:xfrm>
           <a:prstGeom prst="roundRect">
@@ -2568,13 +2607,13 @@
       </p:sp>
       <p:sp>
         <p:nvSpPr>
-          <p:cNvPr id="28" name="Text 24"/>
-          <p:cNvSpPr txBox="1"/>
-          <p:nvPr/>
-        </p:nvSpPr>
-        <p:spPr>
-          <a:xfrm>
-            <a:off x="7808976" y="1499616"/>
+          <p:cNvPr id="27" name="Text 23"/>
+          <p:cNvSpPr txBox="1"/>
+          <p:nvPr/>
+        </p:nvSpPr>
+        <p:spPr>
+          <a:xfrm>
+            <a:off x="7808976" y="1536192"/>
             <a:ext cx="932688" cy="137160"/>
           </a:xfrm>
           <a:prstGeom prst="rect">
@@ -2607,18 +2646,18 @@
       </p:sp>
       <p:sp>
         <p:nvSpPr>
-          <p:cNvPr id="29" name="Shape 25"/>
+          <p:cNvPr id="28" name="Shape 24"/>
           <p:cNvSpPr/>
           <p:nvPr/>
         </p:nvSpPr>
         <p:spPr>
           <a:xfrm>
-            <a:off x="274320" y="1773936"/>
-            <a:ext cx="8595360" cy="274320"/>
+            <a:off x="274320" y="1810512"/>
+            <a:ext cx="8595360" cy="292608"/>
           </a:xfrm>
           <a:prstGeom prst="roundRect">
             <a:avLst>
-              <a:gd name="adj" fmla="val 26667"/>
+              <a:gd name="adj" fmla="val 25000"/>
             </a:avLst>
           </a:prstGeom>
           <a:solidFill>
@@ -2634,14 +2673,41 @@
       </p:sp>
       <p:sp>
         <p:nvSpPr>
+          <p:cNvPr id="29" name="Shape 25"/>
+          <p:cNvSpPr/>
+          <p:nvPr/>
+        </p:nvSpPr>
+        <p:spPr>
+          <a:xfrm>
+            <a:off x="274320" y="1810512"/>
+            <a:ext cx="1143000" cy="292608"/>
+          </a:xfrm>
+          <a:prstGeom prst="roundRect">
+            <a:avLst>
+              <a:gd name="adj" fmla="val 25000"/>
+            </a:avLst>
+          </a:prstGeom>
+          <a:solidFill>
+            <a:srgbClr val="1F4E79"/>
+          </a:solidFill>
+          <a:ln w="9525">
+            <a:solidFill>
+              <a:srgbClr val="1F4E79"/>
+            </a:solidFill>
+            <a:prstDash val="solid"/>
+          </a:ln>
+        </p:spPr>
+      </p:sp>
+      <p:sp>
+        <p:nvSpPr>
           <p:cNvPr id="30" name="Text 26"/>
           <p:cNvSpPr txBox="1"/>
           <p:nvPr/>
         </p:nvSpPr>
         <p:spPr>
           <a:xfrm>
-            <a:off x="384048" y="1773936"/>
-            <a:ext cx="914400" cy="274320"/>
+            <a:off x="274320" y="1810512"/>
+            <a:ext cx="1143000" cy="292608"/>
           </a:xfrm>
           <a:prstGeom prst="rect">
             <a:avLst/>
@@ -2653,11 +2719,50 @@
           <a:bodyPr wrap="square" lIns="0" tIns="0" rIns="0" bIns="0" rtlCol="0" anchor="ctr"/>
           <a:lstStyle/>
           <a:p>
+            <a:pPr algn="ctr" indent="0" marL="0">
+              <a:buNone/>
+            </a:pPr>
+            <a:r>
+              <a:rPr lang="en-US" sz="750" b="1" spc="100" kern="0" dirty="0">
+                <a:solidFill>
+                  <a:srgbClr val="FFFFFF"/>
+                </a:solidFill>
+                <a:latin typeface="Calibri" pitchFamily="34" charset="0"/>
+                <a:ea typeface="Calibri" pitchFamily="34" charset="-122"/>
+                <a:cs typeface="Calibri" pitchFamily="34" charset="-120"/>
+              </a:rPr>
+              <a:t>WHO WE SERVE</a:t>
+            </a:r>
+            <a:endParaRPr lang="en-US" sz="750" dirty="0"/>
+          </a:p>
+        </p:txBody>
+      </p:sp>
+      <p:sp>
+        <p:nvSpPr>
+          <p:cNvPr id="31" name="Text 27"/>
+          <p:cNvSpPr txBox="1"/>
+          <p:nvPr/>
+        </p:nvSpPr>
+        <p:spPr>
+          <a:xfrm>
+            <a:off x="1554480" y="1810512"/>
+            <a:ext cx="1371600" cy="292608"/>
+          </a:xfrm>
+          <a:prstGeom prst="rect">
+            <a:avLst/>
+          </a:prstGeom>
+          <a:noFill/>
+          <a:ln/>
+        </p:spPr>
+        <p:txBody>
+          <a:bodyPr wrap="square" lIns="0" tIns="0" rIns="0" bIns="0" rtlCol="0" anchor="ctr"/>
+          <a:lstStyle/>
+          <a:p>
             <a:pPr indent="0" marL="0">
               <a:buNone/>
             </a:pPr>
             <a:r>
-              <a:rPr lang="en-US" sz="750" b="1" spc="100" kern="0" dirty="0">
+              <a:rPr lang="en-US" sz="950" b="1" dirty="0">
                 <a:solidFill>
                   <a:srgbClr val="1F4E79"/>
                 </a:solidFill>
@@ -2665,22 +2770,33 @@
                 <a:ea typeface="Calibri" pitchFamily="34" charset="-122"/>
                 <a:cs typeface="Calibri" pitchFamily="34" charset="-120"/>
               </a:rPr>
-              <a:t>WHO WE SERVE</a:t>
-            </a:r>
-            <a:endParaRPr lang="en-US" sz="750" dirty="0"/>
-          </a:p>
-        </p:txBody>
-      </p:sp>
-      <p:sp>
-        <p:nvSpPr>
-          <p:cNvPr id="31" name="Text 27"/>
-          <p:cNvSpPr txBox="1"/>
-          <p:nvPr/>
-        </p:nvSpPr>
-        <p:spPr>
-          <a:xfrm>
-            <a:off x="1325880" y="1773936"/>
-            <a:ext cx="1417320" cy="274320"/>
+              <a:t>20.14 crore  </a:t>
+            </a:r>
+            <a:r>
+              <a:rPr lang="en-US" sz="700" dirty="0">
+                <a:solidFill>
+                  <a:srgbClr val="1F2937"/>
+                </a:solidFill>
+                <a:latin typeface="Calibri" pitchFamily="34" charset="0"/>
+                <a:ea typeface="Calibri" pitchFamily="34" charset="-122"/>
+                <a:cs typeface="Calibri" pitchFamily="34" charset="-120"/>
+              </a:rPr>
+              <a:t>SC people</a:t>
+            </a:r>
+            <a:endParaRPr lang="en-US" sz="950" dirty="0"/>
+          </a:p>
+        </p:txBody>
+      </p:sp>
+      <p:sp>
+        <p:nvSpPr>
+          <p:cNvPr id="32" name="Text 28"/>
+          <p:cNvSpPr txBox="1"/>
+          <p:nvPr/>
+        </p:nvSpPr>
+        <p:spPr>
+          <a:xfrm>
+            <a:off x="2743200" y="1810512"/>
+            <a:ext cx="228600" cy="292608"/>
           </a:xfrm>
           <a:prstGeom prst="rect">
             <a:avLst/>
@@ -2692,6 +2808,45 @@
           <a:bodyPr wrap="square" lIns="0" tIns="0" rIns="0" bIns="0" rtlCol="0" anchor="ctr"/>
           <a:lstStyle/>
           <a:p>
+            <a:pPr algn="ctr" indent="0" marL="0">
+              <a:buNone/>
+            </a:pPr>
+            <a:r>
+              <a:rPr lang="en-US" sz="1000" b="1" dirty="0">
+                <a:solidFill>
+                  <a:srgbClr val="2E6FD6"/>
+                </a:solidFill>
+                <a:latin typeface="Calibri" pitchFamily="34" charset="0"/>
+                <a:ea typeface="Calibri" pitchFamily="34" charset="-122"/>
+                <a:cs typeface="Calibri" pitchFamily="34" charset="-120"/>
+              </a:rPr>
+              <a:t>→</a:t>
+            </a:r>
+            <a:endParaRPr lang="en-US" sz="1000" dirty="0"/>
+          </a:p>
+        </p:txBody>
+      </p:sp>
+      <p:sp>
+        <p:nvSpPr>
+          <p:cNvPr id="33" name="Text 29"/>
+          <p:cNvSpPr txBox="1"/>
+          <p:nvPr/>
+        </p:nvSpPr>
+        <p:spPr>
+          <a:xfrm>
+            <a:off x="3017520" y="1810512"/>
+            <a:ext cx="1828800" cy="292608"/>
+          </a:xfrm>
+          <a:prstGeom prst="rect">
+            <a:avLst/>
+          </a:prstGeom>
+          <a:noFill/>
+          <a:ln/>
+        </p:spPr>
+        <p:txBody>
+          <a:bodyPr wrap="square" lIns="0" tIns="0" rIns="0" bIns="0" rtlCol="0" anchor="ctr"/>
+          <a:lstStyle/>
+          <a:p>
             <a:pPr indent="0" marL="0">
               <a:buNone/>
             </a:pPr>
@@ -2704,7 +2859,7 @@
                 <a:ea typeface="Calibri" pitchFamily="34" charset="-122"/>
                 <a:cs typeface="Calibri" pitchFamily="34" charset="-120"/>
               </a:rPr>
-              <a:t>20.14 crore  </a:t>
+              <a:t>≈ 5.9 crore  </a:t>
             </a:r>
             <a:r>
               <a:rPr lang="en-US" sz="700" dirty="0">
@@ -2715,7 +2870,7 @@
                 <a:ea typeface="Calibri" pitchFamily="34" charset="-122"/>
                 <a:cs typeface="Calibri" pitchFamily="34" charset="-120"/>
               </a:rPr>
-              <a:t>SC people</a:t>
+              <a:t>eligible (below poverty line)</a:t>
             </a:r>
             <a:endParaRPr lang="en-US" sz="950" dirty="0"/>
           </a:p>
@@ -2723,14 +2878,14 @@
       </p:sp>
       <p:sp>
         <p:nvSpPr>
-          <p:cNvPr id="32" name="Text 28"/>
-          <p:cNvSpPr txBox="1"/>
-          <p:nvPr/>
-        </p:nvSpPr>
-        <p:spPr>
-          <a:xfrm>
-            <a:off x="2606040" y="1773936"/>
-            <a:ext cx="228600" cy="274320"/>
+          <p:cNvPr id="34" name="Text 30"/>
+          <p:cNvSpPr txBox="1"/>
+          <p:nvPr/>
+        </p:nvSpPr>
+        <p:spPr>
+          <a:xfrm>
+            <a:off x="4617720" y="1810512"/>
+            <a:ext cx="228600" cy="292608"/>
           </a:xfrm>
           <a:prstGeom prst="rect">
             <a:avLst/>
@@ -2762,14 +2917,14 @@
       </p:sp>
       <p:sp>
         <p:nvSpPr>
-          <p:cNvPr id="33" name="Text 29"/>
-          <p:cNvSpPr txBox="1"/>
-          <p:nvPr/>
-        </p:nvSpPr>
-        <p:spPr>
-          <a:xfrm>
-            <a:off x="2880360" y="1773936"/>
-            <a:ext cx="1874520" cy="274320"/>
+          <p:cNvPr id="35" name="Text 31"/>
+          <p:cNvSpPr txBox="1"/>
+          <p:nvPr/>
+        </p:nvSpPr>
+        <p:spPr>
+          <a:xfrm>
+            <a:off x="4892040" y="1810512"/>
+            <a:ext cx="1691640" cy="292608"/>
           </a:xfrm>
           <a:prstGeom prst="rect">
             <a:avLst/>
@@ -2793,7 +2948,7 @@
                 <a:ea typeface="Calibri" pitchFamily="34" charset="-122"/>
                 <a:cs typeface="Calibri" pitchFamily="34" charset="-120"/>
               </a:rPr>
-              <a:t>≈ 5.9 crore  </a:t>
+              <a:t>≈ 50,000  </a:t>
             </a:r>
             <a:r>
               <a:rPr lang="en-US" sz="700" dirty="0">
@@ -2804,7 +2959,7 @@
                 <a:ea typeface="Calibri" pitchFamily="34" charset="-122"/>
                 <a:cs typeface="Calibri" pitchFamily="34" charset="-120"/>
               </a:rPr>
-              <a:t>below the poverty line (eligible)</a:t>
+              <a:t>get GIA support each year</a:t>
             </a:r>
             <a:endParaRPr lang="en-US" sz="950" dirty="0"/>
           </a:p>
@@ -2812,14 +2967,14 @@
       </p:sp>
       <p:sp>
         <p:nvSpPr>
-          <p:cNvPr id="34" name="Text 30"/>
-          <p:cNvSpPr txBox="1"/>
-          <p:nvPr/>
-        </p:nvSpPr>
-        <p:spPr>
-          <a:xfrm>
-            <a:off x="4617720" y="1773936"/>
-            <a:ext cx="228600" cy="274320"/>
+          <p:cNvPr id="36" name="Text 32"/>
+          <p:cNvSpPr txBox="1"/>
+          <p:nvPr/>
+        </p:nvSpPr>
+        <p:spPr>
+          <a:xfrm>
+            <a:off x="6355080" y="1810512"/>
+            <a:ext cx="228600" cy="292608"/>
           </a:xfrm>
           <a:prstGeom prst="rect">
             <a:avLst/>
@@ -2851,14 +3006,14 @@
       </p:sp>
       <p:sp>
         <p:nvSpPr>
-          <p:cNvPr id="35" name="Text 31"/>
-          <p:cNvSpPr txBox="1"/>
-          <p:nvPr/>
-        </p:nvSpPr>
-        <p:spPr>
-          <a:xfrm>
-            <a:off x="4892040" y="1773936"/>
-            <a:ext cx="1691640" cy="274320"/>
+          <p:cNvPr id="37" name="Text 33"/>
+          <p:cNvSpPr txBox="1"/>
+          <p:nvPr/>
+        </p:nvSpPr>
+        <p:spPr>
+          <a:xfrm>
+            <a:off x="6629400" y="1810512"/>
+            <a:ext cx="2194560" cy="292608"/>
           </a:xfrm>
           <a:prstGeom prst="rect">
             <a:avLst/>
@@ -2876,13 +3031,13 @@
             <a:r>
               <a:rPr lang="en-US" sz="950" b="1" dirty="0">
                 <a:solidFill>
-                  <a:srgbClr val="1F4E79"/>
-                </a:solidFill>
-                <a:latin typeface="Calibri" pitchFamily="34" charset="0"/>
-                <a:ea typeface="Calibri" pitchFamily="34" charset="-122"/>
-                <a:cs typeface="Calibri" pitchFamily="34" charset="-120"/>
-              </a:rPr>
-              <a:t>≈ 50,000  </a:t>
+                  <a:srgbClr val="EF8A22"/>
+                </a:solidFill>
+                <a:latin typeface="Calibri" pitchFamily="34" charset="0"/>
+                <a:ea typeface="Calibri" pitchFamily="34" charset="-122"/>
+                <a:cs typeface="Calibri" pitchFamily="34" charset="-120"/>
+              </a:rPr>
+              <a:t>Less than 1 in 1,000  </a:t>
             </a:r>
             <a:r>
               <a:rPr lang="en-US" sz="700" dirty="0">
@@ -2893,7 +3048,7 @@
                 <a:ea typeface="Calibri" pitchFamily="34" charset="-122"/>
                 <a:cs typeface="Calibri" pitchFamily="34" charset="-120"/>
               </a:rPr>
-              <a:t>get GIA support each year</a:t>
+              <a:t>a year → every seat must fit</a:t>
             </a:r>
             <a:endParaRPr lang="en-US" sz="950" dirty="0"/>
           </a:p>
@@ -2901,14 +3056,53 @@
       </p:sp>
       <p:sp>
         <p:nvSpPr>
-          <p:cNvPr id="36" name="Text 32"/>
-          <p:cNvSpPr txBox="1"/>
-          <p:nvPr/>
-        </p:nvSpPr>
-        <p:spPr>
-          <a:xfrm>
-            <a:off x="6446520" y="1773936"/>
-            <a:ext cx="228600" cy="274320"/>
+          <p:cNvPr id="38" name="Text 34"/>
+          <p:cNvSpPr txBox="1"/>
+          <p:nvPr/>
+        </p:nvSpPr>
+        <p:spPr>
+          <a:xfrm>
+            <a:off x="274320" y="2121408"/>
+            <a:ext cx="8595360" cy="118872"/>
+          </a:xfrm>
+          <a:prstGeom prst="rect">
+            <a:avLst/>
+          </a:prstGeom>
+          <a:noFill/>
+          <a:ln/>
+        </p:spPr>
+        <p:txBody>
+          <a:bodyPr wrap="square" lIns="0" tIns="0" rIns="0" bIns="0" rtlCol="0" anchor="t"/>
+          <a:lstStyle/>
+          <a:p>
+            <a:pPr indent="0" marL="0">
+              <a:buNone/>
+            </a:pPr>
+            <a:r>
+              <a:rPr lang="en-US" sz="600" i="1" dirty="0">
+                <a:solidFill>
+                  <a:srgbClr val="6B7280"/>
+                </a:solidFill>
+                <a:latin typeface="Calibri" pitchFamily="34" charset="0"/>
+                <a:ea typeface="Calibri" pitchFamily="34" charset="-122"/>
+                <a:cs typeface="Calibri" pitchFamily="34" charset="-120"/>
+              </a:rPr>
+              <a:t>Census 2011 (via MoSJE Handbook 2021)  ·  SC poverty ratios 31.5% rural / 21.7% urban (Planning Commission, 2011-12)  ·  GIA: 2,01,006 beneficiaries in 2021-25 → ≈ 50,000 a year (PIB, 19 Mar 2025)</a:t>
+            </a:r>
+            <a:endParaRPr lang="en-US" sz="600" dirty="0"/>
+          </a:p>
+        </p:txBody>
+      </p:sp>
+      <p:sp>
+        <p:nvSpPr>
+          <p:cNvPr id="39" name="Text 35"/>
+          <p:cNvSpPr txBox="1"/>
+          <p:nvPr/>
+        </p:nvSpPr>
+        <p:spPr>
+          <a:xfrm>
+            <a:off x="274320" y="2286000"/>
+            <a:ext cx="6400800" cy="182880"/>
           </a:xfrm>
           <a:prstGeom prst="rect">
             <a:avLst/>
@@ -2920,100 +3114,22 @@
           <a:bodyPr wrap="square" lIns="0" tIns="0" rIns="0" bIns="0" rtlCol="0" anchor="ctr"/>
           <a:lstStyle/>
           <a:p>
-            <a:pPr algn="ctr" indent="0" marL="0">
-              <a:buNone/>
-            </a:pPr>
-            <a:r>
-              <a:rPr lang="en-US" sz="1000" b="1" dirty="0">
-                <a:solidFill>
-                  <a:srgbClr val="2E6FD6"/>
-                </a:solidFill>
-                <a:latin typeface="Calibri" pitchFamily="34" charset="0"/>
-                <a:ea typeface="Calibri" pitchFamily="34" charset="-122"/>
-                <a:cs typeface="Calibri" pitchFamily="34" charset="-120"/>
-              </a:rPr>
-              <a:t>→</a:t>
-            </a:r>
-            <a:endParaRPr lang="en-US" sz="1000" dirty="0"/>
-          </a:p>
-        </p:txBody>
-      </p:sp>
-      <p:sp>
-        <p:nvSpPr>
-          <p:cNvPr id="37" name="Text 33"/>
-          <p:cNvSpPr txBox="1"/>
-          <p:nvPr/>
-        </p:nvSpPr>
-        <p:spPr>
-          <a:xfrm>
-            <a:off x="6720840" y="1773936"/>
-            <a:ext cx="2103120" cy="274320"/>
-          </a:xfrm>
-          <a:prstGeom prst="rect">
-            <a:avLst/>
-          </a:prstGeom>
-          <a:noFill/>
-          <a:ln/>
-        </p:spPr>
-        <p:txBody>
-          <a:bodyPr wrap="square" lIns="0" tIns="0" rIns="0" bIns="0" rtlCol="0" anchor="ctr"/>
-          <a:lstStyle/>
-          <a:p>
             <a:pPr indent="0" marL="0">
               <a:buNone/>
             </a:pPr>
             <a:r>
-              <a:rPr lang="en-US" sz="950" b="1" dirty="0">
-                <a:solidFill>
-                  <a:srgbClr val="EF8A22"/>
-                </a:solidFill>
-                <a:latin typeface="Calibri" pitchFamily="34" charset="0"/>
-                <a:ea typeface="Calibri" pitchFamily="34" charset="-122"/>
-                <a:cs typeface="Calibri" pitchFamily="34" charset="-120"/>
-              </a:rPr>
-              <a:t>&lt; 1 in 1,000  </a:t>
-            </a:r>
-            <a:r>
-              <a:rPr lang="en-US" sz="700" dirty="0">
-                <a:solidFill>
-                  <a:srgbClr val="1F2937"/>
-                </a:solidFill>
-                <a:latin typeface="Calibri" pitchFamily="34" charset="0"/>
-                <a:ea typeface="Calibri" pitchFamily="34" charset="-122"/>
-                <a:cs typeface="Calibri" pitchFamily="34" charset="-120"/>
-              </a:rPr>
-              <a:t>a year → every seat must fit</a:t>
-            </a:r>
-            <a:endParaRPr lang="en-US" sz="950" dirty="0"/>
-          </a:p>
-        </p:txBody>
-      </p:sp>
-      <p:sp>
-        <p:nvSpPr>
-          <p:cNvPr id="38" name="Text 34"/>
-          <p:cNvSpPr txBox="1"/>
-          <p:nvPr/>
-        </p:nvSpPr>
-        <p:spPr>
-          <a:xfrm>
-            <a:off x="274320" y="2066544"/>
-            <a:ext cx="8595360" cy="118872"/>
-          </a:xfrm>
-          <a:prstGeom prst="rect">
-            <a:avLst/>
-          </a:prstGeom>
-          <a:noFill/>
-          <a:ln/>
-        </p:spPr>
-        <p:txBody>
-          <a:bodyPr wrap="square" lIns="0" tIns="0" rIns="0" bIns="0" rtlCol="0" anchor="t"/>
-          <a:lstStyle/>
-          <a:p>
-            <a:pPr indent="0" marL="0">
-              <a:buNone/>
-            </a:pPr>
-            <a:r>
-              <a:rPr lang="en-US" sz="600" i="1" dirty="0">
+              <a:rPr lang="en-US" sz="850" b="1" spc="120" kern="0" dirty="0">
+                <a:solidFill>
+                  <a:srgbClr val="1F9D63"/>
+                </a:solidFill>
+                <a:latin typeface="Calibri" pitchFamily="34" charset="0"/>
+                <a:ea typeface="Calibri" pitchFamily="34" charset="-122"/>
+                <a:cs typeface="Calibri" pitchFamily="34" charset="-120"/>
+              </a:rPr>
+              <a:t>ONE CALL  </a:t>
+            </a:r>
+            <a:r>
+              <a:rPr lang="en-US" sz="750" i="1" dirty="0">
                 <a:solidFill>
                   <a:srgbClr val="6B7280"/>
                 </a:solidFill>
@@ -3021,57 +3137,7 @@
                 <a:ea typeface="Calibri" pitchFamily="34" charset="-122"/>
                 <a:cs typeface="Calibri" pitchFamily="34" charset="-120"/>
               </a:rPr>
-              <a:t>Census 2011 (via MoSJE Handbook 2021)  ·  SC poverty ratios 31.5% rural / 21.7% urban (Planning Commission, 2011-12)  ·  GIA: 2,01,006 beneficiaries in 2021-25 → ≈ 50,000 a year (PIB, 19 Mar 2025)</a:t>
-            </a:r>
-            <a:endParaRPr lang="en-US" sz="600" dirty="0"/>
-          </a:p>
-        </p:txBody>
-      </p:sp>
-      <p:sp>
-        <p:nvSpPr>
-          <p:cNvPr id="39" name="Text 35"/>
-          <p:cNvSpPr txBox="1"/>
-          <p:nvPr/>
-        </p:nvSpPr>
-        <p:spPr>
-          <a:xfrm>
-            <a:off x="274320" y="2231136"/>
-            <a:ext cx="6400800" cy="182880"/>
-          </a:xfrm>
-          <a:prstGeom prst="rect">
-            <a:avLst/>
-          </a:prstGeom>
-          <a:noFill/>
-          <a:ln/>
-        </p:spPr>
-        <p:txBody>
-          <a:bodyPr wrap="square" lIns="0" tIns="0" rIns="0" bIns="0" rtlCol="0" anchor="ctr"/>
-          <a:lstStyle/>
-          <a:p>
-            <a:pPr indent="0" marL="0">
-              <a:buNone/>
-            </a:pPr>
-            <a:r>
-              <a:rPr lang="en-US" sz="850" b="1" spc="120" kern="0" dirty="0">
-                <a:solidFill>
-                  <a:srgbClr val="1F9D63"/>
-                </a:solidFill>
-                <a:latin typeface="Calibri" pitchFamily="34" charset="0"/>
-                <a:ea typeface="Calibri" pitchFamily="34" charset="-122"/>
-                <a:cs typeface="Calibri" pitchFamily="34" charset="-120"/>
-              </a:rPr>
-              <a:t>ONE CALL, SIX STEPS  </a:t>
-            </a:r>
-            <a:r>
-              <a:rPr lang="en-US" sz="750" i="1" dirty="0">
-                <a:solidFill>
-                  <a:srgbClr val="6B7280"/>
-                </a:solidFill>
-                <a:latin typeface="Calibri" pitchFamily="34" charset="0"/>
-                <a:ea typeface="Calibri" pitchFamily="34" charset="-122"/>
-                <a:cs typeface="Calibri" pitchFamily="34" charset="-120"/>
-              </a:rPr>
-              <a:t>about 10 minutes, on any keypad phone</a:t>
+              <a:t>about 10 minutes, on any keypad phone — four steps</a:t>
             </a:r>
             <a:endParaRPr lang="en-US" sz="850" dirty="0"/>
           </a:p>
@@ -3085,12 +3151,12 @@
         </p:nvSpPr>
         <p:spPr>
           <a:xfrm>
-            <a:off x="274320" y="2432304"/>
-            <a:ext cx="1371600" cy="1024128"/>
+            <a:off x="274320" y="2487168"/>
+            <a:ext cx="2093976" cy="1042416"/>
           </a:xfrm>
           <a:prstGeom prst="roundRect">
             <a:avLst>
-              <a:gd name="adj" fmla="val 7143"/>
+              <a:gd name="adj" fmla="val 7018"/>
             </a:avLst>
           </a:prstGeom>
           <a:solidFill>
@@ -3104,34 +3170,9 @@
           </a:ln>
         </p:spPr>
       </p:sp>
-      <p:sp>
-        <p:nvSpPr>
-          <p:cNvPr id="41" name="Shape 37"/>
-          <p:cNvSpPr/>
-          <p:nvPr/>
-        </p:nvSpPr>
-        <p:spPr>
-          <a:xfrm>
-            <a:off x="356616" y="2505456"/>
-            <a:ext cx="329184" cy="329184"/>
-          </a:xfrm>
-          <a:prstGeom prst="ellipse">
-            <a:avLst/>
-          </a:prstGeom>
-          <a:solidFill>
-            <a:srgbClr val="FFFFFF"/>
-          </a:solidFill>
-          <a:ln w="12700">
-            <a:solidFill>
-              <a:srgbClr val="FFFFFF"/>
-            </a:solidFill>
-            <a:prstDash val="solid"/>
-          </a:ln>
-        </p:spPr>
-      </p:sp>
       <p:pic>
         <p:nvPicPr>
-          <p:cNvPr id="42" name="Image 2" descr="preencoded.png">    </p:cNvPr>
+          <p:cNvPr id="41" name="Image 2" descr="preencoded.png">    </p:cNvPr>
           <p:cNvPicPr>
             <a:picLocks noChangeAspect="1"/>
           </p:cNvPicPr>
@@ -3145,8 +3186,8 @@
         </p:blipFill>
         <p:spPr>
           <a:xfrm>
-            <a:off x="402336" y="2551176"/>
-            <a:ext cx="237744" cy="237744"/>
+            <a:off x="365760" y="2560320"/>
+            <a:ext cx="274320" cy="274320"/>
           </a:xfrm>
           <a:prstGeom prst="rect">
             <a:avLst/>
@@ -3155,199 +3196,168 @@
       </p:pic>
       <p:sp>
         <p:nvSpPr>
-          <p:cNvPr id="43" name="Shape 38"/>
+          <p:cNvPr id="42" name="Text 37"/>
+          <p:cNvSpPr txBox="1"/>
+          <p:nvPr/>
+        </p:nvSpPr>
+        <p:spPr>
+          <a:xfrm>
+            <a:off x="713232" y="2532888"/>
+            <a:ext cx="1563624" cy="201168"/>
+          </a:xfrm>
+          <a:prstGeom prst="rect">
+            <a:avLst/>
+          </a:prstGeom>
+          <a:noFill/>
+          <a:ln/>
+        </p:spPr>
+        <p:txBody>
+          <a:bodyPr wrap="square" lIns="0" tIns="0" rIns="0" bIns="0" rtlCol="0" anchor="ctr"/>
+          <a:lstStyle/>
+          <a:p>
+            <a:pPr indent="0" marL="0">
+              <a:buNone/>
+            </a:pPr>
+            <a:r>
+              <a:rPr lang="en-US" sz="920" b="1" dirty="0">
+                <a:solidFill>
+                  <a:srgbClr val="2E6FD6"/>
+                </a:solidFill>
+                <a:latin typeface="Calibri" pitchFamily="34" charset="0"/>
+                <a:ea typeface="Calibri" pitchFamily="34" charset="-122"/>
+                <a:cs typeface="Calibri" pitchFamily="34" charset="-120"/>
+              </a:rPr>
+              <a:t>Missed call → free call-back</a:t>
+            </a:r>
+            <a:endParaRPr lang="en-US" sz="920" dirty="0"/>
+          </a:p>
+        </p:txBody>
+      </p:sp>
+      <p:sp>
+        <p:nvSpPr>
+          <p:cNvPr id="43" name="Text 38"/>
+          <p:cNvSpPr txBox="1"/>
+          <p:nvPr/>
+        </p:nvSpPr>
+        <p:spPr>
+          <a:xfrm>
+            <a:off x="713232" y="2724912"/>
+            <a:ext cx="1563624" cy="137160"/>
+          </a:xfrm>
+          <a:prstGeom prst="rect">
+            <a:avLst/>
+          </a:prstGeom>
+          <a:noFill/>
+          <a:ln/>
+        </p:spPr>
+        <p:txBody>
+          <a:bodyPr wrap="square" lIns="0" tIns="0" rIns="0" bIns="0" rtlCol="0" anchor="ctr"/>
+          <a:lstStyle/>
+          <a:p>
+            <a:pPr indent="0" marL="0">
+              <a:buNone/>
+            </a:pPr>
+            <a:r>
+              <a:rPr lang="en-US" sz="730" b="1" dirty="0">
+                <a:solidFill>
+                  <a:srgbClr val="5B6B7F"/>
+                </a:solidFill>
+                <a:latin typeface="Calibri" pitchFamily="34" charset="0"/>
+                <a:ea typeface="Calibri" pitchFamily="34" charset="-122"/>
+                <a:cs typeface="Calibri" pitchFamily="34" charset="-120"/>
+              </a:rPr>
+              <a:t>within a minute, in his language</a:t>
+            </a:r>
+            <a:endParaRPr lang="en-US" sz="730" dirty="0"/>
+          </a:p>
+        </p:txBody>
+      </p:sp>
+      <p:sp>
+        <p:nvSpPr>
+          <p:cNvPr id="44" name="Text 39"/>
+          <p:cNvSpPr txBox="1"/>
+          <p:nvPr/>
+        </p:nvSpPr>
+        <p:spPr>
+          <a:xfrm>
+            <a:off x="365760" y="2907792"/>
+            <a:ext cx="1911096" cy="548640"/>
+          </a:xfrm>
+          <a:prstGeom prst="rect">
+            <a:avLst/>
+          </a:prstGeom>
+          <a:noFill/>
+          <a:ln/>
+        </p:spPr>
+        <p:txBody>
+          <a:bodyPr wrap="square" lIns="0" tIns="0" rIns="0" bIns="0" rtlCol="0" anchor="t"/>
+          <a:lstStyle/>
+          <a:p>
+            <a:pPr indent="0" marL="0">
+              <a:buNone/>
+            </a:pPr>
+            <a:r>
+              <a:rPr lang="en-US" sz="660" dirty="0">
+                <a:solidFill>
+                  <a:srgbClr val="1F2937"/>
+                </a:solidFill>
+                <a:latin typeface="Calibri" pitchFamily="34" charset="0"/>
+                <a:ea typeface="Calibri" pitchFamily="34" charset="-122"/>
+                <a:cs typeface="Calibri" pitchFamily="34" charset="-120"/>
+              </a:rPr>
+              <a:t>He gives a missed call; SkillCall calls back from a </a:t>
+            </a:r>
+            <a:r>
+              <a:rPr lang="en-US" sz="660" b="1" dirty="0">
+                <a:solidFill>
+                  <a:srgbClr val="2E6FD6"/>
+                </a:solidFill>
+                <a:latin typeface="Calibri" pitchFamily="34" charset="0"/>
+                <a:ea typeface="Calibri" pitchFamily="34" charset="-122"/>
+                <a:cs typeface="Calibri" pitchFamily="34" charset="-120"/>
+              </a:rPr>
+              <a:t>govt 1600 number</a:t>
+            </a:r>
+            <a:r>
+              <a:rPr lang="en-US" sz="660" dirty="0">
+                <a:solidFill>
+                  <a:srgbClr val="1F2937"/>
+                </a:solidFill>
+                <a:latin typeface="Calibri" pitchFamily="34" charset="0"/>
+                <a:ea typeface="Calibri" pitchFamily="34" charset="-122"/>
+                <a:cs typeface="Calibri" pitchFamily="34" charset="-120"/>
+              </a:rPr>
+              <a:t> in the language he picks on the keypad. </a:t>
+            </a:r>
+            <a:r>
+              <a:rPr lang="en-US" sz="660" b="1" dirty="0">
+                <a:solidFill>
+                  <a:srgbClr val="1F9D63"/>
+                </a:solidFill>
+                <a:latin typeface="Calibri" pitchFamily="34" charset="0"/>
+                <a:ea typeface="Calibri" pitchFamily="34" charset="-122"/>
+                <a:cs typeface="Calibri" pitchFamily="34" charset="-120"/>
+              </a:rPr>
+              <a:t>No app, no internet, no reading.</a:t>
+            </a:r>
+            <a:endParaRPr lang="en-US" sz="660" dirty="0"/>
+          </a:p>
+        </p:txBody>
+      </p:sp>
+      <p:sp>
+        <p:nvSpPr>
+          <p:cNvPr id="45" name="Shape 40"/>
           <p:cNvSpPr/>
           <p:nvPr/>
         </p:nvSpPr>
         <p:spPr>
           <a:xfrm>
-            <a:off x="1316736" y="2505456"/>
-            <a:ext cx="246888" cy="246888"/>
-          </a:xfrm>
-          <a:prstGeom prst="ellipse">
-            <a:avLst/>
-          </a:prstGeom>
-          <a:solidFill>
-            <a:srgbClr val="2E6FD6"/>
-          </a:solidFill>
-          <a:ln w="12700">
-            <a:solidFill>
-              <a:srgbClr val="2E6FD6"/>
-            </a:solidFill>
-            <a:prstDash val="solid"/>
-          </a:ln>
-        </p:spPr>
-      </p:sp>
-      <p:sp>
-        <p:nvSpPr>
-          <p:cNvPr id="44" name="Text 39"/>
-          <p:cNvSpPr txBox="1"/>
-          <p:nvPr/>
-        </p:nvSpPr>
-        <p:spPr>
-          <a:xfrm>
-            <a:off x="1316736" y="2505456"/>
-            <a:ext cx="246888" cy="246888"/>
-          </a:xfrm>
-          <a:prstGeom prst="rect">
-            <a:avLst/>
-          </a:prstGeom>
-          <a:noFill/>
-          <a:ln/>
-        </p:spPr>
-        <p:txBody>
-          <a:bodyPr wrap="square" lIns="0" tIns="0" rIns="0" bIns="0" rtlCol="0" anchor="ctr"/>
-          <a:lstStyle/>
-          <a:p>
-            <a:pPr algn="ctr" indent="0" marL="0">
-              <a:buNone/>
-            </a:pPr>
-            <a:r>
-              <a:rPr lang="en-US" sz="900" b="1" dirty="0">
-                <a:solidFill>
-                  <a:srgbClr val="FFFFFF"/>
-                </a:solidFill>
-                <a:latin typeface="Calibri" pitchFamily="34" charset="0"/>
-                <a:ea typeface="Calibri" pitchFamily="34" charset="-122"/>
-                <a:cs typeface="Calibri" pitchFamily="34" charset="-120"/>
-              </a:rPr>
-              <a:t>1</a:t>
-            </a:r>
-            <a:endParaRPr lang="en-US" sz="900" dirty="0"/>
-          </a:p>
-        </p:txBody>
-      </p:sp>
-      <p:sp>
-        <p:nvSpPr>
-          <p:cNvPr id="45" name="Text 40"/>
-          <p:cNvSpPr txBox="1"/>
-          <p:nvPr/>
-        </p:nvSpPr>
-        <p:spPr>
-          <a:xfrm>
-            <a:off x="356616" y="2862072"/>
-            <a:ext cx="1207008" cy="182880"/>
-          </a:xfrm>
-          <a:prstGeom prst="rect">
-            <a:avLst/>
-          </a:prstGeom>
-          <a:noFill/>
-          <a:ln/>
-        </p:spPr>
-        <p:txBody>
-          <a:bodyPr wrap="square" lIns="0" tIns="0" rIns="0" bIns="0" rtlCol="0" anchor="ctr"/>
-          <a:lstStyle/>
-          <a:p>
-            <a:pPr indent="0" marL="0">
-              <a:buNone/>
-            </a:pPr>
-            <a:r>
-              <a:rPr lang="en-US" sz="850" b="1" dirty="0">
-                <a:solidFill>
-                  <a:srgbClr val="2E6FD6"/>
-                </a:solidFill>
-                <a:latin typeface="Calibri" pitchFamily="34" charset="0"/>
-                <a:ea typeface="Calibri" pitchFamily="34" charset="-122"/>
-                <a:cs typeface="Calibri" pitchFamily="34" charset="-120"/>
-              </a:rPr>
-              <a:t>Missed call</a:t>
-            </a:r>
-            <a:endParaRPr lang="en-US" sz="850" dirty="0"/>
-          </a:p>
-        </p:txBody>
-      </p:sp>
-      <p:sp>
-        <p:nvSpPr>
-          <p:cNvPr id="46" name="Text 41"/>
-          <p:cNvSpPr txBox="1"/>
-          <p:nvPr/>
-        </p:nvSpPr>
-        <p:spPr>
-          <a:xfrm>
-            <a:off x="356616" y="3035808"/>
-            <a:ext cx="1207008" cy="128016"/>
-          </a:xfrm>
-          <a:prstGeom prst="rect">
-            <a:avLst/>
-          </a:prstGeom>
-          <a:noFill/>
-          <a:ln/>
-        </p:spPr>
-        <p:txBody>
-          <a:bodyPr wrap="square" lIns="0" tIns="0" rIns="0" bIns="0" rtlCol="0" anchor="ctr"/>
-          <a:lstStyle/>
-          <a:p>
-            <a:pPr indent="0" marL="0">
-              <a:buNone/>
-            </a:pPr>
-            <a:r>
-              <a:rPr lang="en-US" sz="680" b="1" dirty="0">
-                <a:solidFill>
-                  <a:srgbClr val="5B6B7F"/>
-                </a:solidFill>
-                <a:latin typeface="Calibri" pitchFamily="34" charset="0"/>
-                <a:ea typeface="Calibri" pitchFamily="34" charset="-122"/>
-                <a:cs typeface="Calibri" pitchFamily="34" charset="-120"/>
-              </a:rPr>
-              <a:t>he gets a free call-back</a:t>
-            </a:r>
-            <a:endParaRPr lang="en-US" sz="680" dirty="0"/>
-          </a:p>
-        </p:txBody>
-      </p:sp>
-      <p:sp>
-        <p:nvSpPr>
-          <p:cNvPr id="47" name="Text 42"/>
-          <p:cNvSpPr txBox="1"/>
-          <p:nvPr/>
-        </p:nvSpPr>
-        <p:spPr>
-          <a:xfrm>
-            <a:off x="356616" y="3182112"/>
-            <a:ext cx="1207008" cy="274320"/>
-          </a:xfrm>
-          <a:prstGeom prst="rect">
-            <a:avLst/>
-          </a:prstGeom>
-          <a:noFill/>
-          <a:ln/>
-        </p:spPr>
-        <p:txBody>
-          <a:bodyPr wrap="square" lIns="0" tIns="0" rIns="0" bIns="0" rtlCol="0" anchor="t"/>
-          <a:lstStyle/>
-          <a:p>
-            <a:pPr indent="0" marL="0">
-              <a:buNone/>
-            </a:pPr>
-            <a:r>
-              <a:rPr lang="en-US" sz="640" dirty="0">
-                <a:solidFill>
-                  <a:srgbClr val="1F2937"/>
-                </a:solidFill>
-                <a:latin typeface="Calibri" pitchFamily="34" charset="0"/>
-                <a:ea typeface="Calibri" pitchFamily="34" charset="-122"/>
-                <a:cs typeface="Calibri" pitchFamily="34" charset="-120"/>
-              </a:rPr>
-              <a:t>Within a minute, from a govt 1600 number, in the language he picks on the keypad.</a:t>
-            </a:r>
-            <a:endParaRPr lang="en-US" sz="640" dirty="0"/>
-          </a:p>
-        </p:txBody>
-      </p:sp>
-      <p:sp>
-        <p:nvSpPr>
-          <p:cNvPr id="48" name="Shape 43"/>
-          <p:cNvSpPr/>
-          <p:nvPr/>
-        </p:nvSpPr>
-        <p:spPr>
-          <a:xfrm>
-            <a:off x="1719072" y="2432304"/>
-            <a:ext cx="1371600" cy="1024128"/>
+            <a:off x="2441448" y="2487168"/>
+            <a:ext cx="2093976" cy="1042416"/>
           </a:xfrm>
           <a:prstGeom prst="roundRect">
             <a:avLst>
-              <a:gd name="adj" fmla="val 7143"/>
+              <a:gd name="adj" fmla="val 7018"/>
             </a:avLst>
           </a:prstGeom>
           <a:solidFill>
@@ -3361,34 +3371,9 @@
           </a:ln>
         </p:spPr>
       </p:sp>
-      <p:sp>
-        <p:nvSpPr>
-          <p:cNvPr id="49" name="Shape 44"/>
-          <p:cNvSpPr/>
-          <p:nvPr/>
-        </p:nvSpPr>
-        <p:spPr>
-          <a:xfrm>
-            <a:off x="1801368" y="2505456"/>
-            <a:ext cx="329184" cy="329184"/>
-          </a:xfrm>
-          <a:prstGeom prst="ellipse">
-            <a:avLst/>
-          </a:prstGeom>
-          <a:solidFill>
-            <a:srgbClr val="FFFFFF"/>
-          </a:solidFill>
-          <a:ln w="12700">
-            <a:solidFill>
-              <a:srgbClr val="FFFFFF"/>
-            </a:solidFill>
-            <a:prstDash val="solid"/>
-          </a:ln>
-        </p:spPr>
-      </p:sp>
       <p:pic>
         <p:nvPicPr>
-          <p:cNvPr id="50" name="Image 3" descr="preencoded.png">    </p:cNvPr>
+          <p:cNvPr id="46" name="Image 3" descr="preencoded.png">    </p:cNvPr>
           <p:cNvPicPr>
             <a:picLocks noChangeAspect="1"/>
           </p:cNvPicPr>
@@ -3402,8 +3387,8 @@
         </p:blipFill>
         <p:spPr>
           <a:xfrm>
-            <a:off x="1847088" y="2551176"/>
-            <a:ext cx="237744" cy="237744"/>
+            <a:off x="2532888" y="2560320"/>
+            <a:ext cx="274320" cy="274320"/>
           </a:xfrm>
           <a:prstGeom prst="rect">
             <a:avLst/>
@@ -3412,713 +3397,179 @@
       </p:pic>
       <p:sp>
         <p:nvSpPr>
-          <p:cNvPr id="51" name="Shape 45"/>
+          <p:cNvPr id="47" name="Text 41"/>
+          <p:cNvSpPr txBox="1"/>
+          <p:nvPr/>
+        </p:nvSpPr>
+        <p:spPr>
+          <a:xfrm>
+            <a:off x="2880360" y="2532888"/>
+            <a:ext cx="1563624" cy="201168"/>
+          </a:xfrm>
+          <a:prstGeom prst="rect">
+            <a:avLst/>
+          </a:prstGeom>
+          <a:noFill/>
+          <a:ln/>
+        </p:spPr>
+        <p:txBody>
+          <a:bodyPr wrap="square" lIns="0" tIns="0" rIns="0" bIns="0" rtlCol="0" anchor="ctr"/>
+          <a:lstStyle/>
+          <a:p>
+            <a:pPr indent="0" marL="0">
+              <a:buNone/>
+            </a:pPr>
+            <a:r>
+              <a:rPr lang="en-US" sz="920" b="1" dirty="0">
+                <a:solidFill>
+                  <a:srgbClr val="13919B"/>
+                </a:solidFill>
+                <a:latin typeface="Calibri" pitchFamily="34" charset="0"/>
+                <a:ea typeface="Calibri" pitchFamily="34" charset="-122"/>
+                <a:cs typeface="Calibri" pitchFamily="34" charset="-120"/>
+              </a:rPr>
+              <a:t>Keys for facts, voice for skills</a:t>
+            </a:r>
+            <a:endParaRPr lang="en-US" sz="920" dirty="0"/>
+          </a:p>
+        </p:txBody>
+      </p:sp>
+      <p:sp>
+        <p:nvSpPr>
+          <p:cNvPr id="48" name="Text 42"/>
+          <p:cNvSpPr txBox="1"/>
+          <p:nvPr/>
+        </p:nvSpPr>
+        <p:spPr>
+          <a:xfrm>
+            <a:off x="2880360" y="2724912"/>
+            <a:ext cx="1563624" cy="137160"/>
+          </a:xfrm>
+          <a:prstGeom prst="rect">
+            <a:avLst/>
+          </a:prstGeom>
+          <a:noFill/>
+          <a:ln/>
+        </p:spPr>
+        <p:txBody>
+          <a:bodyPr wrap="square" lIns="0" tIns="0" rIns="0" bIns="0" rtlCol="0" anchor="ctr"/>
+          <a:lstStyle/>
+          <a:p>
+            <a:pPr indent="0" marL="0">
+              <a:buNone/>
+            </a:pPr>
+            <a:r>
+              <a:rPr lang="en-US" sz="730" b="1" dirty="0">
+                <a:solidFill>
+                  <a:srgbClr val="5B6B7F"/>
+                </a:solidFill>
+                <a:latin typeface="Calibri" pitchFamily="34" charset="0"/>
+                <a:ea typeface="Calibri" pitchFamily="34" charset="-122"/>
+                <a:cs typeface="Calibri" pitchFamily="34" charset="-120"/>
+              </a:rPr>
+              <a:t>so a speech error can never hurt</a:t>
+            </a:r>
+            <a:endParaRPr lang="en-US" sz="730" dirty="0"/>
+          </a:p>
+        </p:txBody>
+      </p:sp>
+      <p:sp>
+        <p:nvSpPr>
+          <p:cNvPr id="49" name="Text 43"/>
+          <p:cNvSpPr txBox="1"/>
+          <p:nvPr/>
+        </p:nvSpPr>
+        <p:spPr>
+          <a:xfrm>
+            <a:off x="2532888" y="2907792"/>
+            <a:ext cx="1911096" cy="548640"/>
+          </a:xfrm>
+          <a:prstGeom prst="rect">
+            <a:avLst/>
+          </a:prstGeom>
+          <a:noFill/>
+          <a:ln/>
+        </p:spPr>
+        <p:txBody>
+          <a:bodyPr wrap="square" lIns="0" tIns="0" rIns="0" bIns="0" rtlCol="0" anchor="t"/>
+          <a:lstStyle/>
+          <a:p>
+            <a:pPr indent="0" marL="0">
+              <a:buNone/>
+            </a:pPr>
+            <a:r>
+              <a:rPr lang="en-US" sz="660" dirty="0">
+                <a:solidFill>
+                  <a:srgbClr val="1F2937"/>
+                </a:solidFill>
+                <a:latin typeface="Calibri" pitchFamily="34" charset="0"/>
+                <a:ea typeface="Calibri" pitchFamily="34" charset="-122"/>
+                <a:cs typeface="Calibri" pitchFamily="34" charset="-120"/>
+              </a:rPr>
+              <a:t>Age, education, travel distance are </a:t>
+            </a:r>
+            <a:r>
+              <a:rPr lang="en-US" sz="660" b="1" dirty="0">
+                <a:solidFill>
+                  <a:srgbClr val="13919B"/>
+                </a:solidFill>
+                <a:latin typeface="Calibri" pitchFamily="34" charset="0"/>
+                <a:ea typeface="Calibri" pitchFamily="34" charset="-122"/>
+                <a:cs typeface="Calibri" pitchFamily="34" charset="-120"/>
+              </a:rPr>
+              <a:t>pressed on keys</a:t>
+            </a:r>
+            <a:r>
+              <a:rPr lang="en-US" sz="660" dirty="0">
+                <a:solidFill>
+                  <a:srgbClr val="1F2937"/>
+                </a:solidFill>
+                <a:latin typeface="Calibri" pitchFamily="34" charset="0"/>
+                <a:ea typeface="Calibri" pitchFamily="34" charset="-122"/>
+                <a:cs typeface="Calibri" pitchFamily="34" charset="-120"/>
+              </a:rPr>
+              <a:t> — eligibility never depends on speech. Then "Aap kya kaam karte ho?" — the AI maps his work to an </a:t>
+            </a:r>
+            <a:r>
+              <a:rPr lang="en-US" sz="660" b="1" dirty="0">
+                <a:solidFill>
+                  <a:srgbClr val="13919B"/>
+                </a:solidFill>
+                <a:latin typeface="Calibri" pitchFamily="34" charset="0"/>
+                <a:ea typeface="Calibri" pitchFamily="34" charset="-122"/>
+                <a:cs typeface="Calibri" pitchFamily="34" charset="-120"/>
+              </a:rPr>
+              <a:t>official NCO code</a:t>
+            </a:r>
+            <a:r>
+              <a:rPr lang="en-US" sz="660" dirty="0">
+                <a:solidFill>
+                  <a:srgbClr val="1F2937"/>
+                </a:solidFill>
+                <a:latin typeface="Calibri" pitchFamily="34" charset="0"/>
+                <a:ea typeface="Calibri" pitchFamily="34" charset="-122"/>
+                <a:cs typeface="Calibri" pitchFamily="34" charset="-120"/>
+              </a:rPr>
+              <a:t> and asks about his skills.</a:t>
+            </a:r>
+            <a:endParaRPr lang="en-US" sz="660" dirty="0"/>
+          </a:p>
+        </p:txBody>
+      </p:sp>
+      <p:sp>
+        <p:nvSpPr>
+          <p:cNvPr id="50" name="Shape 44"/>
           <p:cNvSpPr/>
           <p:nvPr/>
         </p:nvSpPr>
         <p:spPr>
           <a:xfrm>
-            <a:off x="2761488" y="2505456"/>
-            <a:ext cx="246888" cy="246888"/>
-          </a:xfrm>
-          <a:prstGeom prst="ellipse">
-            <a:avLst/>
-          </a:prstGeom>
-          <a:solidFill>
-            <a:srgbClr val="13919B"/>
-          </a:solidFill>
-          <a:ln w="12700">
-            <a:solidFill>
-              <a:srgbClr val="13919B"/>
-            </a:solidFill>
-            <a:prstDash val="solid"/>
-          </a:ln>
-        </p:spPr>
-      </p:sp>
-      <p:sp>
-        <p:nvSpPr>
-          <p:cNvPr id="52" name="Text 46"/>
-          <p:cNvSpPr txBox="1"/>
-          <p:nvPr/>
-        </p:nvSpPr>
-        <p:spPr>
-          <a:xfrm>
-            <a:off x="2761488" y="2505456"/>
-            <a:ext cx="246888" cy="246888"/>
-          </a:xfrm>
-          <a:prstGeom prst="rect">
-            <a:avLst/>
-          </a:prstGeom>
-          <a:noFill/>
-          <a:ln/>
-        </p:spPr>
-        <p:txBody>
-          <a:bodyPr wrap="square" lIns="0" tIns="0" rIns="0" bIns="0" rtlCol="0" anchor="ctr"/>
-          <a:lstStyle/>
-          <a:p>
-            <a:pPr algn="ctr" indent="0" marL="0">
-              <a:buNone/>
-            </a:pPr>
-            <a:r>
-              <a:rPr lang="en-US" sz="900" b="1" dirty="0">
-                <a:solidFill>
-                  <a:srgbClr val="FFFFFF"/>
-                </a:solidFill>
-                <a:latin typeface="Calibri" pitchFamily="34" charset="0"/>
-                <a:ea typeface="Calibri" pitchFamily="34" charset="-122"/>
-                <a:cs typeface="Calibri" pitchFamily="34" charset="-120"/>
-              </a:rPr>
-              <a:t>2</a:t>
-            </a:r>
-            <a:endParaRPr lang="en-US" sz="900" dirty="0"/>
-          </a:p>
-        </p:txBody>
-      </p:sp>
-      <p:sp>
-        <p:nvSpPr>
-          <p:cNvPr id="53" name="Text 47"/>
-          <p:cNvSpPr txBox="1"/>
-          <p:nvPr/>
-        </p:nvSpPr>
-        <p:spPr>
-          <a:xfrm>
-            <a:off x="1801368" y="2862072"/>
-            <a:ext cx="1207008" cy="182880"/>
-          </a:xfrm>
-          <a:prstGeom prst="rect">
-            <a:avLst/>
-          </a:prstGeom>
-          <a:noFill/>
-          <a:ln/>
-        </p:spPr>
-        <p:txBody>
-          <a:bodyPr wrap="square" lIns="0" tIns="0" rIns="0" bIns="0" rtlCol="0" anchor="ctr"/>
-          <a:lstStyle/>
-          <a:p>
-            <a:pPr indent="0" marL="0">
-              <a:buNone/>
-            </a:pPr>
-            <a:r>
-              <a:rPr lang="en-US" sz="850" b="1" dirty="0">
-                <a:solidFill>
-                  <a:srgbClr val="13919B"/>
-                </a:solidFill>
-                <a:latin typeface="Calibri" pitchFamily="34" charset="0"/>
-                <a:ea typeface="Calibri" pitchFamily="34" charset="-122"/>
-                <a:cs typeface="Calibri" pitchFamily="34" charset="-120"/>
-              </a:rPr>
-              <a:t>Facts by keypad</a:t>
-            </a:r>
-            <a:endParaRPr lang="en-US" sz="850" dirty="0"/>
-          </a:p>
-        </p:txBody>
-      </p:sp>
-      <p:sp>
-        <p:nvSpPr>
-          <p:cNvPr id="54" name="Text 48"/>
-          <p:cNvSpPr txBox="1"/>
-          <p:nvPr/>
-        </p:nvSpPr>
-        <p:spPr>
-          <a:xfrm>
-            <a:off x="1801368" y="3035808"/>
-            <a:ext cx="1207008" cy="128016"/>
-          </a:xfrm>
-          <a:prstGeom prst="rect">
-            <a:avLst/>
-          </a:prstGeom>
-          <a:noFill/>
-          <a:ln/>
-        </p:spPr>
-        <p:txBody>
-          <a:bodyPr wrap="square" lIns="0" tIns="0" rIns="0" bIns="0" rtlCol="0" anchor="ctr"/>
-          <a:lstStyle/>
-          <a:p>
-            <a:pPr indent="0" marL="0">
-              <a:buNone/>
-            </a:pPr>
-            <a:r>
-              <a:rPr lang="en-US" sz="680" b="1" dirty="0">
-                <a:solidFill>
-                  <a:srgbClr val="5B6B7F"/>
-                </a:solidFill>
-                <a:latin typeface="Calibri" pitchFamily="34" charset="0"/>
-                <a:ea typeface="Calibri" pitchFamily="34" charset="-122"/>
-                <a:cs typeface="Calibri" pitchFamily="34" charset="-120"/>
-              </a:rPr>
-              <a:t>so a speech error can't hurt</a:t>
-            </a:r>
-            <a:endParaRPr lang="en-US" sz="680" dirty="0"/>
-          </a:p>
-        </p:txBody>
-      </p:sp>
-      <p:sp>
-        <p:nvSpPr>
-          <p:cNvPr id="55" name="Text 49"/>
-          <p:cNvSpPr txBox="1"/>
-          <p:nvPr/>
-        </p:nvSpPr>
-        <p:spPr>
-          <a:xfrm>
-            <a:off x="1801368" y="3182112"/>
-            <a:ext cx="1207008" cy="274320"/>
-          </a:xfrm>
-          <a:prstGeom prst="rect">
-            <a:avLst/>
-          </a:prstGeom>
-          <a:noFill/>
-          <a:ln/>
-        </p:spPr>
-        <p:txBody>
-          <a:bodyPr wrap="square" lIns="0" tIns="0" rIns="0" bIns="0" rtlCol="0" anchor="t"/>
-          <a:lstStyle/>
-          <a:p>
-            <a:pPr indent="0" marL="0">
-              <a:buNone/>
-            </a:pPr>
-            <a:r>
-              <a:rPr lang="en-US" sz="640" dirty="0">
-                <a:solidFill>
-                  <a:srgbClr val="1F2937"/>
-                </a:solidFill>
-                <a:latin typeface="Calibri" pitchFamily="34" charset="0"/>
-                <a:ea typeface="Calibri" pitchFamily="34" charset="-122"/>
-                <a:cs typeface="Calibri" pitchFamily="34" charset="-120"/>
-              </a:rPr>
-              <a:t>Age, education, travel distance are pressed on keys — eligibility never depends on speech.</a:t>
-            </a:r>
-            <a:endParaRPr lang="en-US" sz="640" dirty="0"/>
-          </a:p>
-        </p:txBody>
-      </p:sp>
-      <p:sp>
-        <p:nvSpPr>
-          <p:cNvPr id="56" name="Shape 50"/>
-          <p:cNvSpPr/>
-          <p:nvPr/>
-        </p:nvSpPr>
-        <p:spPr>
-          <a:xfrm>
-            <a:off x="3163824" y="2432304"/>
-            <a:ext cx="1371600" cy="1024128"/>
+            <a:off x="4608576" y="2487168"/>
+            <a:ext cx="2093976" cy="1042416"/>
           </a:xfrm>
           <a:prstGeom prst="roundRect">
             <a:avLst>
-              <a:gd name="adj" fmla="val 7143"/>
-            </a:avLst>
-          </a:prstGeom>
-          <a:solidFill>
-            <a:srgbClr val="EDE9FE"/>
-          </a:solidFill>
-          <a:ln w="9525">
-            <a:solidFill>
-              <a:srgbClr val="EDE9FE"/>
-            </a:solidFill>
-            <a:prstDash val="solid"/>
-          </a:ln>
-        </p:spPr>
-      </p:sp>
-      <p:sp>
-        <p:nvSpPr>
-          <p:cNvPr id="57" name="Shape 51"/>
-          <p:cNvSpPr/>
-          <p:nvPr/>
-        </p:nvSpPr>
-        <p:spPr>
-          <a:xfrm>
-            <a:off x="3246120" y="2505456"/>
-            <a:ext cx="329184" cy="329184"/>
-          </a:xfrm>
-          <a:prstGeom prst="ellipse">
-            <a:avLst/>
-          </a:prstGeom>
-          <a:solidFill>
-            <a:srgbClr val="FFFFFF"/>
-          </a:solidFill>
-          <a:ln w="12700">
-            <a:solidFill>
-              <a:srgbClr val="FFFFFF"/>
-            </a:solidFill>
-            <a:prstDash val="solid"/>
-          </a:ln>
-        </p:spPr>
-      </p:sp>
-      <p:pic>
-        <p:nvPicPr>
-          <p:cNvPr id="58" name="Image 4" descr="preencoded.png">    </p:cNvPr>
-          <p:cNvPicPr>
-            <a:picLocks noChangeAspect="1"/>
-          </p:cNvPicPr>
-          <p:nvPr/>
-        </p:nvPicPr>
-        <p:blipFill>
-          <a:blip r:embed="rId5"/>
-          <a:stretch>
-            <a:fillRect/>
-          </a:stretch>
-        </p:blipFill>
-        <p:spPr>
-          <a:xfrm>
-            <a:off x="3291840" y="2551176"/>
-            <a:ext cx="237744" cy="237744"/>
-          </a:xfrm>
-          <a:prstGeom prst="rect">
-            <a:avLst/>
-          </a:prstGeom>
-        </p:spPr>
-      </p:pic>
-      <p:sp>
-        <p:nvSpPr>
-          <p:cNvPr id="59" name="Shape 52"/>
-          <p:cNvSpPr/>
-          <p:nvPr/>
-        </p:nvSpPr>
-        <p:spPr>
-          <a:xfrm>
-            <a:off x="4206240" y="2505456"/>
-            <a:ext cx="246888" cy="246888"/>
-          </a:xfrm>
-          <a:prstGeom prst="ellipse">
-            <a:avLst/>
-          </a:prstGeom>
-          <a:solidFill>
-            <a:srgbClr val="7A5AF8"/>
-          </a:solidFill>
-          <a:ln w="12700">
-            <a:solidFill>
-              <a:srgbClr val="7A5AF8"/>
-            </a:solidFill>
-            <a:prstDash val="solid"/>
-          </a:ln>
-        </p:spPr>
-      </p:sp>
-      <p:sp>
-        <p:nvSpPr>
-          <p:cNvPr id="60" name="Text 53"/>
-          <p:cNvSpPr txBox="1"/>
-          <p:nvPr/>
-        </p:nvSpPr>
-        <p:spPr>
-          <a:xfrm>
-            <a:off x="4206240" y="2505456"/>
-            <a:ext cx="246888" cy="246888"/>
-          </a:xfrm>
-          <a:prstGeom prst="rect">
-            <a:avLst/>
-          </a:prstGeom>
-          <a:noFill/>
-          <a:ln/>
-        </p:spPr>
-        <p:txBody>
-          <a:bodyPr wrap="square" lIns="0" tIns="0" rIns="0" bIns="0" rtlCol="0" anchor="ctr"/>
-          <a:lstStyle/>
-          <a:p>
-            <a:pPr algn="ctr" indent="0" marL="0">
-              <a:buNone/>
-            </a:pPr>
-            <a:r>
-              <a:rPr lang="en-US" sz="900" b="1" dirty="0">
-                <a:solidFill>
-                  <a:srgbClr val="FFFFFF"/>
-                </a:solidFill>
-                <a:latin typeface="Calibri" pitchFamily="34" charset="0"/>
-                <a:ea typeface="Calibri" pitchFamily="34" charset="-122"/>
-                <a:cs typeface="Calibri" pitchFamily="34" charset="-120"/>
-              </a:rPr>
-              <a:t>3</a:t>
-            </a:r>
-            <a:endParaRPr lang="en-US" sz="900" dirty="0"/>
-          </a:p>
-        </p:txBody>
-      </p:sp>
-      <p:sp>
-        <p:nvSpPr>
-          <p:cNvPr id="61" name="Text 54"/>
-          <p:cNvSpPr txBox="1"/>
-          <p:nvPr/>
-        </p:nvSpPr>
-        <p:spPr>
-          <a:xfrm>
-            <a:off x="3246120" y="2862072"/>
-            <a:ext cx="1207008" cy="182880"/>
-          </a:xfrm>
-          <a:prstGeom prst="rect">
-            <a:avLst/>
-          </a:prstGeom>
-          <a:noFill/>
-          <a:ln/>
-        </p:spPr>
-        <p:txBody>
-          <a:bodyPr wrap="square" lIns="0" tIns="0" rIns="0" bIns="0" rtlCol="0" anchor="ctr"/>
-          <a:lstStyle/>
-          <a:p>
-            <a:pPr indent="0" marL="0">
-              <a:buNone/>
-            </a:pPr>
-            <a:r>
-              <a:rPr lang="en-US" sz="850" b="1" dirty="0">
-                <a:solidFill>
-                  <a:srgbClr val="7A5AF8"/>
-                </a:solidFill>
-                <a:latin typeface="Calibri" pitchFamily="34" charset="0"/>
-                <a:ea typeface="Calibri" pitchFamily="34" charset="-122"/>
-                <a:cs typeface="Calibri" pitchFamily="34" charset="-120"/>
-              </a:rPr>
-              <a:t>He talks, AI listens</a:t>
-            </a:r>
-            <a:endParaRPr lang="en-US" sz="850" dirty="0"/>
-          </a:p>
-        </p:txBody>
-      </p:sp>
-      <p:sp>
-        <p:nvSpPr>
-          <p:cNvPr id="62" name="Text 55"/>
-          <p:cNvSpPr txBox="1"/>
-          <p:nvPr/>
-        </p:nvSpPr>
-        <p:spPr>
-          <a:xfrm>
-            <a:off x="3246120" y="3035808"/>
-            <a:ext cx="1207008" cy="128016"/>
-          </a:xfrm>
-          <a:prstGeom prst="rect">
-            <a:avLst/>
-          </a:prstGeom>
-          <a:noFill/>
-          <a:ln/>
-        </p:spPr>
-        <p:txBody>
-          <a:bodyPr wrap="square" lIns="0" tIns="0" rIns="0" bIns="0" rtlCol="0" anchor="ctr"/>
-          <a:lstStyle/>
-          <a:p>
-            <a:pPr indent="0" marL="0">
-              <a:buNone/>
-            </a:pPr>
-            <a:r>
-              <a:rPr lang="en-US" sz="680" b="1" dirty="0">
-                <a:solidFill>
-                  <a:srgbClr val="5B6B7F"/>
-                </a:solidFill>
-                <a:latin typeface="Calibri" pitchFamily="34" charset="0"/>
-                <a:ea typeface="Calibri" pitchFamily="34" charset="-122"/>
-                <a:cs typeface="Calibri" pitchFamily="34" charset="-120"/>
-              </a:rPr>
-              <a:t>his job becomes an NCO code</a:t>
-            </a:r>
-            <a:endParaRPr lang="en-US" sz="680" dirty="0"/>
-          </a:p>
-        </p:txBody>
-      </p:sp>
-      <p:sp>
-        <p:nvSpPr>
-          <p:cNvPr id="63" name="Text 56"/>
-          <p:cNvSpPr txBox="1"/>
-          <p:nvPr/>
-        </p:nvSpPr>
-        <p:spPr>
-          <a:xfrm>
-            <a:off x="3246120" y="3182112"/>
-            <a:ext cx="1207008" cy="274320"/>
-          </a:xfrm>
-          <a:prstGeom prst="rect">
-            <a:avLst/>
-          </a:prstGeom>
-          <a:noFill/>
-          <a:ln/>
-        </p:spPr>
-        <p:txBody>
-          <a:bodyPr wrap="square" lIns="0" tIns="0" rIns="0" bIns="0" rtlCol="0" anchor="t"/>
-          <a:lstStyle/>
-          <a:p>
-            <a:pPr indent="0" marL="0">
-              <a:buNone/>
-            </a:pPr>
-            <a:r>
-              <a:rPr lang="en-US" sz="640" dirty="0">
-                <a:solidFill>
-                  <a:srgbClr val="1F2937"/>
-                </a:solidFill>
-                <a:latin typeface="Calibri" pitchFamily="34" charset="0"/>
-                <a:ea typeface="Calibri" pitchFamily="34" charset="-122"/>
-                <a:cs typeface="Calibri" pitchFamily="34" charset="-120"/>
-              </a:rPr>
-              <a:t>"Aap kya kaam karte ho?" The AI finds his official occupation and asks about his skills.</a:t>
-            </a:r>
-            <a:endParaRPr lang="en-US" sz="640" dirty="0"/>
-          </a:p>
-        </p:txBody>
-      </p:sp>
-      <p:sp>
-        <p:nvSpPr>
-          <p:cNvPr id="64" name="Shape 57"/>
-          <p:cNvSpPr/>
-          <p:nvPr/>
-        </p:nvSpPr>
-        <p:spPr>
-          <a:xfrm>
-            <a:off x="4608576" y="2432304"/>
-            <a:ext cx="1371600" cy="1024128"/>
-          </a:xfrm>
-          <a:prstGeom prst="roundRect">
-            <a:avLst>
-              <a:gd name="adj" fmla="val 7143"/>
-            </a:avLst>
-          </a:prstGeom>
-          <a:solidFill>
-            <a:srgbClr val="FFF3D6"/>
-          </a:solidFill>
-          <a:ln w="9525">
-            <a:solidFill>
-              <a:srgbClr val="FFF3D6"/>
-            </a:solidFill>
-            <a:prstDash val="solid"/>
-          </a:ln>
-        </p:spPr>
-      </p:sp>
-      <p:sp>
-        <p:nvSpPr>
-          <p:cNvPr id="65" name="Shape 58"/>
-          <p:cNvSpPr/>
-          <p:nvPr/>
-        </p:nvSpPr>
-        <p:spPr>
-          <a:xfrm>
-            <a:off x="4690872" y="2505456"/>
-            <a:ext cx="329184" cy="329184"/>
-          </a:xfrm>
-          <a:prstGeom prst="ellipse">
-            <a:avLst/>
-          </a:prstGeom>
-          <a:solidFill>
-            <a:srgbClr val="FFFFFF"/>
-          </a:solidFill>
-          <a:ln w="12700">
-            <a:solidFill>
-              <a:srgbClr val="FFFFFF"/>
-            </a:solidFill>
-            <a:prstDash val="solid"/>
-          </a:ln>
-        </p:spPr>
-      </p:sp>
-      <p:pic>
-        <p:nvPicPr>
-          <p:cNvPr id="66" name="Image 5" descr="preencoded.png">    </p:cNvPr>
-          <p:cNvPicPr>
-            <a:picLocks noChangeAspect="1"/>
-          </p:cNvPicPr>
-          <p:nvPr/>
-        </p:nvPicPr>
-        <p:blipFill>
-          <a:blip r:embed="rId6"/>
-          <a:stretch>
-            <a:fillRect/>
-          </a:stretch>
-        </p:blipFill>
-        <p:spPr>
-          <a:xfrm>
-            <a:off x="4736592" y="2551176"/>
-            <a:ext cx="237744" cy="237744"/>
-          </a:xfrm>
-          <a:prstGeom prst="rect">
-            <a:avLst/>
-          </a:prstGeom>
-        </p:spPr>
-      </p:pic>
-      <p:sp>
-        <p:nvSpPr>
-          <p:cNvPr id="67" name="Shape 59"/>
-          <p:cNvSpPr/>
-          <p:nvPr/>
-        </p:nvSpPr>
-        <p:spPr>
-          <a:xfrm>
-            <a:off x="5650992" y="2505456"/>
-            <a:ext cx="246888" cy="246888"/>
-          </a:xfrm>
-          <a:prstGeom prst="ellipse">
-            <a:avLst/>
-          </a:prstGeom>
-          <a:solidFill>
-            <a:srgbClr val="D4930D"/>
-          </a:solidFill>
-          <a:ln w="12700">
-            <a:solidFill>
-              <a:srgbClr val="D4930D"/>
-            </a:solidFill>
-            <a:prstDash val="solid"/>
-          </a:ln>
-        </p:spPr>
-      </p:sp>
-      <p:sp>
-        <p:nvSpPr>
-          <p:cNvPr id="68" name="Text 60"/>
-          <p:cNvSpPr txBox="1"/>
-          <p:nvPr/>
-        </p:nvSpPr>
-        <p:spPr>
-          <a:xfrm>
-            <a:off x="5650992" y="2505456"/>
-            <a:ext cx="246888" cy="246888"/>
-          </a:xfrm>
-          <a:prstGeom prst="rect">
-            <a:avLst/>
-          </a:prstGeom>
-          <a:noFill/>
-          <a:ln/>
-        </p:spPr>
-        <p:txBody>
-          <a:bodyPr wrap="square" lIns="0" tIns="0" rIns="0" bIns="0" rtlCol="0" anchor="ctr"/>
-          <a:lstStyle/>
-          <a:p>
-            <a:pPr algn="ctr" indent="0" marL="0">
-              <a:buNone/>
-            </a:pPr>
-            <a:r>
-              <a:rPr lang="en-US" sz="900" b="1" dirty="0">
-                <a:solidFill>
-                  <a:srgbClr val="FFFFFF"/>
-                </a:solidFill>
-                <a:latin typeface="Calibri" pitchFamily="34" charset="0"/>
-                <a:ea typeface="Calibri" pitchFamily="34" charset="-122"/>
-                <a:cs typeface="Calibri" pitchFamily="34" charset="-120"/>
-              </a:rPr>
-              <a:t>4</a:t>
-            </a:r>
-            <a:endParaRPr lang="en-US" sz="900" dirty="0"/>
-          </a:p>
-        </p:txBody>
-      </p:sp>
-      <p:sp>
-        <p:nvSpPr>
-          <p:cNvPr id="69" name="Text 61"/>
-          <p:cNvSpPr txBox="1"/>
-          <p:nvPr/>
-        </p:nvSpPr>
-        <p:spPr>
-          <a:xfrm>
-            <a:off x="4690872" y="2862072"/>
-            <a:ext cx="1207008" cy="182880"/>
-          </a:xfrm>
-          <a:prstGeom prst="rect">
-            <a:avLst/>
-          </a:prstGeom>
-          <a:noFill/>
-          <a:ln/>
-        </p:spPr>
-        <p:txBody>
-          <a:bodyPr wrap="square" lIns="0" tIns="0" rIns="0" bIns="0" rtlCol="0" anchor="ctr"/>
-          <a:lstStyle/>
-          <a:p>
-            <a:pPr indent="0" marL="0">
-              <a:buNone/>
-            </a:pPr>
-            <a:r>
-              <a:rPr lang="en-US" sz="850" b="1" dirty="0">
-                <a:solidFill>
-                  <a:srgbClr val="D4930D"/>
-                </a:solidFill>
-                <a:latin typeface="Calibri" pitchFamily="34" charset="0"/>
-                <a:ea typeface="Calibri" pitchFamily="34" charset="-122"/>
-                <a:cs typeface="Calibri" pitchFamily="34" charset="-120"/>
-              </a:rPr>
-              <a:t>Read back &amp; saved</a:t>
-            </a:r>
-            <a:endParaRPr lang="en-US" sz="850" dirty="0"/>
-          </a:p>
-        </p:txBody>
-      </p:sp>
-      <p:sp>
-        <p:nvSpPr>
-          <p:cNvPr id="70" name="Text 62"/>
-          <p:cNvSpPr txBox="1"/>
-          <p:nvPr/>
-        </p:nvSpPr>
-        <p:spPr>
-          <a:xfrm>
-            <a:off x="4690872" y="3035808"/>
-            <a:ext cx="1207008" cy="128016"/>
-          </a:xfrm>
-          <a:prstGeom prst="rect">
-            <a:avLst/>
-          </a:prstGeom>
-          <a:noFill/>
-          <a:ln/>
-        </p:spPr>
-        <p:txBody>
-          <a:bodyPr wrap="square" lIns="0" tIns="0" rIns="0" bIns="0" rtlCol="0" anchor="ctr"/>
-          <a:lstStyle/>
-          <a:p>
-            <a:pPr indent="0" marL="0">
-              <a:buNone/>
-            </a:pPr>
-            <a:r>
-              <a:rPr lang="en-US" sz="680" b="1" dirty="0">
-                <a:solidFill>
-                  <a:srgbClr val="5B6B7F"/>
-                </a:solidFill>
-                <a:latin typeface="Calibri" pitchFamily="34" charset="0"/>
-                <a:ea typeface="Calibri" pitchFamily="34" charset="-122"/>
-                <a:cs typeface="Calibri" pitchFamily="34" charset="-120"/>
-              </a:rPr>
-              <a:t>one clean profile, no paper</a:t>
-            </a:r>
-            <a:endParaRPr lang="en-US" sz="680" dirty="0"/>
-          </a:p>
-        </p:txBody>
-      </p:sp>
-      <p:sp>
-        <p:nvSpPr>
-          <p:cNvPr id="71" name="Text 63"/>
-          <p:cNvSpPr txBox="1"/>
-          <p:nvPr/>
-        </p:nvSpPr>
-        <p:spPr>
-          <a:xfrm>
-            <a:off x="4690872" y="3182112"/>
-            <a:ext cx="1207008" cy="274320"/>
-          </a:xfrm>
-          <a:prstGeom prst="rect">
-            <a:avLst/>
-          </a:prstGeom>
-          <a:noFill/>
-          <a:ln/>
-        </p:spPr>
-        <p:txBody>
-          <a:bodyPr wrap="square" lIns="0" tIns="0" rIns="0" bIns="0" rtlCol="0" anchor="t"/>
-          <a:lstStyle/>
-          <a:p>
-            <a:pPr indent="0" marL="0">
-              <a:buNone/>
-            </a:pPr>
-            <a:r>
-              <a:rPr lang="en-US" sz="640" dirty="0">
-                <a:solidFill>
-                  <a:srgbClr val="1F2937"/>
-                </a:solidFill>
-                <a:latin typeface="Calibri" pitchFamily="34" charset="0"/>
-                <a:ea typeface="Calibri" pitchFamily="34" charset="-122"/>
-                <a:cs typeface="Calibri" pitchFamily="34" charset="-120"/>
-              </a:rPr>
-              <a:t>He hears everything back and presses 1 to confirm, 2 to correct.</a:t>
-            </a:r>
-            <a:endParaRPr lang="en-US" sz="640" dirty="0"/>
-          </a:p>
-        </p:txBody>
-      </p:sp>
-      <p:sp>
-        <p:nvSpPr>
-          <p:cNvPr id="72" name="Shape 64"/>
-          <p:cNvSpPr/>
-          <p:nvPr/>
-        </p:nvSpPr>
-        <p:spPr>
-          <a:xfrm>
-            <a:off x="6053328" y="2432304"/>
-            <a:ext cx="1371600" cy="1024128"/>
-          </a:xfrm>
-          <a:prstGeom prst="roundRect">
-            <a:avLst>
-              <a:gd name="adj" fmla="val 7143"/>
+              <a:gd name="adj" fmla="val 7018"/>
             </a:avLst>
           </a:prstGeom>
           <a:solidFill>
@@ -4132,49 +3583,24 @@
           </a:ln>
         </p:spPr>
       </p:sp>
-      <p:sp>
-        <p:nvSpPr>
-          <p:cNvPr id="73" name="Shape 65"/>
-          <p:cNvSpPr/>
-          <p:nvPr/>
-        </p:nvSpPr>
-        <p:spPr>
-          <a:xfrm>
-            <a:off x="6135624" y="2505456"/>
-            <a:ext cx="329184" cy="329184"/>
-          </a:xfrm>
-          <a:prstGeom prst="ellipse">
-            <a:avLst/>
-          </a:prstGeom>
-          <a:solidFill>
-            <a:srgbClr val="FFFFFF"/>
-          </a:solidFill>
-          <a:ln w="12700">
-            <a:solidFill>
-              <a:srgbClr val="FFFFFF"/>
-            </a:solidFill>
-            <a:prstDash val="solid"/>
-          </a:ln>
-        </p:spPr>
-      </p:sp>
       <p:pic>
         <p:nvPicPr>
-          <p:cNvPr id="74" name="Image 6" descr="preencoded.png">    </p:cNvPr>
+          <p:cNvPr id="51" name="Image 4" descr="preencoded.png">    </p:cNvPr>
           <p:cNvPicPr>
             <a:picLocks noChangeAspect="1"/>
           </p:cNvPicPr>
           <p:nvPr/>
         </p:nvPicPr>
         <p:blipFill>
-          <a:blip r:embed="rId7"/>
+          <a:blip r:embed="rId5"/>
           <a:stretch>
             <a:fillRect/>
           </a:stretch>
         </p:blipFill>
         <p:spPr>
           <a:xfrm>
-            <a:off x="6181344" y="2551176"/>
-            <a:ext cx="237744" cy="237744"/>
+            <a:off x="4700016" y="2560320"/>
+            <a:ext cx="274320" cy="274320"/>
           </a:xfrm>
           <a:prstGeom prst="rect">
             <a:avLst/>
@@ -4183,199 +3609,168 @@
       </p:pic>
       <p:sp>
         <p:nvSpPr>
-          <p:cNvPr id="75" name="Shape 66"/>
+          <p:cNvPr id="52" name="Text 45"/>
+          <p:cNvSpPr txBox="1"/>
+          <p:nvPr/>
+        </p:nvSpPr>
+        <p:spPr>
+          <a:xfrm>
+            <a:off x="5047488" y="2532888"/>
+            <a:ext cx="1563624" cy="201168"/>
+          </a:xfrm>
+          <a:prstGeom prst="rect">
+            <a:avLst/>
+          </a:prstGeom>
+          <a:noFill/>
+          <a:ln/>
+        </p:spPr>
+        <p:txBody>
+          <a:bodyPr wrap="square" lIns="0" tIns="0" rIns="0" bIns="0" rtlCol="0" anchor="ctr"/>
+          <a:lstStyle/>
+          <a:p>
+            <a:pPr indent="0" marL="0">
+              <a:buNone/>
+            </a:pPr>
+            <a:r>
+              <a:rPr lang="en-US" sz="920" b="1" dirty="0">
+                <a:solidFill>
+                  <a:srgbClr val="1F9D63"/>
+                </a:solidFill>
+                <a:latin typeface="Calibri" pitchFamily="34" charset="0"/>
+                <a:ea typeface="Calibri" pitchFamily="34" charset="-122"/>
+                <a:cs typeface="Calibri" pitchFamily="34" charset="-120"/>
+              </a:rPr>
+              <a:t>Confirm → 1–4 options that fit</a:t>
+            </a:r>
+            <a:endParaRPr lang="en-US" sz="920" dirty="0"/>
+          </a:p>
+        </p:txBody>
+      </p:sp>
+      <p:sp>
+        <p:nvSpPr>
+          <p:cNvPr id="53" name="Text 46"/>
+          <p:cNvSpPr txBox="1"/>
+          <p:nvPr/>
+        </p:nvSpPr>
+        <p:spPr>
+          <a:xfrm>
+            <a:off x="5047488" y="2724912"/>
+            <a:ext cx="1563624" cy="137160"/>
+          </a:xfrm>
+          <a:prstGeom prst="rect">
+            <a:avLst/>
+          </a:prstGeom>
+          <a:noFill/>
+          <a:ln/>
+        </p:spPr>
+        <p:txBody>
+          <a:bodyPr wrap="square" lIns="0" tIns="0" rIns="0" bIns="0" rtlCol="0" anchor="ctr"/>
+          <a:lstStyle/>
+          <a:p>
+            <a:pPr indent="0" marL="0">
+              <a:buNone/>
+            </a:pPr>
+            <a:r>
+              <a:rPr lang="en-US" sz="730" b="1" dirty="0">
+                <a:solidFill>
+                  <a:srgbClr val="5B6B7F"/>
+                </a:solidFill>
+                <a:latin typeface="Calibri" pitchFamily="34" charset="0"/>
+                <a:ea typeface="Calibri" pitchFamily="34" charset="-122"/>
+                <a:cs typeface="Calibri" pitchFamily="34" charset="-120"/>
+              </a:rPr>
+              <a:t>every fact checked before it is spoken</a:t>
+            </a:r>
+            <a:endParaRPr lang="en-US" sz="730" dirty="0"/>
+          </a:p>
+        </p:txBody>
+      </p:sp>
+      <p:sp>
+        <p:nvSpPr>
+          <p:cNvPr id="54" name="Text 47"/>
+          <p:cNvSpPr txBox="1"/>
+          <p:nvPr/>
+        </p:nvSpPr>
+        <p:spPr>
+          <a:xfrm>
+            <a:off x="4700016" y="2907792"/>
+            <a:ext cx="1911096" cy="548640"/>
+          </a:xfrm>
+          <a:prstGeom prst="rect">
+            <a:avLst/>
+          </a:prstGeom>
+          <a:noFill/>
+          <a:ln/>
+        </p:spPr>
+        <p:txBody>
+          <a:bodyPr wrap="square" lIns="0" tIns="0" rIns="0" bIns="0" rtlCol="0" anchor="t"/>
+          <a:lstStyle/>
+          <a:p>
+            <a:pPr indent="0" marL="0">
+              <a:buNone/>
+            </a:pPr>
+            <a:r>
+              <a:rPr lang="en-US" sz="660" dirty="0">
+                <a:solidFill>
+                  <a:srgbClr val="1F2937"/>
+                </a:solidFill>
+                <a:latin typeface="Calibri" pitchFamily="34" charset="0"/>
+                <a:ea typeface="Calibri" pitchFamily="34" charset="-122"/>
+                <a:cs typeface="Calibri" pitchFamily="34" charset="-120"/>
+              </a:rPr>
+              <a:t>He hears everything back and presses 1 to confirm — </a:t>
+            </a:r>
+            <a:r>
+              <a:rPr lang="en-US" sz="660" b="1" dirty="0">
+                <a:solidFill>
+                  <a:srgbClr val="1F9D63"/>
+                </a:solidFill>
+                <a:latin typeface="Calibri" pitchFamily="34" charset="0"/>
+                <a:ea typeface="Calibri" pitchFamily="34" charset="-122"/>
+                <a:cs typeface="Calibri" pitchFamily="34" charset="-120"/>
+              </a:rPr>
+              <a:t>the AI writes the profile, no paper</a:t>
+            </a:r>
+            <a:r>
+              <a:rPr lang="en-US" sz="660" dirty="0">
+                <a:solidFill>
+                  <a:srgbClr val="1F2937"/>
+                </a:solidFill>
+                <a:latin typeface="Calibri" pitchFamily="34" charset="0"/>
+                <a:ea typeface="Calibri" pitchFamily="34" charset="-122"/>
+                <a:cs typeface="Calibri" pitchFamily="34" charset="-120"/>
+              </a:rPr>
+              <a:t>. Then only courses, schemes or jobs near him that truly fit. </a:t>
+            </a:r>
+            <a:r>
+              <a:rPr lang="en-US" sz="660" b="1" dirty="0">
+                <a:solidFill>
+                  <a:srgbClr val="1F9D63"/>
+                </a:solidFill>
+                <a:latin typeface="Calibri" pitchFamily="34" charset="0"/>
+                <a:ea typeface="Calibri" pitchFamily="34" charset="-122"/>
+                <a:cs typeface="Calibri" pitchFamily="34" charset="-120"/>
+              </a:rPr>
+              <a:t>He can ask any doubt.</a:t>
+            </a:r>
+            <a:endParaRPr lang="en-US" sz="660" dirty="0"/>
+          </a:p>
+        </p:txBody>
+      </p:sp>
+      <p:sp>
+        <p:nvSpPr>
+          <p:cNvPr id="55" name="Shape 48"/>
           <p:cNvSpPr/>
           <p:nvPr/>
         </p:nvSpPr>
         <p:spPr>
           <a:xfrm>
-            <a:off x="7095744" y="2505456"/>
-            <a:ext cx="246888" cy="246888"/>
-          </a:xfrm>
-          <a:prstGeom prst="ellipse">
-            <a:avLst/>
-          </a:prstGeom>
-          <a:solidFill>
-            <a:srgbClr val="1F9D63"/>
-          </a:solidFill>
-          <a:ln w="12700">
-            <a:solidFill>
-              <a:srgbClr val="1F9D63"/>
-            </a:solidFill>
-            <a:prstDash val="solid"/>
-          </a:ln>
-        </p:spPr>
-      </p:sp>
-      <p:sp>
-        <p:nvSpPr>
-          <p:cNvPr id="76" name="Text 67"/>
-          <p:cNvSpPr txBox="1"/>
-          <p:nvPr/>
-        </p:nvSpPr>
-        <p:spPr>
-          <a:xfrm>
-            <a:off x="7095744" y="2505456"/>
-            <a:ext cx="246888" cy="246888"/>
-          </a:xfrm>
-          <a:prstGeom prst="rect">
-            <a:avLst/>
-          </a:prstGeom>
-          <a:noFill/>
-          <a:ln/>
-        </p:spPr>
-        <p:txBody>
-          <a:bodyPr wrap="square" lIns="0" tIns="0" rIns="0" bIns="0" rtlCol="0" anchor="ctr"/>
-          <a:lstStyle/>
-          <a:p>
-            <a:pPr algn="ctr" indent="0" marL="0">
-              <a:buNone/>
-            </a:pPr>
-            <a:r>
-              <a:rPr lang="en-US" sz="900" b="1" dirty="0">
-                <a:solidFill>
-                  <a:srgbClr val="FFFFFF"/>
-                </a:solidFill>
-                <a:latin typeface="Calibri" pitchFamily="34" charset="0"/>
-                <a:ea typeface="Calibri" pitchFamily="34" charset="-122"/>
-                <a:cs typeface="Calibri" pitchFamily="34" charset="-120"/>
-              </a:rPr>
-              <a:t>5</a:t>
-            </a:r>
-            <a:endParaRPr lang="en-US" sz="900" dirty="0"/>
-          </a:p>
-        </p:txBody>
-      </p:sp>
-      <p:sp>
-        <p:nvSpPr>
-          <p:cNvPr id="77" name="Text 68"/>
-          <p:cNvSpPr txBox="1"/>
-          <p:nvPr/>
-        </p:nvSpPr>
-        <p:spPr>
-          <a:xfrm>
-            <a:off x="6135624" y="2862072"/>
-            <a:ext cx="1207008" cy="182880"/>
-          </a:xfrm>
-          <a:prstGeom prst="rect">
-            <a:avLst/>
-          </a:prstGeom>
-          <a:noFill/>
-          <a:ln/>
-        </p:spPr>
-        <p:txBody>
-          <a:bodyPr wrap="square" lIns="0" tIns="0" rIns="0" bIns="0" rtlCol="0" anchor="ctr"/>
-          <a:lstStyle/>
-          <a:p>
-            <a:pPr indent="0" marL="0">
-              <a:buNone/>
-            </a:pPr>
-            <a:r>
-              <a:rPr lang="en-US" sz="850" b="1" dirty="0">
-                <a:solidFill>
-                  <a:srgbClr val="1F9D63"/>
-                </a:solidFill>
-                <a:latin typeface="Calibri" pitchFamily="34" charset="0"/>
-                <a:ea typeface="Calibri" pitchFamily="34" charset="-122"/>
-                <a:cs typeface="Calibri" pitchFamily="34" charset="-120"/>
-              </a:rPr>
-              <a:t>1–4 options that fit</a:t>
-            </a:r>
-            <a:endParaRPr lang="en-US" sz="850" dirty="0"/>
-          </a:p>
-        </p:txBody>
-      </p:sp>
-      <p:sp>
-        <p:nvSpPr>
-          <p:cNvPr id="78" name="Text 69"/>
-          <p:cNvSpPr txBox="1"/>
-          <p:nvPr/>
-        </p:nvSpPr>
-        <p:spPr>
-          <a:xfrm>
-            <a:off x="6135624" y="3035808"/>
-            <a:ext cx="1207008" cy="128016"/>
-          </a:xfrm>
-          <a:prstGeom prst="rect">
-            <a:avLst/>
-          </a:prstGeom>
-          <a:noFill/>
-          <a:ln/>
-        </p:spPr>
-        <p:txBody>
-          <a:bodyPr wrap="square" lIns="0" tIns="0" rIns="0" bIns="0" rtlCol="0" anchor="ctr"/>
-          <a:lstStyle/>
-          <a:p>
-            <a:pPr indent="0" marL="0">
-              <a:buNone/>
-            </a:pPr>
-            <a:r>
-              <a:rPr lang="en-US" sz="680" b="1" dirty="0">
-                <a:solidFill>
-                  <a:srgbClr val="5B6B7F"/>
-                </a:solidFill>
-                <a:latin typeface="Calibri" pitchFamily="34" charset="0"/>
-                <a:ea typeface="Calibri" pitchFamily="34" charset="-122"/>
-                <a:cs typeface="Calibri" pitchFamily="34" charset="-120"/>
-              </a:rPr>
-              <a:t>every fact checked first</a:t>
-            </a:r>
-            <a:endParaRPr lang="en-US" sz="680" dirty="0"/>
-          </a:p>
-        </p:txBody>
-      </p:sp>
-      <p:sp>
-        <p:nvSpPr>
-          <p:cNvPr id="79" name="Text 70"/>
-          <p:cNvSpPr txBox="1"/>
-          <p:nvPr/>
-        </p:nvSpPr>
-        <p:spPr>
-          <a:xfrm>
-            <a:off x="6135624" y="3182112"/>
-            <a:ext cx="1207008" cy="274320"/>
-          </a:xfrm>
-          <a:prstGeom prst="rect">
-            <a:avLst/>
-          </a:prstGeom>
-          <a:noFill/>
-          <a:ln/>
-        </p:spPr>
-        <p:txBody>
-          <a:bodyPr wrap="square" lIns="0" tIns="0" rIns="0" bIns="0" rtlCol="0" anchor="t"/>
-          <a:lstStyle/>
-          <a:p>
-            <a:pPr indent="0" marL="0">
-              <a:buNone/>
-            </a:pPr>
-            <a:r>
-              <a:rPr lang="en-US" sz="640" dirty="0">
-                <a:solidFill>
-                  <a:srgbClr val="1F2937"/>
-                </a:solidFill>
-                <a:latin typeface="Calibri" pitchFamily="34" charset="0"/>
-                <a:ea typeface="Calibri" pitchFamily="34" charset="-122"/>
-                <a:cs typeface="Calibri" pitchFamily="34" charset="-120"/>
-              </a:rPr>
-              <a:t>Only courses, schemes or jobs near him that truly fit. He can ask any doubt.</a:t>
-            </a:r>
-            <a:endParaRPr lang="en-US" sz="640" dirty="0"/>
-          </a:p>
-        </p:txBody>
-      </p:sp>
-      <p:sp>
-        <p:nvSpPr>
-          <p:cNvPr id="80" name="Shape 71"/>
-          <p:cNvSpPr/>
-          <p:nvPr/>
-        </p:nvSpPr>
-        <p:spPr>
-          <a:xfrm>
-            <a:off x="7498080" y="2432304"/>
-            <a:ext cx="1371600" cy="1024128"/>
+            <a:off x="6775704" y="2487168"/>
+            <a:ext cx="2093976" cy="1042416"/>
           </a:xfrm>
           <a:prstGeom prst="roundRect">
             <a:avLst>
-              <a:gd name="adj" fmla="val 7143"/>
+              <a:gd name="adj" fmla="val 7018"/>
             </a:avLst>
           </a:prstGeom>
           <a:solidFill>
@@ -4389,49 +3784,24 @@
           </a:ln>
         </p:spPr>
       </p:sp>
-      <p:sp>
-        <p:nvSpPr>
-          <p:cNvPr id="81" name="Shape 72"/>
-          <p:cNvSpPr/>
-          <p:nvPr/>
-        </p:nvSpPr>
-        <p:spPr>
-          <a:xfrm>
-            <a:off x="7580376" y="2505456"/>
-            <a:ext cx="329184" cy="329184"/>
-          </a:xfrm>
-          <a:prstGeom prst="ellipse">
-            <a:avLst/>
-          </a:prstGeom>
-          <a:solidFill>
-            <a:srgbClr val="FFFFFF"/>
-          </a:solidFill>
-          <a:ln w="12700">
-            <a:solidFill>
-              <a:srgbClr val="FFFFFF"/>
-            </a:solidFill>
-            <a:prstDash val="solid"/>
-          </a:ln>
-        </p:spPr>
-      </p:sp>
       <p:pic>
         <p:nvPicPr>
-          <p:cNvPr id="82" name="Image 7" descr="preencoded.png">    </p:cNvPr>
+          <p:cNvPr id="56" name="Image 5" descr="preencoded.png">    </p:cNvPr>
           <p:cNvPicPr>
             <a:picLocks noChangeAspect="1"/>
           </p:cNvPicPr>
           <p:nvPr/>
         </p:nvPicPr>
         <p:blipFill>
-          <a:blip r:embed="rId8"/>
+          <a:blip r:embed="rId6"/>
           <a:stretch>
             <a:fillRect/>
           </a:stretch>
         </p:blipFill>
         <p:spPr>
           <a:xfrm>
-            <a:off x="7626096" y="2551176"/>
-            <a:ext cx="237744" cy="237744"/>
+            <a:off x="6867144" y="2560320"/>
+            <a:ext cx="274320" cy="274320"/>
           </a:xfrm>
           <a:prstGeom prst="rect">
             <a:avLst/>
@@ -4440,249 +3810,229 @@
       </p:pic>
       <p:sp>
         <p:nvSpPr>
-          <p:cNvPr id="83" name="Shape 73"/>
+          <p:cNvPr id="57" name="Text 49"/>
+          <p:cNvSpPr txBox="1"/>
+          <p:nvPr/>
+        </p:nvSpPr>
+        <p:spPr>
+          <a:xfrm>
+            <a:off x="7214616" y="2532888"/>
+            <a:ext cx="1563624" cy="201168"/>
+          </a:xfrm>
+          <a:prstGeom prst="rect">
+            <a:avLst/>
+          </a:prstGeom>
+          <a:noFill/>
+          <a:ln/>
+        </p:spPr>
+        <p:txBody>
+          <a:bodyPr wrap="square" lIns="0" tIns="0" rIns="0" bIns="0" rtlCol="0" anchor="ctr"/>
+          <a:lstStyle/>
+          <a:p>
+            <a:pPr indent="0" marL="0">
+              <a:buNone/>
+            </a:pPr>
+            <a:r>
+              <a:rPr lang="en-US" sz="920" b="1" dirty="0">
+                <a:solidFill>
+                  <a:srgbClr val="EF8A22"/>
+                </a:solidFill>
+                <a:latin typeface="Calibri" pitchFamily="34" charset="0"/>
+                <a:ea typeface="Calibri" pitchFamily="34" charset="-122"/>
+                <a:cs typeface="Calibri" pitchFamily="34" charset="-120"/>
+              </a:rPr>
+              <a:t>Apply &amp; follow-up</a:t>
+            </a:r>
+            <a:endParaRPr lang="en-US" sz="920" dirty="0"/>
+          </a:p>
+        </p:txBody>
+      </p:sp>
+      <p:sp>
+        <p:nvSpPr>
+          <p:cNvPr id="58" name="Text 50"/>
+          <p:cNvSpPr txBox="1"/>
+          <p:nvPr/>
+        </p:nvSpPr>
+        <p:spPr>
+          <a:xfrm>
+            <a:off x="7214616" y="2724912"/>
+            <a:ext cx="1563624" cy="137160"/>
+          </a:xfrm>
+          <a:prstGeom prst="rect">
+            <a:avLst/>
+          </a:prstGeom>
+          <a:noFill/>
+          <a:ln/>
+        </p:spPr>
+        <p:txBody>
+          <a:bodyPr wrap="square" lIns="0" tIns="0" rIns="0" bIns="0" rtlCol="0" anchor="ctr"/>
+          <a:lstStyle/>
+          <a:p>
+            <a:pPr indent="0" marL="0">
+              <a:buNone/>
+            </a:pPr>
+            <a:r>
+              <a:rPr lang="en-US" sz="730" b="1" dirty="0">
+                <a:solidFill>
+                  <a:srgbClr val="5B6B7F"/>
+                </a:solidFill>
+                <a:latin typeface="Calibri" pitchFamily="34" charset="0"/>
+                <a:ea typeface="Calibri" pitchFamily="34" charset="-122"/>
+                <a:cs typeface="Calibri" pitchFamily="34" charset="-120"/>
+              </a:rPr>
+              <a:t>CSC → officer → 3 calls</a:t>
+            </a:r>
+            <a:endParaRPr lang="en-US" sz="730" dirty="0"/>
+          </a:p>
+        </p:txBody>
+      </p:sp>
+      <p:sp>
+        <p:nvSpPr>
+          <p:cNvPr id="59" name="Text 51"/>
+          <p:cNvSpPr txBox="1"/>
+          <p:nvPr/>
+        </p:nvSpPr>
+        <p:spPr>
+          <a:xfrm>
+            <a:off x="6867144" y="2907792"/>
+            <a:ext cx="1911096" cy="548640"/>
+          </a:xfrm>
+          <a:prstGeom prst="rect">
+            <a:avLst/>
+          </a:prstGeom>
+          <a:noFill/>
+          <a:ln/>
+        </p:spPr>
+        <p:txBody>
+          <a:bodyPr wrap="square" lIns="0" tIns="0" rIns="0" bIns="0" rtlCol="0" anchor="t"/>
+          <a:lstStyle/>
+          <a:p>
+            <a:pPr indent="0" marL="0">
+              <a:buNone/>
+            </a:pPr>
+            <a:r>
+              <a:rPr lang="en-US" sz="660" dirty="0">
+                <a:solidFill>
+                  <a:srgbClr val="1F2937"/>
+                </a:solidFill>
+                <a:latin typeface="Calibri" pitchFamily="34" charset="0"/>
+                <a:ea typeface="Calibri" pitchFamily="34" charset="-122"/>
+                <a:cs typeface="Calibri" pitchFamily="34" charset="-120"/>
+              </a:rPr>
+              <a:t>SMS with </a:t>
+            </a:r>
+            <a:r>
+              <a:rPr lang="en-US" sz="660" b="1" dirty="0">
+                <a:solidFill>
+                  <a:srgbClr val="EF8A22"/>
+                </a:solidFill>
+                <a:latin typeface="Calibri" pitchFamily="34" charset="0"/>
+                <a:ea typeface="Calibri" pitchFamily="34" charset="-122"/>
+                <a:cs typeface="Calibri" pitchFamily="34" charset="-120"/>
+              </a:rPr>
+              <a:t>Case ID + nearest CSC</a:t>
+            </a:r>
+            <a:r>
+              <a:rPr lang="en-US" sz="660" dirty="0">
+                <a:solidFill>
+                  <a:srgbClr val="1F2937"/>
+                </a:solidFill>
+                <a:latin typeface="Calibri" pitchFamily="34" charset="0"/>
+                <a:ea typeface="Calibri" pitchFamily="34" charset="-122"/>
+                <a:cs typeface="Calibri" pitchFamily="34" charset="-120"/>
+              </a:rPr>
+              <a:t>; the officer approves in the AJAY app; SkillCall calls at </a:t>
+            </a:r>
+            <a:r>
+              <a:rPr lang="en-US" sz="660" b="1" dirty="0">
+                <a:solidFill>
+                  <a:srgbClr val="EF8A22"/>
+                </a:solidFill>
+                <a:latin typeface="Calibri" pitchFamily="34" charset="0"/>
+                <a:ea typeface="Calibri" pitchFamily="34" charset="-122"/>
+                <a:cs typeface="Calibri" pitchFamily="34" charset="-120"/>
+              </a:rPr>
+              <a:t>1, 3 and 6 months</a:t>
+            </a:r>
+            <a:r>
+              <a:rPr lang="en-US" sz="660" dirty="0">
+                <a:solidFill>
+                  <a:srgbClr val="1F2937"/>
+                </a:solidFill>
+                <a:latin typeface="Calibri" pitchFamily="34" charset="0"/>
+                <a:ea typeface="Calibri" pitchFamily="34" charset="-122"/>
+                <a:cs typeface="Calibri" pitchFamily="34" charset="-120"/>
+              </a:rPr>
+              <a:t> until he is earning.</a:t>
+            </a:r>
+            <a:endParaRPr lang="en-US" sz="660" dirty="0"/>
+          </a:p>
+        </p:txBody>
+      </p:sp>
+      <p:sp>
+        <p:nvSpPr>
+          <p:cNvPr id="60" name="Text 52"/>
+          <p:cNvSpPr txBox="1"/>
+          <p:nvPr/>
+        </p:nvSpPr>
+        <p:spPr>
+          <a:xfrm>
+            <a:off x="274320" y="3621024"/>
+            <a:ext cx="6400800" cy="182880"/>
+          </a:xfrm>
+          <a:prstGeom prst="rect">
+            <a:avLst/>
+          </a:prstGeom>
+          <a:noFill/>
+          <a:ln/>
+        </p:spPr>
+        <p:txBody>
+          <a:bodyPr wrap="square" lIns="0" tIns="0" rIns="0" bIns="0" rtlCol="0" anchor="ctr"/>
+          <a:lstStyle/>
+          <a:p>
+            <a:pPr indent="0" marL="0">
+              <a:buNone/>
+            </a:pPr>
+            <a:r>
+              <a:rPr lang="en-US" sz="850" b="1" spc="120" kern="0" dirty="0">
+                <a:solidFill>
+                  <a:srgbClr val="7A5AF8"/>
+                </a:solidFill>
+                <a:latin typeface="Calibri" pitchFamily="34" charset="0"/>
+                <a:ea typeface="Calibri" pitchFamily="34" charset="-122"/>
+                <a:cs typeface="Calibri" pitchFamily="34" charset="-120"/>
+              </a:rPr>
+              <a:t>WHAT MAKES IT DIFFERENT  </a:t>
+            </a:r>
+            <a:r>
+              <a:rPr lang="en-US" sz="750" i="1" dirty="0">
+                <a:solidFill>
+                  <a:srgbClr val="6B7280"/>
+                </a:solidFill>
+                <a:latin typeface="Calibri" pitchFamily="34" charset="0"/>
+                <a:ea typeface="Calibri" pitchFamily="34" charset="-122"/>
+                <a:cs typeface="Calibri" pitchFamily="34" charset="-120"/>
+              </a:rPr>
+              <a:t>five things a paper form can never do</a:t>
+            </a:r>
+            <a:endParaRPr lang="en-US" sz="850" dirty="0"/>
+          </a:p>
+        </p:txBody>
+      </p:sp>
+      <p:sp>
+        <p:nvSpPr>
+          <p:cNvPr id="61" name="Shape 53"/>
           <p:cNvSpPr/>
           <p:nvPr/>
         </p:nvSpPr>
         <p:spPr>
           <a:xfrm>
-            <a:off x="8540496" y="2505456"/>
-            <a:ext cx="246888" cy="246888"/>
-          </a:xfrm>
-          <a:prstGeom prst="ellipse">
-            <a:avLst/>
-          </a:prstGeom>
-          <a:solidFill>
-            <a:srgbClr val="EF8A22"/>
-          </a:solidFill>
-          <a:ln w="12700">
-            <a:solidFill>
-              <a:srgbClr val="EF8A22"/>
-            </a:solidFill>
-            <a:prstDash val="solid"/>
-          </a:ln>
-        </p:spPr>
-      </p:sp>
-      <p:sp>
-        <p:nvSpPr>
-          <p:cNvPr id="84" name="Text 74"/>
-          <p:cNvSpPr txBox="1"/>
-          <p:nvPr/>
-        </p:nvSpPr>
-        <p:spPr>
-          <a:xfrm>
-            <a:off x="8540496" y="2505456"/>
-            <a:ext cx="246888" cy="246888"/>
-          </a:xfrm>
-          <a:prstGeom prst="rect">
-            <a:avLst/>
-          </a:prstGeom>
-          <a:noFill/>
-          <a:ln/>
-        </p:spPr>
-        <p:txBody>
-          <a:bodyPr wrap="square" lIns="0" tIns="0" rIns="0" bIns="0" rtlCol="0" anchor="ctr"/>
-          <a:lstStyle/>
-          <a:p>
-            <a:pPr algn="ctr" indent="0" marL="0">
-              <a:buNone/>
-            </a:pPr>
-            <a:r>
-              <a:rPr lang="en-US" sz="900" b="1" dirty="0">
-                <a:solidFill>
-                  <a:srgbClr val="FFFFFF"/>
-                </a:solidFill>
-                <a:latin typeface="Calibri" pitchFamily="34" charset="0"/>
-                <a:ea typeface="Calibri" pitchFamily="34" charset="-122"/>
-                <a:cs typeface="Calibri" pitchFamily="34" charset="-120"/>
-              </a:rPr>
-              <a:t>6</a:t>
-            </a:r>
-            <a:endParaRPr lang="en-US" sz="900" dirty="0"/>
-          </a:p>
-        </p:txBody>
-      </p:sp>
-      <p:sp>
-        <p:nvSpPr>
-          <p:cNvPr id="85" name="Text 75"/>
-          <p:cNvSpPr txBox="1"/>
-          <p:nvPr/>
-        </p:nvSpPr>
-        <p:spPr>
-          <a:xfrm>
-            <a:off x="7580376" y="2862072"/>
-            <a:ext cx="1207008" cy="182880"/>
-          </a:xfrm>
-          <a:prstGeom prst="rect">
-            <a:avLst/>
-          </a:prstGeom>
-          <a:noFill/>
-          <a:ln/>
-        </p:spPr>
-        <p:txBody>
-          <a:bodyPr wrap="square" lIns="0" tIns="0" rIns="0" bIns="0" rtlCol="0" anchor="ctr"/>
-          <a:lstStyle/>
-          <a:p>
-            <a:pPr indent="0" marL="0">
-              <a:buNone/>
-            </a:pPr>
-            <a:r>
-              <a:rPr lang="en-US" sz="850" b="1" dirty="0">
-                <a:solidFill>
-                  <a:srgbClr val="EF8A22"/>
-                </a:solidFill>
-                <a:latin typeface="Calibri" pitchFamily="34" charset="0"/>
-                <a:ea typeface="Calibri" pitchFamily="34" charset="-122"/>
-                <a:cs typeface="Calibri" pitchFamily="34" charset="-120"/>
-              </a:rPr>
-              <a:t>Apply &amp; follow-up</a:t>
-            </a:r>
-            <a:endParaRPr lang="en-US" sz="850" dirty="0"/>
-          </a:p>
-        </p:txBody>
-      </p:sp>
-      <p:sp>
-        <p:nvSpPr>
-          <p:cNvPr id="86" name="Text 76"/>
-          <p:cNvSpPr txBox="1"/>
-          <p:nvPr/>
-        </p:nvSpPr>
-        <p:spPr>
-          <a:xfrm>
-            <a:off x="7580376" y="3035808"/>
-            <a:ext cx="1207008" cy="128016"/>
-          </a:xfrm>
-          <a:prstGeom prst="rect">
-            <a:avLst/>
-          </a:prstGeom>
-          <a:noFill/>
-          <a:ln/>
-        </p:spPr>
-        <p:txBody>
-          <a:bodyPr wrap="square" lIns="0" tIns="0" rIns="0" bIns="0" rtlCol="0" anchor="ctr"/>
-          <a:lstStyle/>
-          <a:p>
-            <a:pPr indent="0" marL="0">
-              <a:buNone/>
-            </a:pPr>
-            <a:r>
-              <a:rPr lang="en-US" sz="680" b="1" dirty="0">
-                <a:solidFill>
-                  <a:srgbClr val="5B6B7F"/>
-                </a:solidFill>
-                <a:latin typeface="Calibri" pitchFamily="34" charset="0"/>
-                <a:ea typeface="Calibri" pitchFamily="34" charset="-122"/>
-                <a:cs typeface="Calibri" pitchFamily="34" charset="-120"/>
-              </a:rPr>
-              <a:t>CSC → officer → 3 calls</a:t>
-            </a:r>
-            <a:endParaRPr lang="en-US" sz="680" dirty="0"/>
-          </a:p>
-        </p:txBody>
-      </p:sp>
-      <p:sp>
-        <p:nvSpPr>
-          <p:cNvPr id="87" name="Text 77"/>
-          <p:cNvSpPr txBox="1"/>
-          <p:nvPr/>
-        </p:nvSpPr>
-        <p:spPr>
-          <a:xfrm>
-            <a:off x="7580376" y="3182112"/>
-            <a:ext cx="1207008" cy="274320"/>
-          </a:xfrm>
-          <a:prstGeom prst="rect">
-            <a:avLst/>
-          </a:prstGeom>
-          <a:noFill/>
-          <a:ln/>
-        </p:spPr>
-        <p:txBody>
-          <a:bodyPr wrap="square" lIns="0" tIns="0" rIns="0" bIns="0" rtlCol="0" anchor="t"/>
-          <a:lstStyle/>
-          <a:p>
-            <a:pPr indent="0" marL="0">
-              <a:buNone/>
-            </a:pPr>
-            <a:r>
-              <a:rPr lang="en-US" sz="640" dirty="0">
-                <a:solidFill>
-                  <a:srgbClr val="1F2937"/>
-                </a:solidFill>
-                <a:latin typeface="Calibri" pitchFamily="34" charset="0"/>
-                <a:ea typeface="Calibri" pitchFamily="34" charset="-122"/>
-                <a:cs typeface="Calibri" pitchFamily="34" charset="-120"/>
-              </a:rPr>
-              <a:t>SMS with Case ID + nearest CSC; officer approves in the AJAY app; calls at 1, 3 and 6 months.</a:t>
-            </a:r>
-            <a:endParaRPr lang="en-US" sz="640" dirty="0"/>
-          </a:p>
-        </p:txBody>
-      </p:sp>
-      <p:sp>
-        <p:nvSpPr>
-          <p:cNvPr id="88" name="Text 78"/>
-          <p:cNvSpPr txBox="1"/>
-          <p:nvPr/>
-        </p:nvSpPr>
-        <p:spPr>
-          <a:xfrm>
-            <a:off x="274320" y="3529584"/>
-            <a:ext cx="6400800" cy="182880"/>
-          </a:xfrm>
-          <a:prstGeom prst="rect">
-            <a:avLst/>
-          </a:prstGeom>
-          <a:noFill/>
-          <a:ln/>
-        </p:spPr>
-        <p:txBody>
-          <a:bodyPr wrap="square" lIns="0" tIns="0" rIns="0" bIns="0" rtlCol="0" anchor="ctr"/>
-          <a:lstStyle/>
-          <a:p>
-            <a:pPr indent="0" marL="0">
-              <a:buNone/>
-            </a:pPr>
-            <a:r>
-              <a:rPr lang="en-US" sz="850" b="1" spc="120" kern="0" dirty="0">
-                <a:solidFill>
-                  <a:srgbClr val="7A5AF8"/>
-                </a:solidFill>
-                <a:latin typeface="Calibri" pitchFamily="34" charset="0"/>
-                <a:ea typeface="Calibri" pitchFamily="34" charset="-122"/>
-                <a:cs typeface="Calibri" pitchFamily="34" charset="-120"/>
-              </a:rPr>
-              <a:t>WHAT MAKES IT DIFFERENT  </a:t>
-            </a:r>
-            <a:r>
-              <a:rPr lang="en-US" sz="750" i="1" dirty="0">
-                <a:solidFill>
-                  <a:srgbClr val="6B7280"/>
-                </a:solidFill>
-                <a:latin typeface="Calibri" pitchFamily="34" charset="0"/>
-                <a:ea typeface="Calibri" pitchFamily="34" charset="-122"/>
-                <a:cs typeface="Calibri" pitchFamily="34" charset="-120"/>
-              </a:rPr>
-              <a:t>six things a paper form can never do</a:t>
-            </a:r>
-            <a:endParaRPr lang="en-US" sz="850" dirty="0"/>
-          </a:p>
-        </p:txBody>
-      </p:sp>
-      <p:sp>
-        <p:nvSpPr>
-          <p:cNvPr id="89" name="Shape 79"/>
-          <p:cNvSpPr/>
-          <p:nvPr/>
-        </p:nvSpPr>
-        <p:spPr>
-          <a:xfrm>
-            <a:off x="274320" y="3730752"/>
-            <a:ext cx="1371600" cy="914400"/>
+            <a:off x="274320" y="3822192"/>
+            <a:ext cx="1660550" cy="877824"/>
           </a:xfrm>
           <a:prstGeom prst="roundRect">
             <a:avLst>
-              <a:gd name="adj" fmla="val 8000"/>
+              <a:gd name="adj" fmla="val 8333"/>
             </a:avLst>
           </a:prstGeom>
           <a:solidFill>
@@ -4696,51 +4046,24 @@
           </a:ln>
         </p:spPr>
       </p:sp>
-      <p:sp>
-        <p:nvSpPr>
-          <p:cNvPr id="90" name="Shape 80"/>
-          <p:cNvSpPr/>
-          <p:nvPr/>
-        </p:nvSpPr>
-        <p:spPr>
-          <a:xfrm>
-            <a:off x="356616" y="3813048"/>
-            <a:ext cx="274320" cy="274320"/>
-          </a:xfrm>
-          <a:prstGeom prst="roundRect">
-            <a:avLst>
-              <a:gd name="adj" fmla="val 22000"/>
-            </a:avLst>
-          </a:prstGeom>
-          <a:solidFill>
-            <a:srgbClr val="13919B"/>
-          </a:solidFill>
-          <a:ln w="12700">
-            <a:solidFill>
-              <a:srgbClr val="13919B"/>
-            </a:solidFill>
-            <a:prstDash val="solid"/>
-          </a:ln>
-        </p:spPr>
-      </p:sp>
       <p:pic>
         <p:nvPicPr>
-          <p:cNvPr id="91" name="Image 8" descr="preencoded.png">    </p:cNvPr>
+          <p:cNvPr id="62" name="Image 6" descr="preencoded.png">    </p:cNvPr>
           <p:cNvPicPr>
             <a:picLocks noChangeAspect="1"/>
           </p:cNvPicPr>
           <p:nvPr/>
         </p:nvPicPr>
         <p:blipFill>
-          <a:blip r:embed="rId9"/>
+          <a:blip r:embed="rId7"/>
           <a:stretch>
             <a:fillRect/>
           </a:stretch>
         </p:blipFill>
         <p:spPr>
           <a:xfrm>
-            <a:off x="397764" y="3854196"/>
-            <a:ext cx="192024" cy="192024"/>
+            <a:off x="365760" y="3895344"/>
+            <a:ext cx="256032" cy="256032"/>
           </a:xfrm>
           <a:prstGeom prst="rect">
             <a:avLst/>
@@ -4749,14 +4072,14 @@
       </p:pic>
       <p:sp>
         <p:nvSpPr>
-          <p:cNvPr id="92" name="Text 81"/>
-          <p:cNvSpPr txBox="1"/>
-          <p:nvPr/>
-        </p:nvSpPr>
-        <p:spPr>
-          <a:xfrm>
-            <a:off x="694944" y="3803904"/>
-            <a:ext cx="896112" cy="292608"/>
+          <p:cNvPr id="63" name="Text 54"/>
+          <p:cNvSpPr txBox="1"/>
+          <p:nvPr/>
+        </p:nvSpPr>
+        <p:spPr>
+          <a:xfrm>
+            <a:off x="694944" y="3867912"/>
+            <a:ext cx="1148486" cy="201168"/>
           </a:xfrm>
           <a:prstGeom prst="rect">
             <a:avLst/>
@@ -4772,7 +4095,7 @@
               <a:buNone/>
             </a:pPr>
             <a:r>
-              <a:rPr lang="en-US" sz="780" b="1" dirty="0">
+              <a:rPr lang="en-US" sz="840" b="1" dirty="0">
                 <a:solidFill>
                   <a:srgbClr val="13919B"/>
                 </a:solidFill>
@@ -4782,20 +4105,20 @@
               </a:rPr>
               <a:t>Smart questions</a:t>
             </a:r>
-            <a:endParaRPr lang="en-US" sz="780" dirty="0"/>
-          </a:p>
-        </p:txBody>
-      </p:sp>
-      <p:sp>
-        <p:nvSpPr>
-          <p:cNvPr id="93" name="Text 82"/>
-          <p:cNvSpPr txBox="1"/>
-          <p:nvPr/>
-        </p:nvSpPr>
-        <p:spPr>
-          <a:xfrm>
-            <a:off x="356616" y="4142232"/>
-            <a:ext cx="1207008" cy="146304"/>
+            <a:endParaRPr lang="en-US" sz="840" dirty="0"/>
+          </a:p>
+        </p:txBody>
+      </p:sp>
+      <p:sp>
+        <p:nvSpPr>
+          <p:cNvPr id="64" name="Text 55"/>
+          <p:cNvSpPr txBox="1"/>
+          <p:nvPr/>
+        </p:nvSpPr>
+        <p:spPr>
+          <a:xfrm>
+            <a:off x="694944" y="4059936"/>
+            <a:ext cx="1148486" cy="137160"/>
           </a:xfrm>
           <a:prstGeom prst="rect">
             <a:avLst/>
@@ -4811,7 +4134,7 @@
               <a:buNone/>
             </a:pPr>
             <a:r>
-              <a:rPr lang="en-US" sz="660" b="1" dirty="0">
+              <a:rPr lang="en-US" sz="680" b="1" dirty="0">
                 <a:solidFill>
                   <a:srgbClr val="5B6B7F"/>
                 </a:solidFill>
@@ -4821,20 +4144,20 @@
               </a:rPr>
               <a:t>each depends on the last answer</a:t>
             </a:r>
-            <a:endParaRPr lang="en-US" sz="660" dirty="0"/>
-          </a:p>
-        </p:txBody>
-      </p:sp>
-      <p:sp>
-        <p:nvSpPr>
-          <p:cNvPr id="94" name="Text 83"/>
-          <p:cNvSpPr txBox="1"/>
-          <p:nvPr/>
-        </p:nvSpPr>
-        <p:spPr>
-          <a:xfrm>
-            <a:off x="356616" y="4306824"/>
-            <a:ext cx="1207008" cy="329184"/>
+            <a:endParaRPr lang="en-US" sz="680" dirty="0"/>
+          </a:p>
+        </p:txBody>
+      </p:sp>
+      <p:sp>
+        <p:nvSpPr>
+          <p:cNvPr id="65" name="Text 56"/>
+          <p:cNvSpPr txBox="1"/>
+          <p:nvPr/>
+        </p:nvSpPr>
+        <p:spPr>
+          <a:xfrm>
+            <a:off x="365760" y="4242816"/>
+            <a:ext cx="1477670" cy="384048"/>
           </a:xfrm>
           <a:prstGeom prst="rect">
             <a:avLst/>
@@ -4858,7 +4181,29 @@
                 <a:ea typeface="Calibri" pitchFamily="34" charset="-122"/>
                 <a:cs typeface="Calibri" pitchFamily="34" charset="-120"/>
               </a:rPr>
-              <a:t>Bike mechanic → engine, tyres, oil — not a generic form.</a:t>
+              <a:t>Bike mechanic → engine, tyres, oil — </a:t>
+            </a:r>
+            <a:r>
+              <a:rPr lang="en-US" sz="640" b="1" dirty="0">
+                <a:solidFill>
+                  <a:srgbClr val="13919B"/>
+                </a:solidFill>
+                <a:latin typeface="Calibri" pitchFamily="34" charset="0"/>
+                <a:ea typeface="Calibri" pitchFamily="34" charset="-122"/>
+                <a:cs typeface="Calibri" pitchFamily="34" charset="-120"/>
+              </a:rPr>
+              <a:t>not a generic form</a:t>
+            </a:r>
+            <a:r>
+              <a:rPr lang="en-US" sz="640" dirty="0">
+                <a:solidFill>
+                  <a:srgbClr val="1F2937"/>
+                </a:solidFill>
+                <a:latin typeface="Calibri" pitchFamily="34" charset="0"/>
+                <a:ea typeface="Calibri" pitchFamily="34" charset="-122"/>
+                <a:cs typeface="Calibri" pitchFamily="34" charset="-120"/>
+              </a:rPr>
+              <a:t>.</a:t>
             </a:r>
             <a:endParaRPr lang="en-US" sz="640" dirty="0"/>
           </a:p>
@@ -4866,18 +4211,18 @@
       </p:sp>
       <p:sp>
         <p:nvSpPr>
-          <p:cNvPr id="95" name="Shape 84"/>
+          <p:cNvPr id="66" name="Shape 57"/>
           <p:cNvSpPr/>
           <p:nvPr/>
         </p:nvSpPr>
         <p:spPr>
           <a:xfrm>
-            <a:off x="1719072" y="3730752"/>
-            <a:ext cx="1371600" cy="914400"/>
+            <a:off x="2008022" y="3822192"/>
+            <a:ext cx="1660550" cy="877824"/>
           </a:xfrm>
           <a:prstGeom prst="roundRect">
             <a:avLst>
-              <a:gd name="adj" fmla="val 8000"/>
+              <a:gd name="adj" fmla="val 8333"/>
             </a:avLst>
           </a:prstGeom>
           <a:solidFill>
@@ -4891,51 +4236,24 @@
           </a:ln>
         </p:spPr>
       </p:sp>
-      <p:sp>
-        <p:nvSpPr>
-          <p:cNvPr id="96" name="Shape 85"/>
-          <p:cNvSpPr/>
-          <p:nvPr/>
-        </p:nvSpPr>
-        <p:spPr>
-          <a:xfrm>
-            <a:off x="1801368" y="3813048"/>
-            <a:ext cx="274320" cy="274320"/>
-          </a:xfrm>
-          <a:prstGeom prst="roundRect">
-            <a:avLst>
-              <a:gd name="adj" fmla="val 22000"/>
-            </a:avLst>
-          </a:prstGeom>
-          <a:solidFill>
-            <a:srgbClr val="D4930D"/>
-          </a:solidFill>
-          <a:ln w="12700">
-            <a:solidFill>
-              <a:srgbClr val="D4930D"/>
-            </a:solidFill>
-            <a:prstDash val="solid"/>
-          </a:ln>
-        </p:spPr>
-      </p:sp>
       <p:pic>
         <p:nvPicPr>
-          <p:cNvPr id="97" name="Image 9" descr="preencoded.png">    </p:cNvPr>
+          <p:cNvPr id="67" name="Image 7" descr="preencoded.png">    </p:cNvPr>
           <p:cNvPicPr>
             <a:picLocks noChangeAspect="1"/>
           </p:cNvPicPr>
           <p:nvPr/>
         </p:nvPicPr>
         <p:blipFill>
-          <a:blip r:embed="rId10"/>
+          <a:blip r:embed="rId8"/>
           <a:stretch>
             <a:fillRect/>
           </a:stretch>
         </p:blipFill>
         <p:spPr>
           <a:xfrm>
-            <a:off x="1842516" y="3854196"/>
-            <a:ext cx="192024" cy="192024"/>
+            <a:off x="2099462" y="3895344"/>
+            <a:ext cx="256032" cy="256032"/>
           </a:xfrm>
           <a:prstGeom prst="rect">
             <a:avLst/>
@@ -4944,14 +4262,14 @@
       </p:pic>
       <p:sp>
         <p:nvSpPr>
-          <p:cNvPr id="98" name="Text 86"/>
-          <p:cNvSpPr txBox="1"/>
-          <p:nvPr/>
-        </p:nvSpPr>
-        <p:spPr>
-          <a:xfrm>
-            <a:off x="2139696" y="3803904"/>
-            <a:ext cx="896112" cy="292608"/>
+          <p:cNvPr id="68" name="Text 58"/>
+          <p:cNvSpPr txBox="1"/>
+          <p:nvPr/>
+        </p:nvSpPr>
+        <p:spPr>
+          <a:xfrm>
+            <a:off x="2428646" y="3867912"/>
+            <a:ext cx="1148486" cy="201168"/>
           </a:xfrm>
           <a:prstGeom prst="rect">
             <a:avLst/>
@@ -4967,7 +4285,7 @@
               <a:buNone/>
             </a:pPr>
             <a:r>
-              <a:rPr lang="en-US" sz="780" b="1" dirty="0">
+              <a:rPr lang="en-US" sz="840" b="1" dirty="0">
                 <a:solidFill>
                   <a:srgbClr val="D4930D"/>
                 </a:solidFill>
@@ -4977,20 +4295,20 @@
               </a:rPr>
               <a:t>Profile writes itself</a:t>
             </a:r>
-            <a:endParaRPr lang="en-US" sz="780" dirty="0"/>
-          </a:p>
-        </p:txBody>
-      </p:sp>
-      <p:sp>
-        <p:nvSpPr>
-          <p:cNvPr id="99" name="Text 87"/>
-          <p:cNvSpPr txBox="1"/>
-          <p:nvPr/>
-        </p:nvSpPr>
-        <p:spPr>
-          <a:xfrm>
-            <a:off x="1801368" y="4142232"/>
-            <a:ext cx="1207008" cy="146304"/>
+            <a:endParaRPr lang="en-US" sz="840" dirty="0"/>
+          </a:p>
+        </p:txBody>
+      </p:sp>
+      <p:sp>
+        <p:nvSpPr>
+          <p:cNvPr id="69" name="Text 59"/>
+          <p:cNvSpPr txBox="1"/>
+          <p:nvPr/>
+        </p:nvSpPr>
+        <p:spPr>
+          <a:xfrm>
+            <a:off x="2428646" y="4059936"/>
+            <a:ext cx="1148486" cy="137160"/>
           </a:xfrm>
           <a:prstGeom prst="rect">
             <a:avLst/>
@@ -5006,7 +4324,7 @@
               <a:buNone/>
             </a:pPr>
             <a:r>
-              <a:rPr lang="en-US" sz="660" b="1" dirty="0">
+              <a:rPr lang="en-US" sz="680" b="1" dirty="0">
                 <a:solidFill>
                   <a:srgbClr val="5B6B7F"/>
                 </a:solidFill>
@@ -5016,20 +4334,20 @@
               </a:rPr>
               <a:t>officers only review and approve</a:t>
             </a:r>
-            <a:endParaRPr lang="en-US" sz="660" dirty="0"/>
-          </a:p>
-        </p:txBody>
-      </p:sp>
-      <p:sp>
-        <p:nvSpPr>
-          <p:cNvPr id="100" name="Text 88"/>
-          <p:cNvSpPr txBox="1"/>
-          <p:nvPr/>
-        </p:nvSpPr>
-        <p:spPr>
-          <a:xfrm>
-            <a:off x="1801368" y="4306824"/>
-            <a:ext cx="1207008" cy="329184"/>
+            <a:endParaRPr lang="en-US" sz="680" dirty="0"/>
+          </a:p>
+        </p:txBody>
+      </p:sp>
+      <p:sp>
+        <p:nvSpPr>
+          <p:cNvPr id="70" name="Text 60"/>
+          <p:cNvSpPr txBox="1"/>
+          <p:nvPr/>
+        </p:nvSpPr>
+        <p:spPr>
+          <a:xfrm>
+            <a:off x="2099462" y="4242816"/>
+            <a:ext cx="1477670" cy="384048"/>
           </a:xfrm>
           <a:prstGeom prst="rect">
             <a:avLst/>
@@ -5053,7 +4371,29 @@
                 <a:ea typeface="Calibri" pitchFamily="34" charset="-122"/>
                 <a:cs typeface="Calibri" pitchFamily="34" charset="-120"/>
               </a:rPr>
-              <a:t>The AI fills the full profile table in the proper format.</a:t>
+              <a:t>The AI fills the </a:t>
+            </a:r>
+            <a:r>
+              <a:rPr lang="en-US" sz="640" b="1" dirty="0">
+                <a:solidFill>
+                  <a:srgbClr val="D4930D"/>
+                </a:solidFill>
+                <a:latin typeface="Calibri" pitchFamily="34" charset="0"/>
+                <a:ea typeface="Calibri" pitchFamily="34" charset="-122"/>
+                <a:cs typeface="Calibri" pitchFamily="34" charset="-120"/>
+              </a:rPr>
+              <a:t>full profile table</a:t>
+            </a:r>
+            <a:r>
+              <a:rPr lang="en-US" sz="640" dirty="0">
+                <a:solidFill>
+                  <a:srgbClr val="1F2937"/>
+                </a:solidFill>
+                <a:latin typeface="Calibri" pitchFamily="34" charset="0"/>
+                <a:ea typeface="Calibri" pitchFamily="34" charset="-122"/>
+                <a:cs typeface="Calibri" pitchFamily="34" charset="-120"/>
+              </a:rPr>
+              <a:t> in the proper format.</a:t>
             </a:r>
             <a:endParaRPr lang="en-US" sz="640" dirty="0"/>
           </a:p>
@@ -5061,18 +4401,18 @@
       </p:sp>
       <p:sp>
         <p:nvSpPr>
-          <p:cNvPr id="101" name="Shape 89"/>
+          <p:cNvPr id="71" name="Shape 61"/>
           <p:cNvSpPr/>
           <p:nvPr/>
         </p:nvSpPr>
         <p:spPr>
           <a:xfrm>
-            <a:off x="3163824" y="3730752"/>
-            <a:ext cx="1371600" cy="914400"/>
+            <a:off x="3741725" y="3822192"/>
+            <a:ext cx="1660550" cy="877824"/>
           </a:xfrm>
           <a:prstGeom prst="roundRect">
             <a:avLst>
-              <a:gd name="adj" fmla="val 8000"/>
+              <a:gd name="adj" fmla="val 8333"/>
             </a:avLst>
           </a:prstGeom>
           <a:solidFill>
@@ -5086,51 +4426,24 @@
           </a:ln>
         </p:spPr>
       </p:sp>
-      <p:sp>
-        <p:nvSpPr>
-          <p:cNvPr id="102" name="Shape 90"/>
-          <p:cNvSpPr/>
-          <p:nvPr/>
-        </p:nvSpPr>
-        <p:spPr>
-          <a:xfrm>
-            <a:off x="3246120" y="3813048"/>
-            <a:ext cx="274320" cy="274320"/>
-          </a:xfrm>
-          <a:prstGeom prst="roundRect">
-            <a:avLst>
-              <a:gd name="adj" fmla="val 22000"/>
-            </a:avLst>
-          </a:prstGeom>
-          <a:solidFill>
-            <a:srgbClr val="1F9D63"/>
-          </a:solidFill>
-          <a:ln w="12700">
-            <a:solidFill>
-              <a:srgbClr val="1F9D63"/>
-            </a:solidFill>
-            <a:prstDash val="solid"/>
-          </a:ln>
-        </p:spPr>
-      </p:sp>
       <p:pic>
         <p:nvPicPr>
-          <p:cNvPr id="103" name="Image 10" descr="preencoded.png">    </p:cNvPr>
+          <p:cNvPr id="72" name="Image 8" descr="preencoded.png">    </p:cNvPr>
           <p:cNvPicPr>
             <a:picLocks noChangeAspect="1"/>
           </p:cNvPicPr>
           <p:nvPr/>
         </p:nvPicPr>
         <p:blipFill>
-          <a:blip r:embed="rId11"/>
+          <a:blip r:embed="rId9"/>
           <a:stretch>
             <a:fillRect/>
           </a:stretch>
         </p:blipFill>
         <p:spPr>
           <a:xfrm>
-            <a:off x="3287268" y="3854196"/>
-            <a:ext cx="192024" cy="192024"/>
+            <a:off x="3833165" y="3895344"/>
+            <a:ext cx="256032" cy="256032"/>
           </a:xfrm>
           <a:prstGeom prst="rect">
             <a:avLst/>
@@ -5139,14 +4452,14 @@
       </p:pic>
       <p:sp>
         <p:nvSpPr>
-          <p:cNvPr id="104" name="Text 91"/>
-          <p:cNvSpPr txBox="1"/>
-          <p:nvPr/>
-        </p:nvSpPr>
-        <p:spPr>
-          <a:xfrm>
-            <a:off x="3584448" y="3803904"/>
-            <a:ext cx="896112" cy="292608"/>
+          <p:cNvPr id="73" name="Text 62"/>
+          <p:cNvSpPr txBox="1"/>
+          <p:nvPr/>
+        </p:nvSpPr>
+        <p:spPr>
+          <a:xfrm>
+            <a:off x="4162349" y="3867912"/>
+            <a:ext cx="1148486" cy="201168"/>
           </a:xfrm>
           <a:prstGeom prst="rect">
             <a:avLst/>
@@ -5162,7 +4475,7 @@
               <a:buNone/>
             </a:pPr>
             <a:r>
-              <a:rPr lang="en-US" sz="780" b="1" dirty="0">
+              <a:rPr lang="en-US" sz="840" b="1" dirty="0">
                 <a:solidFill>
                   <a:srgbClr val="1F9D63"/>
                 </a:solidFill>
@@ -5170,22 +4483,22 @@
                 <a:ea typeface="Calibri" pitchFamily="34" charset="-122"/>
                 <a:cs typeface="Calibri" pitchFamily="34" charset="-120"/>
               </a:rPr>
-              <a:t>Only verified govt data</a:t>
-            </a:r>
-            <a:endParaRPr lang="en-US" sz="780" dirty="0"/>
-          </a:p>
-        </p:txBody>
-      </p:sp>
-      <p:sp>
-        <p:nvSpPr>
-          <p:cNvPr id="105" name="Text 92"/>
-          <p:cNvSpPr txBox="1"/>
-          <p:nvPr/>
-        </p:nvSpPr>
-        <p:spPr>
-          <a:xfrm>
-            <a:off x="3246120" y="4142232"/>
-            <a:ext cx="1207008" cy="146304"/>
+              <a:t>Verified facts only</a:t>
+            </a:r>
+            <a:endParaRPr lang="en-US" sz="840" dirty="0"/>
+          </a:p>
+        </p:txBody>
+      </p:sp>
+      <p:sp>
+        <p:nvSpPr>
+          <p:cNvPr id="74" name="Text 63"/>
+          <p:cNvSpPr txBox="1"/>
+          <p:nvPr/>
+        </p:nvSpPr>
+        <p:spPr>
+          <a:xfrm>
+            <a:off x="4162349" y="4059936"/>
+            <a:ext cx="1148486" cy="137160"/>
           </a:xfrm>
           <a:prstGeom prst="rect">
             <a:avLst/>
@@ -5201,7 +4514,7 @@
               <a:buNone/>
             </a:pPr>
             <a:r>
-              <a:rPr lang="en-US" sz="660" b="1" dirty="0">
+              <a:rPr lang="en-US" sz="680" b="1" dirty="0">
                 <a:solidFill>
                   <a:srgbClr val="5B6B7F"/>
                 </a:solidFill>
@@ -5209,22 +4522,22 @@
                 <a:ea typeface="Calibri" pitchFamily="34" charset="-122"/>
                 <a:cs typeface="Calibri" pitchFamily="34" charset="-120"/>
               </a:rPr>
-              <a:t>nothing invented, ever</a:t>
-            </a:r>
-            <a:endParaRPr lang="en-US" sz="660" dirty="0"/>
-          </a:p>
-        </p:txBody>
-      </p:sp>
-      <p:sp>
-        <p:nvSpPr>
-          <p:cNvPr id="106" name="Text 93"/>
-          <p:cNvSpPr txBox="1"/>
-          <p:nvPr/>
-        </p:nvSpPr>
-        <p:spPr>
-          <a:xfrm>
-            <a:off x="3246120" y="4306824"/>
-            <a:ext cx="1207008" cy="329184"/>
+              <a:t>govt data + SATYA double-check</a:t>
+            </a:r>
+            <a:endParaRPr lang="en-US" sz="680" dirty="0"/>
+          </a:p>
+        </p:txBody>
+      </p:sp>
+      <p:sp>
+        <p:nvSpPr>
+          <p:cNvPr id="75" name="Text 64"/>
+          <p:cNvSpPr txBox="1"/>
+          <p:nvPr/>
+        </p:nvSpPr>
+        <p:spPr>
+          <a:xfrm>
+            <a:off x="3833165" y="4242816"/>
+            <a:ext cx="1477670" cy="384048"/>
           </a:xfrm>
           <a:prstGeom prst="rect">
             <a:avLst/>
@@ -5248,7 +4561,29 @@
                 <a:ea typeface="Calibri" pitchFamily="34" charset="-122"/>
                 <a:cs typeface="Calibri" pitchFamily="34" charset="-120"/>
               </a:rPr>
-              <a:t>Rules, NQR courses, NCO codes, centres — loaded by us, never the internet.</a:t>
+              <a:t>Answers come only from loaded rules, NQR courses, NCO codes, centres; SATYA matches each fact to a DB row — </a:t>
+            </a:r>
+            <a:r>
+              <a:rPr lang="en-US" sz="640" b="1" dirty="0">
+                <a:solidFill>
+                  <a:srgbClr val="1F9D63"/>
+                </a:solidFill>
+                <a:latin typeface="Calibri" pitchFamily="34" charset="0"/>
+                <a:ea typeface="Calibri" pitchFamily="34" charset="-122"/>
+                <a:cs typeface="Calibri" pitchFamily="34" charset="-120"/>
+              </a:rPr>
+              <a:t>no match → not said</a:t>
+            </a:r>
+            <a:r>
+              <a:rPr lang="en-US" sz="640" dirty="0">
+                <a:solidFill>
+                  <a:srgbClr val="1F2937"/>
+                </a:solidFill>
+                <a:latin typeface="Calibri" pitchFamily="34" charset="0"/>
+                <a:ea typeface="Calibri" pitchFamily="34" charset="-122"/>
+                <a:cs typeface="Calibri" pitchFamily="34" charset="-120"/>
+              </a:rPr>
+              <a:t>.</a:t>
             </a:r>
             <a:endParaRPr lang="en-US" sz="640" dirty="0"/>
           </a:p>
@@ -5256,18 +4591,18 @@
       </p:sp>
       <p:sp>
         <p:nvSpPr>
-          <p:cNvPr id="107" name="Shape 94"/>
+          <p:cNvPr id="76" name="Shape 65"/>
           <p:cNvSpPr/>
           <p:nvPr/>
         </p:nvSpPr>
         <p:spPr>
           <a:xfrm>
-            <a:off x="4608576" y="3730752"/>
-            <a:ext cx="1371600" cy="914400"/>
+            <a:off x="5475427" y="3822192"/>
+            <a:ext cx="1660550" cy="877824"/>
           </a:xfrm>
           <a:prstGeom prst="roundRect">
             <a:avLst>
-              <a:gd name="adj" fmla="val 8000"/>
+              <a:gd name="adj" fmla="val 8333"/>
             </a:avLst>
           </a:prstGeom>
           <a:solidFill>
@@ -5281,51 +4616,24 @@
           </a:ln>
         </p:spPr>
       </p:sp>
-      <p:sp>
-        <p:nvSpPr>
-          <p:cNvPr id="108" name="Shape 95"/>
-          <p:cNvSpPr/>
-          <p:nvPr/>
-        </p:nvSpPr>
-        <p:spPr>
-          <a:xfrm>
-            <a:off x="4690872" y="3813048"/>
-            <a:ext cx="274320" cy="274320"/>
-          </a:xfrm>
-          <a:prstGeom prst="roundRect">
-            <a:avLst>
-              <a:gd name="adj" fmla="val 22000"/>
-            </a:avLst>
-          </a:prstGeom>
-          <a:solidFill>
-            <a:srgbClr val="D64545"/>
-          </a:solidFill>
-          <a:ln w="12700">
-            <a:solidFill>
-              <a:srgbClr val="D64545"/>
-            </a:solidFill>
-            <a:prstDash val="solid"/>
-          </a:ln>
-        </p:spPr>
-      </p:sp>
       <p:pic>
         <p:nvPicPr>
-          <p:cNvPr id="109" name="Image 11" descr="preencoded.png">    </p:cNvPr>
+          <p:cNvPr id="77" name="Image 9" descr="preencoded.png">    </p:cNvPr>
           <p:cNvPicPr>
             <a:picLocks noChangeAspect="1"/>
           </p:cNvPicPr>
           <p:nvPr/>
         </p:nvPicPr>
         <p:blipFill>
-          <a:blip r:embed="rId12"/>
+          <a:blip r:embed="rId10"/>
           <a:stretch>
             <a:fillRect/>
           </a:stretch>
         </p:blipFill>
         <p:spPr>
           <a:xfrm>
-            <a:off x="4732020" y="3854196"/>
-            <a:ext cx="192024" cy="192024"/>
+            <a:off x="5566867" y="3895344"/>
+            <a:ext cx="256032" cy="256032"/>
           </a:xfrm>
           <a:prstGeom prst="rect">
             <a:avLst/>
@@ -5334,14 +4642,14 @@
       </p:pic>
       <p:sp>
         <p:nvSpPr>
-          <p:cNvPr id="110" name="Text 96"/>
-          <p:cNvSpPr txBox="1"/>
-          <p:nvPr/>
-        </p:nvSpPr>
-        <p:spPr>
-          <a:xfrm>
-            <a:off x="5029200" y="3803904"/>
-            <a:ext cx="896112" cy="292608"/>
+          <p:cNvPr id="78" name="Text 66"/>
+          <p:cNvSpPr txBox="1"/>
+          <p:nvPr/>
+        </p:nvSpPr>
+        <p:spPr>
+          <a:xfrm>
+            <a:off x="5896051" y="3867912"/>
+            <a:ext cx="1148486" cy="201168"/>
           </a:xfrm>
           <a:prstGeom prst="rect">
             <a:avLst/>
@@ -5357,30 +4665,30 @@
               <a:buNone/>
             </a:pPr>
             <a:r>
-              <a:rPr lang="en-US" sz="780" b="1" dirty="0">
-                <a:solidFill>
-                  <a:srgbClr val="D64545"/>
-                </a:solidFill>
-                <a:latin typeface="Calibri" pitchFamily="34" charset="0"/>
-                <a:ea typeface="Calibri" pitchFamily="34" charset="-122"/>
-                <a:cs typeface="Calibri" pitchFamily="34" charset="-120"/>
-              </a:rPr>
-              <a:t>SATYA fact-check</a:t>
-            </a:r>
-            <a:endParaRPr lang="en-US" sz="780" dirty="0"/>
-          </a:p>
-        </p:txBody>
-      </p:sp>
-      <p:sp>
-        <p:nvSpPr>
-          <p:cNvPr id="111" name="Text 97"/>
-          <p:cNvSpPr txBox="1"/>
-          <p:nvPr/>
-        </p:nvSpPr>
-        <p:spPr>
-          <a:xfrm>
-            <a:off x="4690872" y="4142232"/>
-            <a:ext cx="1207008" cy="146304"/>
+              <a:rPr lang="en-US" sz="840" b="1" dirty="0">
+                <a:solidFill>
+                  <a:srgbClr val="EF8A22"/>
+                </a:solidFill>
+                <a:latin typeface="Calibri" pitchFamily="34" charset="0"/>
+                <a:ea typeface="Calibri" pitchFamily="34" charset="-122"/>
+                <a:cs typeface="Calibri" pitchFamily="34" charset="-120"/>
+              </a:rPr>
+              <a:t>Cheapest AI first</a:t>
+            </a:r>
+            <a:endParaRPr lang="en-US" sz="840" dirty="0"/>
+          </a:p>
+        </p:txBody>
+      </p:sp>
+      <p:sp>
+        <p:nvSpPr>
+          <p:cNvPr id="79" name="Text 67"/>
+          <p:cNvSpPr txBox="1"/>
+          <p:nvPr/>
+        </p:nvSpPr>
+        <p:spPr>
+          <a:xfrm>
+            <a:off x="5896051" y="4059936"/>
+            <a:ext cx="1148486" cy="137160"/>
           </a:xfrm>
           <a:prstGeom prst="rect">
             <a:avLst/>
@@ -5396,7 +4704,7 @@
               <a:buNone/>
             </a:pPr>
             <a:r>
-              <a:rPr lang="en-US" sz="660" b="1" dirty="0">
+              <a:rPr lang="en-US" sz="680" b="1" dirty="0">
                 <a:solidFill>
                   <a:srgbClr val="5B6B7F"/>
                 </a:solidFill>
@@ -5404,22 +4712,22 @@
                 <a:ea typeface="Calibri" pitchFamily="34" charset="-122"/>
                 <a:cs typeface="Calibri" pitchFamily="34" charset="-120"/>
               </a:rPr>
-              <a:t>no match in the DB → not said</a:t>
-            </a:r>
-            <a:endParaRPr lang="en-US" sz="660" dirty="0"/>
-          </a:p>
-        </p:txBody>
-      </p:sp>
-      <p:sp>
-        <p:nvSpPr>
-          <p:cNvPr id="112" name="Text 98"/>
-          <p:cNvSpPr txBox="1"/>
-          <p:nvPr/>
-        </p:nvSpPr>
-        <p:spPr>
-          <a:xfrm>
-            <a:off x="4690872" y="4306824"/>
-            <a:ext cx="1207008" cy="329184"/>
+              <a:t>bigger model, then a human, only if needed</a:t>
+            </a:r>
+            <a:endParaRPr lang="en-US" sz="680" dirty="0"/>
+          </a:p>
+        </p:txBody>
+      </p:sp>
+      <p:sp>
+        <p:nvSpPr>
+          <p:cNvPr id="80" name="Text 68"/>
+          <p:cNvSpPr txBox="1"/>
+          <p:nvPr/>
+        </p:nvSpPr>
+        <p:spPr>
+          <a:xfrm>
+            <a:off x="5566867" y="4242816"/>
+            <a:ext cx="1477670" cy="384048"/>
           </a:xfrm>
           <a:prstGeom prst="rect">
             <a:avLst/>
@@ -5443,7 +4751,29 @@
                 <a:ea typeface="Calibri" pitchFamily="34" charset="-122"/>
                 <a:cs typeface="Calibri" pitchFamily="34" charset="-120"/>
               </a:rPr>
-              <a:t>Every fact is matched to a database row before it is spoken.</a:t>
+              <a:t>Common answers get </a:t>
+            </a:r>
+            <a:r>
+              <a:rPr lang="en-US" sz="640" b="1" dirty="0">
+                <a:solidFill>
+                  <a:srgbClr val="EF8A22"/>
+                </a:solidFill>
+                <a:latin typeface="Calibri" pitchFamily="34" charset="0"/>
+                <a:ea typeface="Calibri" pitchFamily="34" charset="-122"/>
+                <a:cs typeface="Calibri" pitchFamily="34" charset="-120"/>
+              </a:rPr>
+              <a:t>cached</a:t>
+            </a:r>
+            <a:r>
+              <a:rPr lang="en-US" sz="640" dirty="0">
+                <a:solidFill>
+                  <a:srgbClr val="1F2937"/>
+                </a:solidFill>
+                <a:latin typeface="Calibri" pitchFamily="34" charset="0"/>
+                <a:ea typeface="Calibri" pitchFamily="34" charset="-122"/>
+                <a:cs typeface="Calibri" pitchFamily="34" charset="-120"/>
+              </a:rPr>
+              <a:t> — cost falls over time.</a:t>
             </a:r>
             <a:endParaRPr lang="en-US" sz="640" dirty="0"/>
           </a:p>
@@ -5451,18 +4781,18 @@
       </p:sp>
       <p:sp>
         <p:nvSpPr>
-          <p:cNvPr id="113" name="Shape 99"/>
+          <p:cNvPr id="81" name="Shape 69"/>
           <p:cNvSpPr/>
           <p:nvPr/>
         </p:nvSpPr>
         <p:spPr>
           <a:xfrm>
-            <a:off x="6053328" y="3730752"/>
-            <a:ext cx="1371600" cy="914400"/>
+            <a:off x="7209130" y="3822192"/>
+            <a:ext cx="1660550" cy="877824"/>
           </a:xfrm>
           <a:prstGeom prst="roundRect">
             <a:avLst>
-              <a:gd name="adj" fmla="val 8000"/>
+              <a:gd name="adj" fmla="val 8333"/>
             </a:avLst>
           </a:prstGeom>
           <a:solidFill>
@@ -5476,51 +4806,24 @@
           </a:ln>
         </p:spPr>
       </p:sp>
-      <p:sp>
-        <p:nvSpPr>
-          <p:cNvPr id="114" name="Shape 100"/>
-          <p:cNvSpPr/>
-          <p:nvPr/>
-        </p:nvSpPr>
-        <p:spPr>
-          <a:xfrm>
-            <a:off x="6135624" y="3813048"/>
-            <a:ext cx="274320" cy="274320"/>
-          </a:xfrm>
-          <a:prstGeom prst="roundRect">
-            <a:avLst>
-              <a:gd name="adj" fmla="val 22000"/>
-            </a:avLst>
-          </a:prstGeom>
-          <a:solidFill>
-            <a:srgbClr val="EF8A22"/>
-          </a:solidFill>
-          <a:ln w="12700">
-            <a:solidFill>
-              <a:srgbClr val="EF8A22"/>
-            </a:solidFill>
-            <a:prstDash val="solid"/>
-          </a:ln>
-        </p:spPr>
-      </p:sp>
       <p:pic>
         <p:nvPicPr>
-          <p:cNvPr id="115" name="Image 12" descr="preencoded.png">    </p:cNvPr>
+          <p:cNvPr id="82" name="Image 10" descr="preencoded.png">    </p:cNvPr>
           <p:cNvPicPr>
             <a:picLocks noChangeAspect="1"/>
           </p:cNvPicPr>
           <p:nvPr/>
         </p:nvPicPr>
         <p:blipFill>
-          <a:blip r:embed="rId13"/>
+          <a:blip r:embed="rId11"/>
           <a:stretch>
             <a:fillRect/>
           </a:stretch>
         </p:blipFill>
         <p:spPr>
           <a:xfrm>
-            <a:off x="6176772" y="3854196"/>
-            <a:ext cx="192024" cy="192024"/>
+            <a:off x="7300570" y="3895344"/>
+            <a:ext cx="256032" cy="256032"/>
           </a:xfrm>
           <a:prstGeom prst="rect">
             <a:avLst/>
@@ -5529,14 +4832,14 @@
       </p:pic>
       <p:sp>
         <p:nvSpPr>
-          <p:cNvPr id="116" name="Text 101"/>
-          <p:cNvSpPr txBox="1"/>
-          <p:nvPr/>
-        </p:nvSpPr>
-        <p:spPr>
-          <a:xfrm>
-            <a:off x="6473952" y="3803904"/>
-            <a:ext cx="896112" cy="292608"/>
+          <p:cNvPr id="83" name="Text 70"/>
+          <p:cNvSpPr txBox="1"/>
+          <p:nvPr/>
+        </p:nvSpPr>
+        <p:spPr>
+          <a:xfrm>
+            <a:off x="7629754" y="3867912"/>
+            <a:ext cx="1148486" cy="201168"/>
           </a:xfrm>
           <a:prstGeom prst="rect">
             <a:avLst/>
@@ -5552,30 +4855,30 @@
               <a:buNone/>
             </a:pPr>
             <a:r>
-              <a:rPr lang="en-US" sz="780" b="1" dirty="0">
-                <a:solidFill>
-                  <a:srgbClr val="EF8A22"/>
-                </a:solidFill>
-                <a:latin typeface="Calibri" pitchFamily="34" charset="0"/>
-                <a:ea typeface="Calibri" pitchFamily="34" charset="-122"/>
-                <a:cs typeface="Calibri" pitchFamily="34" charset="-120"/>
-              </a:rPr>
-              <a:t>Cheapest AI first</a:t>
-            </a:r>
-            <a:endParaRPr lang="en-US" sz="780" dirty="0"/>
-          </a:p>
-        </p:txBody>
-      </p:sp>
-      <p:sp>
-        <p:nvSpPr>
-          <p:cNvPr id="117" name="Text 102"/>
-          <p:cNvSpPr txBox="1"/>
-          <p:nvPr/>
-        </p:nvSpPr>
-        <p:spPr>
-          <a:xfrm>
-            <a:off x="6135624" y="4142232"/>
-            <a:ext cx="1207008" cy="146304"/>
+              <a:rPr lang="en-US" sz="840" b="1" dirty="0">
+                <a:solidFill>
+                  <a:srgbClr val="2E6FD6"/>
+                </a:solidFill>
+                <a:latin typeface="Calibri" pitchFamily="34" charset="0"/>
+                <a:ea typeface="Calibri" pitchFamily="34" charset="-122"/>
+                <a:cs typeface="Calibri" pitchFamily="34" charset="-120"/>
+              </a:rPr>
+              <a:t>Web portal too</a:t>
+            </a:r>
+            <a:endParaRPr lang="en-US" sz="840" dirty="0"/>
+          </a:p>
+        </p:txBody>
+      </p:sp>
+      <p:sp>
+        <p:nvSpPr>
+          <p:cNvPr id="84" name="Text 71"/>
+          <p:cNvSpPr txBox="1"/>
+          <p:nvPr/>
+        </p:nvSpPr>
+        <p:spPr>
+          <a:xfrm>
+            <a:off x="7629754" y="4059936"/>
+            <a:ext cx="1148486" cy="137160"/>
           </a:xfrm>
           <a:prstGeom prst="rect">
             <a:avLst/>
@@ -5591,7 +4894,7 @@
               <a:buNone/>
             </a:pPr>
             <a:r>
-              <a:rPr lang="en-US" sz="660" b="1" dirty="0">
+              <a:rPr lang="en-US" sz="680" b="1" dirty="0">
                 <a:solidFill>
                   <a:srgbClr val="5B6B7F"/>
                 </a:solidFill>
@@ -5599,22 +4902,22 @@
                 <a:ea typeface="Calibri" pitchFamily="34" charset="-122"/>
                 <a:cs typeface="Calibri" pitchFamily="34" charset="-120"/>
               </a:rPr>
-              <a:t>bigger model, then a human, only if needed</a:t>
-            </a:r>
-            <a:endParaRPr lang="en-US" sz="660" dirty="0"/>
-          </a:p>
-        </p:txBody>
-      </p:sp>
-      <p:sp>
-        <p:nvSpPr>
-          <p:cNvPr id="118" name="Text 103"/>
-          <p:cNvSpPr txBox="1"/>
-          <p:nvPr/>
-        </p:nvSpPr>
-        <p:spPr>
-          <a:xfrm>
-            <a:off x="6135624" y="4306824"/>
-            <a:ext cx="1207008" cy="329184"/>
+              <a:t>same case, no call needed</a:t>
+            </a:r>
+            <a:endParaRPr lang="en-US" sz="680" dirty="0"/>
+          </a:p>
+        </p:txBody>
+      </p:sp>
+      <p:sp>
+        <p:nvSpPr>
+          <p:cNvPr id="85" name="Text 72"/>
+          <p:cNvSpPr txBox="1"/>
+          <p:nvPr/>
+        </p:nvSpPr>
+        <p:spPr>
+          <a:xfrm>
+            <a:off x="7300570" y="4242816"/>
+            <a:ext cx="1477670" cy="384048"/>
           </a:xfrm>
           <a:prstGeom prst="rect">
             <a:avLst/>
@@ -5630,6 +4933,17 @@
               <a:buNone/>
             </a:pPr>
             <a:r>
+              <a:rPr lang="en-US" sz="640" b="1" dirty="0">
+                <a:solidFill>
+                  <a:srgbClr val="2E6FD6"/>
+                </a:solidFill>
+                <a:latin typeface="Calibri" pitchFamily="34" charset="0"/>
+                <a:ea typeface="Calibri" pitchFamily="34" charset="-122"/>
+                <a:cs typeface="Calibri" pitchFamily="34" charset="-120"/>
+              </a:rPr>
+              <a:t>Mobile + OTP</a:t>
+            </a:r>
+            <a:r>
               <a:rPr lang="en-US" sz="640" dirty="0">
                 <a:solidFill>
                   <a:srgbClr val="1F2937"/>
@@ -5638,7 +4952,7 @@
                 <a:ea typeface="Calibri" pitchFamily="34" charset="-122"/>
                 <a:cs typeface="Calibri" pitchFamily="34" charset="-120"/>
               </a:rPr>
-              <a:t>Common answers get cached — cost falls over time.</a:t>
+              <a:t> login for the family, CSC or officer to view or edit.</a:t>
             </a:r>
             <a:endParaRPr lang="en-US" sz="640" dirty="0"/>
           </a:p>
@@ -5646,225 +4960,30 @@
       </p:sp>
       <p:sp>
         <p:nvSpPr>
-          <p:cNvPr id="119" name="Shape 104"/>
-          <p:cNvSpPr/>
-          <p:nvPr/>
-        </p:nvSpPr>
-        <p:spPr>
-          <a:xfrm>
-            <a:off x="7498080" y="3730752"/>
-            <a:ext cx="1371600" cy="914400"/>
-          </a:xfrm>
-          <a:prstGeom prst="roundRect">
-            <a:avLst>
-              <a:gd name="adj" fmla="val 8000"/>
-            </a:avLst>
-          </a:prstGeom>
-          <a:solidFill>
-            <a:srgbClr val="FFFFFF"/>
-          </a:solidFill>
-          <a:ln w="9525">
-            <a:solidFill>
-              <a:srgbClr val="DDE3EC"/>
-            </a:solidFill>
-            <a:prstDash val="solid"/>
-          </a:ln>
-        </p:spPr>
-      </p:sp>
-      <p:sp>
-        <p:nvSpPr>
-          <p:cNvPr id="120" name="Shape 105"/>
-          <p:cNvSpPr/>
-          <p:nvPr/>
-        </p:nvSpPr>
-        <p:spPr>
-          <a:xfrm>
-            <a:off x="7580376" y="3813048"/>
-            <a:ext cx="274320" cy="274320"/>
-          </a:xfrm>
-          <a:prstGeom prst="roundRect">
-            <a:avLst>
-              <a:gd name="adj" fmla="val 22000"/>
-            </a:avLst>
-          </a:prstGeom>
-          <a:solidFill>
-            <a:srgbClr val="2E6FD6"/>
-          </a:solidFill>
-          <a:ln w="12700">
-            <a:solidFill>
-              <a:srgbClr val="2E6FD6"/>
-            </a:solidFill>
-            <a:prstDash val="solid"/>
-          </a:ln>
-        </p:spPr>
-      </p:sp>
-      <p:pic>
-        <p:nvPicPr>
-          <p:cNvPr id="121" name="Image 13" descr="preencoded.png">    </p:cNvPr>
-          <p:cNvPicPr>
-            <a:picLocks noChangeAspect="1"/>
-          </p:cNvPicPr>
-          <p:nvPr/>
-        </p:nvPicPr>
-        <p:blipFill>
-          <a:blip r:embed="rId14"/>
-          <a:stretch>
-            <a:fillRect/>
-          </a:stretch>
-        </p:blipFill>
-        <p:spPr>
-          <a:xfrm>
-            <a:off x="7621524" y="3854196"/>
-            <a:ext cx="192024" cy="192024"/>
-          </a:xfrm>
-          <a:prstGeom prst="rect">
-            <a:avLst/>
-          </a:prstGeom>
-        </p:spPr>
-      </p:pic>
-      <p:sp>
-        <p:nvSpPr>
-          <p:cNvPr id="122" name="Text 106"/>
-          <p:cNvSpPr txBox="1"/>
-          <p:nvPr/>
-        </p:nvSpPr>
-        <p:spPr>
-          <a:xfrm>
-            <a:off x="7918704" y="3803904"/>
-            <a:ext cx="896112" cy="292608"/>
-          </a:xfrm>
-          <a:prstGeom prst="rect">
-            <a:avLst/>
-          </a:prstGeom>
-          <a:noFill/>
-          <a:ln/>
-        </p:spPr>
-        <p:txBody>
-          <a:bodyPr wrap="square" lIns="0" tIns="0" rIns="0" bIns="0" rtlCol="0" anchor="ctr"/>
+          <p:cNvPr id="86" name="Text 73"/>
+          <p:cNvSpPr txBox="1"/>
+          <p:nvPr/>
+        </p:nvSpPr>
+        <p:spPr>
+          <a:xfrm>
+            <a:off x="274320" y="4754880"/>
+            <a:ext cx="8046720" cy="146304"/>
+          </a:xfrm>
+          <a:prstGeom prst="rect">
+            <a:avLst/>
+          </a:prstGeom>
+          <a:noFill/>
+          <a:ln/>
+        </p:spPr>
+        <p:txBody>
+          <a:bodyPr wrap="square" lIns="0" tIns="0" rIns="0" bIns="0" rtlCol="0" anchor="t"/>
           <a:lstStyle/>
           <a:p>
             <a:pPr indent="0" marL="0">
               <a:buNone/>
             </a:pPr>
             <a:r>
-              <a:rPr lang="en-US" sz="780" b="1" dirty="0">
-                <a:solidFill>
-                  <a:srgbClr val="2E6FD6"/>
-                </a:solidFill>
-                <a:latin typeface="Calibri" pitchFamily="34" charset="0"/>
-                <a:ea typeface="Calibri" pitchFamily="34" charset="-122"/>
-                <a:cs typeface="Calibri" pitchFamily="34" charset="-120"/>
-              </a:rPr>
-              <a:t>Web portal too</a:t>
-            </a:r>
-            <a:endParaRPr lang="en-US" sz="780" dirty="0"/>
-          </a:p>
-        </p:txBody>
-      </p:sp>
-      <p:sp>
-        <p:nvSpPr>
-          <p:cNvPr id="123" name="Text 107"/>
-          <p:cNvSpPr txBox="1"/>
-          <p:nvPr/>
-        </p:nvSpPr>
-        <p:spPr>
-          <a:xfrm>
-            <a:off x="7580376" y="4142232"/>
-            <a:ext cx="1207008" cy="146304"/>
-          </a:xfrm>
-          <a:prstGeom prst="rect">
-            <a:avLst/>
-          </a:prstGeom>
-          <a:noFill/>
-          <a:ln/>
-        </p:spPr>
-        <p:txBody>
-          <a:bodyPr wrap="square" lIns="0" tIns="0" rIns="0" bIns="0" rtlCol="0" anchor="ctr"/>
-          <a:lstStyle/>
-          <a:p>
-            <a:pPr indent="0" marL="0">
-              <a:buNone/>
-            </a:pPr>
-            <a:r>
-              <a:rPr lang="en-US" sz="660" b="1" dirty="0">
-                <a:solidFill>
-                  <a:srgbClr val="5B6B7F"/>
-                </a:solidFill>
-                <a:latin typeface="Calibri" pitchFamily="34" charset="0"/>
-                <a:ea typeface="Calibri" pitchFamily="34" charset="-122"/>
-                <a:cs typeface="Calibri" pitchFamily="34" charset="-120"/>
-              </a:rPr>
-              <a:t>same case, no call needed</a:t>
-            </a:r>
-            <a:endParaRPr lang="en-US" sz="660" dirty="0"/>
-          </a:p>
-        </p:txBody>
-      </p:sp>
-      <p:sp>
-        <p:nvSpPr>
-          <p:cNvPr id="124" name="Text 108"/>
-          <p:cNvSpPr txBox="1"/>
-          <p:nvPr/>
-        </p:nvSpPr>
-        <p:spPr>
-          <a:xfrm>
-            <a:off x="7580376" y="4306824"/>
-            <a:ext cx="1207008" cy="329184"/>
-          </a:xfrm>
-          <a:prstGeom prst="rect">
-            <a:avLst/>
-          </a:prstGeom>
-          <a:noFill/>
-          <a:ln/>
-        </p:spPr>
-        <p:txBody>
-          <a:bodyPr wrap="square" lIns="0" tIns="0" rIns="0" bIns="0" rtlCol="0" anchor="t"/>
-          <a:lstStyle/>
-          <a:p>
-            <a:pPr indent="0" marL="0">
-              <a:buNone/>
-            </a:pPr>
-            <a:r>
-              <a:rPr lang="en-US" sz="640" dirty="0">
-                <a:solidFill>
-                  <a:srgbClr val="1F2937"/>
-                </a:solidFill>
-                <a:latin typeface="Calibri" pitchFamily="34" charset="0"/>
-                <a:ea typeface="Calibri" pitchFamily="34" charset="-122"/>
-                <a:cs typeface="Calibri" pitchFamily="34" charset="-120"/>
-              </a:rPr>
-              <a:t>Mobile + OTP login for the family, CSC or officer to view or edit.</a:t>
-            </a:r>
-            <a:endParaRPr lang="en-US" sz="640" dirty="0"/>
-          </a:p>
-        </p:txBody>
-      </p:sp>
-      <p:sp>
-        <p:nvSpPr>
-          <p:cNvPr id="125" name="Text 109"/>
-          <p:cNvSpPr txBox="1"/>
-          <p:nvPr/>
-        </p:nvSpPr>
-        <p:spPr>
-          <a:xfrm>
-            <a:off x="274320" y="4700016"/>
-            <a:ext cx="8046720" cy="164592"/>
-          </a:xfrm>
-          <a:prstGeom prst="rect">
-            <a:avLst/>
-          </a:prstGeom>
-          <a:noFill/>
-          <a:ln/>
-        </p:spPr>
-        <p:txBody>
-          <a:bodyPr wrap="square" lIns="0" tIns="0" rIns="0" bIns="0" rtlCol="0" anchor="t"/>
-          <a:lstStyle/>
-          <a:p>
-            <a:pPr indent="0" marL="0">
-              <a:buNone/>
-            </a:pPr>
-            <a:r>
-              <a:rPr lang="en-US" sz="700" b="1" i="1" dirty="0">
+              <a:rPr lang="en-US" sz="680" b="1" i="1" dirty="0">
                 <a:solidFill>
                   <a:srgbClr val="1F4E79"/>
                 </a:solidFill>
@@ -5875,7 +4994,7 @@
               <a:t>Also answers the 5 GIA issues in the brief:  </a:t>
             </a:r>
             <a:r>
-              <a:rPr lang="en-US" sz="700" i="1" dirty="0">
+              <a:rPr lang="en-US" sz="680" i="1" dirty="0">
                 <a:solidFill>
                   <a:srgbClr val="6B7280"/>
                 </a:solidFill>
@@ -5885,7 +5004,7 @@
               </a:rPr>
               <a:t>planning  ·  beneficiary selection  ·  placement after training  ·  coordination  ·  too few ground staff</a:t>
             </a:r>
-            <a:endParaRPr lang="en-US" sz="700" dirty="0"/>
+            <a:endParaRPr lang="en-US" sz="680" dirty="0"/>
           </a:p>
         </p:txBody>
       </p:sp>
@@ -12542,15 +11661,59 @@
               <a:buNone/>
             </a:pPr>
             <a:r>
+              <a:rPr lang="en-US" sz="900" b="1" u="sng" dirty="0">
+                <a:solidFill>
+                  <a:srgbClr val="1F4E79"/>
+                </a:solidFill>
+                <a:latin typeface="Calibri" pitchFamily="34" charset="0"/>
+                <a:ea typeface="Calibri" pitchFamily="34" charset="-122"/>
+                <a:cs typeface="Calibri" pitchFamily="34" charset="-120"/>
+              </a:rPr>
+              <a:t>Can it be built and run?</a:t>
+            </a:r>
+            <a:r>
+              <a:rPr lang="en-US" sz="900" dirty="0">
+                <a:solidFill>
+                  <a:srgbClr val="1F2937"/>
+                </a:solidFill>
+                <a:latin typeface="Calibri" pitchFamily="34" charset="0"/>
+                <a:ea typeface="Calibri" pitchFamily="34" charset="-122"/>
+                <a:cs typeface="Calibri" pitchFamily="34" charset="-120"/>
+              </a:rPr>
+              <a:t>  </a:t>
+            </a:r>
+            <a:r>
               <a:rPr lang="en-US" sz="900" b="1" dirty="0">
                 <a:solidFill>
+                  <a:srgbClr val="1F9D63"/>
+                </a:solidFill>
+                <a:latin typeface="Calibri" pitchFamily="34" charset="0"/>
+                <a:ea typeface="Calibri" pitchFamily="34" charset="-122"/>
+                <a:cs typeface="Calibri" pitchFamily="34" charset="-120"/>
+              </a:rPr>
+              <a:t>Yes</a:t>
+            </a:r>
+            <a:r>
+              <a:rPr lang="en-US" sz="900" dirty="0">
+                <a:solidFill>
+                  <a:srgbClr val="1F2937"/>
+                </a:solidFill>
+                <a:latin typeface="Calibri" pitchFamily="34" charset="0"/>
+                <a:ea typeface="Calibri" pitchFamily="34" charset="-122"/>
+                <a:cs typeface="Calibri" pitchFamily="34" charset="-120"/>
+              </a:rPr>
+              <a:t> — every part already runs in India, the prototype can be built today, and one completed call costs about </a:t>
+            </a:r>
+            <a:r>
+              <a:rPr lang="en-US" sz="900" b="1" dirty="0">
+                <a:solidFill>
                   <a:srgbClr val="1F4E79"/>
                 </a:solidFill>
                 <a:latin typeface="Calibri" pitchFamily="34" charset="0"/>
                 <a:ea typeface="Calibri" pitchFamily="34" charset="-122"/>
                 <a:cs typeface="Calibri" pitchFamily="34" charset="-120"/>
               </a:rPr>
-              <a:t>Can it be built and run?  </a:t>
+              <a:t>₹25–54</a:t>
             </a:r>
             <a:r>
               <a:rPr lang="en-US" sz="900" dirty="0">
@@ -12561,7 +11724,7 @@
                 <a:ea typeface="Calibri" pitchFamily="34" charset="-122"/>
                 <a:cs typeface="Calibri" pitchFamily="34" charset="-120"/>
               </a:rPr>
-              <a:t>Yes — every part already runs in India, the prototype can be built today, and one completed call costs about ₹25–54.</a:t>
+              <a:t>.</a:t>
             </a:r>
             <a:endParaRPr lang="en-US" sz="900" dirty="0"/>
           </a:p>
@@ -12626,11 +11789,11 @@
         <p:spPr>
           <a:xfrm>
             <a:off x="274320" y="1389888"/>
-            <a:ext cx="2057400" cy="914400"/>
+            <a:ext cx="2057400" cy="932688"/>
           </a:xfrm>
           <a:prstGeom prst="roundRect">
             <a:avLst>
-              <a:gd name="adj" fmla="val 8000"/>
+              <a:gd name="adj" fmla="val 7843"/>
             </a:avLst>
           </a:prstGeom>
           <a:solidFill>
@@ -12644,36 +11807,9 @@
           </a:ln>
         </p:spPr>
       </p:sp>
-      <p:sp>
-        <p:nvSpPr>
-          <p:cNvPr id="10" name="Shape 7"/>
-          <p:cNvSpPr/>
-          <p:nvPr/>
-        </p:nvSpPr>
-        <p:spPr>
-          <a:xfrm>
-            <a:off x="365760" y="1481328"/>
-            <a:ext cx="310896" cy="310896"/>
-          </a:xfrm>
-          <a:prstGeom prst="roundRect">
-            <a:avLst>
-              <a:gd name="adj" fmla="val 22000"/>
-            </a:avLst>
-          </a:prstGeom>
-          <a:solidFill>
-            <a:srgbClr val="2E6FD6"/>
-          </a:solidFill>
-          <a:ln w="12700">
-            <a:solidFill>
-              <a:srgbClr val="2E6FD6"/>
-            </a:solidFill>
-            <a:prstDash val="solid"/>
-          </a:ln>
-        </p:spPr>
-      </p:sp>
       <p:pic>
         <p:nvPicPr>
-          <p:cNvPr id="11" name="Image 1" descr="preencoded.png">    </p:cNvPr>
+          <p:cNvPr id="10" name="Image 1" descr="preencoded.png">    </p:cNvPr>
           <p:cNvPicPr>
             <a:picLocks noChangeAspect="1"/>
           </p:cNvPicPr>
@@ -12687,8 +11823,8 @@
         </p:blipFill>
         <p:spPr>
           <a:xfrm>
-            <a:off x="412394" y="1527962"/>
-            <a:ext cx="217627" cy="217627"/>
+            <a:off x="365760" y="1463040"/>
+            <a:ext cx="292608" cy="292608"/>
           </a:xfrm>
           <a:prstGeom prst="rect">
             <a:avLst/>
@@ -12697,14 +11833,53 @@
       </p:pic>
       <p:sp>
         <p:nvSpPr>
+          <p:cNvPr id="11" name="Text 7"/>
+          <p:cNvSpPr txBox="1"/>
+          <p:nvPr/>
+        </p:nvSpPr>
+        <p:spPr>
+          <a:xfrm>
+            <a:off x="731520" y="1435608"/>
+            <a:ext cx="1508760" cy="201168"/>
+          </a:xfrm>
+          <a:prstGeom prst="rect">
+            <a:avLst/>
+          </a:prstGeom>
+          <a:noFill/>
+          <a:ln/>
+        </p:spPr>
+        <p:txBody>
+          <a:bodyPr wrap="square" lIns="0" tIns="0" rIns="0" bIns="0" rtlCol="0" anchor="ctr"/>
+          <a:lstStyle/>
+          <a:p>
+            <a:pPr indent="0" marL="0">
+              <a:buNone/>
+            </a:pPr>
+            <a:r>
+              <a:rPr lang="en-US" sz="1000" b="1" dirty="0">
+                <a:solidFill>
+                  <a:srgbClr val="2E6FD6"/>
+                </a:solidFill>
+                <a:latin typeface="Calibri" pitchFamily="34" charset="0"/>
+                <a:ea typeface="Calibri" pitchFamily="34" charset="-122"/>
+                <a:cs typeface="Calibri" pitchFamily="34" charset="-120"/>
+              </a:rPr>
+              <a:t>10 languages out of 22</a:t>
+            </a:r>
+            <a:endParaRPr lang="en-US" sz="1000" dirty="0"/>
+          </a:p>
+        </p:txBody>
+      </p:sp>
+      <p:sp>
+        <p:nvSpPr>
           <p:cNvPr id="12" name="Text 8"/>
           <p:cNvSpPr txBox="1"/>
           <p:nvPr/>
         </p:nvSpPr>
         <p:spPr>
           <a:xfrm>
-            <a:off x="768096" y="1453896"/>
-            <a:ext cx="1472184" cy="219456"/>
+            <a:off x="731520" y="1627632"/>
+            <a:ext cx="1508760" cy="137160"/>
           </a:xfrm>
           <a:prstGeom prst="rect">
             <a:avLst/>
@@ -12720,7 +11895,46 @@
               <a:buNone/>
             </a:pPr>
             <a:r>
-              <a:rPr lang="en-US" sz="1050" b="1" dirty="0">
+              <a:rPr lang="en-US" sz="730" b="1" dirty="0">
+                <a:solidFill>
+                  <a:srgbClr val="5B6B7F"/>
+                </a:solidFill>
+                <a:latin typeface="Calibri" pitchFamily="34" charset="0"/>
+                <a:ea typeface="Calibri" pitchFamily="34" charset="-122"/>
+                <a:cs typeface="Calibri" pitchFamily="34" charset="-120"/>
+              </a:rPr>
+              <a:t>are already in use</a:t>
+            </a:r>
+            <a:endParaRPr lang="en-US" sz="730" dirty="0"/>
+          </a:p>
+        </p:txBody>
+      </p:sp>
+      <p:sp>
+        <p:nvSpPr>
+          <p:cNvPr id="13" name="Text 9"/>
+          <p:cNvSpPr txBox="1"/>
+          <p:nvPr/>
+        </p:nvSpPr>
+        <p:spPr>
+          <a:xfrm>
+            <a:off x="365760" y="1810512"/>
+            <a:ext cx="1874520" cy="292608"/>
+          </a:xfrm>
+          <a:prstGeom prst="rect">
+            <a:avLst/>
+          </a:prstGeom>
+          <a:noFill/>
+          <a:ln/>
+        </p:spPr>
+        <p:txBody>
+          <a:bodyPr wrap="square" lIns="0" tIns="0" rIns="0" bIns="0" rtlCol="0" anchor="t"/>
+          <a:lstStyle/>
+          <a:p>
+            <a:pPr indent="0" marL="0">
+              <a:buNone/>
+            </a:pPr>
+            <a:r>
+              <a:rPr lang="en-US" sz="670" b="1" dirty="0">
                 <a:solidFill>
                   <a:srgbClr val="2E6FD6"/>
                 </a:solidFill>
@@ -12728,75 +11942,8 @@
                 <a:ea typeface="Calibri" pitchFamily="34" charset="-122"/>
                 <a:cs typeface="Calibri" pitchFamily="34" charset="-120"/>
               </a:rPr>
-              <a:t>10 languages out of 22</a:t>
-            </a:r>
-            <a:endParaRPr lang="en-US" sz="1050" dirty="0"/>
-          </a:p>
-        </p:txBody>
-      </p:sp>
-      <p:sp>
-        <p:nvSpPr>
-          <p:cNvPr id="13" name="Text 9"/>
-          <p:cNvSpPr txBox="1"/>
-          <p:nvPr/>
-        </p:nvSpPr>
-        <p:spPr>
-          <a:xfrm>
-            <a:off x="768096" y="1664208"/>
-            <a:ext cx="1472184" cy="146304"/>
-          </a:xfrm>
-          <a:prstGeom prst="rect">
-            <a:avLst/>
-          </a:prstGeom>
-          <a:noFill/>
-          <a:ln/>
-        </p:spPr>
-        <p:txBody>
-          <a:bodyPr wrap="square" lIns="0" tIns="0" rIns="0" bIns="0" rtlCol="0" anchor="ctr"/>
-          <a:lstStyle/>
-          <a:p>
-            <a:pPr indent="0" marL="0">
-              <a:buNone/>
-            </a:pPr>
-            <a:r>
-              <a:rPr lang="en-US" sz="730" b="1" dirty="0">
-                <a:solidFill>
-                  <a:srgbClr val="5B6B7F"/>
-                </a:solidFill>
-                <a:latin typeface="Calibri" pitchFamily="34" charset="0"/>
-                <a:ea typeface="Calibri" pitchFamily="34" charset="-122"/>
-                <a:cs typeface="Calibri" pitchFamily="34" charset="-120"/>
-              </a:rPr>
-              <a:t>are already in use</a:t>
-            </a:r>
-            <a:endParaRPr lang="en-US" sz="730" dirty="0"/>
-          </a:p>
-        </p:txBody>
-      </p:sp>
-      <p:sp>
-        <p:nvSpPr>
-          <p:cNvPr id="14" name="Text 10"/>
-          <p:cNvSpPr txBox="1"/>
-          <p:nvPr/>
-        </p:nvSpPr>
-        <p:spPr>
-          <a:xfrm>
-            <a:off x="365760" y="1865376"/>
-            <a:ext cx="1874520" cy="219456"/>
-          </a:xfrm>
-          <a:prstGeom prst="rect">
-            <a:avLst/>
-          </a:prstGeom>
-          <a:noFill/>
-          <a:ln/>
-        </p:spPr>
-        <p:txBody>
-          <a:bodyPr wrap="square" lIns="0" tIns="0" rIns="0" bIns="0" rtlCol="0" anchor="t"/>
-          <a:lstStyle/>
-          <a:p>
-            <a:pPr indent="0" marL="0">
-              <a:buNone/>
-            </a:pPr>
+              <a:t>UIDAI</a:t>
+            </a:r>
             <a:r>
               <a:rPr lang="en-US" sz="670" dirty="0">
                 <a:solidFill>
@@ -12806,7 +11953,7 @@
                 <a:ea typeface="Calibri" pitchFamily="34" charset="-122"/>
                 <a:cs typeface="Calibri" pitchFamily="34" charset="-120"/>
               </a:rPr>
-              <a:t>UIDAI already runs Sarvam's voice AI for Aadhaar on its own servers, in 10 of Sarvam's 22 languages.</a:t>
+              <a:t> already runs Sarvam's voice AI for Aadhaar on its own servers, in 10 of Sarvam's 22 languages.</a:t>
             </a:r>
             <a:endParaRPr lang="en-US" sz="670" dirty="0"/>
           </a:p>
@@ -12814,13 +11961,13 @@
       </p:sp>
       <p:sp>
         <p:nvSpPr>
-          <p:cNvPr id="15" name="Shape 11"/>
+          <p:cNvPr id="14" name="Shape 10"/>
           <p:cNvSpPr/>
           <p:nvPr/>
         </p:nvSpPr>
         <p:spPr>
           <a:xfrm>
-            <a:off x="365760" y="2103120"/>
+            <a:off x="365760" y="2121408"/>
             <a:ext cx="1874520" cy="137160"/>
           </a:xfrm>
           <a:prstGeom prst="roundRect">
@@ -12841,13 +11988,13 @@
       </p:sp>
       <p:sp>
         <p:nvSpPr>
-          <p:cNvPr id="16" name="Text 12"/>
-          <p:cNvSpPr txBox="1"/>
-          <p:nvPr/>
-        </p:nvSpPr>
-        <p:spPr>
-          <a:xfrm>
-            <a:off x="420624" y="2103120"/>
+          <p:cNvPr id="15" name="Text 11"/>
+          <p:cNvSpPr txBox="1"/>
+          <p:nvPr/>
+        </p:nvSpPr>
+        <p:spPr>
+          <a:xfrm>
+            <a:off x="420624" y="2121408"/>
             <a:ext cx="1783080" cy="137160"/>
           </a:xfrm>
           <a:prstGeom prst="rect">
@@ -12880,18 +12027,18 @@
       </p:sp>
       <p:sp>
         <p:nvSpPr>
-          <p:cNvPr id="17" name="Shape 13"/>
+          <p:cNvPr id="16" name="Shape 12"/>
           <p:cNvSpPr/>
           <p:nvPr/>
         </p:nvSpPr>
         <p:spPr>
           <a:xfrm>
             <a:off x="2446020" y="1389888"/>
-            <a:ext cx="2057400" cy="914400"/>
+            <a:ext cx="2057400" cy="932688"/>
           </a:xfrm>
           <a:prstGeom prst="roundRect">
             <a:avLst>
-              <a:gd name="adj" fmla="val 8000"/>
+              <a:gd name="adj" fmla="val 7843"/>
             </a:avLst>
           </a:prstGeom>
           <a:solidFill>
@@ -12905,36 +12052,9 @@
           </a:ln>
         </p:spPr>
       </p:sp>
-      <p:sp>
-        <p:nvSpPr>
-          <p:cNvPr id="18" name="Shape 14"/>
-          <p:cNvSpPr/>
-          <p:nvPr/>
-        </p:nvSpPr>
-        <p:spPr>
-          <a:xfrm>
-            <a:off x="2537460" y="1481328"/>
-            <a:ext cx="310896" cy="310896"/>
-          </a:xfrm>
-          <a:prstGeom prst="roundRect">
-            <a:avLst>
-              <a:gd name="adj" fmla="val 22000"/>
-            </a:avLst>
-          </a:prstGeom>
-          <a:solidFill>
-            <a:srgbClr val="13919B"/>
-          </a:solidFill>
-          <a:ln w="12700">
-            <a:solidFill>
-              <a:srgbClr val="13919B"/>
-            </a:solidFill>
-            <a:prstDash val="solid"/>
-          </a:ln>
-        </p:spPr>
-      </p:sp>
       <p:pic>
         <p:nvPicPr>
-          <p:cNvPr id="19" name="Image 2" descr="preencoded.png">    </p:cNvPr>
+          <p:cNvPr id="17" name="Image 2" descr="preencoded.png">    </p:cNvPr>
           <p:cNvPicPr>
             <a:picLocks noChangeAspect="1"/>
           </p:cNvPicPr>
@@ -12948,8 +12068,8 @@
         </p:blipFill>
         <p:spPr>
           <a:xfrm>
-            <a:off x="2584094" y="1527962"/>
-            <a:ext cx="217627" cy="217627"/>
+            <a:off x="2537460" y="1463040"/>
+            <a:ext cx="292608" cy="292608"/>
           </a:xfrm>
           <a:prstGeom prst="rect">
             <a:avLst/>
@@ -12958,30 +12078,108 @@
       </p:pic>
       <p:sp>
         <p:nvSpPr>
+          <p:cNvPr id="18" name="Text 13"/>
+          <p:cNvSpPr txBox="1"/>
+          <p:nvPr/>
+        </p:nvSpPr>
+        <p:spPr>
+          <a:xfrm>
+            <a:off x="2903220" y="1435608"/>
+            <a:ext cx="1508760" cy="201168"/>
+          </a:xfrm>
+          <a:prstGeom prst="rect">
+            <a:avLst/>
+          </a:prstGeom>
+          <a:noFill/>
+          <a:ln/>
+        </p:spPr>
+        <p:txBody>
+          <a:bodyPr wrap="square" lIns="0" tIns="0" rIns="0" bIns="0" rtlCol="0" anchor="ctr"/>
+          <a:lstStyle/>
+          <a:p>
+            <a:pPr indent="0" marL="0">
+              <a:buNone/>
+            </a:pPr>
+            <a:r>
+              <a:rPr lang="en-US" sz="1000" b="1" dirty="0">
+                <a:solidFill>
+                  <a:srgbClr val="13919B"/>
+                </a:solidFill>
+                <a:latin typeface="Calibri" pitchFamily="34" charset="0"/>
+                <a:ea typeface="Calibri" pitchFamily="34" charset="-122"/>
+                <a:cs typeface="Calibri" pitchFamily="34" charset="-120"/>
+              </a:rPr>
+              <a:t>12 lakh calls a day</a:t>
+            </a:r>
+            <a:endParaRPr lang="en-US" sz="1000" dirty="0"/>
+          </a:p>
+        </p:txBody>
+      </p:sp>
+      <p:sp>
+        <p:nvSpPr>
+          <p:cNvPr id="19" name="Text 14"/>
+          <p:cNvSpPr txBox="1"/>
+          <p:nvPr/>
+        </p:nvSpPr>
+        <p:spPr>
+          <a:xfrm>
+            <a:off x="2903220" y="1627632"/>
+            <a:ext cx="1508760" cy="137160"/>
+          </a:xfrm>
+          <a:prstGeom prst="rect">
+            <a:avLst/>
+          </a:prstGeom>
+          <a:noFill/>
+          <a:ln/>
+        </p:spPr>
+        <p:txBody>
+          <a:bodyPr wrap="square" lIns="0" tIns="0" rIns="0" bIns="0" rtlCol="0" anchor="ctr"/>
+          <a:lstStyle/>
+          <a:p>
+            <a:pPr indent="0" marL="0">
+              <a:buNone/>
+            </a:pPr>
+            <a:r>
+              <a:rPr lang="en-US" sz="730" b="1" dirty="0">
+                <a:solidFill>
+                  <a:srgbClr val="5B6B7F"/>
+                </a:solidFill>
+                <a:latin typeface="Calibri" pitchFamily="34" charset="0"/>
+                <a:ea typeface="Calibri" pitchFamily="34" charset="-122"/>
+                <a:cs typeface="Calibri" pitchFamily="34" charset="-120"/>
+              </a:rPr>
+              <a:t>already handled by a govt line</a:t>
+            </a:r>
+            <a:endParaRPr lang="en-US" sz="730" dirty="0"/>
+          </a:p>
+        </p:txBody>
+      </p:sp>
+      <p:sp>
+        <p:nvSpPr>
           <p:cNvPr id="20" name="Text 15"/>
           <p:cNvSpPr txBox="1"/>
           <p:nvPr/>
         </p:nvSpPr>
         <p:spPr>
           <a:xfrm>
-            <a:off x="2939796" y="1453896"/>
-            <a:ext cx="1472184" cy="219456"/>
-          </a:xfrm>
-          <a:prstGeom prst="rect">
-            <a:avLst/>
-          </a:prstGeom>
-          <a:noFill/>
-          <a:ln/>
-        </p:spPr>
-        <p:txBody>
-          <a:bodyPr wrap="square" lIns="0" tIns="0" rIns="0" bIns="0" rtlCol="0" anchor="ctr"/>
+            <a:off x="2537460" y="1810512"/>
+            <a:ext cx="1874520" cy="292608"/>
+          </a:xfrm>
+          <a:prstGeom prst="rect">
+            <a:avLst/>
+          </a:prstGeom>
+          <a:noFill/>
+          <a:ln/>
+        </p:spPr>
+        <p:txBody>
+          <a:bodyPr wrap="square" lIns="0" tIns="0" rIns="0" bIns="0" rtlCol="0" anchor="t"/>
           <a:lstStyle/>
           <a:p>
             <a:pPr indent="0" marL="0">
               <a:buNone/>
             </a:pPr>
             <a:r>
-              <a:rPr lang="en-US" sz="1050" b="1" dirty="0">
+              <a:rPr lang="en-US" sz="670" b="1" dirty="0">
                 <a:solidFill>
                   <a:srgbClr val="13919B"/>
                 </a:solidFill>
@@ -12989,75 +12187,8 @@
                 <a:ea typeface="Calibri" pitchFamily="34" charset="-122"/>
                 <a:cs typeface="Calibri" pitchFamily="34" charset="-120"/>
               </a:rPr>
-              <a:t>12 lakh calls a day</a:t>
-            </a:r>
-            <a:endParaRPr lang="en-US" sz="1050" dirty="0"/>
-          </a:p>
-        </p:txBody>
-      </p:sp>
-      <p:sp>
-        <p:nvSpPr>
-          <p:cNvPr id="21" name="Text 16"/>
-          <p:cNvSpPr txBox="1"/>
-          <p:nvPr/>
-        </p:nvSpPr>
-        <p:spPr>
-          <a:xfrm>
-            <a:off x="2939796" y="1664208"/>
-            <a:ext cx="1472184" cy="146304"/>
-          </a:xfrm>
-          <a:prstGeom prst="rect">
-            <a:avLst/>
-          </a:prstGeom>
-          <a:noFill/>
-          <a:ln/>
-        </p:spPr>
-        <p:txBody>
-          <a:bodyPr wrap="square" lIns="0" tIns="0" rIns="0" bIns="0" rtlCol="0" anchor="ctr"/>
-          <a:lstStyle/>
-          <a:p>
-            <a:pPr indent="0" marL="0">
-              <a:buNone/>
-            </a:pPr>
-            <a:r>
-              <a:rPr lang="en-US" sz="730" b="1" dirty="0">
-                <a:solidFill>
-                  <a:srgbClr val="5B6B7F"/>
-                </a:solidFill>
-                <a:latin typeface="Calibri" pitchFamily="34" charset="0"/>
-                <a:ea typeface="Calibri" pitchFamily="34" charset="-122"/>
-                <a:cs typeface="Calibri" pitchFamily="34" charset="-120"/>
-              </a:rPr>
-              <a:t>already handled by a govt line</a:t>
-            </a:r>
-            <a:endParaRPr lang="en-US" sz="730" dirty="0"/>
-          </a:p>
-        </p:txBody>
-      </p:sp>
-      <p:sp>
-        <p:nvSpPr>
-          <p:cNvPr id="22" name="Text 17"/>
-          <p:cNvSpPr txBox="1"/>
-          <p:nvPr/>
-        </p:nvSpPr>
-        <p:spPr>
-          <a:xfrm>
-            <a:off x="2537460" y="1865376"/>
-            <a:ext cx="1874520" cy="219456"/>
-          </a:xfrm>
-          <a:prstGeom prst="rect">
-            <a:avLst/>
-          </a:prstGeom>
-          <a:noFill/>
-          <a:ln/>
-        </p:spPr>
-        <p:txBody>
-          <a:bodyPr wrap="square" lIns="0" tIns="0" rIns="0" bIns="0" rtlCol="0" anchor="t"/>
-          <a:lstStyle/>
-          <a:p>
-            <a:pPr indent="0" marL="0">
-              <a:buNone/>
-            </a:pPr>
+              <a:t>Kilkari</a:t>
+            </a:r>
             <a:r>
               <a:rPr lang="en-US" sz="670" dirty="0">
                 <a:solidFill>
@@ -13067,7 +12198,7 @@
                 <a:ea typeface="Calibri" pitchFamily="34" charset="-122"/>
                 <a:cs typeface="Calibri" pitchFamily="34" charset="-120"/>
               </a:rPr>
-              <a:t>Kilkari, the government health-advice line, runs this volume every single day.</a:t>
+              <a:t>, the government health-advice line, runs this volume every single day.</a:t>
             </a:r>
             <a:endParaRPr lang="en-US" sz="670" dirty="0"/>
           </a:p>
@@ -13075,13 +12206,13 @@
       </p:sp>
       <p:sp>
         <p:nvSpPr>
-          <p:cNvPr id="23" name="Shape 18"/>
+          <p:cNvPr id="21" name="Shape 16"/>
           <p:cNvSpPr/>
           <p:nvPr/>
         </p:nvSpPr>
         <p:spPr>
           <a:xfrm>
-            <a:off x="2537460" y="2103120"/>
+            <a:off x="2537460" y="2121408"/>
             <a:ext cx="1874520" cy="137160"/>
           </a:xfrm>
           <a:prstGeom prst="roundRect">
@@ -13102,13 +12233,13 @@
       </p:sp>
       <p:sp>
         <p:nvSpPr>
-          <p:cNvPr id="24" name="Text 19"/>
-          <p:cNvSpPr txBox="1"/>
-          <p:nvPr/>
-        </p:nvSpPr>
-        <p:spPr>
-          <a:xfrm>
-            <a:off x="2592324" y="2103120"/>
+          <p:cNvPr id="22" name="Text 17"/>
+          <p:cNvSpPr txBox="1"/>
+          <p:nvPr/>
+        </p:nvSpPr>
+        <p:spPr>
+          <a:xfrm>
+            <a:off x="2592324" y="2121408"/>
             <a:ext cx="1783080" cy="137160"/>
           </a:xfrm>
           <a:prstGeom prst="rect">
@@ -13141,18 +12272,18 @@
       </p:sp>
       <p:sp>
         <p:nvSpPr>
-          <p:cNvPr id="25" name="Shape 20"/>
+          <p:cNvPr id="23" name="Shape 18"/>
           <p:cNvSpPr/>
           <p:nvPr/>
         </p:nvSpPr>
         <p:spPr>
           <a:xfrm>
             <a:off x="4617720" y="1389888"/>
-            <a:ext cx="2057400" cy="914400"/>
+            <a:ext cx="2057400" cy="932688"/>
           </a:xfrm>
           <a:prstGeom prst="roundRect">
             <a:avLst>
-              <a:gd name="adj" fmla="val 8000"/>
+              <a:gd name="adj" fmla="val 7843"/>
             </a:avLst>
           </a:prstGeom>
           <a:solidFill>
@@ -13166,36 +12297,9 @@
           </a:ln>
         </p:spPr>
       </p:sp>
-      <p:sp>
-        <p:nvSpPr>
-          <p:cNvPr id="26" name="Shape 21"/>
-          <p:cNvSpPr/>
-          <p:nvPr/>
-        </p:nvSpPr>
-        <p:spPr>
-          <a:xfrm>
-            <a:off x="4709160" y="1481328"/>
-            <a:ext cx="310896" cy="310896"/>
-          </a:xfrm>
-          <a:prstGeom prst="roundRect">
-            <a:avLst>
-              <a:gd name="adj" fmla="val 22000"/>
-            </a:avLst>
-          </a:prstGeom>
-          <a:solidFill>
-            <a:srgbClr val="7A5AF8"/>
-          </a:solidFill>
-          <a:ln w="12700">
-            <a:solidFill>
-              <a:srgbClr val="7A5AF8"/>
-            </a:solidFill>
-            <a:prstDash val="solid"/>
-          </a:ln>
-        </p:spPr>
-      </p:sp>
       <p:pic>
         <p:nvPicPr>
-          <p:cNvPr id="27" name="Image 3" descr="preencoded.png">    </p:cNvPr>
+          <p:cNvPr id="24" name="Image 3" descr="preencoded.png">    </p:cNvPr>
           <p:cNvPicPr>
             <a:picLocks noChangeAspect="1"/>
           </p:cNvPicPr>
@@ -13209,8 +12313,8 @@
         </p:blipFill>
         <p:spPr>
           <a:xfrm>
-            <a:off x="4755794" y="1527962"/>
-            <a:ext cx="217627" cy="217627"/>
+            <a:off x="4709160" y="1463040"/>
+            <a:ext cx="292608" cy="292608"/>
           </a:xfrm>
           <a:prstGeom prst="rect">
             <a:avLst/>
@@ -13219,14 +12323,14 @@
       </p:pic>
       <p:sp>
         <p:nvSpPr>
-          <p:cNvPr id="28" name="Text 22"/>
-          <p:cNvSpPr txBox="1"/>
-          <p:nvPr/>
-        </p:nvSpPr>
-        <p:spPr>
-          <a:xfrm>
-            <a:off x="5111496" y="1453896"/>
-            <a:ext cx="1472184" cy="219456"/>
+          <p:cNvPr id="25" name="Text 19"/>
+          <p:cNvSpPr txBox="1"/>
+          <p:nvPr/>
+        </p:nvSpPr>
+        <p:spPr>
+          <a:xfrm>
+            <a:off x="5074920" y="1435608"/>
+            <a:ext cx="1508760" cy="201168"/>
           </a:xfrm>
           <a:prstGeom prst="rect">
             <a:avLst/>
@@ -13242,7 +12346,7 @@
               <a:buNone/>
             </a:pPr>
             <a:r>
-              <a:rPr lang="en-US" sz="1050" b="1" dirty="0">
+              <a:rPr lang="en-US" sz="1000" b="1" dirty="0">
                 <a:solidFill>
                   <a:srgbClr val="7A5AF8"/>
                 </a:solidFill>
@@ -13252,20 +12356,20 @@
               </a:rPr>
               <a:t>≤ 20% word error</a:t>
             </a:r>
-            <a:endParaRPr lang="en-US" sz="1050" dirty="0"/>
-          </a:p>
-        </p:txBody>
-      </p:sp>
-      <p:sp>
-        <p:nvSpPr>
-          <p:cNvPr id="29" name="Text 23"/>
-          <p:cNvSpPr txBox="1"/>
-          <p:nvPr/>
-        </p:nvSpPr>
-        <p:spPr>
-          <a:xfrm>
-            <a:off x="5111496" y="1664208"/>
-            <a:ext cx="1472184" cy="146304"/>
+            <a:endParaRPr lang="en-US" sz="1000" dirty="0"/>
+          </a:p>
+        </p:txBody>
+      </p:sp>
+      <p:sp>
+        <p:nvSpPr>
+          <p:cNvPr id="26" name="Text 20"/>
+          <p:cNvSpPr txBox="1"/>
+          <p:nvPr/>
+        </p:nvSpPr>
+        <p:spPr>
+          <a:xfrm>
+            <a:off x="5074920" y="1627632"/>
+            <a:ext cx="1508760" cy="137160"/>
           </a:xfrm>
           <a:prstGeom prst="rect">
             <a:avLst/>
@@ -13297,14 +12401,14 @@
       </p:sp>
       <p:sp>
         <p:nvSpPr>
-          <p:cNvPr id="30" name="Text 24"/>
-          <p:cNvSpPr txBox="1"/>
-          <p:nvPr/>
-        </p:nvSpPr>
-        <p:spPr>
-          <a:xfrm>
-            <a:off x="4709160" y="1865376"/>
-            <a:ext cx="1874520" cy="219456"/>
+          <p:cNvPr id="27" name="Text 21"/>
+          <p:cNvSpPr txBox="1"/>
+          <p:nvPr/>
+        </p:nvSpPr>
+        <p:spPr>
+          <a:xfrm>
+            <a:off x="4709160" y="1810512"/>
+            <a:ext cx="1874520" cy="292608"/>
           </a:xfrm>
           <a:prstGeom prst="rect">
             <a:avLst/>
@@ -13328,7 +12432,29 @@
                 <a:ea typeface="Calibri" pitchFamily="34" charset="-122"/>
                 <a:cs typeface="Calibri" pitchFamily="34" charset="-120"/>
               </a:rPr>
-              <a:t>Best Indian speech AI, tested on 36,691 speakers in 15 languages (536 hours).</a:t>
+              <a:t>Best Indian speech AI, tested on </a:t>
+            </a:r>
+            <a:r>
+              <a:rPr lang="en-US" sz="670" b="1" dirty="0">
+                <a:solidFill>
+                  <a:srgbClr val="7A5AF8"/>
+                </a:solidFill>
+                <a:latin typeface="Calibri" pitchFamily="34" charset="0"/>
+                <a:ea typeface="Calibri" pitchFamily="34" charset="-122"/>
+                <a:cs typeface="Calibri" pitchFamily="34" charset="-120"/>
+              </a:rPr>
+              <a:t>36,691 speakers</a:t>
+            </a:r>
+            <a:r>
+              <a:rPr lang="en-US" sz="670" dirty="0">
+                <a:solidFill>
+                  <a:srgbClr val="1F2937"/>
+                </a:solidFill>
+                <a:latin typeface="Calibri" pitchFamily="34" charset="0"/>
+                <a:ea typeface="Calibri" pitchFamily="34" charset="-122"/>
+                <a:cs typeface="Calibri" pitchFamily="34" charset="-120"/>
+              </a:rPr>
+              <a:t> in 15 languages (536 hours).</a:t>
             </a:r>
             <a:endParaRPr lang="en-US" sz="670" dirty="0"/>
           </a:p>
@@ -13336,13 +12462,13 @@
       </p:sp>
       <p:sp>
         <p:nvSpPr>
-          <p:cNvPr id="31" name="Shape 25"/>
+          <p:cNvPr id="28" name="Shape 22"/>
           <p:cNvSpPr/>
           <p:nvPr/>
         </p:nvSpPr>
         <p:spPr>
           <a:xfrm>
-            <a:off x="4709160" y="2103120"/>
+            <a:off x="4709160" y="2121408"/>
             <a:ext cx="1874520" cy="137160"/>
           </a:xfrm>
           <a:prstGeom prst="roundRect">
@@ -13363,13 +12489,13 @@
       </p:sp>
       <p:sp>
         <p:nvSpPr>
-          <p:cNvPr id="32" name="Text 26"/>
-          <p:cNvSpPr txBox="1"/>
-          <p:nvPr/>
-        </p:nvSpPr>
-        <p:spPr>
-          <a:xfrm>
-            <a:off x="4764024" y="2103120"/>
+          <p:cNvPr id="29" name="Text 23"/>
+          <p:cNvSpPr txBox="1"/>
+          <p:nvPr/>
+        </p:nvSpPr>
+        <p:spPr>
+          <a:xfrm>
+            <a:off x="4764024" y="2121408"/>
             <a:ext cx="1783080" cy="137160"/>
           </a:xfrm>
           <a:prstGeom prst="rect">
@@ -13402,18 +12528,18 @@
       </p:sp>
       <p:sp>
         <p:nvSpPr>
-          <p:cNvPr id="33" name="Shape 27"/>
+          <p:cNvPr id="30" name="Shape 24"/>
           <p:cNvSpPr/>
           <p:nvPr/>
         </p:nvSpPr>
         <p:spPr>
           <a:xfrm>
             <a:off x="6789420" y="1389888"/>
-            <a:ext cx="2057400" cy="914400"/>
+            <a:ext cx="2057400" cy="932688"/>
           </a:xfrm>
           <a:prstGeom prst="roundRect">
             <a:avLst>
-              <a:gd name="adj" fmla="val 8000"/>
+              <a:gd name="adj" fmla="val 7843"/>
             </a:avLst>
           </a:prstGeom>
           <a:solidFill>
@@ -13427,36 +12553,9 @@
           </a:ln>
         </p:spPr>
       </p:sp>
-      <p:sp>
-        <p:nvSpPr>
-          <p:cNvPr id="34" name="Shape 28"/>
-          <p:cNvSpPr/>
-          <p:nvPr/>
-        </p:nvSpPr>
-        <p:spPr>
-          <a:xfrm>
-            <a:off x="6880860" y="1481328"/>
-            <a:ext cx="310896" cy="310896"/>
-          </a:xfrm>
-          <a:prstGeom prst="roundRect">
-            <a:avLst>
-              <a:gd name="adj" fmla="val 22000"/>
-            </a:avLst>
-          </a:prstGeom>
-          <a:solidFill>
-            <a:srgbClr val="EF8A22"/>
-          </a:solidFill>
-          <a:ln w="12700">
-            <a:solidFill>
-              <a:srgbClr val="EF8A22"/>
-            </a:solidFill>
-            <a:prstDash val="solid"/>
-          </a:ln>
-        </p:spPr>
-      </p:sp>
       <p:pic>
         <p:nvPicPr>
-          <p:cNvPr id="35" name="Image 4" descr="preencoded.png">    </p:cNvPr>
+          <p:cNvPr id="31" name="Image 4" descr="preencoded.png">    </p:cNvPr>
           <p:cNvPicPr>
             <a:picLocks noChangeAspect="1"/>
           </p:cNvPicPr>
@@ -13470,8 +12569,8 @@
         </p:blipFill>
         <p:spPr>
           <a:xfrm>
-            <a:off x="6927494" y="1527962"/>
-            <a:ext cx="217627" cy="217627"/>
+            <a:off x="6880860" y="1463040"/>
+            <a:ext cx="292608" cy="292608"/>
           </a:xfrm>
           <a:prstGeom prst="rect">
             <a:avLst/>
@@ -13480,14 +12579,14 @@
       </p:pic>
       <p:sp>
         <p:nvSpPr>
-          <p:cNvPr id="36" name="Text 29"/>
-          <p:cNvSpPr txBox="1"/>
-          <p:nvPr/>
-        </p:nvSpPr>
-        <p:spPr>
-          <a:xfrm>
-            <a:off x="7283196" y="1453896"/>
-            <a:ext cx="1472184" cy="219456"/>
+          <p:cNvPr id="32" name="Text 25"/>
+          <p:cNvSpPr txBox="1"/>
+          <p:nvPr/>
+        </p:nvSpPr>
+        <p:spPr>
+          <a:xfrm>
+            <a:off x="7246620" y="1435608"/>
+            <a:ext cx="1508760" cy="201168"/>
           </a:xfrm>
           <a:prstGeom prst="rect">
             <a:avLst/>
@@ -13503,7 +12602,7 @@
               <a:buNone/>
             </a:pPr>
             <a:r>
-              <a:rPr lang="en-US" sz="1050" b="1" dirty="0">
+              <a:rPr lang="en-US" sz="1000" b="1" dirty="0">
                 <a:solidFill>
                   <a:srgbClr val="EF8A22"/>
                 </a:solidFill>
@@ -13513,20 +12612,20 @@
               </a:rPr>
               <a:t>1.2–2.2 s per reply</a:t>
             </a:r>
-            <a:endParaRPr lang="en-US" sz="1050" dirty="0"/>
-          </a:p>
-        </p:txBody>
-      </p:sp>
-      <p:sp>
-        <p:nvSpPr>
-          <p:cNvPr id="37" name="Text 30"/>
-          <p:cNvSpPr txBox="1"/>
-          <p:nvPr/>
-        </p:nvSpPr>
-        <p:spPr>
-          <a:xfrm>
-            <a:off x="7283196" y="1664208"/>
-            <a:ext cx="1472184" cy="146304"/>
+            <a:endParaRPr lang="en-US" sz="1000" dirty="0"/>
+          </a:p>
+        </p:txBody>
+      </p:sp>
+      <p:sp>
+        <p:nvSpPr>
+          <p:cNvPr id="33" name="Text 26"/>
+          <p:cNvSpPr txBox="1"/>
+          <p:nvPr/>
+        </p:nvSpPr>
+        <p:spPr>
+          <a:xfrm>
+            <a:off x="7246620" y="1627632"/>
+            <a:ext cx="1508760" cy="137160"/>
           </a:xfrm>
           <a:prstGeom prst="rect">
             <a:avLst/>
@@ -13558,14 +12657,14 @@
       </p:sp>
       <p:sp>
         <p:nvSpPr>
-          <p:cNvPr id="38" name="Text 31"/>
-          <p:cNvSpPr txBox="1"/>
-          <p:nvPr/>
-        </p:nvSpPr>
-        <p:spPr>
-          <a:xfrm>
-            <a:off x="6880860" y="1865376"/>
-            <a:ext cx="1874520" cy="219456"/>
+          <p:cNvPr id="34" name="Text 27"/>
+          <p:cNvSpPr txBox="1"/>
+          <p:nvPr/>
+        </p:nvSpPr>
+        <p:spPr>
+          <a:xfrm>
+            <a:off x="6880860" y="1810512"/>
+            <a:ext cx="1874520" cy="292608"/>
           </a:xfrm>
           <a:prstGeom prst="rect">
             <a:avLst/>
@@ -13597,13 +12696,13 @@
       </p:sp>
       <p:sp>
         <p:nvSpPr>
-          <p:cNvPr id="39" name="Shape 32"/>
+          <p:cNvPr id="35" name="Shape 28"/>
           <p:cNvSpPr/>
           <p:nvPr/>
         </p:nvSpPr>
         <p:spPr>
           <a:xfrm>
-            <a:off x="6880860" y="2103120"/>
+            <a:off x="6880860" y="2121408"/>
             <a:ext cx="1874520" cy="137160"/>
           </a:xfrm>
           <a:prstGeom prst="roundRect">
@@ -13624,13 +12723,13 @@
       </p:sp>
       <p:sp>
         <p:nvSpPr>
-          <p:cNvPr id="40" name="Text 33"/>
-          <p:cNvSpPr txBox="1"/>
-          <p:nvPr/>
-        </p:nvSpPr>
-        <p:spPr>
-          <a:xfrm>
-            <a:off x="6935724" y="2103120"/>
+          <p:cNvPr id="36" name="Text 29"/>
+          <p:cNvSpPr txBox="1"/>
+          <p:nvPr/>
+        </p:nvSpPr>
+        <p:spPr>
+          <a:xfrm>
+            <a:off x="6935724" y="2121408"/>
             <a:ext cx="1783080" cy="137160"/>
           </a:xfrm>
           <a:prstGeom prst="rect">
@@ -13663,13 +12762,13 @@
       </p:sp>
       <p:sp>
         <p:nvSpPr>
-          <p:cNvPr id="41" name="Text 34"/>
-          <p:cNvSpPr txBox="1"/>
-          <p:nvPr/>
-        </p:nvSpPr>
-        <p:spPr>
-          <a:xfrm>
-            <a:off x="274320" y="2395728"/>
+          <p:cNvPr id="37" name="Text 30"/>
+          <p:cNvSpPr txBox="1"/>
+          <p:nvPr/>
+        </p:nvSpPr>
+        <p:spPr>
+          <a:xfrm>
+            <a:off x="274320" y="2414016"/>
             <a:ext cx="4297680" cy="182880"/>
           </a:xfrm>
           <a:prstGeom prst="rect">
@@ -13705,48 +12804,9 @@
                 <a:ea typeface="Calibri" pitchFamily="34" charset="-122"/>
                 <a:cs typeface="Calibri" pitchFamily="34" charset="-120"/>
               </a:rPr>
-              <a:t>per person, all-in: phone + AI + SMS + human help</a:t>
+              <a:t>rates per minute → one call of ≈ 16 min</a:t>
             </a:r>
             <a:endParaRPr lang="en-US" sz="850" dirty="0"/>
-          </a:p>
-        </p:txBody>
-      </p:sp>
-      <p:sp>
-        <p:nvSpPr>
-          <p:cNvPr id="42" name="Text 35"/>
-          <p:cNvSpPr txBox="1"/>
-          <p:nvPr/>
-        </p:nvSpPr>
-        <p:spPr>
-          <a:xfrm>
-            <a:off x="274320" y="2560320"/>
-            <a:ext cx="4206240" cy="137160"/>
-          </a:xfrm>
-          <a:prstGeom prst="rect">
-            <a:avLst/>
-          </a:prstGeom>
-          <a:noFill/>
-          <a:ln/>
-        </p:spPr>
-        <p:txBody>
-          <a:bodyPr wrap="square" lIns="0" tIns="0" rIns="0" bIns="0" rtlCol="0" anchor="t"/>
-          <a:lstStyle/>
-          <a:p>
-            <a:pPr indent="0" marL="0">
-              <a:buNone/>
-            </a:pPr>
-            <a:r>
-              <a:rPr lang="en-US" sz="640" i="1" dirty="0">
-                <a:solidFill>
-                  <a:srgbClr val="6B7280"/>
-                </a:solidFill>
-                <a:latin typeface="Calibri" pitchFamily="34" charset="0"/>
-                <a:ea typeface="Calibri" pitchFamily="34" charset="-122"/>
-                <a:cs typeface="Calibri" pitchFamily="34" charset="-120"/>
-              </a:rPr>
-              <a:t>Completed call = 10-min interview + options, plus 3 follow-up calls of 2 min (≈ 16 min of phone time).</a:t>
-            </a:r>
-            <a:endParaRPr lang="en-US" sz="640" dirty="0"/>
           </a:p>
         </p:txBody>
       </p:sp>
@@ -13765,7 +12825,7 @@
           </p:nvPr>
         </p:nvGraphicFramePr>
         <p:xfrm>
-          <a:off x="274320" y="2706624"/>
+          <a:off x="274320" y="2615184"/>
           <a:ext cx="4206240" cy="914400"/>
         </p:xfrm>
         <a:graphic>
@@ -13774,9 +12834,8 @@
               <a:tblPr/>
               <a:tblGrid>
                 <a:gridCol w="1280160"/>
-                <a:gridCol w="2194560"/>
-                <a:gridCol w="365760"/>
-                <a:gridCol w="365760"/>
+                <a:gridCol w="2240280"/>
+                <a:gridCol w="685800"/>
               </a:tblGrid>
               <a:tr h="141732">
                 <a:tc>
@@ -13840,7 +12899,7 @@
                           <a:ea typeface="Calibri" pitchFamily="34" charset="-122"/>
                           <a:cs typeface="Calibri" pitchFamily="34" charset="-120"/>
                         </a:rPr>
-                        <a:t>How we calculate it</a:t>
+                        <a:t>Rate</a:t>
                       </a:r>
                       <a:endParaRPr lang="en-US" sz="700" dirty="0">
                         <a:latin typeface="Calibri" charset="0"/>
@@ -13884,51 +12943,7 @@
                           <a:ea typeface="Calibri" pitchFamily="34" charset="-122"/>
                           <a:cs typeface="Calibri" pitchFamily="34" charset="-120"/>
                         </a:rPr>
-                        <a:t>Low</a:t>
-                      </a:r>
-                      <a:endParaRPr lang="en-US" sz="700" dirty="0">
-                        <a:latin typeface="Calibri" charset="0"/>
-                        <a:ea typeface="Calibri" charset="0"/>
-                        <a:cs typeface="Calibri" charset="0"/>
-                      </a:endParaRPr>
-                    </a:p>
-                  </a:txBody>
-                  <a:tcPr marL="50800" marR="50800" marT="12700" marB="12700" anchor="ctr">
-                    <a:lnL w="0" cap="flat" cmpd="sng" algn="ctr">
-                      <a:noFill/>
-                    </a:lnL>
-                    <a:lnR w="0" cap="flat" cmpd="sng" algn="ctr">
-                      <a:noFill/>
-                    </a:lnR>
-                    <a:lnT w="0" cap="flat" cmpd="sng" algn="ctr">
-                      <a:noFill/>
-                    </a:lnT>
-                    <a:lnB w="0" cap="flat" cmpd="sng" algn="ctr">
-                      <a:noFill/>
-                    </a:lnB>
-                    <a:solidFill>
-                      <a:srgbClr val="1F4E79"/>
-                    </a:solidFill>
-                  </a:tcPr>
-                </a:tc>
-                <a:tc>
-                  <a:txBody>
-                    <a:bodyPr/>
-                    <a:lstStyle/>
-                    <a:p>
-                      <a:pPr algn="r" indent="0" marL="0">
-                        <a:buNone/>
-                      </a:pPr>
-                      <a:r>
-                        <a:rPr lang="en-US" sz="700" b="1" dirty="0">
-                          <a:solidFill>
-                            <a:srgbClr val="FFFFFF"/>
-                          </a:solidFill>
-                          <a:latin typeface="Calibri" pitchFamily="34" charset="0"/>
-                          <a:ea typeface="Calibri" pitchFamily="34" charset="-122"/>
-                          <a:cs typeface="Calibri" pitchFamily="34" charset="-120"/>
-                        </a:rPr>
-                        <a:t>High</a:t>
+                        <a:t>Per call</a:t>
                       </a:r>
                       <a:endParaRPr lang="en-US" sz="700" dirty="0">
                         <a:latin typeface="Calibri" charset="0"/>
@@ -14018,7 +13033,7 @@
                           <a:ea typeface="Calibri" pitchFamily="34" charset="-122"/>
                           <a:cs typeface="Calibri" pitchFamily="34" charset="-120"/>
                         </a:rPr>
-                        <a:t>16 min × ₹0.80–1.80, + unfinished calls &amp; 30-s billing</a:t>
+                        <a:t>₹0.80–1.80 per minute (+ unfinished calls, 30-s billing)</a:t>
                       </a:r>
                       <a:endParaRPr lang="en-US" sz="660" dirty="0">
                         <a:latin typeface="Calibri" charset="0"/>
@@ -14062,51 +13077,7 @@
                           <a:ea typeface="Calibri" pitchFamily="34" charset="-122"/>
                           <a:cs typeface="Calibri" pitchFamily="34" charset="-120"/>
                         </a:rPr>
-                        <a:t>₹14.7</a:t>
-                      </a:r>
-                      <a:endParaRPr lang="en-US" sz="660" dirty="0">
-                        <a:latin typeface="Calibri" charset="0"/>
-                        <a:ea typeface="Calibri" charset="0"/>
-                        <a:cs typeface="Calibri" charset="0"/>
-                      </a:endParaRPr>
-                    </a:p>
-                  </a:txBody>
-                  <a:tcPr marL="50800" marR="50800" marT="12700" marB="12700" anchor="ctr">
-                    <a:lnL w="0" cap="flat" cmpd="sng" algn="ctr">
-                      <a:noFill/>
-                    </a:lnL>
-                    <a:lnR w="0" cap="flat" cmpd="sng" algn="ctr">
-                      <a:noFill/>
-                    </a:lnR>
-                    <a:lnT w="0" cap="flat" cmpd="sng" algn="ctr">
-                      <a:noFill/>
-                    </a:lnT>
-                    <a:lnB w="0" cap="flat" cmpd="sng" algn="ctr">
-                      <a:noFill/>
-                    </a:lnB>
-                    <a:solidFill>
-                      <a:srgbClr val="FFFFFF"/>
-                    </a:solidFill>
-                  </a:tcPr>
-                </a:tc>
-                <a:tc>
-                  <a:txBody>
-                    <a:bodyPr/>
-                    <a:lstStyle/>
-                    <a:p>
-                      <a:pPr algn="r" indent="0" marL="0">
-                        <a:buNone/>
-                      </a:pPr>
-                      <a:r>
-                        <a:rPr lang="en-US" sz="660" dirty="0">
-                          <a:solidFill>
-                            <a:srgbClr val="1F2937"/>
-                          </a:solidFill>
-                          <a:latin typeface="Calibri" pitchFamily="34" charset="0"/>
-                          <a:ea typeface="Calibri" pitchFamily="34" charset="-122"/>
-                          <a:cs typeface="Calibri" pitchFamily="34" charset="-120"/>
-                        </a:rPr>
-                        <a:t>₹33.7</a:t>
+                        <a:t>₹14.7–33.7</a:t>
                       </a:r>
                       <a:endParaRPr lang="en-US" sz="660" dirty="0">
                         <a:latin typeface="Calibri" charset="0"/>
@@ -14196,7 +13167,7 @@
                           <a:ea typeface="Calibri" pitchFamily="34" charset="-122"/>
                           <a:cs typeface="Calibri" pitchFamily="34" charset="-120"/>
                         </a:rPr>
-                        <a:t>₹30 per hour; only his speech (50–60% of the call)</a:t>
+                        <a:t>₹0.50 per minute, only his speech (50–60% of the call)</a:t>
                       </a:r>
                       <a:endParaRPr lang="en-US" sz="660" dirty="0">
                         <a:latin typeface="Calibri" charset="0"/>
@@ -14240,51 +13211,7 @@
                           <a:ea typeface="Calibri" pitchFamily="34" charset="-122"/>
                           <a:cs typeface="Calibri" pitchFamily="34" charset="-120"/>
                         </a:rPr>
-                        <a:t>₹4.2</a:t>
-                      </a:r>
-                      <a:endParaRPr lang="en-US" sz="660" dirty="0">
-                        <a:latin typeface="Calibri" charset="0"/>
-                        <a:ea typeface="Calibri" charset="0"/>
-                        <a:cs typeface="Calibri" charset="0"/>
-                      </a:endParaRPr>
-                    </a:p>
-                  </a:txBody>
-                  <a:tcPr marL="50800" marR="50800" marT="12700" marB="12700" anchor="ctr">
-                    <a:lnL w="0" cap="flat" cmpd="sng" algn="ctr">
-                      <a:noFill/>
-                    </a:lnL>
-                    <a:lnR w="0" cap="flat" cmpd="sng" algn="ctr">
-                      <a:noFill/>
-                    </a:lnR>
-                    <a:lnT w="0" cap="flat" cmpd="sng" algn="ctr">
-                      <a:noFill/>
-                    </a:lnT>
-                    <a:lnB w="0" cap="flat" cmpd="sng" algn="ctr">
-                      <a:noFill/>
-                    </a:lnB>
-                    <a:solidFill>
-                      <a:srgbClr val="F3F5F8"/>
-                    </a:solidFill>
-                  </a:tcPr>
-                </a:tc>
-                <a:tc>
-                  <a:txBody>
-                    <a:bodyPr/>
-                    <a:lstStyle/>
-                    <a:p>
-                      <a:pPr algn="r" indent="0" marL="0">
-                        <a:buNone/>
-                      </a:pPr>
-                      <a:r>
-                        <a:rPr lang="en-US" sz="660" dirty="0">
-                          <a:solidFill>
-                            <a:srgbClr val="1F2937"/>
-                          </a:solidFill>
-                          <a:latin typeface="Calibri" pitchFamily="34" charset="0"/>
-                          <a:ea typeface="Calibri" pitchFamily="34" charset="-122"/>
-                          <a:cs typeface="Calibri" pitchFamily="34" charset="-120"/>
-                        </a:rPr>
-                        <a:t>₹5.1</a:t>
+                        <a:t>₹4.2–5.1</a:t>
                       </a:r>
                       <a:endParaRPr lang="en-US" sz="660" dirty="0">
                         <a:latin typeface="Calibri" charset="0"/>
@@ -14418,51 +13345,7 @@
                           <a:ea typeface="Calibri" pitchFamily="34" charset="-122"/>
                           <a:cs typeface="Calibri" pitchFamily="34" charset="-120"/>
                         </a:rPr>
-                        <a:t>₹2.4</a:t>
-                      </a:r>
-                      <a:endParaRPr lang="en-US" sz="660" dirty="0">
-                        <a:latin typeface="Calibri" charset="0"/>
-                        <a:ea typeface="Calibri" charset="0"/>
-                        <a:cs typeface="Calibri" charset="0"/>
-                      </a:endParaRPr>
-                    </a:p>
-                  </a:txBody>
-                  <a:tcPr marL="50800" marR="50800" marT="12700" marB="12700" anchor="ctr">
-                    <a:lnL w="0" cap="flat" cmpd="sng" algn="ctr">
-                      <a:noFill/>
-                    </a:lnL>
-                    <a:lnR w="0" cap="flat" cmpd="sng" algn="ctr">
-                      <a:noFill/>
-                    </a:lnR>
-                    <a:lnT w="0" cap="flat" cmpd="sng" algn="ctr">
-                      <a:noFill/>
-                    </a:lnT>
-                    <a:lnB w="0" cap="flat" cmpd="sng" algn="ctr">
-                      <a:noFill/>
-                    </a:lnB>
-                    <a:solidFill>
-                      <a:srgbClr val="FFFFFF"/>
-                    </a:solidFill>
-                  </a:tcPr>
-                </a:tc>
-                <a:tc>
-                  <a:txBody>
-                    <a:bodyPr/>
-                    <a:lstStyle/>
-                    <a:p>
-                      <a:pPr algn="r" indent="0" marL="0">
-                        <a:buNone/>
-                      </a:pPr>
-                      <a:r>
-                        <a:rPr lang="en-US" sz="660" dirty="0">
-                          <a:solidFill>
-                            <a:srgbClr val="1F2937"/>
-                          </a:solidFill>
-                          <a:latin typeface="Calibri" pitchFamily="34" charset="0"/>
-                          <a:ea typeface="Calibri" pitchFamily="34" charset="-122"/>
-                          <a:cs typeface="Calibri" pitchFamily="34" charset="-120"/>
-                        </a:rPr>
-                        <a:t>₹6.0</a:t>
+                        <a:t>₹2.4–6.0</a:t>
                       </a:r>
                       <a:endParaRPr lang="en-US" sz="660" dirty="0">
                         <a:latin typeface="Calibri" charset="0"/>
@@ -14596,51 +13479,7 @@
                           <a:ea typeface="Calibri" pitchFamily="34" charset="-122"/>
                           <a:cs typeface="Calibri" pitchFamily="34" charset="-120"/>
                         </a:rPr>
-                        <a:t>₹0.25</a:t>
-                      </a:r>
-                      <a:endParaRPr lang="en-US" sz="660" dirty="0">
-                        <a:latin typeface="Calibri" charset="0"/>
-                        <a:ea typeface="Calibri" charset="0"/>
-                        <a:cs typeface="Calibri" charset="0"/>
-                      </a:endParaRPr>
-                    </a:p>
-                  </a:txBody>
-                  <a:tcPr marL="50800" marR="50800" marT="12700" marB="12700" anchor="ctr">
-                    <a:lnL w="0" cap="flat" cmpd="sng" algn="ctr">
-                      <a:noFill/>
-                    </a:lnL>
-                    <a:lnR w="0" cap="flat" cmpd="sng" algn="ctr">
-                      <a:noFill/>
-                    </a:lnR>
-                    <a:lnT w="0" cap="flat" cmpd="sng" algn="ctr">
-                      <a:noFill/>
-                    </a:lnT>
-                    <a:lnB w="0" cap="flat" cmpd="sng" algn="ctr">
-                      <a:noFill/>
-                    </a:lnB>
-                    <a:solidFill>
-                      <a:srgbClr val="F3F5F8"/>
-                    </a:solidFill>
-                  </a:tcPr>
-                </a:tc>
-                <a:tc>
-                  <a:txBody>
-                    <a:bodyPr/>
-                    <a:lstStyle/>
-                    <a:p>
-                      <a:pPr algn="r" indent="0" marL="0">
-                        <a:buNone/>
-                      </a:pPr>
-                      <a:r>
-                        <a:rPr lang="en-US" sz="660" dirty="0">
-                          <a:solidFill>
-                            <a:srgbClr val="1F2937"/>
-                          </a:solidFill>
-                          <a:latin typeface="Calibri" pitchFamily="34" charset="0"/>
-                          <a:ea typeface="Calibri" pitchFamily="34" charset="-122"/>
-                          <a:cs typeface="Calibri" pitchFamily="34" charset="-120"/>
-                        </a:rPr>
-                        <a:t>₹0.5</a:t>
+                        <a:t>₹0.25–0.5</a:t>
                       </a:r>
                       <a:endParaRPr lang="en-US" sz="660" dirty="0">
                         <a:latin typeface="Calibri" charset="0"/>
@@ -14774,51 +13613,7 @@
                           <a:ea typeface="Calibri" pitchFamily="34" charset="-122"/>
                           <a:cs typeface="Calibri" pitchFamily="34" charset="-120"/>
                         </a:rPr>
-                        <a:t>₹2.2</a:t>
-                      </a:r>
-                      <a:endParaRPr lang="en-US" sz="660" dirty="0">
-                        <a:latin typeface="Calibri" charset="0"/>
-                        <a:ea typeface="Calibri" charset="0"/>
-                        <a:cs typeface="Calibri" charset="0"/>
-                      </a:endParaRPr>
-                    </a:p>
-                  </a:txBody>
-                  <a:tcPr marL="50800" marR="50800" marT="12700" marB="12700" anchor="ctr">
-                    <a:lnL w="0" cap="flat" cmpd="sng" algn="ctr">
-                      <a:noFill/>
-                    </a:lnL>
-                    <a:lnR w="0" cap="flat" cmpd="sng" algn="ctr">
-                      <a:noFill/>
-                    </a:lnR>
-                    <a:lnT w="0" cap="flat" cmpd="sng" algn="ctr">
-                      <a:noFill/>
-                    </a:lnT>
-                    <a:lnB w="0" cap="flat" cmpd="sng" algn="ctr">
-                      <a:noFill/>
-                    </a:lnB>
-                    <a:solidFill>
-                      <a:srgbClr val="FFFFFF"/>
-                    </a:solidFill>
-                  </a:tcPr>
-                </a:tc>
-                <a:tc>
-                  <a:txBody>
-                    <a:bodyPr/>
-                    <a:lstStyle/>
-                    <a:p>
-                      <a:pPr algn="r" indent="0" marL="0">
-                        <a:buNone/>
-                      </a:pPr>
-                      <a:r>
-                        <a:rPr lang="en-US" sz="660" dirty="0">
-                          <a:solidFill>
-                            <a:srgbClr val="1F2937"/>
-                          </a:solidFill>
-                          <a:latin typeface="Calibri" pitchFamily="34" charset="0"/>
-                          <a:ea typeface="Calibri" pitchFamily="34" charset="-122"/>
-                          <a:cs typeface="Calibri" pitchFamily="34" charset="-120"/>
-                        </a:rPr>
-                        <a:t>₹5.3</a:t>
+                        <a:t>₹2.2–5.3</a:t>
                       </a:r>
                       <a:endParaRPr lang="en-US" sz="660" dirty="0">
                         <a:latin typeface="Calibri" charset="0"/>
@@ -14952,51 +13747,7 @@
                           <a:ea typeface="Calibri" pitchFamily="34" charset="-122"/>
                           <a:cs typeface="Calibri" pitchFamily="34" charset="-120"/>
                         </a:rPr>
-                        <a:t>₹1.0</a:t>
-                      </a:r>
-                      <a:endParaRPr lang="en-US" sz="660" dirty="0">
-                        <a:latin typeface="Calibri" charset="0"/>
-                        <a:ea typeface="Calibri" charset="0"/>
-                        <a:cs typeface="Calibri" charset="0"/>
-                      </a:endParaRPr>
-                    </a:p>
-                  </a:txBody>
-                  <a:tcPr marL="50800" marR="50800" marT="12700" marB="12700" anchor="ctr">
-                    <a:lnL w="0" cap="flat" cmpd="sng" algn="ctr">
-                      <a:noFill/>
-                    </a:lnL>
-                    <a:lnR w="0" cap="flat" cmpd="sng" algn="ctr">
-                      <a:noFill/>
-                    </a:lnR>
-                    <a:lnT w="0" cap="flat" cmpd="sng" algn="ctr">
-                      <a:noFill/>
-                    </a:lnT>
-                    <a:lnB w="0" cap="flat" cmpd="sng" algn="ctr">
-                      <a:noFill/>
-                    </a:lnB>
-                    <a:solidFill>
-                      <a:srgbClr val="F3F5F8"/>
-                    </a:solidFill>
-                  </a:tcPr>
-                </a:tc>
-                <a:tc>
-                  <a:txBody>
-                    <a:bodyPr/>
-                    <a:lstStyle/>
-                    <a:p>
-                      <a:pPr algn="r" indent="0" marL="0">
-                        <a:buNone/>
-                      </a:pPr>
-                      <a:r>
-                        <a:rPr lang="en-US" sz="660" dirty="0">
-                          <a:solidFill>
-                            <a:srgbClr val="1F2937"/>
-                          </a:solidFill>
-                          <a:latin typeface="Calibri" pitchFamily="34" charset="0"/>
-                          <a:ea typeface="Calibri" pitchFamily="34" charset="-122"/>
-                          <a:cs typeface="Calibri" pitchFamily="34" charset="-120"/>
-                        </a:rPr>
-                        <a:t>₹3.0</a:t>
+                        <a:t>₹1.0–3.0</a:t>
                       </a:r>
                       <a:endParaRPr lang="en-US" sz="660" dirty="0">
                         <a:latin typeface="Calibri" charset="0"/>
@@ -15042,7 +13793,7 @@
                           <a:ea typeface="Calibri" pitchFamily="34" charset="-122"/>
                           <a:cs typeface="Calibri" pitchFamily="34" charset="-120"/>
                         </a:rPr>
-                        <a:t>TOTAL per completed profile</a:t>
+                        <a:t>ONE COMPLETED CALL</a:t>
                       </a:r>
                       <a:endParaRPr lang="en-US" sz="660" dirty="0">
                         <a:latin typeface="Calibri" charset="0"/>
@@ -15086,7 +13837,7 @@
                           <a:ea typeface="Calibri" pitchFamily="34" charset="-122"/>
                           <a:cs typeface="Calibri" pitchFamily="34" charset="-120"/>
                         </a:rPr>
-                        <a:t>1,000 missed calls → 420–517 finished profiles</a:t>
+                        <a:t>all-in ≈ ₹1.6–3.4 per minute</a:t>
                       </a:r>
                       <a:endParaRPr lang="en-US" sz="660" dirty="0">
                         <a:latin typeface="Calibri" charset="0"/>
@@ -15130,51 +13881,7 @@
                           <a:ea typeface="Calibri" pitchFamily="34" charset="-122"/>
                           <a:cs typeface="Calibri" pitchFamily="34" charset="-120"/>
                         </a:rPr>
-                        <a:t>≈ ₹25</a:t>
-                      </a:r>
-                      <a:endParaRPr lang="en-US" sz="660" dirty="0">
-                        <a:latin typeface="Calibri" charset="0"/>
-                        <a:ea typeface="Calibri" charset="0"/>
-                        <a:cs typeface="Calibri" charset="0"/>
-                      </a:endParaRPr>
-                    </a:p>
-                  </a:txBody>
-                  <a:tcPr marL="50800" marR="50800" marT="12700" marB="12700" anchor="ctr">
-                    <a:lnL w="0" cap="flat" cmpd="sng" algn="ctr">
-                      <a:noFill/>
-                    </a:lnL>
-                    <a:lnR w="0" cap="flat" cmpd="sng" algn="ctr">
-                      <a:noFill/>
-                    </a:lnR>
-                    <a:lnT w="0" cap="flat" cmpd="sng" algn="ctr">
-                      <a:noFill/>
-                    </a:lnT>
-                    <a:lnB w="0" cap="flat" cmpd="sng" algn="ctr">
-                      <a:noFill/>
-                    </a:lnB>
-                    <a:solidFill>
-                      <a:srgbClr val="1F9D63"/>
-                    </a:solidFill>
-                  </a:tcPr>
-                </a:tc>
-                <a:tc>
-                  <a:txBody>
-                    <a:bodyPr/>
-                    <a:lstStyle/>
-                    <a:p>
-                      <a:pPr algn="r" indent="0" marL="0">
-                        <a:buNone/>
-                      </a:pPr>
-                      <a:r>
-                        <a:rPr lang="en-US" sz="660" b="1" dirty="0">
-                          <a:solidFill>
-                            <a:srgbClr val="FFFFFF"/>
-                          </a:solidFill>
-                          <a:latin typeface="Calibri" pitchFamily="34" charset="0"/>
-                          <a:ea typeface="Calibri" pitchFamily="34" charset="-122"/>
-                          <a:cs typeface="Calibri" pitchFamily="34" charset="-120"/>
-                        </a:rPr>
-                        <a:t>≈ ₹54</a:t>
+                        <a:t>₹25–54</a:t>
                       </a:r>
                       <a:endParaRPr lang="en-US" sz="660" dirty="0">
                         <a:latin typeface="Calibri" charset="0"/>
@@ -15208,18 +13915,18 @@
       </p:graphicFrame>
       <p:sp>
         <p:nvSpPr>
-          <p:cNvPr id="44" name="Shape 36"/>
+          <p:cNvPr id="39" name="Shape 31"/>
           <p:cNvSpPr/>
           <p:nvPr/>
         </p:nvSpPr>
         <p:spPr>
           <a:xfrm>
-            <a:off x="274320" y="3877056"/>
-            <a:ext cx="4206240" cy="365760"/>
+            <a:off x="274320" y="3785616"/>
+            <a:ext cx="4206240" cy="658368"/>
           </a:xfrm>
           <a:prstGeom prst="roundRect">
             <a:avLst>
-              <a:gd name="adj" fmla="val 12500"/>
+              <a:gd name="adj" fmla="val 11111"/>
             </a:avLst>
           </a:prstGeom>
           <a:solidFill>
@@ -15235,30 +13942,30 @@
       </p:sp>
       <p:sp>
         <p:nvSpPr>
-          <p:cNvPr id="45" name="Text 37"/>
-          <p:cNvSpPr txBox="1"/>
-          <p:nvPr/>
-        </p:nvSpPr>
-        <p:spPr>
-          <a:xfrm>
-            <a:off x="347472" y="3886200"/>
-            <a:ext cx="4069080" cy="347472"/>
-          </a:xfrm>
-          <a:prstGeom prst="rect">
-            <a:avLst/>
-          </a:prstGeom>
-          <a:noFill/>
-          <a:ln/>
-        </p:spPr>
-        <p:txBody>
-          <a:bodyPr wrap="square" lIns="0" tIns="0" rIns="0" bIns="0" rtlCol="0" anchor="t"/>
+          <p:cNvPr id="40" name="Text 32"/>
+          <p:cNvSpPr txBox="1"/>
+          <p:nvPr/>
+        </p:nvSpPr>
+        <p:spPr>
+          <a:xfrm>
+            <a:off x="365760" y="3803904"/>
+            <a:ext cx="4041648" cy="621792"/>
+          </a:xfrm>
+          <a:prstGeom prst="rect">
+            <a:avLst/>
+          </a:prstGeom>
+          <a:noFill/>
+          <a:ln/>
+        </p:spPr>
+        <p:txBody>
+          <a:bodyPr wrap="square" lIns="0" tIns="0" rIns="0" bIns="0" rtlCol="0" anchor="ctr"/>
           <a:lstStyle/>
           <a:p>
             <a:pPr indent="0" marL="0">
               <a:buNone/>
             </a:pPr>
             <a:r>
-              <a:rPr lang="en-US" sz="750" b="1" dirty="0">
+              <a:rPr lang="en-US" sz="650" b="1" dirty="0">
                 <a:solidFill>
                   <a:srgbClr val="1F9D63"/>
                 </a:solidFill>
@@ -15266,21 +13973,32 @@
                 <a:ea typeface="Calibri" pitchFamily="34" charset="-122"/>
                 <a:cs typeface="Calibri" pitchFamily="34" charset="-120"/>
               </a:rPr>
-              <a:t>Cost falls further over time  </a:t>
+              <a:t>Per 1,000 missed calls, at the average ≈ ₹40 a call:</a:t>
+            </a:r>
+            <a:r>
+              <a:rPr lang="en-US" sz="650" dirty="0">
+                <a:solidFill>
+                  <a:srgbClr val="1F2937"/>
+                </a:solidFill>
+                <a:latin typeface="Calibri" pitchFamily="34" charset="0"/>
+                <a:ea typeface="Calibri" pitchFamily="34" charset="-122"/>
+                <a:cs typeface="Calibri" pitchFamily="34" charset="-120"/>
+              </a:rPr>
+              <a:t>  </a:t>
             </a:r>
             <a:r>
               <a:rPr lang="en-US" sz="650" b="1" dirty="0">
                 <a:solidFill>
-                  <a:srgbClr val="5B6B7F"/>
-                </a:solidFill>
-                <a:latin typeface="Calibri" pitchFamily="34" charset="0"/>
-                <a:ea typeface="Calibri" pitchFamily="34" charset="-122"/>
-                <a:cs typeface="Calibri" pitchFamily="34" charset="-120"/>
-              </a:rPr>
-              <a:t>cached answers, cheaper cached tokens, free self-hosted speech</a:t>
-            </a:r>
-            <a:r>
-              <a:rPr lang="en-US" sz="610" dirty="0">
+                  <a:srgbClr val="1F9D63"/>
+                </a:solidFill>
+                <a:latin typeface="Calibri" pitchFamily="34" charset="0"/>
+                <a:ea typeface="Calibri" pitchFamily="34" charset="-122"/>
+                <a:cs typeface="Calibri" pitchFamily="34" charset="-120"/>
+              </a:rPr>
+              <a:t>420–517 people</a:t>
+            </a:r>
+            <a:r>
+              <a:rPr lang="en-US" sz="650" dirty="0">
                 <a:solidFill>
                   <a:srgbClr val="1F2937"/>
                 </a:solidFill>
@@ -15288,11 +14006,44 @@
                 <a:ea typeface="Calibri" pitchFamily="34" charset="-122"/>
                 <a:cs typeface="Calibri" pitchFamily="34" charset="-120"/>
               </a:rPr>
-              <a:t>
+              <a:t> get a complete, verified profile for </a:t>
+            </a:r>
+            <a:r>
+              <a:rPr lang="en-US" sz="650" b="1" dirty="0">
+                <a:solidFill>
+                  <a:srgbClr val="1F9D63"/>
+                </a:solidFill>
+                <a:latin typeface="Calibri" pitchFamily="34" charset="0"/>
+                <a:ea typeface="Calibri" pitchFamily="34" charset="-122"/>
+                <a:cs typeface="Calibri" pitchFamily="34" charset="-120"/>
+              </a:rPr>
+              <a:t>≈ ₹17,000–21,000</a:t>
+            </a:r>
+            <a:r>
+              <a:rPr lang="en-US" sz="650" dirty="0">
+                <a:solidFill>
+                  <a:srgbClr val="1F2937"/>
+                </a:solidFill>
+                <a:latin typeface="Calibri" pitchFamily="34" charset="0"/>
+                <a:ea typeface="Calibri" pitchFamily="34" charset="-122"/>
+                <a:cs typeface="Calibri" pitchFamily="34" charset="-120"/>
+              </a:rPr>
+              <a:t> in total.
 </a:t>
             </a:r>
             <a:r>
-              <a:rPr lang="en-US" sz="610" dirty="0">
+              <a:rPr lang="en-US" sz="650" b="1" dirty="0">
+                <a:solidFill>
+                  <a:srgbClr val="2E6FD6"/>
+                </a:solidFill>
+                <a:latin typeface="Calibri" pitchFamily="34" charset="0"/>
+                <a:ea typeface="Calibri" pitchFamily="34" charset="-122"/>
+                <a:cs typeface="Calibri" pitchFamily="34" charset="-120"/>
+              </a:rPr>
+              <a:t>50%</a:t>
+            </a:r>
+            <a:r>
+              <a:rPr lang="en-US" sz="650" dirty="0">
                 <a:solidFill>
                   <a:srgbClr val="1F2937"/>
                 </a:solidFill>
@@ -15300,21 +14051,87 @@
                 <a:ea typeface="Calibri" pitchFamily="34" charset="-122"/>
                 <a:cs typeface="Calibri" pitchFamily="34" charset="-120"/>
               </a:rPr>
-              <a:t>Frequent questions get pre-written, verified answers and audio (answer cache, slide 3); Sarvam bills cached input at ₹10.98 vs ₹29.28 per 1M tokens; at national scale ~70% of speech moves to free IndicConformer → ₹21–49 per profile.</a:t>
-            </a:r>
-            <a:endParaRPr lang="en-US" sz="610" dirty="0"/>
-          </a:p>
-        </p:txBody>
-      </p:sp>
-      <p:sp>
-        <p:nvSpPr>
-          <p:cNvPr id="46" name="Shape 38"/>
+              <a:t> are reached on the 1st call and </a:t>
+            </a:r>
+            <a:r>
+              <a:rPr lang="en-US" sz="650" b="1" dirty="0">
+                <a:solidFill>
+                  <a:srgbClr val="2E6FD6"/>
+                </a:solidFill>
+                <a:latin typeface="Calibri" pitchFamily="34" charset="0"/>
+                <a:ea typeface="Calibri" pitchFamily="34" charset="-122"/>
+                <a:cs typeface="Calibri" pitchFamily="34" charset="-120"/>
+              </a:rPr>
+              <a:t>76%</a:t>
+            </a:r>
+            <a:r>
+              <a:rPr lang="en-US" sz="650" dirty="0">
+                <a:solidFill>
+                  <a:srgbClr val="1F2937"/>
+                </a:solidFill>
+                <a:latin typeface="Calibri" pitchFamily="34" charset="0"/>
+                <a:ea typeface="Calibri" pitchFamily="34" charset="-122"/>
+                <a:cs typeface="Calibri" pitchFamily="34" charset="-120"/>
+              </a:rPr>
+              <a:t> by the 3rd; ~80% of those finish the interview and ~85% of those finish the options. Only </a:t>
+            </a:r>
+            <a:r>
+              <a:rPr lang="en-US" sz="650" b="1" dirty="0">
+                <a:solidFill>
+                  <a:srgbClr val="D4930D"/>
+                </a:solidFill>
+                <a:latin typeface="Calibri" pitchFamily="34" charset="0"/>
+                <a:ea typeface="Calibri" pitchFamily="34" charset="-122"/>
+                <a:cs typeface="Calibri" pitchFamily="34" charset="-120"/>
+              </a:rPr>
+              <a:t>10–20%</a:t>
+            </a:r>
+            <a:r>
+              <a:rPr lang="en-US" sz="650" dirty="0">
+                <a:solidFill>
+                  <a:srgbClr val="1F2937"/>
+                </a:solidFill>
+                <a:latin typeface="Calibri" pitchFamily="34" charset="0"/>
+                <a:ea typeface="Calibri" pitchFamily="34" charset="-122"/>
+                <a:cs typeface="Calibri" pitchFamily="34" charset="-120"/>
+              </a:rPr>
+              <a:t> (≈ 40–100 people) need a human counsellor call. </a:t>
+            </a:r>
+            <a:r>
+              <a:rPr lang="en-US" sz="650" b="1" dirty="0">
+                <a:solidFill>
+                  <a:srgbClr val="D64545"/>
+                </a:solidFill>
+                <a:latin typeface="Calibri" pitchFamily="34" charset="0"/>
+                <a:ea typeface="Calibri" pitchFamily="34" charset="-122"/>
+                <a:cs typeface="Calibri" pitchFamily="34" charset="-120"/>
+              </a:rPr>
+              <a:t>Estimated</a:t>
+            </a:r>
+            <a:r>
+              <a:rPr lang="en-US" sz="650" dirty="0">
+                <a:solidFill>
+                  <a:srgbClr val="1F2937"/>
+                </a:solidFill>
+                <a:latin typeface="Calibri" pitchFamily="34" charset="0"/>
+                <a:ea typeface="Calibri" pitchFamily="34" charset="-122"/>
+                <a:cs typeface="Calibri" pitchFamily="34" charset="-120"/>
+              </a:rPr>
+              <a:t> — every step is worked in the calculations sheet.</a:t>
+            </a:r>
+            <a:endParaRPr lang="en-US" sz="650" dirty="0"/>
+          </a:p>
+        </p:txBody>
+      </p:sp>
+      <p:sp>
+        <p:nvSpPr>
+          <p:cNvPr id="41" name="Shape 33"/>
           <p:cNvSpPr/>
           <p:nvPr/>
         </p:nvSpPr>
         <p:spPr>
           <a:xfrm>
-            <a:off x="274320" y="4279392"/>
+            <a:off x="274320" y="4480560"/>
             <a:ext cx="4206240" cy="137160"/>
           </a:xfrm>
           <a:prstGeom prst="roundRect">
@@ -15335,13 +14152,13 @@
       </p:sp>
       <p:sp>
         <p:nvSpPr>
-          <p:cNvPr id="47" name="Text 39"/>
-          <p:cNvSpPr txBox="1"/>
-          <p:nvPr/>
-        </p:nvSpPr>
-        <p:spPr>
-          <a:xfrm>
-            <a:off x="329184" y="4279392"/>
+          <p:cNvPr id="42" name="Text 34"/>
+          <p:cNvSpPr txBox="1"/>
+          <p:nvPr/>
+        </p:nvSpPr>
+        <p:spPr>
+          <a:xfrm>
+            <a:off x="329184" y="4480560"/>
             <a:ext cx="4114800" cy="137160"/>
           </a:xfrm>
           <a:prstGeom prst="rect">
@@ -15366,7 +14183,7 @@
                 <a:ea typeface="Calibri" pitchFamily="34" charset="-122"/>
                 <a:cs typeface="Calibri" pitchFamily="34" charset="-120"/>
               </a:rPr>
-              <a:t>Prices: Sarvam API pricing · Indian telephony rate cards 2026 · funnel = our estimate</a:t>
+              <a:t>Prices &amp; funnel: Sarvam API pricing · Indian telephony rate cards 2026 · Kilkari (BMJ 2021) · funnel = our estimate</a:t>
             </a:r>
             <a:endParaRPr lang="en-US" sz="600" dirty="0"/>
           </a:p>
@@ -15374,13 +14191,13 @@
       </p:sp>
       <p:sp>
         <p:nvSpPr>
-          <p:cNvPr id="48" name="Text 40"/>
-          <p:cNvSpPr txBox="1"/>
-          <p:nvPr/>
-        </p:nvSpPr>
-        <p:spPr>
-          <a:xfrm>
-            <a:off x="4709160" y="2395728"/>
+          <p:cNvPr id="43" name="Text 35"/>
+          <p:cNvSpPr txBox="1"/>
+          <p:nvPr/>
+        </p:nvSpPr>
+        <p:spPr>
+          <a:xfrm>
+            <a:off x="4709160" y="2414016"/>
             <a:ext cx="4160520" cy="182880"/>
           </a:xfrm>
           <a:prstGeom prst="rect">
@@ -15399,13 +14216,13 @@
             <a:r>
               <a:rPr lang="en-US" sz="850" b="1" spc="120" kern="0" dirty="0">
                 <a:solidFill>
-                  <a:srgbClr val="13919B"/>
-                </a:solidFill>
-                <a:latin typeface="Calibri" pitchFamily="34" charset="0"/>
-                <a:ea typeface="Calibri" pitchFamily="34" charset="-122"/>
-                <a:cs typeface="Calibri" pitchFamily="34" charset="-120"/>
-              </a:rPr>
-              <a:t>76% OF CALLS ANSWERED BY THE 3RD TRY  </a:t>
+                  <a:srgbClr val="D4930D"/>
+                </a:solidFill>
+                <a:latin typeface="Calibri" pitchFamily="34" charset="0"/>
+                <a:ea typeface="Calibri" pitchFamily="34" charset="-122"/>
+                <a:cs typeface="Calibri" pitchFamily="34" charset="-120"/>
+              </a:rPr>
+              <a:t>THE GOVERNMENT CAN AFFORD IT  </a:t>
             </a:r>
             <a:r>
               <a:rPr lang="en-US" sz="750" i="1" dirty="0">
@@ -15416,7 +14233,7 @@
                 <a:ea typeface="Calibri" pitchFamily="34" charset="-122"/>
                 <a:cs typeface="Calibri" pitchFamily="34" charset="-120"/>
               </a:rPr>
-              <a:t>and only 10–20% ever need a human</a:t>
+              <a:t>less than ₹1 of every ₹100 it already spends</a:t>
             </a:r>
             <a:endParaRPr lang="en-US" sz="850" dirty="0"/>
           </a:p>
@@ -15424,18 +14241,456 @@
       </p:sp>
       <p:sp>
         <p:nvSpPr>
-          <p:cNvPr id="49" name="Shape 41"/>
+          <p:cNvPr id="44" name="Shape 36"/>
           <p:cNvSpPr/>
           <p:nvPr/>
         </p:nvSpPr>
         <p:spPr>
           <a:xfrm>
-            <a:off x="4709160" y="2596896"/>
-            <a:ext cx="4160520" cy="914400"/>
+            <a:off x="4709160" y="2615184"/>
+            <a:ext cx="4160520" cy="365760"/>
           </a:xfrm>
           <a:prstGeom prst="roundRect">
             <a:avLst>
-              <a:gd name="adj" fmla="val 8000"/>
+              <a:gd name="adj" fmla="val 20000"/>
+            </a:avLst>
+          </a:prstGeom>
+          <a:solidFill>
+            <a:srgbClr val="E3F6EC"/>
+          </a:solidFill>
+          <a:ln w="9525">
+            <a:solidFill>
+              <a:srgbClr val="E3F6EC"/>
+            </a:solidFill>
+            <a:prstDash val="solid"/>
+          </a:ln>
+        </p:spPr>
+      </p:sp>
+      <p:pic>
+        <p:nvPicPr>
+          <p:cNvPr id="45" name="Image 5" descr="preencoded.png">    </p:cNvPr>
+          <p:cNvPicPr>
+            <a:picLocks noChangeAspect="1"/>
+          </p:cNvPicPr>
+          <p:nvPr/>
+        </p:nvPicPr>
+        <p:blipFill>
+          <a:blip r:embed="rId6"/>
+          <a:stretch>
+            <a:fillRect/>
+          </a:stretch>
+        </p:blipFill>
+        <p:spPr>
+          <a:xfrm>
+            <a:off x="4791456" y="2670048"/>
+            <a:ext cx="256032" cy="256032"/>
+          </a:xfrm>
+          <a:prstGeom prst="rect">
+            <a:avLst/>
+          </a:prstGeom>
+        </p:spPr>
+      </p:pic>
+      <p:sp>
+        <p:nvSpPr>
+          <p:cNvPr id="46" name="Text 37"/>
+          <p:cNvSpPr txBox="1"/>
+          <p:nvPr/>
+        </p:nvSpPr>
+        <p:spPr>
+          <a:xfrm>
+            <a:off x="5120640" y="2633472"/>
+            <a:ext cx="3703320" cy="347472"/>
+          </a:xfrm>
+          <a:prstGeom prst="rect">
+            <a:avLst/>
+          </a:prstGeom>
+          <a:noFill/>
+          <a:ln/>
+        </p:spPr>
+        <p:txBody>
+          <a:bodyPr wrap="square" lIns="0" tIns="0" rIns="0" bIns="0" rtlCol="0" anchor="ctr"/>
+          <a:lstStyle/>
+          <a:p>
+            <a:pPr indent="0" marL="0">
+              <a:buNone/>
+            </a:pPr>
+            <a:r>
+              <a:rPr lang="en-US" sz="800" b="1" dirty="0">
+                <a:solidFill>
+                  <a:srgbClr val="1F9D63"/>
+                </a:solidFill>
+                <a:latin typeface="Calibri" pitchFamily="34" charset="0"/>
+                <a:ea typeface="Calibri" pitchFamily="34" charset="-122"/>
+                <a:cs typeface="Calibri" pitchFamily="34" charset="-120"/>
+              </a:rPr>
+              <a:t>0.05–0.10% of the budget  </a:t>
+            </a:r>
+            <a:r>
+              <a:rPr lang="en-US" sz="650" b="1" dirty="0">
+                <a:solidFill>
+                  <a:srgbClr val="5B6B7F"/>
+                </a:solidFill>
+                <a:latin typeface="Calibri" pitchFamily="34" charset="0"/>
+                <a:ea typeface="Calibri" pitchFamily="34" charset="-122"/>
+                <a:cs typeface="Calibri" pitchFamily="34" charset="-120"/>
+              </a:rPr>
+              <a:t>is all SkillCall needs</a:t>
+            </a:r>
+            <a:r>
+              <a:rPr lang="en-US" sz="630" dirty="0">
+                <a:solidFill>
+                  <a:srgbClr val="1F2937"/>
+                </a:solidFill>
+                <a:latin typeface="Calibri" pitchFamily="34" charset="0"/>
+                <a:ea typeface="Calibri" pitchFamily="34" charset="-122"/>
+                <a:cs typeface="Calibri" pitchFamily="34" charset="-120"/>
+              </a:rPr>
+              <a:t>
+</a:t>
+            </a:r>
+            <a:r>
+              <a:rPr lang="en-US" sz="630" dirty="0">
+                <a:solidFill>
+                  <a:srgbClr val="1F2937"/>
+                </a:solidFill>
+                <a:latin typeface="Calibri" pitchFamily="34" charset="0"/>
+                <a:ea typeface="Calibri" pitchFamily="34" charset="-122"/>
+                <a:cs typeface="Calibri" pitchFamily="34" charset="-120"/>
+              </a:rPr>
+              <a:t>All of India: </a:t>
+            </a:r>
+            <a:r>
+              <a:rPr lang="en-US" sz="630" b="1" dirty="0">
+                <a:solidFill>
+                  <a:srgbClr val="1F9D63"/>
+                </a:solidFill>
+                <a:latin typeface="Calibri" pitchFamily="34" charset="0"/>
+                <a:ea typeface="Calibri" pitchFamily="34" charset="-122"/>
+                <a:cs typeface="Calibri" pitchFamily="34" charset="-120"/>
+              </a:rPr>
+              <a:t>₹1.1–2.1 crore a year</a:t>
+            </a:r>
+            <a:r>
+              <a:rPr lang="en-US" sz="630" dirty="0">
+                <a:solidFill>
+                  <a:srgbClr val="1F2937"/>
+                </a:solidFill>
+                <a:latin typeface="Calibri" pitchFamily="34" charset="0"/>
+                <a:ea typeface="Calibri" pitchFamily="34" charset="-122"/>
+                <a:cs typeface="Calibri" pitchFamily="34" charset="-120"/>
+              </a:rPr>
+              <a:t> vs PM-AJAY's ₹2,140 crore (2026-27).</a:t>
+            </a:r>
+            <a:endParaRPr lang="en-US" sz="630" dirty="0"/>
+          </a:p>
+        </p:txBody>
+      </p:sp>
+      <p:sp>
+        <p:nvSpPr>
+          <p:cNvPr id="47" name="Shape 38"/>
+          <p:cNvSpPr/>
+          <p:nvPr/>
+        </p:nvSpPr>
+        <p:spPr>
+          <a:xfrm>
+            <a:off x="4709160" y="3017520"/>
+            <a:ext cx="4160520" cy="365760"/>
+          </a:xfrm>
+          <a:prstGeom prst="roundRect">
+            <a:avLst>
+              <a:gd name="adj" fmla="val 20000"/>
+            </a:avLst>
+          </a:prstGeom>
+          <a:solidFill>
+            <a:srgbClr val="E6EEFC"/>
+          </a:solidFill>
+          <a:ln w="9525">
+            <a:solidFill>
+              <a:srgbClr val="E6EEFC"/>
+            </a:solidFill>
+            <a:prstDash val="solid"/>
+          </a:ln>
+        </p:spPr>
+      </p:sp>
+      <p:pic>
+        <p:nvPicPr>
+          <p:cNvPr id="48" name="Image 6" descr="preencoded.png">    </p:cNvPr>
+          <p:cNvPicPr>
+            <a:picLocks noChangeAspect="1"/>
+          </p:cNvPicPr>
+          <p:nvPr/>
+        </p:nvPicPr>
+        <p:blipFill>
+          <a:blip r:embed="rId7"/>
+          <a:stretch>
+            <a:fillRect/>
+          </a:stretch>
+        </p:blipFill>
+        <p:spPr>
+          <a:xfrm>
+            <a:off x="4791456" y="3072384"/>
+            <a:ext cx="256032" cy="256032"/>
+          </a:xfrm>
+          <a:prstGeom prst="rect">
+            <a:avLst/>
+          </a:prstGeom>
+        </p:spPr>
+      </p:pic>
+      <p:sp>
+        <p:nvSpPr>
+          <p:cNvPr id="49" name="Text 39"/>
+          <p:cNvSpPr txBox="1"/>
+          <p:nvPr/>
+        </p:nvSpPr>
+        <p:spPr>
+          <a:xfrm>
+            <a:off x="5120640" y="3035808"/>
+            <a:ext cx="3703320" cy="347472"/>
+          </a:xfrm>
+          <a:prstGeom prst="rect">
+            <a:avLst/>
+          </a:prstGeom>
+          <a:noFill/>
+          <a:ln/>
+        </p:spPr>
+        <p:txBody>
+          <a:bodyPr wrap="square" lIns="0" tIns="0" rIns="0" bIns="0" rtlCol="0" anchor="ctr"/>
+          <a:lstStyle/>
+          <a:p>
+            <a:pPr indent="0" marL="0">
+              <a:buNone/>
+            </a:pPr>
+            <a:r>
+              <a:rPr lang="en-US" sz="800" b="1" dirty="0">
+                <a:solidFill>
+                  <a:srgbClr val="2E6FD6"/>
+                </a:solidFill>
+                <a:latin typeface="Calibri" pitchFamily="34" charset="0"/>
+                <a:ea typeface="Calibri" pitchFamily="34" charset="-122"/>
+                <a:cs typeface="Calibri" pitchFamily="34" charset="-120"/>
+              </a:rPr>
+              <a:t>Under ₹1 in every ₹100  </a:t>
+            </a:r>
+            <a:r>
+              <a:rPr lang="en-US" sz="650" b="1" dirty="0">
+                <a:solidFill>
+                  <a:srgbClr val="5B6B7F"/>
+                </a:solidFill>
+                <a:latin typeface="Calibri" pitchFamily="34" charset="0"/>
+                <a:ea typeface="Calibri" pitchFamily="34" charset="-122"/>
+                <a:cs typeface="Calibri" pitchFamily="34" charset="-120"/>
+              </a:rPr>
+              <a:t>of what each beneficiary already gets</a:t>
+            </a:r>
+            <a:r>
+              <a:rPr lang="en-US" sz="630" dirty="0">
+                <a:solidFill>
+                  <a:srgbClr val="1F2937"/>
+                </a:solidFill>
+                <a:latin typeface="Calibri" pitchFamily="34" charset="0"/>
+                <a:ea typeface="Calibri" pitchFamily="34" charset="-122"/>
+                <a:cs typeface="Calibri" pitchFamily="34" charset="-120"/>
+              </a:rPr>
+              <a:t>
+</a:t>
+            </a:r>
+            <a:r>
+              <a:rPr lang="en-US" sz="630" dirty="0">
+                <a:solidFill>
+                  <a:srgbClr val="1F2937"/>
+                </a:solidFill>
+                <a:latin typeface="Calibri" pitchFamily="34" charset="0"/>
+                <a:ea typeface="Calibri" pitchFamily="34" charset="-122"/>
+                <a:cs typeface="Calibri" pitchFamily="34" charset="-120"/>
+              </a:rPr>
+              <a:t>≈ ₹220–420 per beneficiary vs ≈ </a:t>
+            </a:r>
+            <a:r>
+              <a:rPr lang="en-US" sz="630" b="1" dirty="0">
+                <a:solidFill>
+                  <a:srgbClr val="2E6FD6"/>
+                </a:solidFill>
+                <a:latin typeface="Calibri" pitchFamily="34" charset="0"/>
+                <a:ea typeface="Calibri" pitchFamily="34" charset="-122"/>
+                <a:cs typeface="Calibri" pitchFamily="34" charset="-120"/>
+              </a:rPr>
+              <a:t>₹60,700</a:t>
+            </a:r>
+            <a:r>
+              <a:rPr lang="en-US" sz="630" dirty="0">
+                <a:solidFill>
+                  <a:srgbClr val="1F2937"/>
+                </a:solidFill>
+                <a:latin typeface="Calibri" pitchFamily="34" charset="0"/>
+                <a:ea typeface="Calibri" pitchFamily="34" charset="-122"/>
+                <a:cs typeface="Calibri" pitchFamily="34" charset="-120"/>
+              </a:rPr>
+              <a:t> average GIA support.</a:t>
+            </a:r>
+            <a:endParaRPr lang="en-US" sz="630" dirty="0"/>
+          </a:p>
+        </p:txBody>
+      </p:sp>
+      <p:sp>
+        <p:nvSpPr>
+          <p:cNvPr id="50" name="Shape 40"/>
+          <p:cNvSpPr/>
+          <p:nvPr/>
+        </p:nvSpPr>
+        <p:spPr>
+          <a:xfrm>
+            <a:off x="4709160" y="3419856"/>
+            <a:ext cx="4160520" cy="365760"/>
+          </a:xfrm>
+          <a:prstGeom prst="roundRect">
+            <a:avLst>
+              <a:gd name="adj" fmla="val 20000"/>
+            </a:avLst>
+          </a:prstGeom>
+          <a:solidFill>
+            <a:srgbClr val="EDE9FE"/>
+          </a:solidFill>
+          <a:ln w="9525">
+            <a:solidFill>
+              <a:srgbClr val="EDE9FE"/>
+            </a:solidFill>
+            <a:prstDash val="solid"/>
+          </a:ln>
+        </p:spPr>
+      </p:sp>
+      <p:pic>
+        <p:nvPicPr>
+          <p:cNvPr id="51" name="Image 7" descr="preencoded.png">    </p:cNvPr>
+          <p:cNvPicPr>
+            <a:picLocks noChangeAspect="1"/>
+          </p:cNvPicPr>
+          <p:nvPr/>
+        </p:nvPicPr>
+        <p:blipFill>
+          <a:blip r:embed="rId8"/>
+          <a:stretch>
+            <a:fillRect/>
+          </a:stretch>
+        </p:blipFill>
+        <p:spPr>
+          <a:xfrm>
+            <a:off x="4791456" y="3474720"/>
+            <a:ext cx="256032" cy="256032"/>
+          </a:xfrm>
+          <a:prstGeom prst="rect">
+            <a:avLst/>
+          </a:prstGeom>
+        </p:spPr>
+      </p:pic>
+      <p:sp>
+        <p:nvSpPr>
+          <p:cNvPr id="52" name="Text 41"/>
+          <p:cNvSpPr txBox="1"/>
+          <p:nvPr/>
+        </p:nvSpPr>
+        <p:spPr>
+          <a:xfrm>
+            <a:off x="5120640" y="3438144"/>
+            <a:ext cx="3703320" cy="347472"/>
+          </a:xfrm>
+          <a:prstGeom prst="rect">
+            <a:avLst/>
+          </a:prstGeom>
+          <a:noFill/>
+          <a:ln/>
+        </p:spPr>
+        <p:txBody>
+          <a:bodyPr wrap="square" lIns="0" tIns="0" rIns="0" bIns="0" rtlCol="0" anchor="ctr"/>
+          <a:lstStyle/>
+          <a:p>
+            <a:pPr indent="0" marL="0">
+              <a:buNone/>
+            </a:pPr>
+            <a:r>
+              <a:rPr lang="en-US" sz="800" b="1" dirty="0">
+                <a:solidFill>
+                  <a:srgbClr val="7A5AF8"/>
+                </a:solidFill>
+                <a:latin typeface="Calibri" pitchFamily="34" charset="0"/>
+                <a:ea typeface="Calibri" pitchFamily="34" charset="-122"/>
+                <a:cs typeface="Calibri" pitchFamily="34" charset="-120"/>
+              </a:rPr>
+              <a:t>₹9–13 lakh to start  </a:t>
+            </a:r>
+            <a:r>
+              <a:rPr lang="en-US" sz="650" b="1" dirty="0">
+                <a:solidFill>
+                  <a:srgbClr val="5B6B7F"/>
+                </a:solidFill>
+                <a:latin typeface="Calibri" pitchFamily="34" charset="0"/>
+                <a:ea typeface="Calibri" pitchFamily="34" charset="-122"/>
+                <a:cs typeface="Calibri" pitchFamily="34" charset="-120"/>
+              </a:rPr>
+              <a:t>a 6-month pilot in one block</a:t>
+            </a:r>
+            <a:r>
+              <a:rPr lang="en-US" sz="630" dirty="0">
+                <a:solidFill>
+                  <a:srgbClr val="1F2937"/>
+                </a:solidFill>
+                <a:latin typeface="Calibri" pitchFamily="34" charset="0"/>
+                <a:ea typeface="Calibri" pitchFamily="34" charset="-122"/>
+                <a:cs typeface="Calibri" pitchFamily="34" charset="-120"/>
+              </a:rPr>
+              <a:t>
+</a:t>
+            </a:r>
+            <a:r>
+              <a:rPr lang="en-US" sz="630" dirty="0">
+                <a:solidFill>
+                  <a:srgbClr val="1F2937"/>
+                </a:solidFill>
+                <a:latin typeface="Calibri" pitchFamily="34" charset="0"/>
+                <a:ea typeface="Calibri" pitchFamily="34" charset="-122"/>
+                <a:cs typeface="Calibri" pitchFamily="34" charset="-120"/>
+              </a:rPr>
+              <a:t>≈ 1,000 families: build, </a:t>
+            </a:r>
+            <a:r>
+              <a:rPr lang="en-US" sz="630" b="1" dirty="0">
+                <a:solidFill>
+                  <a:srgbClr val="7A5AF8"/>
+                </a:solidFill>
+                <a:latin typeface="Calibri" pitchFamily="34" charset="0"/>
+                <a:ea typeface="Calibri" pitchFamily="34" charset="-122"/>
+                <a:cs typeface="Calibri" pitchFamily="34" charset="-120"/>
+              </a:rPr>
+              <a:t>test with real users</a:t>
+            </a:r>
+            <a:r>
+              <a:rPr lang="en-US" sz="630" dirty="0">
+                <a:solidFill>
+                  <a:srgbClr val="1F2937"/>
+                </a:solidFill>
+                <a:latin typeface="Calibri" pitchFamily="34" charset="0"/>
+                <a:ea typeface="Calibri" pitchFamily="34" charset="-122"/>
+                <a:cs typeface="Calibri" pitchFamily="34" charset="-120"/>
+              </a:rPr>
+              <a:t>, then scale to the state.</a:t>
+            </a:r>
+            <a:endParaRPr lang="en-US" sz="630" dirty="0"/>
+          </a:p>
+        </p:txBody>
+      </p:sp>
+      <p:sp>
+        <p:nvSpPr>
+          <p:cNvPr id="53" name="Shape 42"/>
+          <p:cNvSpPr/>
+          <p:nvPr/>
+        </p:nvSpPr>
+        <p:spPr>
+          <a:xfrm>
+            <a:off x="4709160" y="3840480"/>
+            <a:ext cx="4160520" cy="384048"/>
+          </a:xfrm>
+          <a:prstGeom prst="roundRect">
+            <a:avLst>
+              <a:gd name="adj" fmla="val 19048"/>
             </a:avLst>
           </a:prstGeom>
           <a:solidFill>
@@ -15451,39 +14706,14 @@
       </p:sp>
       <p:sp>
         <p:nvSpPr>
-          <p:cNvPr id="50" name="Shape 42"/>
-          <p:cNvSpPr/>
-          <p:nvPr/>
-        </p:nvSpPr>
-        <p:spPr>
-          <a:xfrm>
-            <a:off x="4800600" y="2697480"/>
-            <a:ext cx="91440" cy="91440"/>
-          </a:xfrm>
-          <a:prstGeom prst="ellipse">
-            <a:avLst/>
-          </a:prstGeom>
-          <a:solidFill>
-            <a:srgbClr val="13919B"/>
-          </a:solidFill>
-          <a:ln w="12700">
-            <a:solidFill>
-              <a:srgbClr val="13919B"/>
-            </a:solidFill>
-            <a:prstDash val="solid"/>
-          </a:ln>
-        </p:spPr>
-      </p:sp>
-      <p:sp>
-        <p:nvSpPr>
-          <p:cNvPr id="51" name="Text 43"/>
-          <p:cNvSpPr txBox="1"/>
-          <p:nvPr/>
-        </p:nvSpPr>
-        <p:spPr>
-          <a:xfrm>
-            <a:off x="4956048" y="2642616"/>
-            <a:ext cx="2487168" cy="201168"/>
+          <p:cNvPr id="54" name="Text 43"/>
+          <p:cNvSpPr txBox="1"/>
+          <p:nvPr/>
+        </p:nvSpPr>
+        <p:spPr>
+          <a:xfrm>
+            <a:off x="4800600" y="3858768"/>
+            <a:ext cx="3977640" cy="347472"/>
           </a:xfrm>
           <a:prstGeom prst="rect">
             <a:avLst/>
@@ -15499,7 +14729,18 @@
               <a:buNone/>
             </a:pPr>
             <a:r>
-              <a:rPr lang="en-US" sz="650" dirty="0">
+              <a:rPr lang="en-US" sz="630" b="1" dirty="0">
+                <a:solidFill>
+                  <a:srgbClr val="13919B"/>
+                </a:solidFill>
+                <a:latin typeface="Calibri" pitchFamily="34" charset="0"/>
+                <a:ea typeface="Calibri" pitchFamily="34" charset="-122"/>
+                <a:cs typeface="Calibri" pitchFamily="34" charset="-120"/>
+              </a:rPr>
+              <a:t>Cost falls further over time.</a:t>
+            </a:r>
+            <a:r>
+              <a:rPr lang="en-US" sz="630" dirty="0">
                 <a:solidFill>
                   <a:srgbClr val="1F2937"/>
                 </a:solidFill>
@@ -15507,49 +14748,44 @@
                 <a:ea typeface="Calibri" pitchFamily="34" charset="-122"/>
                 <a:cs typeface="Calibri" pitchFamily="34" charset="-120"/>
               </a:rPr>
-              <a:t>50% answer on the 1st attempt, 76% by the 3rd, 99.5% by the 9th</a:t>
-            </a:r>
-            <a:endParaRPr lang="en-US" sz="650" dirty="0"/>
-          </a:p>
-        </p:txBody>
-      </p:sp>
-      <p:sp>
-        <p:nvSpPr>
-          <p:cNvPr id="52" name="Shape 44"/>
-          <p:cNvSpPr/>
-          <p:nvPr/>
-        </p:nvSpPr>
-        <p:spPr>
-          <a:xfrm>
-            <a:off x="7479792" y="2674620"/>
-            <a:ext cx="1344168" cy="137160"/>
-          </a:xfrm>
-          <a:prstGeom prst="roundRect">
-            <a:avLst>
-              <a:gd name="adj" fmla="val 50000"/>
-            </a:avLst>
-          </a:prstGeom>
-          <a:solidFill>
-            <a:srgbClr val="FFFFFF"/>
-          </a:solidFill>
-          <a:ln w="9525">
-            <a:solidFill>
-              <a:srgbClr val="FFFFFF"/>
-            </a:solidFill>
-            <a:prstDash val="solid"/>
-          </a:ln>
-        </p:spPr>
-      </p:sp>
-      <p:sp>
-        <p:nvSpPr>
-          <p:cNvPr id="53" name="Text 45"/>
-          <p:cNvSpPr txBox="1"/>
-          <p:nvPr/>
-        </p:nvSpPr>
-        <p:spPr>
-          <a:xfrm>
-            <a:off x="7534656" y="2674620"/>
-            <a:ext cx="1252728" cy="137160"/>
+              <a:t> Frequent questions get pre-written, verified answers and audio (answer cache, slide 3); Sarvam bills cached input at ₹10.98 vs ₹29.28 per 1M tokens; at national scale ~70% of speech moves to free IndicConformer → </a:t>
+            </a:r>
+            <a:r>
+              <a:rPr lang="en-US" sz="630" b="1" dirty="0">
+                <a:solidFill>
+                  <a:srgbClr val="1F9D63"/>
+                </a:solidFill>
+                <a:latin typeface="Calibri" pitchFamily="34" charset="0"/>
+                <a:ea typeface="Calibri" pitchFamily="34" charset="-122"/>
+                <a:cs typeface="Calibri" pitchFamily="34" charset="-120"/>
+              </a:rPr>
+              <a:t>₹21–49 per profile</a:t>
+            </a:r>
+            <a:r>
+              <a:rPr lang="en-US" sz="630" dirty="0">
+                <a:solidFill>
+                  <a:srgbClr val="1F2937"/>
+                </a:solidFill>
+                <a:latin typeface="Calibri" pitchFamily="34" charset="0"/>
+                <a:ea typeface="Calibri" pitchFamily="34" charset="-122"/>
+                <a:cs typeface="Calibri" pitchFamily="34" charset="-120"/>
+              </a:rPr>
+              <a:t>.</a:t>
+            </a:r>
+            <a:endParaRPr lang="en-US" sz="630" dirty="0"/>
+          </a:p>
+        </p:txBody>
+      </p:sp>
+      <p:sp>
+        <p:nvSpPr>
+          <p:cNvPr id="55" name="Text 44"/>
+          <p:cNvSpPr txBox="1"/>
+          <p:nvPr/>
+        </p:nvSpPr>
+        <p:spPr>
+          <a:xfrm>
+            <a:off x="274320" y="4572000"/>
+            <a:ext cx="8595360" cy="182880"/>
           </a:xfrm>
           <a:prstGeom prst="rect">
             <a:avLst/>
@@ -15565,15 +14801,76 @@
               <a:buNone/>
             </a:pPr>
             <a:r>
+              <a:rPr lang="en-US" sz="850" b="1" spc="120" kern="0" dirty="0">
+                <a:solidFill>
+                  <a:srgbClr val="D64545"/>
+                </a:solidFill>
+                <a:latin typeface="Calibri" pitchFamily="34" charset="0"/>
+                <a:ea typeface="Calibri" pitchFamily="34" charset="-122"/>
+                <a:cs typeface="Calibri" pitchFamily="34" charset="-120"/>
+              </a:rPr>
+              <a:t>WHAT COULD GO WRONG — AND WHAT ALREADY HANDLES IT  </a:t>
+            </a:r>
+            <a:endParaRPr lang="en-US" sz="850" dirty="0"/>
+          </a:p>
+        </p:txBody>
+      </p:sp>
+      <p:sp>
+        <p:nvSpPr>
+          <p:cNvPr id="56" name="Text 45"/>
+          <p:cNvSpPr txBox="1"/>
+          <p:nvPr/>
+        </p:nvSpPr>
+        <p:spPr>
+          <a:xfrm>
+            <a:off x="274320" y="4736592"/>
+            <a:ext cx="4251960" cy="100584"/>
+          </a:xfrm>
+          <a:prstGeom prst="rect">
+            <a:avLst/>
+          </a:prstGeom>
+          <a:noFill/>
+          <a:ln/>
+        </p:spPr>
+        <p:txBody>
+          <a:bodyPr wrap="square" lIns="0" tIns="0" rIns="0" bIns="0" rtlCol="0" anchor="ctr"/>
+          <a:lstStyle/>
+          <a:p>
+            <a:pPr indent="0" marL="0">
+              <a:buNone/>
+            </a:pPr>
+            <a:r>
               <a:rPr lang="en-US" sz="600" b="1" dirty="0">
                 <a:solidFill>
-                  <a:srgbClr val="13919B"/>
-                </a:solidFill>
-                <a:latin typeface="Calibri" pitchFamily="34" charset="0"/>
-                <a:ea typeface="Calibri" pitchFamily="34" charset="-122"/>
-                <a:cs typeface="Calibri" pitchFamily="34" charset="-120"/>
-              </a:rPr>
-              <a:t>Source: Kilkari, BMJ Global Health 2021</a:t>
+                  <a:srgbClr val="D64545"/>
+                </a:solidFill>
+                <a:latin typeface="Calibri" pitchFamily="34" charset="0"/>
+                <a:ea typeface="Calibri" pitchFamily="34" charset="-122"/>
+                <a:cs typeface="Calibri" pitchFamily="34" charset="-120"/>
+              </a:rPr>
+              <a:t>✗ Village dialects are hard to understand</a:t>
+            </a:r>
+            <a:r>
+              <a:rPr lang="en-US" sz="600" b="1" dirty="0">
+                <a:solidFill>
+                  <a:srgbClr val="1F9D63"/>
+                </a:solidFill>
+                <a:latin typeface="Calibri" pitchFamily="34" charset="0"/>
+                <a:ea typeface="Calibri" pitchFamily="34" charset="-122"/>
+                <a:cs typeface="Calibri" pitchFamily="34" charset="-120"/>
+              </a:rPr>
+              <a:t>   ✓ solved: </a:t>
+            </a:r>
+            <a:r>
+              <a:rPr lang="en-US" sz="600" dirty="0">
+                <a:solidFill>
+                  <a:srgbClr val="1F2937"/>
+                </a:solidFill>
+                <a:latin typeface="Calibri" pitchFamily="34" charset="0"/>
+                <a:ea typeface="Calibri" pitchFamily="34" charset="-122"/>
+                <a:cs typeface="Calibri" pitchFamily="34" charset="-120"/>
+              </a:rPr>
+              <a:t>facts by keypad, every answer read back, bigger model, then a human</a:t>
             </a:r>
             <a:endParaRPr lang="en-US" sz="600" dirty="0"/>
           </a:p>
@@ -15581,39 +14878,14 @@
       </p:sp>
       <p:sp>
         <p:nvSpPr>
-          <p:cNvPr id="54" name="Shape 46"/>
-          <p:cNvSpPr/>
-          <p:nvPr/>
-        </p:nvSpPr>
-        <p:spPr>
-          <a:xfrm>
-            <a:off x="4800600" y="2912364"/>
-            <a:ext cx="91440" cy="91440"/>
-          </a:xfrm>
-          <a:prstGeom prst="ellipse">
-            <a:avLst/>
-          </a:prstGeom>
-          <a:solidFill>
-            <a:srgbClr val="2E6FD6"/>
-          </a:solidFill>
-          <a:ln w="12700">
-            <a:solidFill>
-              <a:srgbClr val="2E6FD6"/>
-            </a:solidFill>
-            <a:prstDash val="solid"/>
-          </a:ln>
-        </p:spPr>
-      </p:sp>
-      <p:sp>
-        <p:nvSpPr>
-          <p:cNvPr id="55" name="Text 47"/>
-          <p:cNvSpPr txBox="1"/>
-          <p:nvPr/>
-        </p:nvSpPr>
-        <p:spPr>
-          <a:xfrm>
-            <a:off x="4956048" y="2857500"/>
-            <a:ext cx="2487168" cy="201168"/>
+          <p:cNvPr id="57" name="Text 46"/>
+          <p:cNvSpPr txBox="1"/>
+          <p:nvPr/>
+        </p:nvSpPr>
+        <p:spPr>
+          <a:xfrm>
+            <a:off x="4617720" y="4736592"/>
+            <a:ext cx="4251960" cy="100584"/>
           </a:xfrm>
           <a:prstGeom prst="rect">
             <a:avLst/>
@@ -15629,7 +14901,29 @@
               <a:buNone/>
             </a:pPr>
             <a:r>
-              <a:rPr lang="en-US" sz="650" dirty="0">
+              <a:rPr lang="en-US" sz="600" b="1" dirty="0">
+                <a:solidFill>
+                  <a:srgbClr val="D64545"/>
+                </a:solidFill>
+                <a:latin typeface="Calibri" pitchFamily="34" charset="0"/>
+                <a:ea typeface="Calibri" pitchFamily="34" charset="-122"/>
+                <a:cs typeface="Calibri" pitchFamily="34" charset="-120"/>
+              </a:rPr>
+              <a:t>✗ The AI could say something wrong</a:t>
+            </a:r>
+            <a:r>
+              <a:rPr lang="en-US" sz="600" b="1" dirty="0">
+                <a:solidFill>
+                  <a:srgbClr val="1F9D63"/>
+                </a:solidFill>
+                <a:latin typeface="Calibri" pitchFamily="34" charset="0"/>
+                <a:ea typeface="Calibri" pitchFamily="34" charset="-122"/>
+                <a:cs typeface="Calibri" pitchFamily="34" charset="-120"/>
+              </a:rPr>
+              <a:t>   ✓ solved: </a:t>
+            </a:r>
+            <a:r>
+              <a:rPr lang="en-US" sz="600" dirty="0">
                 <a:solidFill>
                   <a:srgbClr val="1F2937"/>
                 </a:solidFill>
@@ -15637,49 +14931,22 @@
                 <a:ea typeface="Calibri" pitchFamily="34" charset="-122"/>
                 <a:cs typeface="Calibri" pitchFamily="34" charset="-120"/>
               </a:rPr>
-              <a:t>~80% of answered calls finish the interview; ~85% of those finish the options → 420–517 profiles per 1,000 missed calls</a:t>
-            </a:r>
-            <a:endParaRPr lang="en-US" sz="650" dirty="0"/>
-          </a:p>
-        </p:txBody>
-      </p:sp>
-      <p:sp>
-        <p:nvSpPr>
-          <p:cNvPr id="56" name="Shape 48"/>
-          <p:cNvSpPr/>
-          <p:nvPr/>
-        </p:nvSpPr>
-        <p:spPr>
-          <a:xfrm>
-            <a:off x="7479792" y="2889504"/>
-            <a:ext cx="1344168" cy="137160"/>
-          </a:xfrm>
-          <a:prstGeom prst="roundRect">
-            <a:avLst>
-              <a:gd name="adj" fmla="val 50000"/>
-            </a:avLst>
-          </a:prstGeom>
-          <a:solidFill>
-            <a:srgbClr val="FFFFFF"/>
-          </a:solidFill>
-          <a:ln w="9525">
-            <a:solidFill>
-              <a:srgbClr val="FFFFFF"/>
-            </a:solidFill>
-            <a:prstDash val="solid"/>
-          </a:ln>
-        </p:spPr>
-      </p:sp>
-      <p:sp>
-        <p:nvSpPr>
-          <p:cNvPr id="57" name="Text 49"/>
-          <p:cNvSpPr txBox="1"/>
-          <p:nvPr/>
-        </p:nvSpPr>
-        <p:spPr>
-          <a:xfrm>
-            <a:off x="7534656" y="2889504"/>
-            <a:ext cx="1252728" cy="137160"/>
+              <a:t>SATYA blocks anything not in the government database</a:t>
+            </a:r>
+            <a:endParaRPr lang="en-US" sz="600" dirty="0"/>
+          </a:p>
+        </p:txBody>
+      </p:sp>
+      <p:sp>
+        <p:nvSpPr>
+          <p:cNvPr id="58" name="Text 47"/>
+          <p:cNvSpPr txBox="1"/>
+          <p:nvPr/>
+        </p:nvSpPr>
+        <p:spPr>
+          <a:xfrm>
+            <a:off x="274320" y="4841748"/>
+            <a:ext cx="4251960" cy="100584"/>
           </a:xfrm>
           <a:prstGeom prst="rect">
             <a:avLst/>
@@ -15697,13 +14964,35 @@
             <a:r>
               <a:rPr lang="en-US" sz="600" b="1" dirty="0">
                 <a:solidFill>
-                  <a:srgbClr val="2E6FD6"/>
-                </a:solidFill>
-                <a:latin typeface="Calibri" pitchFamily="34" charset="0"/>
-                <a:ea typeface="Calibri" pitchFamily="34" charset="-122"/>
-                <a:cs typeface="Calibri" pitchFamily="34" charset="-120"/>
-              </a:rPr>
-              <a:t>Source: our funnel estimate</a:t>
+                  <a:srgbClr val="D64545"/>
+                </a:solidFill>
+                <a:latin typeface="Calibri" pitchFamily="34" charset="0"/>
+                <a:ea typeface="Calibri" pitchFamily="34" charset="-122"/>
+                <a:cs typeface="Calibri" pitchFamily="34" charset="-120"/>
+              </a:rPr>
+              <a:t>✗ People ignore unknown numbers</a:t>
+            </a:r>
+            <a:r>
+              <a:rPr lang="en-US" sz="600" b="1" dirty="0">
+                <a:solidFill>
+                  <a:srgbClr val="1F9D63"/>
+                </a:solidFill>
+                <a:latin typeface="Calibri" pitchFamily="34" charset="0"/>
+                <a:ea typeface="Calibri" pitchFamily="34" charset="-122"/>
+                <a:cs typeface="Calibri" pitchFamily="34" charset="-120"/>
+              </a:rPr>
+              <a:t>   ✓ solved: </a:t>
+            </a:r>
+            <a:r>
+              <a:rPr lang="en-US" sz="600" dirty="0">
+                <a:solidFill>
+                  <a:srgbClr val="1F2937"/>
+                </a:solidFill>
+                <a:latin typeface="Calibri" pitchFamily="34" charset="0"/>
+                <a:ea typeface="Calibri" pitchFamily="34" charset="-122"/>
+                <a:cs typeface="Calibri" pitchFamily="34" charset="-120"/>
+              </a:rPr>
+              <a:t>he calls first; the call-back comes from an official 1600 number</a:t>
             </a:r>
             <a:endParaRPr lang="en-US" sz="600" dirty="0"/>
           </a:p>
@@ -15711,39 +15000,14 @@
       </p:sp>
       <p:sp>
         <p:nvSpPr>
-          <p:cNvPr id="58" name="Shape 50"/>
-          <p:cNvSpPr/>
-          <p:nvPr/>
-        </p:nvSpPr>
-        <p:spPr>
-          <a:xfrm>
-            <a:off x="4800600" y="3127248"/>
-            <a:ext cx="91440" cy="91440"/>
-          </a:xfrm>
-          <a:prstGeom prst="ellipse">
-            <a:avLst/>
-          </a:prstGeom>
-          <a:solidFill>
-            <a:srgbClr val="EF8A22"/>
-          </a:solidFill>
-          <a:ln w="12700">
-            <a:solidFill>
-              <a:srgbClr val="EF8A22"/>
-            </a:solidFill>
-            <a:prstDash val="solid"/>
-          </a:ln>
-        </p:spPr>
-      </p:sp>
-      <p:sp>
-        <p:nvSpPr>
-          <p:cNvPr id="59" name="Text 51"/>
-          <p:cNvSpPr txBox="1"/>
-          <p:nvPr/>
-        </p:nvSpPr>
-        <p:spPr>
-          <a:xfrm>
-            <a:off x="4956048" y="3072384"/>
-            <a:ext cx="2487168" cy="201168"/>
+          <p:cNvPr id="59" name="Text 48"/>
+          <p:cNvSpPr txBox="1"/>
+          <p:nvPr/>
+        </p:nvSpPr>
+        <p:spPr>
+          <a:xfrm>
+            <a:off x="4617720" y="4841748"/>
+            <a:ext cx="4251960" cy="100584"/>
           </a:xfrm>
           <a:prstGeom prst="rect">
             <a:avLst/>
@@ -15759,7 +15023,29 @@
               <a:buNone/>
             </a:pPr>
             <a:r>
-              <a:rPr lang="en-US" sz="650" dirty="0">
+              <a:rPr lang="en-US" sz="600" b="1" dirty="0">
+                <a:solidFill>
+                  <a:srgbClr val="D64545"/>
+                </a:solidFill>
+                <a:latin typeface="Calibri" pitchFamily="34" charset="0"/>
+                <a:ea typeface="Calibri" pitchFamily="34" charset="-122"/>
+                <a:cs typeface="Calibri" pitchFamily="34" charset="-120"/>
+              </a:rPr>
+              <a:t>✗ Slow replies bore callers</a:t>
+            </a:r>
+            <a:r>
+              <a:rPr lang="en-US" sz="600" b="1" dirty="0">
+                <a:solidFill>
+                  <a:srgbClr val="1F9D63"/>
+                </a:solidFill>
+                <a:latin typeface="Calibri" pitchFamily="34" charset="0"/>
+                <a:ea typeface="Calibri" pitchFamily="34" charset="-122"/>
+                <a:cs typeface="Calibri" pitchFamily="34" charset="-120"/>
+              </a:rPr>
+              <a:t>   ✓ solved: </a:t>
+            </a:r>
+            <a:r>
+              <a:rPr lang="en-US" sz="600" dirty="0">
                 <a:solidFill>
                   <a:srgbClr val="1F2937"/>
                 </a:solidFill>
@@ -15767,863 +15053,9 @@
                 <a:ea typeface="Calibri" pitchFamily="34" charset="-122"/>
                 <a:cs typeface="Calibri" pitchFamily="34" charset="-120"/>
               </a:rPr>
-              <a:t>10–20% need a human counsellor call-back — design target ≤ 20%</a:t>
-            </a:r>
-            <a:endParaRPr lang="en-US" sz="650" dirty="0"/>
-          </a:p>
-        </p:txBody>
-      </p:sp>
-      <p:sp>
-        <p:nvSpPr>
-          <p:cNvPr id="60" name="Shape 52"/>
-          <p:cNvSpPr/>
-          <p:nvPr/>
-        </p:nvSpPr>
-        <p:spPr>
-          <a:xfrm>
-            <a:off x="7479792" y="3104388"/>
-            <a:ext cx="1344168" cy="137160"/>
-          </a:xfrm>
-          <a:prstGeom prst="roundRect">
-            <a:avLst>
-              <a:gd name="adj" fmla="val 50000"/>
-            </a:avLst>
-          </a:prstGeom>
-          <a:solidFill>
-            <a:srgbClr val="FFFFFF"/>
-          </a:solidFill>
-          <a:ln w="9525">
-            <a:solidFill>
-              <a:srgbClr val="FFFFFF"/>
-            </a:solidFill>
-            <a:prstDash val="solid"/>
-          </a:ln>
-        </p:spPr>
-      </p:sp>
-      <p:sp>
-        <p:nvSpPr>
-          <p:cNvPr id="61" name="Text 53"/>
-          <p:cNvSpPr txBox="1"/>
-          <p:nvPr/>
-        </p:nvSpPr>
-        <p:spPr>
-          <a:xfrm>
-            <a:off x="7534656" y="3104388"/>
-            <a:ext cx="1252728" cy="137160"/>
-          </a:xfrm>
-          <a:prstGeom prst="rect">
-            <a:avLst/>
-          </a:prstGeom>
-          <a:noFill/>
-          <a:ln/>
-        </p:spPr>
-        <p:txBody>
-          <a:bodyPr wrap="square" lIns="0" tIns="0" rIns="0" bIns="0" rtlCol="0" anchor="ctr"/>
-          <a:lstStyle/>
-          <a:p>
-            <a:pPr indent="0" marL="0">
-              <a:buNone/>
-            </a:pPr>
-            <a:r>
-              <a:rPr lang="en-US" sz="600" b="1" dirty="0">
-                <a:solidFill>
-                  <a:srgbClr val="EF8A22"/>
-                </a:solidFill>
-                <a:latin typeface="Calibri" pitchFamily="34" charset="0"/>
-                <a:ea typeface="Calibri" pitchFamily="34" charset="-122"/>
-                <a:cs typeface="Calibri" pitchFamily="34" charset="-120"/>
-              </a:rPr>
-              <a:t>Source: our design target</a:t>
+              <a:t>streaming voice, pre-recorded questions, keypad turns are instant</a:t>
             </a:r>
             <a:endParaRPr lang="en-US" sz="600" dirty="0"/>
-          </a:p>
-        </p:txBody>
-      </p:sp>
-      <p:sp>
-        <p:nvSpPr>
-          <p:cNvPr id="62" name="Shape 54"/>
-          <p:cNvSpPr/>
-          <p:nvPr/>
-        </p:nvSpPr>
-        <p:spPr>
-          <a:xfrm>
-            <a:off x="4800600" y="3342132"/>
-            <a:ext cx="91440" cy="91440"/>
-          </a:xfrm>
-          <a:prstGeom prst="ellipse">
-            <a:avLst/>
-          </a:prstGeom>
-          <a:solidFill>
-            <a:srgbClr val="7A5AF8"/>
-          </a:solidFill>
-          <a:ln w="12700">
-            <a:solidFill>
-              <a:srgbClr val="7A5AF8"/>
-            </a:solidFill>
-            <a:prstDash val="solid"/>
-          </a:ln>
-        </p:spPr>
-      </p:sp>
-      <p:sp>
-        <p:nvSpPr>
-          <p:cNvPr id="63" name="Text 55"/>
-          <p:cNvSpPr txBox="1"/>
-          <p:nvPr/>
-        </p:nvSpPr>
-        <p:spPr>
-          <a:xfrm>
-            <a:off x="4956048" y="3287268"/>
-            <a:ext cx="2487168" cy="201168"/>
-          </a:xfrm>
-          <a:prstGeom prst="rect">
-            <a:avLst/>
-          </a:prstGeom>
-          <a:noFill/>
-          <a:ln/>
-        </p:spPr>
-        <p:txBody>
-          <a:bodyPr wrap="square" lIns="0" tIns="0" rIns="0" bIns="0" rtlCol="0" anchor="ctr"/>
-          <a:lstStyle/>
-          <a:p>
-            <a:pPr indent="0" marL="0">
-              <a:buNone/>
-            </a:pPr>
-            <a:r>
-              <a:rPr lang="en-US" sz="650" dirty="0">
-                <a:solidFill>
-                  <a:srgbClr val="1F2937"/>
-                </a:solidFill>
-                <a:latin typeface="Calibri" pitchFamily="34" charset="0"/>
-                <a:ea typeface="Calibri" pitchFamily="34" charset="-122"/>
-                <a:cs typeface="Calibri" pitchFamily="34" charset="-120"/>
-              </a:rPr>
-              <a:t>Can't be reached by phone? The web portal (mobile + OTP) is always open.</a:t>
-            </a:r>
-            <a:endParaRPr lang="en-US" sz="650" dirty="0"/>
-          </a:p>
-        </p:txBody>
-      </p:sp>
-      <p:sp>
-        <p:nvSpPr>
-          <p:cNvPr id="64" name="Text 56"/>
-          <p:cNvSpPr txBox="1"/>
-          <p:nvPr/>
-        </p:nvSpPr>
-        <p:spPr>
-          <a:xfrm>
-            <a:off x="4709160" y="3602736"/>
-            <a:ext cx="4160520" cy="182880"/>
-          </a:xfrm>
-          <a:prstGeom prst="rect">
-            <a:avLst/>
-          </a:prstGeom>
-          <a:noFill/>
-          <a:ln/>
-        </p:spPr>
-        <p:txBody>
-          <a:bodyPr wrap="square" lIns="0" tIns="0" rIns="0" bIns="0" rtlCol="0" anchor="ctr"/>
-          <a:lstStyle/>
-          <a:p>
-            <a:pPr indent="0" marL="0">
-              <a:buNone/>
-            </a:pPr>
-            <a:r>
-              <a:rPr lang="en-US" sz="850" b="1" spc="120" kern="0" dirty="0">
-                <a:solidFill>
-                  <a:srgbClr val="D4930D"/>
-                </a:solidFill>
-                <a:latin typeface="Calibri" pitchFamily="34" charset="0"/>
-                <a:ea typeface="Calibri" pitchFamily="34" charset="-122"/>
-                <a:cs typeface="Calibri" pitchFamily="34" charset="-120"/>
-              </a:rPr>
-              <a:t>THE GOVERNMENT CAN AFFORD IT  </a:t>
-            </a:r>
-            <a:r>
-              <a:rPr lang="en-US" sz="750" i="1" dirty="0">
-                <a:solidFill>
-                  <a:srgbClr val="6B7280"/>
-                </a:solidFill>
-                <a:latin typeface="Calibri" pitchFamily="34" charset="0"/>
-                <a:ea typeface="Calibri" pitchFamily="34" charset="-122"/>
-                <a:cs typeface="Calibri" pitchFamily="34" charset="-120"/>
-              </a:rPr>
-              <a:t>less than ₹1 of every ₹100 it already spends</a:t>
-            </a:r>
-            <a:endParaRPr lang="en-US" sz="850" dirty="0"/>
-          </a:p>
-        </p:txBody>
-      </p:sp>
-      <p:sp>
-        <p:nvSpPr>
-          <p:cNvPr id="65" name="Shape 57"/>
-          <p:cNvSpPr/>
-          <p:nvPr/>
-        </p:nvSpPr>
-        <p:spPr>
-          <a:xfrm>
-            <a:off x="4709160" y="3803904"/>
-            <a:ext cx="4160520" cy="329184"/>
-          </a:xfrm>
-          <a:prstGeom prst="roundRect">
-            <a:avLst>
-              <a:gd name="adj" fmla="val 22222"/>
-            </a:avLst>
-          </a:prstGeom>
-          <a:solidFill>
-            <a:srgbClr val="E3F6EC"/>
-          </a:solidFill>
-          <a:ln w="9525">
-            <a:solidFill>
-              <a:srgbClr val="E3F6EC"/>
-            </a:solidFill>
-            <a:prstDash val="solid"/>
-          </a:ln>
-        </p:spPr>
-      </p:sp>
-      <p:sp>
-        <p:nvSpPr>
-          <p:cNvPr id="66" name="Shape 58"/>
-          <p:cNvSpPr/>
-          <p:nvPr/>
-        </p:nvSpPr>
-        <p:spPr>
-          <a:xfrm>
-            <a:off x="4773168" y="3849624"/>
-            <a:ext cx="237744" cy="237744"/>
-          </a:xfrm>
-          <a:prstGeom prst="roundRect">
-            <a:avLst>
-              <a:gd name="adj" fmla="val 22000"/>
-            </a:avLst>
-          </a:prstGeom>
-          <a:solidFill>
-            <a:srgbClr val="1F9D63"/>
-          </a:solidFill>
-          <a:ln w="12700">
-            <a:solidFill>
-              <a:srgbClr val="1F9D63"/>
-            </a:solidFill>
-            <a:prstDash val="solid"/>
-          </a:ln>
-        </p:spPr>
-      </p:sp>
-      <p:pic>
-        <p:nvPicPr>
-          <p:cNvPr id="67" name="Image 5" descr="preencoded.png">    </p:cNvPr>
-          <p:cNvPicPr>
-            <a:picLocks noChangeAspect="1"/>
-          </p:cNvPicPr>
-          <p:nvPr/>
-        </p:nvPicPr>
-        <p:blipFill>
-          <a:blip r:embed="rId6"/>
-          <a:stretch>
-            <a:fillRect/>
-          </a:stretch>
-        </p:blipFill>
-        <p:spPr>
-          <a:xfrm>
-            <a:off x="4808830" y="3885286"/>
-            <a:ext cx="166421" cy="166421"/>
-          </a:xfrm>
-          <a:prstGeom prst="rect">
-            <a:avLst/>
-          </a:prstGeom>
-        </p:spPr>
-      </p:pic>
-      <p:sp>
-        <p:nvSpPr>
-          <p:cNvPr id="68" name="Text 59"/>
-          <p:cNvSpPr txBox="1"/>
-          <p:nvPr/>
-        </p:nvSpPr>
-        <p:spPr>
-          <a:xfrm>
-            <a:off x="5084064" y="3822192"/>
-            <a:ext cx="3730752" cy="310896"/>
-          </a:xfrm>
-          <a:prstGeom prst="rect">
-            <a:avLst/>
-          </a:prstGeom>
-          <a:noFill/>
-          <a:ln/>
-        </p:spPr>
-        <p:txBody>
-          <a:bodyPr wrap="square" lIns="0" tIns="0" rIns="0" bIns="0" rtlCol="0" anchor="ctr"/>
-          <a:lstStyle/>
-          <a:p>
-            <a:pPr indent="0" marL="0">
-              <a:buNone/>
-            </a:pPr>
-            <a:r>
-              <a:rPr lang="en-US" sz="780" b="1" dirty="0">
-                <a:solidFill>
-                  <a:srgbClr val="1F9D63"/>
-                </a:solidFill>
-                <a:latin typeface="Calibri" pitchFamily="34" charset="0"/>
-                <a:ea typeface="Calibri" pitchFamily="34" charset="-122"/>
-                <a:cs typeface="Calibri" pitchFamily="34" charset="-120"/>
-              </a:rPr>
-              <a:t>0.05–0.10% of the budget  </a:t>
-            </a:r>
-            <a:r>
-              <a:rPr lang="en-US" sz="650" b="1" dirty="0">
-                <a:solidFill>
-                  <a:srgbClr val="5B6B7F"/>
-                </a:solidFill>
-                <a:latin typeface="Calibri" pitchFamily="34" charset="0"/>
-                <a:ea typeface="Calibri" pitchFamily="34" charset="-122"/>
-                <a:cs typeface="Calibri" pitchFamily="34" charset="-120"/>
-              </a:rPr>
-              <a:t>is all SkillCall needs</a:t>
-            </a:r>
-            <a:endParaRPr lang="en-US" sz="780" dirty="0"/>
-          </a:p>
-          <a:p>
-            <a:pPr indent="0" marL="0">
-              <a:buNone/>
-            </a:pPr>
-            <a:r>
-              <a:rPr lang="en-US" sz="620" dirty="0">
-                <a:solidFill>
-                  <a:srgbClr val="1F2937"/>
-                </a:solidFill>
-                <a:latin typeface="Calibri" pitchFamily="34" charset="0"/>
-                <a:ea typeface="Calibri" pitchFamily="34" charset="-122"/>
-                <a:cs typeface="Calibri" pitchFamily="34" charset="-120"/>
-              </a:rPr>
-              <a:t>All of India: ₹1.1–2.1 crore a year vs PM-AJAY's ₹2,140 crore (2026-27).</a:t>
-            </a:r>
-            <a:endParaRPr lang="en-US" sz="780" dirty="0"/>
-          </a:p>
-        </p:txBody>
-      </p:sp>
-      <p:sp>
-        <p:nvSpPr>
-          <p:cNvPr id="69" name="Shape 60"/>
-          <p:cNvSpPr/>
-          <p:nvPr/>
-        </p:nvSpPr>
-        <p:spPr>
-          <a:xfrm>
-            <a:off x="4709160" y="4169664"/>
-            <a:ext cx="4160520" cy="329184"/>
-          </a:xfrm>
-          <a:prstGeom prst="roundRect">
-            <a:avLst>
-              <a:gd name="adj" fmla="val 22222"/>
-            </a:avLst>
-          </a:prstGeom>
-          <a:solidFill>
-            <a:srgbClr val="E6EEFC"/>
-          </a:solidFill>
-          <a:ln w="9525">
-            <a:solidFill>
-              <a:srgbClr val="E6EEFC"/>
-            </a:solidFill>
-            <a:prstDash val="solid"/>
-          </a:ln>
-        </p:spPr>
-      </p:sp>
-      <p:sp>
-        <p:nvSpPr>
-          <p:cNvPr id="70" name="Shape 61"/>
-          <p:cNvSpPr/>
-          <p:nvPr/>
-        </p:nvSpPr>
-        <p:spPr>
-          <a:xfrm>
-            <a:off x="4773168" y="4215384"/>
-            <a:ext cx="237744" cy="237744"/>
-          </a:xfrm>
-          <a:prstGeom prst="roundRect">
-            <a:avLst>
-              <a:gd name="adj" fmla="val 22000"/>
-            </a:avLst>
-          </a:prstGeom>
-          <a:solidFill>
-            <a:srgbClr val="2E6FD6"/>
-          </a:solidFill>
-          <a:ln w="12700">
-            <a:solidFill>
-              <a:srgbClr val="2E6FD6"/>
-            </a:solidFill>
-            <a:prstDash val="solid"/>
-          </a:ln>
-        </p:spPr>
-      </p:sp>
-      <p:pic>
-        <p:nvPicPr>
-          <p:cNvPr id="71" name="Image 6" descr="preencoded.png">    </p:cNvPr>
-          <p:cNvPicPr>
-            <a:picLocks noChangeAspect="1"/>
-          </p:cNvPicPr>
-          <p:nvPr/>
-        </p:nvPicPr>
-        <p:blipFill>
-          <a:blip r:embed="rId7"/>
-          <a:stretch>
-            <a:fillRect/>
-          </a:stretch>
-        </p:blipFill>
-        <p:spPr>
-          <a:xfrm>
-            <a:off x="4808830" y="4251046"/>
-            <a:ext cx="166421" cy="166421"/>
-          </a:xfrm>
-          <a:prstGeom prst="rect">
-            <a:avLst/>
-          </a:prstGeom>
-        </p:spPr>
-      </p:pic>
-      <p:sp>
-        <p:nvSpPr>
-          <p:cNvPr id="72" name="Text 62"/>
-          <p:cNvSpPr txBox="1"/>
-          <p:nvPr/>
-        </p:nvSpPr>
-        <p:spPr>
-          <a:xfrm>
-            <a:off x="5084064" y="4187952"/>
-            <a:ext cx="3730752" cy="310896"/>
-          </a:xfrm>
-          <a:prstGeom prst="rect">
-            <a:avLst/>
-          </a:prstGeom>
-          <a:noFill/>
-          <a:ln/>
-        </p:spPr>
-        <p:txBody>
-          <a:bodyPr wrap="square" lIns="0" tIns="0" rIns="0" bIns="0" rtlCol="0" anchor="ctr"/>
-          <a:lstStyle/>
-          <a:p>
-            <a:pPr indent="0" marL="0">
-              <a:buNone/>
-            </a:pPr>
-            <a:r>
-              <a:rPr lang="en-US" sz="780" b="1" dirty="0">
-                <a:solidFill>
-                  <a:srgbClr val="2E6FD6"/>
-                </a:solidFill>
-                <a:latin typeface="Calibri" pitchFamily="34" charset="0"/>
-                <a:ea typeface="Calibri" pitchFamily="34" charset="-122"/>
-                <a:cs typeface="Calibri" pitchFamily="34" charset="-120"/>
-              </a:rPr>
-              <a:t>Under ₹1 in every ₹100  </a:t>
-            </a:r>
-            <a:r>
-              <a:rPr lang="en-US" sz="650" b="1" dirty="0">
-                <a:solidFill>
-                  <a:srgbClr val="5B6B7F"/>
-                </a:solidFill>
-                <a:latin typeface="Calibri" pitchFamily="34" charset="0"/>
-                <a:ea typeface="Calibri" pitchFamily="34" charset="-122"/>
-                <a:cs typeface="Calibri" pitchFamily="34" charset="-120"/>
-              </a:rPr>
-              <a:t>of what each beneficiary already gets</a:t>
-            </a:r>
-            <a:endParaRPr lang="en-US" sz="780" dirty="0"/>
-          </a:p>
-          <a:p>
-            <a:pPr indent="0" marL="0">
-              <a:buNone/>
-            </a:pPr>
-            <a:r>
-              <a:rPr lang="en-US" sz="620" dirty="0">
-                <a:solidFill>
-                  <a:srgbClr val="1F2937"/>
-                </a:solidFill>
-                <a:latin typeface="Calibri" pitchFamily="34" charset="0"/>
-                <a:ea typeface="Calibri" pitchFamily="34" charset="-122"/>
-                <a:cs typeface="Calibri" pitchFamily="34" charset="-120"/>
-              </a:rPr>
-              <a:t>≈ ₹220–420 per beneficiary vs ≈ ₹60,700 average GIA support (₹1,219.80 cr ÷ 2,01,006).</a:t>
-            </a:r>
-            <a:endParaRPr lang="en-US" sz="780" dirty="0"/>
-          </a:p>
-        </p:txBody>
-      </p:sp>
-      <p:sp>
-        <p:nvSpPr>
-          <p:cNvPr id="73" name="Shape 63"/>
-          <p:cNvSpPr/>
-          <p:nvPr/>
-        </p:nvSpPr>
-        <p:spPr>
-          <a:xfrm>
-            <a:off x="4709160" y="4535424"/>
-            <a:ext cx="4160520" cy="329184"/>
-          </a:xfrm>
-          <a:prstGeom prst="roundRect">
-            <a:avLst>
-              <a:gd name="adj" fmla="val 22222"/>
-            </a:avLst>
-          </a:prstGeom>
-          <a:solidFill>
-            <a:srgbClr val="EDE9FE"/>
-          </a:solidFill>
-          <a:ln w="9525">
-            <a:solidFill>
-              <a:srgbClr val="EDE9FE"/>
-            </a:solidFill>
-            <a:prstDash val="solid"/>
-          </a:ln>
-        </p:spPr>
-      </p:sp>
-      <p:sp>
-        <p:nvSpPr>
-          <p:cNvPr id="74" name="Shape 64"/>
-          <p:cNvSpPr/>
-          <p:nvPr/>
-        </p:nvSpPr>
-        <p:spPr>
-          <a:xfrm>
-            <a:off x="4773168" y="4581144"/>
-            <a:ext cx="237744" cy="237744"/>
-          </a:xfrm>
-          <a:prstGeom prst="roundRect">
-            <a:avLst>
-              <a:gd name="adj" fmla="val 22000"/>
-            </a:avLst>
-          </a:prstGeom>
-          <a:solidFill>
-            <a:srgbClr val="7A5AF8"/>
-          </a:solidFill>
-          <a:ln w="12700">
-            <a:solidFill>
-              <a:srgbClr val="7A5AF8"/>
-            </a:solidFill>
-            <a:prstDash val="solid"/>
-          </a:ln>
-        </p:spPr>
-      </p:sp>
-      <p:pic>
-        <p:nvPicPr>
-          <p:cNvPr id="75" name="Image 7" descr="preencoded.png">    </p:cNvPr>
-          <p:cNvPicPr>
-            <a:picLocks noChangeAspect="1"/>
-          </p:cNvPicPr>
-          <p:nvPr/>
-        </p:nvPicPr>
-        <p:blipFill>
-          <a:blip r:embed="rId8"/>
-          <a:stretch>
-            <a:fillRect/>
-          </a:stretch>
-        </p:blipFill>
-        <p:spPr>
-          <a:xfrm>
-            <a:off x="4808830" y="4616806"/>
-            <a:ext cx="166421" cy="166421"/>
-          </a:xfrm>
-          <a:prstGeom prst="rect">
-            <a:avLst/>
-          </a:prstGeom>
-        </p:spPr>
-      </p:pic>
-      <p:sp>
-        <p:nvSpPr>
-          <p:cNvPr id="76" name="Text 65"/>
-          <p:cNvSpPr txBox="1"/>
-          <p:nvPr/>
-        </p:nvSpPr>
-        <p:spPr>
-          <a:xfrm>
-            <a:off x="5084064" y="4553712"/>
-            <a:ext cx="3730752" cy="310896"/>
-          </a:xfrm>
-          <a:prstGeom prst="rect">
-            <a:avLst/>
-          </a:prstGeom>
-          <a:noFill/>
-          <a:ln/>
-        </p:spPr>
-        <p:txBody>
-          <a:bodyPr wrap="square" lIns="0" tIns="0" rIns="0" bIns="0" rtlCol="0" anchor="ctr"/>
-          <a:lstStyle/>
-          <a:p>
-            <a:pPr indent="0" marL="0">
-              <a:buNone/>
-            </a:pPr>
-            <a:r>
-              <a:rPr lang="en-US" sz="780" b="1" dirty="0">
-                <a:solidFill>
-                  <a:srgbClr val="7A5AF8"/>
-                </a:solidFill>
-                <a:latin typeface="Calibri" pitchFamily="34" charset="0"/>
-                <a:ea typeface="Calibri" pitchFamily="34" charset="-122"/>
-                <a:cs typeface="Calibri" pitchFamily="34" charset="-120"/>
-              </a:rPr>
-              <a:t>₹9–13 lakh to start  </a:t>
-            </a:r>
-            <a:r>
-              <a:rPr lang="en-US" sz="650" b="1" dirty="0">
-                <a:solidFill>
-                  <a:srgbClr val="5B6B7F"/>
-                </a:solidFill>
-                <a:latin typeface="Calibri" pitchFamily="34" charset="0"/>
-                <a:ea typeface="Calibri" pitchFamily="34" charset="-122"/>
-                <a:cs typeface="Calibri" pitchFamily="34" charset="-120"/>
-              </a:rPr>
-              <a:t>a 6-month pilot in one block</a:t>
-            </a:r>
-            <a:endParaRPr lang="en-US" sz="780" dirty="0"/>
-          </a:p>
-          <a:p>
-            <a:pPr indent="0" marL="0">
-              <a:buNone/>
-            </a:pPr>
-            <a:r>
-              <a:rPr lang="en-US" sz="620" dirty="0">
-                <a:solidFill>
-                  <a:srgbClr val="1F2937"/>
-                </a:solidFill>
-                <a:latin typeface="Calibri" pitchFamily="34" charset="0"/>
-                <a:ea typeface="Calibri" pitchFamily="34" charset="-122"/>
-                <a:cs typeface="Calibri" pitchFamily="34" charset="-120"/>
-              </a:rPr>
-              <a:t>≈ 1,000 families: build, test with real users, then scale to the state.</a:t>
-            </a:r>
-            <a:endParaRPr lang="en-US" sz="780" dirty="0"/>
-          </a:p>
-        </p:txBody>
-      </p:sp>
-      <p:sp>
-        <p:nvSpPr>
-          <p:cNvPr id="77" name="Text 66"/>
-          <p:cNvSpPr txBox="1"/>
-          <p:nvPr/>
-        </p:nvSpPr>
-        <p:spPr>
-          <a:xfrm>
-            <a:off x="274320" y="4462272"/>
-            <a:ext cx="4206240" cy="182880"/>
-          </a:xfrm>
-          <a:prstGeom prst="rect">
-            <a:avLst/>
-          </a:prstGeom>
-          <a:noFill/>
-          <a:ln/>
-        </p:spPr>
-        <p:txBody>
-          <a:bodyPr wrap="square" lIns="0" tIns="0" rIns="0" bIns="0" rtlCol="0" anchor="ctr"/>
-          <a:lstStyle/>
-          <a:p>
-            <a:pPr indent="0" marL="0">
-              <a:buNone/>
-            </a:pPr>
-            <a:r>
-              <a:rPr lang="en-US" sz="850" b="1" spc="120" kern="0" dirty="0">
-                <a:solidFill>
-                  <a:srgbClr val="D64545"/>
-                </a:solidFill>
-                <a:latin typeface="Calibri" pitchFamily="34" charset="0"/>
-                <a:ea typeface="Calibri" pitchFamily="34" charset="-122"/>
-                <a:cs typeface="Calibri" pitchFamily="34" charset="-120"/>
-              </a:rPr>
-              <a:t>4 RISKS, EACH WITH AN ANSWER  </a:t>
-            </a:r>
-            <a:endParaRPr lang="en-US" sz="850" dirty="0"/>
-          </a:p>
-        </p:txBody>
-      </p:sp>
-      <p:sp>
-        <p:nvSpPr>
-          <p:cNvPr id="78" name="Text 67"/>
-          <p:cNvSpPr txBox="1"/>
-          <p:nvPr/>
-        </p:nvSpPr>
-        <p:spPr>
-          <a:xfrm>
-            <a:off x="274320" y="4626864"/>
-            <a:ext cx="4206240" cy="105156"/>
-          </a:xfrm>
-          <a:prstGeom prst="rect">
-            <a:avLst/>
-          </a:prstGeom>
-          <a:noFill/>
-          <a:ln/>
-        </p:spPr>
-        <p:txBody>
-          <a:bodyPr wrap="square" lIns="0" tIns="0" rIns="0" bIns="0" rtlCol="0" anchor="ctr"/>
-          <a:lstStyle/>
-          <a:p>
-            <a:pPr indent="0" marL="0">
-              <a:buNone/>
-            </a:pPr>
-            <a:r>
-              <a:rPr lang="en-US" sz="620" b="1" dirty="0">
-                <a:solidFill>
-                  <a:srgbClr val="D64545"/>
-                </a:solidFill>
-                <a:latin typeface="Calibri" pitchFamily="34" charset="0"/>
-                <a:ea typeface="Calibri" pitchFamily="34" charset="-122"/>
-                <a:cs typeface="Calibri" pitchFamily="34" charset="-120"/>
-              </a:rPr>
-              <a:t>Village dialects are hard  →  </a:t>
-            </a:r>
-            <a:r>
-              <a:rPr lang="en-US" sz="620" dirty="0">
-                <a:solidFill>
-                  <a:srgbClr val="1F2937"/>
-                </a:solidFill>
-                <a:latin typeface="Calibri" pitchFamily="34" charset="0"/>
-                <a:ea typeface="Calibri" pitchFamily="34" charset="-122"/>
-                <a:cs typeface="Calibri" pitchFamily="34" charset="-120"/>
-              </a:rPr>
-              <a:t>keypad for facts · read-back · bigger model · then a human</a:t>
-            </a:r>
-            <a:endParaRPr lang="en-US" sz="620" dirty="0"/>
-          </a:p>
-        </p:txBody>
-      </p:sp>
-      <p:sp>
-        <p:nvSpPr>
-          <p:cNvPr id="79" name="Text 68"/>
-          <p:cNvSpPr txBox="1"/>
-          <p:nvPr/>
-        </p:nvSpPr>
-        <p:spPr>
-          <a:xfrm>
-            <a:off x="274320" y="4732020"/>
-            <a:ext cx="4206240" cy="105156"/>
-          </a:xfrm>
-          <a:prstGeom prst="rect">
-            <a:avLst/>
-          </a:prstGeom>
-          <a:noFill/>
-          <a:ln/>
-        </p:spPr>
-        <p:txBody>
-          <a:bodyPr wrap="square" lIns="0" tIns="0" rIns="0" bIns="0" rtlCol="0" anchor="ctr"/>
-          <a:lstStyle/>
-          <a:p>
-            <a:pPr indent="0" marL="0">
-              <a:buNone/>
-            </a:pPr>
-            <a:r>
-              <a:rPr lang="en-US" sz="620" b="1" dirty="0">
-                <a:solidFill>
-                  <a:srgbClr val="D64545"/>
-                </a:solidFill>
-                <a:latin typeface="Calibri" pitchFamily="34" charset="0"/>
-                <a:ea typeface="Calibri" pitchFamily="34" charset="-122"/>
-                <a:cs typeface="Calibri" pitchFamily="34" charset="-120"/>
-              </a:rPr>
-              <a:t>AI could say something wrong  →  </a:t>
-            </a:r>
-            <a:r>
-              <a:rPr lang="en-US" sz="620" dirty="0">
-                <a:solidFill>
-                  <a:srgbClr val="1F2937"/>
-                </a:solidFill>
-                <a:latin typeface="Calibri" pitchFamily="34" charset="0"/>
-                <a:ea typeface="Calibri" pitchFamily="34" charset="-122"/>
-                <a:cs typeface="Calibri" pitchFamily="34" charset="-120"/>
-              </a:rPr>
-              <a:t>SATYA blocks anything not in the govt database</a:t>
-            </a:r>
-            <a:endParaRPr lang="en-US" sz="620" dirty="0"/>
-          </a:p>
-        </p:txBody>
-      </p:sp>
-      <p:sp>
-        <p:nvSpPr>
-          <p:cNvPr id="80" name="Text 69"/>
-          <p:cNvSpPr txBox="1"/>
-          <p:nvPr/>
-        </p:nvSpPr>
-        <p:spPr>
-          <a:xfrm>
-            <a:off x="274320" y="4837176"/>
-            <a:ext cx="4206240" cy="105156"/>
-          </a:xfrm>
-          <a:prstGeom prst="rect">
-            <a:avLst/>
-          </a:prstGeom>
-          <a:noFill/>
-          <a:ln/>
-        </p:spPr>
-        <p:txBody>
-          <a:bodyPr wrap="square" lIns="0" tIns="0" rIns="0" bIns="0" rtlCol="0" anchor="ctr"/>
-          <a:lstStyle/>
-          <a:p>
-            <a:pPr indent="0" marL="0">
-              <a:buNone/>
-            </a:pPr>
-            <a:r>
-              <a:rPr lang="en-US" sz="620" b="1" dirty="0">
-                <a:solidFill>
-                  <a:srgbClr val="D64545"/>
-                </a:solidFill>
-                <a:latin typeface="Calibri" pitchFamily="34" charset="0"/>
-                <a:ea typeface="Calibri" pitchFamily="34" charset="-122"/>
-                <a:cs typeface="Calibri" pitchFamily="34" charset="-120"/>
-              </a:rPr>
-              <a:t>People ignore unknown numbers  →  </a:t>
-            </a:r>
-            <a:r>
-              <a:rPr lang="en-US" sz="620" dirty="0">
-                <a:solidFill>
-                  <a:srgbClr val="1F2937"/>
-                </a:solidFill>
-                <a:latin typeface="Calibri" pitchFamily="34" charset="0"/>
-                <a:ea typeface="Calibri" pitchFamily="34" charset="-122"/>
-                <a:cs typeface="Calibri" pitchFamily="34" charset="-120"/>
-              </a:rPr>
-              <a:t>he calls first; call-back from an official 1600 number</a:t>
-            </a:r>
-            <a:endParaRPr lang="en-US" sz="620" dirty="0"/>
-          </a:p>
-        </p:txBody>
-      </p:sp>
-      <p:sp>
-        <p:nvSpPr>
-          <p:cNvPr id="81" name="Text 70"/>
-          <p:cNvSpPr txBox="1"/>
-          <p:nvPr/>
-        </p:nvSpPr>
-        <p:spPr>
-          <a:xfrm>
-            <a:off x="274320" y="4942332"/>
-            <a:ext cx="4206240" cy="105156"/>
-          </a:xfrm>
-          <a:prstGeom prst="rect">
-            <a:avLst/>
-          </a:prstGeom>
-          <a:noFill/>
-          <a:ln/>
-        </p:spPr>
-        <p:txBody>
-          <a:bodyPr wrap="square" lIns="0" tIns="0" rIns="0" bIns="0" rtlCol="0" anchor="ctr"/>
-          <a:lstStyle/>
-          <a:p>
-            <a:pPr indent="0" marL="0">
-              <a:buNone/>
-            </a:pPr>
-            <a:r>
-              <a:rPr lang="en-US" sz="620" b="1" dirty="0">
-                <a:solidFill>
-                  <a:srgbClr val="D64545"/>
-                </a:solidFill>
-                <a:latin typeface="Calibri" pitchFamily="34" charset="0"/>
-                <a:ea typeface="Calibri" pitchFamily="34" charset="-122"/>
-                <a:cs typeface="Calibri" pitchFamily="34" charset="-120"/>
-              </a:rPr>
-              <a:t>Slow replies bore callers  →  </a:t>
-            </a:r>
-            <a:r>
-              <a:rPr lang="en-US" sz="620" dirty="0">
-                <a:solidFill>
-                  <a:srgbClr val="1F2937"/>
-                </a:solidFill>
-                <a:latin typeface="Calibri" pitchFamily="34" charset="0"/>
-                <a:ea typeface="Calibri" pitchFamily="34" charset="-122"/>
-                <a:cs typeface="Calibri" pitchFamily="34" charset="-120"/>
-              </a:rPr>
-              <a:t>streaming voice · pre-recorded questions · keypad turns are instant</a:t>
-            </a:r>
-            <a:endParaRPr lang="en-US" sz="620" dirty="0"/>
           </a:p>
         </p:txBody>
       </p:sp>
@@ -16858,7 +15290,7 @@
                 <a:ea typeface="Calibri" pitchFamily="34" charset="-122"/>
                 <a:cs typeface="Calibri" pitchFamily="34" charset="-120"/>
               </a:rPr>
-              <a:t>Who gains?  </a:t>
+              <a:t>Who gains?</a:t>
             </a:r>
             <a:r>
               <a:rPr lang="en-US" sz="900" dirty="0">
@@ -16869,7 +15301,95 @@
                 <a:ea typeface="Calibri" pitchFamily="34" charset="-122"/>
                 <a:cs typeface="Calibri" pitchFamily="34" charset="-120"/>
               </a:rPr>
-              <a:t>SC families, CSC operators, district officers and the Ministry. Every number shows how it was worked out.</a:t>
+              <a:t>  </a:t>
+            </a:r>
+            <a:r>
+              <a:rPr lang="en-US" sz="900" b="1" u="sng" dirty="0">
+                <a:solidFill>
+                  <a:srgbClr val="1F4E79"/>
+                </a:solidFill>
+                <a:latin typeface="Calibri" pitchFamily="34" charset="0"/>
+                <a:ea typeface="Calibri" pitchFamily="34" charset="-122"/>
+                <a:cs typeface="Calibri" pitchFamily="34" charset="-120"/>
+              </a:rPr>
+              <a:t>SC families</a:t>
+            </a:r>
+            <a:r>
+              <a:rPr lang="en-US" sz="900" dirty="0">
+                <a:solidFill>
+                  <a:srgbClr val="1F2937"/>
+                </a:solidFill>
+                <a:latin typeface="Calibri" pitchFamily="34" charset="0"/>
+                <a:ea typeface="Calibri" pitchFamily="34" charset="-122"/>
+                <a:cs typeface="Calibri" pitchFamily="34" charset="-120"/>
+              </a:rPr>
+              <a:t>, </a:t>
+            </a:r>
+            <a:r>
+              <a:rPr lang="en-US" sz="900" b="1" u="sng" dirty="0">
+                <a:solidFill>
+                  <a:srgbClr val="1F4E79"/>
+                </a:solidFill>
+                <a:latin typeface="Calibri" pitchFamily="34" charset="0"/>
+                <a:ea typeface="Calibri" pitchFamily="34" charset="-122"/>
+                <a:cs typeface="Calibri" pitchFamily="34" charset="-120"/>
+              </a:rPr>
+              <a:t>CSC operators</a:t>
+            </a:r>
+            <a:r>
+              <a:rPr lang="en-US" sz="900" dirty="0">
+                <a:solidFill>
+                  <a:srgbClr val="1F2937"/>
+                </a:solidFill>
+                <a:latin typeface="Calibri" pitchFamily="34" charset="0"/>
+                <a:ea typeface="Calibri" pitchFamily="34" charset="-122"/>
+                <a:cs typeface="Calibri" pitchFamily="34" charset="-120"/>
+              </a:rPr>
+              <a:t>, </a:t>
+            </a:r>
+            <a:r>
+              <a:rPr lang="en-US" sz="900" b="1" u="sng" dirty="0">
+                <a:solidFill>
+                  <a:srgbClr val="1F4E79"/>
+                </a:solidFill>
+                <a:latin typeface="Calibri" pitchFamily="34" charset="0"/>
+                <a:ea typeface="Calibri" pitchFamily="34" charset="-122"/>
+                <a:cs typeface="Calibri" pitchFamily="34" charset="-120"/>
+              </a:rPr>
+              <a:t>district officers</a:t>
+            </a:r>
+            <a:r>
+              <a:rPr lang="en-US" sz="900" dirty="0">
+                <a:solidFill>
+                  <a:srgbClr val="1F2937"/>
+                </a:solidFill>
+                <a:latin typeface="Calibri" pitchFamily="34" charset="0"/>
+                <a:ea typeface="Calibri" pitchFamily="34" charset="-122"/>
+                <a:cs typeface="Calibri" pitchFamily="34" charset="-120"/>
+              </a:rPr>
+              <a:t> and the </a:t>
+            </a:r>
+            <a:r>
+              <a:rPr lang="en-US" sz="900" b="1" u="sng" dirty="0">
+                <a:solidFill>
+                  <a:srgbClr val="1F4E79"/>
+                </a:solidFill>
+                <a:latin typeface="Calibri" pitchFamily="34" charset="0"/>
+                <a:ea typeface="Calibri" pitchFamily="34" charset="-122"/>
+                <a:cs typeface="Calibri" pitchFamily="34" charset="-120"/>
+              </a:rPr>
+              <a:t>Ministry</a:t>
+            </a:r>
+            <a:r>
+              <a:rPr lang="en-US" sz="900" dirty="0">
+                <a:solidFill>
+                  <a:srgbClr val="1F2937"/>
+                </a:solidFill>
+                <a:latin typeface="Calibri" pitchFamily="34" charset="0"/>
+                <a:ea typeface="Calibri" pitchFamily="34" charset="-122"/>
+                <a:cs typeface="Calibri" pitchFamily="34" charset="-120"/>
+              </a:rPr>
+              <a:t>. Every number shows how it was worked out.</a:t>
             </a:r>
             <a:endParaRPr lang="en-US" sz="900" dirty="0"/>
           </a:p>

--- a/sih-26097/SkillCall_SIH26097_Cognify.pptx
+++ b/sih-26097/SkillCall_SIH26097_Cognify.pptx
@@ -14233,7 +14233,7 @@
                 <a:ea typeface="Calibri" pitchFamily="34" charset="-122"/>
                 <a:cs typeface="Calibri" pitchFamily="34" charset="-120"/>
               </a:rPr>
-              <a:t>less than ₹1 of every ₹100 it already spends</a:t>
+              <a:t>we add ~1% to what is already spent</a:t>
             </a:r>
             <a:endParaRPr lang="en-US" sz="850" dirty="0"/>
           </a:p>
@@ -14469,7 +14469,7 @@
                 <a:ea typeface="Calibri" pitchFamily="34" charset="-122"/>
                 <a:cs typeface="Calibri" pitchFamily="34" charset="-120"/>
               </a:rPr>
-              <a:t>Under ₹1 in every ₹100  </a:t>
+              <a:t>Only 1% more per person  </a:t>
             </a:r>
             <a:r>
               <a:rPr lang="en-US" sz="650" b="1" dirty="0">
@@ -14480,7 +14480,7 @@
                 <a:ea typeface="Calibri" pitchFamily="34" charset="-122"/>
                 <a:cs typeface="Calibri" pitchFamily="34" charset="-120"/>
               </a:rPr>
-              <a:t>of what each beneficiary already gets</a:t>
+              <a:t>and the other 99% stops being wasted</a:t>
             </a:r>
             <a:r>
               <a:rPr lang="en-US" sz="630" dirty="0">
@@ -14503,7 +14503,7 @@
                 <a:ea typeface="Calibri" pitchFamily="34" charset="-122"/>
                 <a:cs typeface="Calibri" pitchFamily="34" charset="-120"/>
               </a:rPr>
-              <a:t>≈ ₹220–420 per beneficiary vs ≈ </a:t>
+              <a:t>The govt already spends </a:t>
             </a:r>
             <a:r>
               <a:rPr lang="en-US" sz="630" b="1" dirty="0">
@@ -14525,7 +14525,51 @@
                 <a:ea typeface="Calibri" pitchFamily="34" charset="-122"/>
                 <a:cs typeface="Calibri" pitchFamily="34" charset="-120"/>
               </a:rPr>
-              <a:t> average GIA support.</a:t>
+              <a:t> on one beneficiary. SkillCall costs </a:t>
+            </a:r>
+            <a:r>
+              <a:rPr lang="en-US" sz="630" b="1" dirty="0">
+                <a:solidFill>
+                  <a:srgbClr val="1F9D63"/>
+                </a:solidFill>
+                <a:latin typeface="Calibri" pitchFamily="34" charset="0"/>
+                <a:ea typeface="Calibri" pitchFamily="34" charset="-122"/>
+                <a:cs typeface="Calibri" pitchFamily="34" charset="-120"/>
+              </a:rPr>
+              <a:t>₹220–420</a:t>
+            </a:r>
+            <a:r>
+              <a:rPr lang="en-US" sz="630" dirty="0">
+                <a:solidFill>
+                  <a:srgbClr val="1F2937"/>
+                </a:solidFill>
+                <a:latin typeface="Calibri" pitchFamily="34" charset="0"/>
+                <a:ea typeface="Calibri" pitchFamily="34" charset="-122"/>
+                <a:cs typeface="Calibri" pitchFamily="34" charset="-120"/>
+              </a:rPr>
+              <a:t> more — </a:t>
+            </a:r>
+            <a:r>
+              <a:rPr lang="en-US" sz="630" b="1" dirty="0">
+                <a:solidFill>
+                  <a:srgbClr val="1F9D63"/>
+                </a:solidFill>
+                <a:latin typeface="Calibri" pitchFamily="34" charset="0"/>
+                <a:ea typeface="Calibri" pitchFamily="34" charset="-122"/>
+                <a:cs typeface="Calibri" pitchFamily="34" charset="-120"/>
+              </a:rPr>
+              <a:t>under 1%</a:t>
+            </a:r>
+            <a:r>
+              <a:rPr lang="en-US" sz="630" dirty="0">
+                <a:solidFill>
+                  <a:srgbClr val="1F2937"/>
+                </a:solidFill>
+                <a:latin typeface="Calibri" pitchFamily="34" charset="0"/>
+                <a:ea typeface="Calibri" pitchFamily="34" charset="-122"/>
+                <a:cs typeface="Calibri" pitchFamily="34" charset="-120"/>
+              </a:rPr>
+              <a:t> — to make sure that ₹60,700 goes to the right course.</a:t>
             </a:r>
             <a:endParaRPr lang="en-US" sz="630" dirty="0"/>
           </a:p>
